--- a/ENSO_NEW.pptx
+++ b/ENSO_NEW.pptx
@@ -5,7 +5,7 @@
     <p:sldMasterId id="2147483659" r:id="rId1"/>
   </p:sldMasterIdLst>
   <p:notesMasterIdLst>
-    <p:notesMasterId r:id="rId11"/>
+    <p:notesMasterId r:id="rId13"/>
   </p:notesMasterIdLst>
   <p:sldIdLst>
     <p:sldId id="256" r:id="rId2"/>
@@ -13,10 +13,12 @@
     <p:sldId id="303" r:id="rId4"/>
     <p:sldId id="297" r:id="rId5"/>
     <p:sldId id="301" r:id="rId6"/>
-    <p:sldId id="305" r:id="rId7"/>
-    <p:sldId id="306" r:id="rId8"/>
+    <p:sldId id="306" r:id="rId7"/>
+    <p:sldId id="305" r:id="rId8"/>
     <p:sldId id="307" r:id="rId9"/>
     <p:sldId id="308" r:id="rId10"/>
+    <p:sldId id="309" r:id="rId11"/>
+    <p:sldId id="310" r:id="rId12"/>
   </p:sldIdLst>
   <p:sldSz cx="12192000" cy="6858000"/>
   <p:notesSz cx="6858000" cy="9144000"/>
@@ -813,6 +815,260 @@
 </p:notes>
 </file>
 
+<file path=ppt/notesSlides/notesSlide10.xml><?xml version="1.0" encoding="utf-8"?>
+<p:notes xmlns:a="http://schemas.openxmlformats.org/drawingml/2006/main" xmlns:r="http://schemas.openxmlformats.org/officeDocument/2006/relationships" xmlns:p="http://schemas.openxmlformats.org/presentationml/2006/main" showMasterSp="0" showMasterPhAnim="0">
+  <p:cSld>
+    <p:spTree>
+      <p:nvGrpSpPr>
+        <p:cNvPr id="1" name="Shape 154">
+          <a:extLst>
+            <a:ext uri="{FF2B5EF4-FFF2-40B4-BE49-F238E27FC236}">
+              <a16:creationId xmlns:a16="http://schemas.microsoft.com/office/drawing/2014/main" id="{1B9C6297-19C8-E4CF-69F3-EA7CCCCA47F5}"/>
+            </a:ext>
+          </a:extLst>
+        </p:cNvPr>
+        <p:cNvGrpSpPr/>
+        <p:nvPr/>
+      </p:nvGrpSpPr>
+      <p:grpSpPr>
+        <a:xfrm>
+          <a:off x="0" y="0"/>
+          <a:ext cx="0" cy="0"/>
+          <a:chOff x="0" y="0"/>
+          <a:chExt cx="0" cy="0"/>
+        </a:xfrm>
+      </p:grpSpPr>
+      <p:sp>
+        <p:nvSpPr>
+          <p:cNvPr id="155" name="Google Shape;155;p6:notes">
+            <a:extLst>
+              <a:ext uri="{FF2B5EF4-FFF2-40B4-BE49-F238E27FC236}">
+                <a16:creationId xmlns:a16="http://schemas.microsoft.com/office/drawing/2014/main" id="{F6ECAF2F-E099-D864-EE36-AA24CE05F77F}"/>
+              </a:ext>
+            </a:extLst>
+          </p:cNvPr>
+          <p:cNvSpPr txBox="1">
+            <a:spLocks noGrp="1"/>
+          </p:cNvSpPr>
+          <p:nvPr>
+            <p:ph type="body" idx="1"/>
+          </p:nvPr>
+        </p:nvSpPr>
+        <p:spPr>
+          <a:xfrm>
+            <a:off x="685800" y="4343400"/>
+            <a:ext cx="5486400" cy="4114800"/>
+          </a:xfrm>
+          <a:prstGeom prst="rect">
+            <a:avLst/>
+          </a:prstGeom>
+        </p:spPr>
+        <p:txBody>
+          <a:bodyPr spcFirstLastPara="1" wrap="square" lIns="91425" tIns="91425" rIns="91425" bIns="91425" anchor="t" anchorCtr="0">
+            <a:noAutofit/>
+          </a:bodyPr>
+          <a:lstStyle/>
+          <a:p>
+            <a:pPr marL="0" lvl="0" indent="0" algn="l" rtl="0">
+              <a:spcBef>
+                <a:spcPts val="0"/>
+              </a:spcBef>
+              <a:spcAft>
+                <a:spcPts val="0"/>
+              </a:spcAft>
+              <a:buNone/>
+            </a:pPr>
+            <a:endParaRPr/>
+          </a:p>
+        </p:txBody>
+      </p:sp>
+      <p:sp>
+        <p:nvSpPr>
+          <p:cNvPr id="156" name="Google Shape;156;p6:notes">
+            <a:extLst>
+              <a:ext uri="{FF2B5EF4-FFF2-40B4-BE49-F238E27FC236}">
+                <a16:creationId xmlns:a16="http://schemas.microsoft.com/office/drawing/2014/main" id="{A99FA170-0E66-10F8-37DE-4AE8211BCEA2}"/>
+              </a:ext>
+            </a:extLst>
+          </p:cNvPr>
+          <p:cNvSpPr>
+            <a:spLocks noGrp="1" noRot="1" noChangeAspect="1"/>
+          </p:cNvSpPr>
+          <p:nvPr>
+            <p:ph type="sldImg" idx="2"/>
+          </p:nvPr>
+        </p:nvSpPr>
+        <p:spPr>
+          <a:xfrm>
+            <a:off x="381000" y="685800"/>
+            <a:ext cx="6096000" cy="3429000"/>
+          </a:xfrm>
+          <a:custGeom>
+            <a:avLst/>
+            <a:gdLst/>
+            <a:ahLst/>
+            <a:cxnLst/>
+            <a:rect l="l" t="t" r="r" b="b"/>
+            <a:pathLst>
+              <a:path w="120000" h="120000" extrusionOk="0">
+                <a:moveTo>
+                  <a:pt x="0" y="0"/>
+                </a:moveTo>
+                <a:lnTo>
+                  <a:pt x="120000" y="0"/>
+                </a:lnTo>
+                <a:lnTo>
+                  <a:pt x="120000" y="120000"/>
+                </a:lnTo>
+                <a:lnTo>
+                  <a:pt x="0" y="120000"/>
+                </a:lnTo>
+                <a:close/>
+              </a:path>
+            </a:pathLst>
+          </a:custGeom>
+        </p:spPr>
+      </p:sp>
+    </p:spTree>
+    <p:extLst>
+      <p:ext uri="{BB962C8B-B14F-4D97-AF65-F5344CB8AC3E}">
+        <p14:creationId xmlns:p14="http://schemas.microsoft.com/office/powerpoint/2010/main" val="2399505638"/>
+      </p:ext>
+    </p:extLst>
+  </p:cSld>
+  <p:clrMapOvr>
+    <a:masterClrMapping/>
+  </p:clrMapOvr>
+</p:notes>
+</file>
+
+<file path=ppt/notesSlides/notesSlide11.xml><?xml version="1.0" encoding="utf-8"?>
+<p:notes xmlns:a="http://schemas.openxmlformats.org/drawingml/2006/main" xmlns:r="http://schemas.openxmlformats.org/officeDocument/2006/relationships" xmlns:p="http://schemas.openxmlformats.org/presentationml/2006/main" showMasterSp="0" showMasterPhAnim="0">
+  <p:cSld>
+    <p:spTree>
+      <p:nvGrpSpPr>
+        <p:cNvPr id="1" name="Shape 154">
+          <a:extLst>
+            <a:ext uri="{FF2B5EF4-FFF2-40B4-BE49-F238E27FC236}">
+              <a16:creationId xmlns:a16="http://schemas.microsoft.com/office/drawing/2014/main" id="{A126CCA3-F64E-837E-E927-7F0893333F5E}"/>
+            </a:ext>
+          </a:extLst>
+        </p:cNvPr>
+        <p:cNvGrpSpPr/>
+        <p:nvPr/>
+      </p:nvGrpSpPr>
+      <p:grpSpPr>
+        <a:xfrm>
+          <a:off x="0" y="0"/>
+          <a:ext cx="0" cy="0"/>
+          <a:chOff x="0" y="0"/>
+          <a:chExt cx="0" cy="0"/>
+        </a:xfrm>
+      </p:grpSpPr>
+      <p:sp>
+        <p:nvSpPr>
+          <p:cNvPr id="155" name="Google Shape;155;p6:notes">
+            <a:extLst>
+              <a:ext uri="{FF2B5EF4-FFF2-40B4-BE49-F238E27FC236}">
+                <a16:creationId xmlns:a16="http://schemas.microsoft.com/office/drawing/2014/main" id="{4DC08DEA-8500-49D1-7072-DACEEF002565}"/>
+              </a:ext>
+            </a:extLst>
+          </p:cNvPr>
+          <p:cNvSpPr txBox="1">
+            <a:spLocks noGrp="1"/>
+          </p:cNvSpPr>
+          <p:nvPr>
+            <p:ph type="body" idx="1"/>
+          </p:nvPr>
+        </p:nvSpPr>
+        <p:spPr>
+          <a:xfrm>
+            <a:off x="685800" y="4343400"/>
+            <a:ext cx="5486400" cy="4114800"/>
+          </a:xfrm>
+          <a:prstGeom prst="rect">
+            <a:avLst/>
+          </a:prstGeom>
+        </p:spPr>
+        <p:txBody>
+          <a:bodyPr spcFirstLastPara="1" wrap="square" lIns="91425" tIns="91425" rIns="91425" bIns="91425" anchor="t" anchorCtr="0">
+            <a:noAutofit/>
+          </a:bodyPr>
+          <a:lstStyle/>
+          <a:p>
+            <a:pPr marL="0" lvl="0" indent="0" algn="l" rtl="0">
+              <a:spcBef>
+                <a:spcPts val="0"/>
+              </a:spcBef>
+              <a:spcAft>
+                <a:spcPts val="0"/>
+              </a:spcAft>
+              <a:buNone/>
+            </a:pPr>
+            <a:endParaRPr/>
+          </a:p>
+        </p:txBody>
+      </p:sp>
+      <p:sp>
+        <p:nvSpPr>
+          <p:cNvPr id="156" name="Google Shape;156;p6:notes">
+            <a:extLst>
+              <a:ext uri="{FF2B5EF4-FFF2-40B4-BE49-F238E27FC236}">
+                <a16:creationId xmlns:a16="http://schemas.microsoft.com/office/drawing/2014/main" id="{F249919F-4B93-6DFC-CC6C-902243D7F995}"/>
+              </a:ext>
+            </a:extLst>
+          </p:cNvPr>
+          <p:cNvSpPr>
+            <a:spLocks noGrp="1" noRot="1" noChangeAspect="1"/>
+          </p:cNvSpPr>
+          <p:nvPr>
+            <p:ph type="sldImg" idx="2"/>
+          </p:nvPr>
+        </p:nvSpPr>
+        <p:spPr>
+          <a:xfrm>
+            <a:off x="381000" y="685800"/>
+            <a:ext cx="6096000" cy="3429000"/>
+          </a:xfrm>
+          <a:custGeom>
+            <a:avLst/>
+            <a:gdLst/>
+            <a:ahLst/>
+            <a:cxnLst/>
+            <a:rect l="l" t="t" r="r" b="b"/>
+            <a:pathLst>
+              <a:path w="120000" h="120000" extrusionOk="0">
+                <a:moveTo>
+                  <a:pt x="0" y="0"/>
+                </a:moveTo>
+                <a:lnTo>
+                  <a:pt x="120000" y="0"/>
+                </a:lnTo>
+                <a:lnTo>
+                  <a:pt x="120000" y="120000"/>
+                </a:lnTo>
+                <a:lnTo>
+                  <a:pt x="0" y="120000"/>
+                </a:lnTo>
+                <a:close/>
+              </a:path>
+            </a:pathLst>
+          </a:custGeom>
+        </p:spPr>
+      </p:sp>
+    </p:spTree>
+    <p:extLst>
+      <p:ext uri="{BB962C8B-B14F-4D97-AF65-F5344CB8AC3E}">
+        <p14:creationId xmlns:p14="http://schemas.microsoft.com/office/powerpoint/2010/main" val="876218942"/>
+      </p:ext>
+    </p:extLst>
+  </p:cSld>
+  <p:clrMapOvr>
+    <a:masterClrMapping/>
+  </p:clrMapOvr>
+</p:notes>
+</file>
+
 <file path=ppt/notesSlides/notesSlide2.xml><?xml version="1.0" encoding="utf-8"?>
 <p:notes xmlns:a="http://schemas.openxmlformats.org/drawingml/2006/main" xmlns:r="http://schemas.openxmlformats.org/officeDocument/2006/relationships" xmlns:p="http://schemas.openxmlformats.org/presentationml/2006/main" showMasterSp="0" showMasterPhAnim="0">
   <p:cSld>
@@ -1329,6 +1585,133 @@
         <p:cNvPr id="1" name="Shape 154">
           <a:extLst>
             <a:ext uri="{FF2B5EF4-FFF2-40B4-BE49-F238E27FC236}">
+              <a16:creationId xmlns:a16="http://schemas.microsoft.com/office/drawing/2014/main" id="{4DA4E559-543F-EF98-5F20-C20E06BAA8BC}"/>
+            </a:ext>
+          </a:extLst>
+        </p:cNvPr>
+        <p:cNvGrpSpPr/>
+        <p:nvPr/>
+      </p:nvGrpSpPr>
+      <p:grpSpPr>
+        <a:xfrm>
+          <a:off x="0" y="0"/>
+          <a:ext cx="0" cy="0"/>
+          <a:chOff x="0" y="0"/>
+          <a:chExt cx="0" cy="0"/>
+        </a:xfrm>
+      </p:grpSpPr>
+      <p:sp>
+        <p:nvSpPr>
+          <p:cNvPr id="155" name="Google Shape;155;p6:notes">
+            <a:extLst>
+              <a:ext uri="{FF2B5EF4-FFF2-40B4-BE49-F238E27FC236}">
+                <a16:creationId xmlns:a16="http://schemas.microsoft.com/office/drawing/2014/main" id="{CF5077E7-74A1-AA55-4B65-3F86B9A6331D}"/>
+              </a:ext>
+            </a:extLst>
+          </p:cNvPr>
+          <p:cNvSpPr txBox="1">
+            <a:spLocks noGrp="1"/>
+          </p:cNvSpPr>
+          <p:nvPr>
+            <p:ph type="body" idx="1"/>
+          </p:nvPr>
+        </p:nvSpPr>
+        <p:spPr>
+          <a:xfrm>
+            <a:off x="685800" y="4343400"/>
+            <a:ext cx="5486400" cy="4114800"/>
+          </a:xfrm>
+          <a:prstGeom prst="rect">
+            <a:avLst/>
+          </a:prstGeom>
+        </p:spPr>
+        <p:txBody>
+          <a:bodyPr spcFirstLastPara="1" wrap="square" lIns="91425" tIns="91425" rIns="91425" bIns="91425" anchor="t" anchorCtr="0">
+            <a:noAutofit/>
+          </a:bodyPr>
+          <a:lstStyle/>
+          <a:p>
+            <a:pPr marL="0" lvl="0" indent="0" algn="l" rtl="0">
+              <a:spcBef>
+                <a:spcPts val="0"/>
+              </a:spcBef>
+              <a:spcAft>
+                <a:spcPts val="0"/>
+              </a:spcAft>
+              <a:buNone/>
+            </a:pPr>
+            <a:endParaRPr/>
+          </a:p>
+        </p:txBody>
+      </p:sp>
+      <p:sp>
+        <p:nvSpPr>
+          <p:cNvPr id="156" name="Google Shape;156;p6:notes">
+            <a:extLst>
+              <a:ext uri="{FF2B5EF4-FFF2-40B4-BE49-F238E27FC236}">
+                <a16:creationId xmlns:a16="http://schemas.microsoft.com/office/drawing/2014/main" id="{676F414B-0531-DD16-B10F-A1D074147CBE}"/>
+              </a:ext>
+            </a:extLst>
+          </p:cNvPr>
+          <p:cNvSpPr>
+            <a:spLocks noGrp="1" noRot="1" noChangeAspect="1"/>
+          </p:cNvSpPr>
+          <p:nvPr>
+            <p:ph type="sldImg" idx="2"/>
+          </p:nvPr>
+        </p:nvSpPr>
+        <p:spPr>
+          <a:xfrm>
+            <a:off x="381000" y="685800"/>
+            <a:ext cx="6096000" cy="3429000"/>
+          </a:xfrm>
+          <a:custGeom>
+            <a:avLst/>
+            <a:gdLst/>
+            <a:ahLst/>
+            <a:cxnLst/>
+            <a:rect l="l" t="t" r="r" b="b"/>
+            <a:pathLst>
+              <a:path w="120000" h="120000" extrusionOk="0">
+                <a:moveTo>
+                  <a:pt x="0" y="0"/>
+                </a:moveTo>
+                <a:lnTo>
+                  <a:pt x="120000" y="0"/>
+                </a:lnTo>
+                <a:lnTo>
+                  <a:pt x="120000" y="120000"/>
+                </a:lnTo>
+                <a:lnTo>
+                  <a:pt x="0" y="120000"/>
+                </a:lnTo>
+                <a:close/>
+              </a:path>
+            </a:pathLst>
+          </a:custGeom>
+        </p:spPr>
+      </p:sp>
+    </p:spTree>
+    <p:extLst>
+      <p:ext uri="{BB962C8B-B14F-4D97-AF65-F5344CB8AC3E}">
+        <p14:creationId xmlns:p14="http://schemas.microsoft.com/office/powerpoint/2010/main" val="1608968399"/>
+      </p:ext>
+    </p:extLst>
+  </p:cSld>
+  <p:clrMapOvr>
+    <a:masterClrMapping/>
+  </p:clrMapOvr>
+</p:notes>
+</file>
+
+<file path=ppt/notesSlides/notesSlide7.xml><?xml version="1.0" encoding="utf-8"?>
+<p:notes xmlns:a="http://schemas.openxmlformats.org/drawingml/2006/main" xmlns:r="http://schemas.openxmlformats.org/officeDocument/2006/relationships" xmlns:p="http://schemas.openxmlformats.org/presentationml/2006/main" showMasterSp="0" showMasterPhAnim="0">
+  <p:cSld>
+    <p:spTree>
+      <p:nvGrpSpPr>
+        <p:cNvPr id="1" name="Shape 154">
+          <a:extLst>
+            <a:ext uri="{FF2B5EF4-FFF2-40B4-BE49-F238E27FC236}">
               <a16:creationId xmlns:a16="http://schemas.microsoft.com/office/drawing/2014/main" id="{E5208DAE-5D4A-5F1F-4F36-514A7BB66345}"/>
             </a:ext>
           </a:extLst>
@@ -1439,133 +1822,6 @@
     <p:extLst>
       <p:ext uri="{BB962C8B-B14F-4D97-AF65-F5344CB8AC3E}">
         <p14:creationId xmlns:p14="http://schemas.microsoft.com/office/powerpoint/2010/main" val="2867312404"/>
-      </p:ext>
-    </p:extLst>
-  </p:cSld>
-  <p:clrMapOvr>
-    <a:masterClrMapping/>
-  </p:clrMapOvr>
-</p:notes>
-</file>
-
-<file path=ppt/notesSlides/notesSlide7.xml><?xml version="1.0" encoding="utf-8"?>
-<p:notes xmlns:a="http://schemas.openxmlformats.org/drawingml/2006/main" xmlns:r="http://schemas.openxmlformats.org/officeDocument/2006/relationships" xmlns:p="http://schemas.openxmlformats.org/presentationml/2006/main" showMasterSp="0" showMasterPhAnim="0">
-  <p:cSld>
-    <p:spTree>
-      <p:nvGrpSpPr>
-        <p:cNvPr id="1" name="Shape 154">
-          <a:extLst>
-            <a:ext uri="{FF2B5EF4-FFF2-40B4-BE49-F238E27FC236}">
-              <a16:creationId xmlns:a16="http://schemas.microsoft.com/office/drawing/2014/main" id="{4DA4E559-543F-EF98-5F20-C20E06BAA8BC}"/>
-            </a:ext>
-          </a:extLst>
-        </p:cNvPr>
-        <p:cNvGrpSpPr/>
-        <p:nvPr/>
-      </p:nvGrpSpPr>
-      <p:grpSpPr>
-        <a:xfrm>
-          <a:off x="0" y="0"/>
-          <a:ext cx="0" cy="0"/>
-          <a:chOff x="0" y="0"/>
-          <a:chExt cx="0" cy="0"/>
-        </a:xfrm>
-      </p:grpSpPr>
-      <p:sp>
-        <p:nvSpPr>
-          <p:cNvPr id="155" name="Google Shape;155;p6:notes">
-            <a:extLst>
-              <a:ext uri="{FF2B5EF4-FFF2-40B4-BE49-F238E27FC236}">
-                <a16:creationId xmlns:a16="http://schemas.microsoft.com/office/drawing/2014/main" id="{CF5077E7-74A1-AA55-4B65-3F86B9A6331D}"/>
-              </a:ext>
-            </a:extLst>
-          </p:cNvPr>
-          <p:cNvSpPr txBox="1">
-            <a:spLocks noGrp="1"/>
-          </p:cNvSpPr>
-          <p:nvPr>
-            <p:ph type="body" idx="1"/>
-          </p:nvPr>
-        </p:nvSpPr>
-        <p:spPr>
-          <a:xfrm>
-            <a:off x="685800" y="4343400"/>
-            <a:ext cx="5486400" cy="4114800"/>
-          </a:xfrm>
-          <a:prstGeom prst="rect">
-            <a:avLst/>
-          </a:prstGeom>
-        </p:spPr>
-        <p:txBody>
-          <a:bodyPr spcFirstLastPara="1" wrap="square" lIns="91425" tIns="91425" rIns="91425" bIns="91425" anchor="t" anchorCtr="0">
-            <a:noAutofit/>
-          </a:bodyPr>
-          <a:lstStyle/>
-          <a:p>
-            <a:pPr marL="0" lvl="0" indent="0" algn="l" rtl="0">
-              <a:spcBef>
-                <a:spcPts val="0"/>
-              </a:spcBef>
-              <a:spcAft>
-                <a:spcPts val="0"/>
-              </a:spcAft>
-              <a:buNone/>
-            </a:pPr>
-            <a:endParaRPr/>
-          </a:p>
-        </p:txBody>
-      </p:sp>
-      <p:sp>
-        <p:nvSpPr>
-          <p:cNvPr id="156" name="Google Shape;156;p6:notes">
-            <a:extLst>
-              <a:ext uri="{FF2B5EF4-FFF2-40B4-BE49-F238E27FC236}">
-                <a16:creationId xmlns:a16="http://schemas.microsoft.com/office/drawing/2014/main" id="{676F414B-0531-DD16-B10F-A1D074147CBE}"/>
-              </a:ext>
-            </a:extLst>
-          </p:cNvPr>
-          <p:cNvSpPr>
-            <a:spLocks noGrp="1" noRot="1" noChangeAspect="1"/>
-          </p:cNvSpPr>
-          <p:nvPr>
-            <p:ph type="sldImg" idx="2"/>
-          </p:nvPr>
-        </p:nvSpPr>
-        <p:spPr>
-          <a:xfrm>
-            <a:off x="381000" y="685800"/>
-            <a:ext cx="6096000" cy="3429000"/>
-          </a:xfrm>
-          <a:custGeom>
-            <a:avLst/>
-            <a:gdLst/>
-            <a:ahLst/>
-            <a:cxnLst/>
-            <a:rect l="l" t="t" r="r" b="b"/>
-            <a:pathLst>
-              <a:path w="120000" h="120000" extrusionOk="0">
-                <a:moveTo>
-                  <a:pt x="0" y="0"/>
-                </a:moveTo>
-                <a:lnTo>
-                  <a:pt x="120000" y="0"/>
-                </a:lnTo>
-                <a:lnTo>
-                  <a:pt x="120000" y="120000"/>
-                </a:lnTo>
-                <a:lnTo>
-                  <a:pt x="0" y="120000"/>
-                </a:lnTo>
-                <a:close/>
-              </a:path>
-            </a:pathLst>
-          </a:custGeom>
-        </p:spPr>
-      </p:sp>
-    </p:spTree>
-    <p:extLst>
-      <p:ext uri="{BB962C8B-B14F-4D97-AF65-F5344CB8AC3E}">
-        <p14:creationId xmlns:p14="http://schemas.microsoft.com/office/powerpoint/2010/main" val="1608968399"/>
       </p:ext>
     </p:extLst>
   </p:cSld>
@@ -4797,6 +5053,1009 @@
 </p:sld>
 </file>
 
+<file path=ppt/slides/slide10.xml><?xml version="1.0" encoding="utf-8"?>
+<p:sld xmlns:a="http://schemas.openxmlformats.org/drawingml/2006/main" xmlns:r="http://schemas.openxmlformats.org/officeDocument/2006/relationships" xmlns:p="http://schemas.openxmlformats.org/presentationml/2006/main">
+  <p:cSld>
+    <p:spTree>
+      <p:nvGrpSpPr>
+        <p:cNvPr id="1" name="Shape 157">
+          <a:extLst>
+            <a:ext uri="{FF2B5EF4-FFF2-40B4-BE49-F238E27FC236}">
+              <a16:creationId xmlns:a16="http://schemas.microsoft.com/office/drawing/2014/main" id="{8A331AF0-9370-1D85-C1D7-FB9790D24E3A}"/>
+            </a:ext>
+          </a:extLst>
+        </p:cNvPr>
+        <p:cNvGrpSpPr/>
+        <p:nvPr/>
+      </p:nvGrpSpPr>
+      <p:grpSpPr>
+        <a:xfrm>
+          <a:off x="0" y="0"/>
+          <a:ext cx="0" cy="0"/>
+          <a:chOff x="0" y="0"/>
+          <a:chExt cx="0" cy="0"/>
+        </a:xfrm>
+      </p:grpSpPr>
+      <p:pic>
+        <p:nvPicPr>
+          <p:cNvPr id="158" name="Google Shape;158;p18" descr="image.png">
+            <a:extLst>
+              <a:ext uri="{FF2B5EF4-FFF2-40B4-BE49-F238E27FC236}">
+                <a16:creationId xmlns:a16="http://schemas.microsoft.com/office/drawing/2014/main" id="{741C7702-7A60-3E7A-B047-2C624B2BD893}"/>
+              </a:ext>
+            </a:extLst>
+          </p:cNvPr>
+          <p:cNvPicPr preferRelativeResize="0">
+            <a:picLocks noGrp="1" noRot="1" noMove="1" noResize="1" noEditPoints="1" noAdjustHandles="1" noChangeArrowheads="1" noChangeShapeType="1" noCrop="1"/>
+          </p:cNvPicPr>
+          <p:nvPr/>
+        </p:nvPicPr>
+        <p:blipFill rotWithShape="1">
+          <a:blip r:embed="rId3">
+            <a:alphaModFix/>
+          </a:blip>
+          <a:srcRect/>
+          <a:stretch/>
+        </p:blipFill>
+        <p:spPr>
+          <a:xfrm>
+            <a:off x="0" y="0"/>
+            <a:ext cx="12192000" cy="6858000"/>
+          </a:xfrm>
+          <a:prstGeom prst="rect">
+            <a:avLst/>
+          </a:prstGeom>
+          <a:noFill/>
+          <a:ln>
+            <a:noFill/>
+          </a:ln>
+        </p:spPr>
+      </p:pic>
+      <p:sp>
+        <p:nvSpPr>
+          <p:cNvPr id="160" name="Google Shape;160;p18">
+            <a:extLst>
+              <a:ext uri="{FF2B5EF4-FFF2-40B4-BE49-F238E27FC236}">
+                <a16:creationId xmlns:a16="http://schemas.microsoft.com/office/drawing/2014/main" id="{2072E083-9083-1369-7585-F50FBD858BA0}"/>
+              </a:ext>
+            </a:extLst>
+          </p:cNvPr>
+          <p:cNvSpPr txBox="1"/>
+          <p:nvPr/>
+        </p:nvSpPr>
+        <p:spPr>
+          <a:xfrm>
+            <a:off x="571500" y="476250"/>
+            <a:ext cx="11049000" cy="484748"/>
+          </a:xfrm>
+          <a:prstGeom prst="rect">
+            <a:avLst/>
+          </a:prstGeom>
+          <a:noFill/>
+          <a:ln>
+            <a:noFill/>
+          </a:ln>
+        </p:spPr>
+        <p:txBody>
+          <a:bodyPr spcFirstLastPara="1" wrap="square" lIns="0" tIns="0" rIns="0" bIns="0" anchor="t" anchorCtr="0">
+            <a:spAutoFit/>
+          </a:bodyPr>
+          <a:lstStyle/>
+          <a:p>
+            <a:pPr marL="0" marR="0" lvl="0" indent="0" algn="l" rtl="0">
+              <a:spcBef>
+                <a:spcPts val="0"/>
+              </a:spcBef>
+              <a:spcAft>
+                <a:spcPts val="0"/>
+              </a:spcAft>
+              <a:buNone/>
+            </a:pPr>
+            <a:r>
+              <a:rPr lang="en-US" sz="3150" b="1" i="0" u="none" strike="noStrike" cap="none" dirty="0">
+                <a:solidFill>
+                  <a:srgbClr val="001F3F"/>
+                </a:solidFill>
+                <a:latin typeface="Pretendard ExtraBold" panose="02000903000000020004" pitchFamily="50" charset="-127"/>
+                <a:ea typeface="Pretendard ExtraBold" panose="02000903000000020004" pitchFamily="50" charset="-127"/>
+                <a:cs typeface="Pretendard ExtraBold" panose="02000903000000020004" pitchFamily="50" charset="-127"/>
+                <a:sym typeface="Arial"/>
+              </a:rPr>
+              <a:t>Sample </a:t>
+            </a:r>
+            <a:endParaRPr dirty="0">
+              <a:latin typeface="Pretendard ExtraBold" panose="02000903000000020004" pitchFamily="50" charset="-127"/>
+              <a:ea typeface="Pretendard ExtraBold" panose="02000903000000020004" pitchFamily="50" charset="-127"/>
+              <a:cs typeface="Pretendard ExtraBold" panose="02000903000000020004" pitchFamily="50" charset="-127"/>
+            </a:endParaRPr>
+          </a:p>
+        </p:txBody>
+      </p:sp>
+      <p:sp>
+        <p:nvSpPr>
+          <p:cNvPr id="161" name="Google Shape;161;p18">
+            <a:extLst>
+              <a:ext uri="{FF2B5EF4-FFF2-40B4-BE49-F238E27FC236}">
+                <a16:creationId xmlns:a16="http://schemas.microsoft.com/office/drawing/2014/main" id="{C9757FD2-DBC7-0D50-7A45-7F8815D33C82}"/>
+              </a:ext>
+            </a:extLst>
+          </p:cNvPr>
+          <p:cNvSpPr/>
+          <p:nvPr/>
+        </p:nvSpPr>
+        <p:spPr>
+          <a:xfrm>
+            <a:off x="571500" y="1076325"/>
+            <a:ext cx="11049000" cy="19050"/>
+          </a:xfrm>
+          <a:prstGeom prst="rect">
+            <a:avLst/>
+          </a:prstGeom>
+          <a:solidFill>
+            <a:srgbClr val="EEEEEE"/>
+          </a:solidFill>
+          <a:ln>
+            <a:noFill/>
+          </a:ln>
+        </p:spPr>
+        <p:txBody>
+          <a:bodyPr spcFirstLastPara="1" wrap="square" lIns="91425" tIns="45700" rIns="91425" bIns="45700" anchor="ctr" anchorCtr="0">
+            <a:noAutofit/>
+          </a:bodyPr>
+          <a:lstStyle/>
+          <a:p>
+            <a:pPr marL="0" marR="0" lvl="0" indent="0" algn="ctr" rtl="0">
+              <a:spcBef>
+                <a:spcPts val="0"/>
+              </a:spcBef>
+              <a:spcAft>
+                <a:spcPts val="0"/>
+              </a:spcAft>
+              <a:buNone/>
+            </a:pPr>
+            <a:endParaRPr sz="1800" b="0" i="0" u="none" strike="noStrike" cap="none">
+              <a:solidFill>
+                <a:schemeClr val="dk1"/>
+              </a:solidFill>
+              <a:latin typeface="Calibri"/>
+              <a:ea typeface="Calibri"/>
+              <a:cs typeface="Calibri"/>
+              <a:sym typeface="Calibri"/>
+            </a:endParaRPr>
+          </a:p>
+        </p:txBody>
+      </p:sp>
+      <p:sp>
+        <p:nvSpPr>
+          <p:cNvPr id="4" name="슬라이드 번호 개체 틀 3">
+            <a:extLst>
+              <a:ext uri="{FF2B5EF4-FFF2-40B4-BE49-F238E27FC236}">
+                <a16:creationId xmlns:a16="http://schemas.microsoft.com/office/drawing/2014/main" id="{A4AFBA6A-E229-1EC7-E7CF-665278364BDE}"/>
+              </a:ext>
+            </a:extLst>
+          </p:cNvPr>
+          <p:cNvSpPr>
+            <a:spLocks noGrp="1"/>
+          </p:cNvSpPr>
+          <p:nvPr>
+            <p:ph type="sldNum" idx="12"/>
+          </p:nvPr>
+        </p:nvSpPr>
+        <p:spPr/>
+        <p:txBody>
+          <a:bodyPr/>
+          <a:lstStyle/>
+          <a:p>
+            <a:pPr marL="0" lvl="0" indent="0" algn="r" rtl="0">
+              <a:spcBef>
+                <a:spcPts val="0"/>
+              </a:spcBef>
+              <a:spcAft>
+                <a:spcPts val="0"/>
+              </a:spcAft>
+              <a:buNone/>
+            </a:pPr>
+            <a:fld id="{00000000-1234-1234-1234-123412341234}" type="slidenum">
+              <a:rPr lang="en-US" smtClean="0"/>
+              <a:t>10</a:t>
+            </a:fld>
+            <a:endParaRPr lang="en-US"/>
+          </a:p>
+        </p:txBody>
+      </p:sp>
+      <p:sp>
+        <p:nvSpPr>
+          <p:cNvPr id="3" name="TextBox 2">
+            <a:extLst>
+              <a:ext uri="{FF2B5EF4-FFF2-40B4-BE49-F238E27FC236}">
+                <a16:creationId xmlns:a16="http://schemas.microsoft.com/office/drawing/2014/main" id="{D17E4728-3518-DA77-FE16-93D7B7552CB0}"/>
+              </a:ext>
+            </a:extLst>
+          </p:cNvPr>
+          <p:cNvSpPr txBox="1"/>
+          <p:nvPr/>
+        </p:nvSpPr>
+        <p:spPr>
+          <a:xfrm>
+            <a:off x="571500" y="1210702"/>
+            <a:ext cx="11049000" cy="4093428"/>
+          </a:xfrm>
+          <a:prstGeom prst="rect">
+            <a:avLst/>
+          </a:prstGeom>
+          <a:noFill/>
+        </p:spPr>
+        <p:txBody>
+          <a:bodyPr wrap="square" rtlCol="0">
+            <a:spAutoFit/>
+          </a:bodyPr>
+          <a:lstStyle/>
+          <a:p>
+            <a:r>
+              <a:rPr lang="ko-KR" altLang="en-US" sz="1000" b="1" dirty="0">
+                <a:latin typeface="Pretendard" panose="02000503000000020004" pitchFamily="50" charset="-127"/>
+                <a:ea typeface="Pretendard" panose="02000503000000020004" pitchFamily="50" charset="-127"/>
+                <a:cs typeface="Pretendard" panose="02000503000000020004" pitchFamily="50" charset="-127"/>
+              </a:rPr>
+              <a:t>변수 병합</a:t>
+            </a:r>
+            <a:endParaRPr lang="en-US" altLang="ko-KR" sz="1000" dirty="0">
+              <a:latin typeface="Pretendard" panose="02000503000000020004" pitchFamily="50" charset="-127"/>
+              <a:ea typeface="Pretendard" panose="02000503000000020004" pitchFamily="50" charset="-127"/>
+              <a:cs typeface="Pretendard" panose="02000503000000020004" pitchFamily="50" charset="-127"/>
+            </a:endParaRPr>
+          </a:p>
+          <a:p>
+            <a:r>
+              <a:rPr lang="en-US" altLang="ko-KR" sz="1000" dirty="0"/>
+              <a:t>python merge_vars.py   --</a:t>
+            </a:r>
+            <a:r>
+              <a:rPr lang="en-US" altLang="ko-KR" sz="1000" dirty="0" err="1"/>
+              <a:t>inroot</a:t>
+            </a:r>
+            <a:r>
+              <a:rPr lang="en-US" altLang="ko-KR" sz="1000" dirty="0"/>
+              <a:t>  /</a:t>
+            </a:r>
+            <a:r>
+              <a:rPr lang="en-US" altLang="ko-KR" sz="1000" dirty="0" err="1"/>
+              <a:t>mnt</a:t>
+            </a:r>
+            <a:r>
+              <a:rPr lang="en-US" altLang="ko-KR" sz="1000" dirty="0"/>
+              <a:t>/d/project/01_ENSO/01_data/02_interim   --outroot /</a:t>
+            </a:r>
+            <a:r>
+              <a:rPr lang="en-US" altLang="ko-KR" sz="1000" dirty="0" err="1"/>
+              <a:t>mnt</a:t>
+            </a:r>
+            <a:r>
+              <a:rPr lang="en-US" altLang="ko-KR" sz="1000" dirty="0"/>
+              <a:t>/d/project/01_ENSO/01_data/03_input   --mode all   --</a:t>
+            </a:r>
+            <a:r>
+              <a:rPr lang="en-US" altLang="ko-KR" sz="1000" dirty="0" err="1"/>
+              <a:t>fillna</a:t>
+            </a:r>
+            <a:r>
+              <a:rPr lang="en-US" altLang="ko-KR" sz="1000" dirty="0"/>
+              <a:t> none</a:t>
+            </a:r>
+          </a:p>
+          <a:p>
+            <a:endParaRPr lang="en-US" altLang="ko-KR" sz="1000" dirty="0">
+              <a:latin typeface="Pretendard" panose="02000503000000020004" pitchFamily="50" charset="-127"/>
+              <a:ea typeface="Pretendard" panose="02000503000000020004" pitchFamily="50" charset="-127"/>
+              <a:cs typeface="Pretendard" panose="02000503000000020004" pitchFamily="50" charset="-127"/>
+            </a:endParaRPr>
+          </a:p>
+          <a:p>
+            <a:r>
+              <a:rPr lang="ko-KR" altLang="en-US" sz="1000" b="1" dirty="0">
+                <a:latin typeface="Pretendard" panose="02000503000000020004" pitchFamily="50" charset="-127"/>
+                <a:ea typeface="Pretendard" panose="02000503000000020004" pitchFamily="50" charset="-127"/>
+                <a:cs typeface="Pretendard" panose="02000503000000020004" pitchFamily="50" charset="-127"/>
+              </a:rPr>
+              <a:t>검증</a:t>
+            </a:r>
+            <a:endParaRPr lang="en-US" altLang="ko-KR" sz="1000" b="1" dirty="0">
+              <a:latin typeface="Pretendard" panose="02000503000000020004" pitchFamily="50" charset="-127"/>
+              <a:ea typeface="Pretendard" panose="02000503000000020004" pitchFamily="50" charset="-127"/>
+              <a:cs typeface="Pretendard" panose="02000503000000020004" pitchFamily="50" charset="-127"/>
+            </a:endParaRPr>
+          </a:p>
+          <a:p>
+            <a:r>
+              <a:rPr lang="en-US" altLang="ko-KR" sz="1000" dirty="0" err="1">
+                <a:latin typeface="Pretendard" panose="02000503000000020004" pitchFamily="50" charset="-127"/>
+                <a:ea typeface="Pretendard" panose="02000503000000020004" pitchFamily="50" charset="-127"/>
+                <a:cs typeface="Pretendard" panose="02000503000000020004" pitchFamily="50" charset="-127"/>
+              </a:rPr>
+              <a:t>ncdump</a:t>
+            </a:r>
+            <a:r>
+              <a:rPr lang="en-US" altLang="ko-KR" sz="1000" dirty="0">
+                <a:latin typeface="Pretendard" panose="02000503000000020004" pitchFamily="50" charset="-127"/>
+                <a:ea typeface="Pretendard" panose="02000503000000020004" pitchFamily="50" charset="-127"/>
+                <a:cs typeface="Pretendard" panose="02000503000000020004" pitchFamily="50" charset="-127"/>
+              </a:rPr>
+              <a:t> -h /mnt/d/project/01_ENSO/01_data/03_input/cmip6/ssp370/ACCESS-CM2/r1i1p1f1/monthly/input_ACCESS-CM2_ssp370_r1i1p1f1.anom_1x2.nc | head -n 50</a:t>
+            </a:r>
+          </a:p>
+          <a:p>
+            <a:r>
+              <a:rPr lang="en-US" altLang="ko-KR" sz="1000" dirty="0" err="1">
+                <a:latin typeface="Pretendard" panose="02000503000000020004" pitchFamily="50" charset="-127"/>
+                <a:ea typeface="Pretendard" panose="02000503000000020004" pitchFamily="50" charset="-127"/>
+                <a:cs typeface="Pretendard" panose="02000503000000020004" pitchFamily="50" charset="-127"/>
+              </a:rPr>
+              <a:t>cdo</a:t>
+            </a:r>
+            <a:r>
+              <a:rPr lang="en-US" altLang="ko-KR" sz="1000" dirty="0">
+                <a:latin typeface="Pretendard" panose="02000503000000020004" pitchFamily="50" charset="-127"/>
+                <a:ea typeface="Pretendard" panose="02000503000000020004" pitchFamily="50" charset="-127"/>
+                <a:cs typeface="Pretendard" panose="02000503000000020004" pitchFamily="50" charset="-127"/>
+              </a:rPr>
+              <a:t> </a:t>
+            </a:r>
+            <a:r>
+              <a:rPr lang="en-US" altLang="ko-KR" sz="1000" dirty="0" err="1">
+                <a:latin typeface="Pretendard" panose="02000503000000020004" pitchFamily="50" charset="-127"/>
+                <a:ea typeface="Pretendard" panose="02000503000000020004" pitchFamily="50" charset="-127"/>
+                <a:cs typeface="Pretendard" panose="02000503000000020004" pitchFamily="50" charset="-127"/>
+              </a:rPr>
+              <a:t>showname</a:t>
+            </a:r>
+            <a:r>
+              <a:rPr lang="en-US" altLang="ko-KR" sz="1000" dirty="0">
+                <a:latin typeface="Pretendard" panose="02000503000000020004" pitchFamily="50" charset="-127"/>
+                <a:ea typeface="Pretendard" panose="02000503000000020004" pitchFamily="50" charset="-127"/>
+                <a:cs typeface="Pretendard" panose="02000503000000020004" pitchFamily="50" charset="-127"/>
+              </a:rPr>
+              <a:t> /mnt/d/project/01_ENSO/01_data/03_input/cmip6/ssp370/ACCESS-CM2/r1i1p1f1/monthly/input_ACCESS-CM2_ssp370_r1i1p1f1.anom_1x2.nc</a:t>
+            </a:r>
+          </a:p>
+          <a:p>
+            <a:r>
+              <a:rPr lang="en-US" altLang="ko-KR" sz="1000" dirty="0" err="1">
+                <a:latin typeface="Pretendard" panose="02000503000000020004" pitchFamily="50" charset="-127"/>
+                <a:ea typeface="Pretendard" panose="02000503000000020004" pitchFamily="50" charset="-127"/>
+                <a:cs typeface="Pretendard" panose="02000503000000020004" pitchFamily="50" charset="-127"/>
+              </a:rPr>
+              <a:t>cdo</a:t>
+            </a:r>
+            <a:r>
+              <a:rPr lang="en-US" altLang="ko-KR" sz="1000" dirty="0">
+                <a:latin typeface="Pretendard" panose="02000503000000020004" pitchFamily="50" charset="-127"/>
+                <a:ea typeface="Pretendard" panose="02000503000000020004" pitchFamily="50" charset="-127"/>
+                <a:cs typeface="Pretendard" panose="02000503000000020004" pitchFamily="50" charset="-127"/>
+              </a:rPr>
+              <a:t> </a:t>
+            </a:r>
+            <a:r>
+              <a:rPr lang="en-US" altLang="ko-KR" sz="1000" dirty="0" err="1">
+                <a:latin typeface="Pretendard" panose="02000503000000020004" pitchFamily="50" charset="-127"/>
+                <a:ea typeface="Pretendard" panose="02000503000000020004" pitchFamily="50" charset="-127"/>
+                <a:cs typeface="Pretendard" panose="02000503000000020004" pitchFamily="50" charset="-127"/>
+              </a:rPr>
+              <a:t>showtimestamp</a:t>
+            </a:r>
+            <a:r>
+              <a:rPr lang="en-US" altLang="ko-KR" sz="1000" dirty="0">
+                <a:latin typeface="Pretendard" panose="02000503000000020004" pitchFamily="50" charset="-127"/>
+                <a:ea typeface="Pretendard" panose="02000503000000020004" pitchFamily="50" charset="-127"/>
+                <a:cs typeface="Pretendard" panose="02000503000000020004" pitchFamily="50" charset="-127"/>
+              </a:rPr>
+              <a:t> /mnt/d/project/01_ENSO/01_data/03_input/cmip6/ssp370/ACCESS-CM2/r1i1p1f1/monthly/input_ACCESS-CM2_ssp370_r1i1p1f1.anom_1x2.nc</a:t>
+            </a:r>
+          </a:p>
+          <a:p>
+            <a:endParaRPr lang="en-US" altLang="ko-KR" sz="1000" dirty="0">
+              <a:latin typeface="Pretendard" panose="02000503000000020004" pitchFamily="50" charset="-127"/>
+              <a:ea typeface="Pretendard" panose="02000503000000020004" pitchFamily="50" charset="-127"/>
+              <a:cs typeface="Pretendard" panose="02000503000000020004" pitchFamily="50" charset="-127"/>
+            </a:endParaRPr>
+          </a:p>
+          <a:p>
+            <a:endParaRPr lang="en-US" altLang="ko-KR" sz="1000" dirty="0">
+              <a:latin typeface="Pretendard" panose="02000503000000020004" pitchFamily="50" charset="-127"/>
+              <a:ea typeface="Pretendard" panose="02000503000000020004" pitchFamily="50" charset="-127"/>
+              <a:cs typeface="Pretendard" panose="02000503000000020004" pitchFamily="50" charset="-127"/>
+            </a:endParaRPr>
+          </a:p>
+          <a:p>
+            <a:r>
+              <a:rPr lang="ko-KR" altLang="en-US" sz="1000" b="1" dirty="0">
+                <a:latin typeface="Pretendard" panose="02000503000000020004" pitchFamily="50" charset="-127"/>
+                <a:ea typeface="Pretendard" panose="02000503000000020004" pitchFamily="50" charset="-127"/>
+                <a:cs typeface="Pretendard" panose="02000503000000020004" pitchFamily="50" charset="-127"/>
+              </a:rPr>
+              <a:t>시간 자르기</a:t>
+            </a:r>
+            <a:endParaRPr lang="en-US" altLang="ko-KR" sz="1000" b="1" dirty="0">
+              <a:latin typeface="Pretendard" panose="02000503000000020004" pitchFamily="50" charset="-127"/>
+              <a:ea typeface="Pretendard" panose="02000503000000020004" pitchFamily="50" charset="-127"/>
+              <a:cs typeface="Pretendard" panose="02000503000000020004" pitchFamily="50" charset="-127"/>
+            </a:endParaRPr>
+          </a:p>
+          <a:p>
+            <a:r>
+              <a:rPr lang="en-US" altLang="ko-KR" sz="1000" dirty="0" err="1">
+                <a:latin typeface="Pretendard" panose="02000503000000020004" pitchFamily="50" charset="-127"/>
+                <a:ea typeface="Pretendard" panose="02000503000000020004" pitchFamily="50" charset="-127"/>
+                <a:cs typeface="Pretendard" panose="02000503000000020004" pitchFamily="50" charset="-127"/>
+              </a:rPr>
+              <a:t>mkdir</a:t>
+            </a:r>
+            <a:r>
+              <a:rPr lang="en-US" altLang="ko-KR" sz="1000" dirty="0">
+                <a:latin typeface="Pretendard" panose="02000503000000020004" pitchFamily="50" charset="-127"/>
+                <a:ea typeface="Pretendard" panose="02000503000000020004" pitchFamily="50" charset="-127"/>
+                <a:cs typeface="Pretendard" panose="02000503000000020004" pitchFamily="50" charset="-127"/>
+              </a:rPr>
+              <a:t> -p /</a:t>
+            </a:r>
+            <a:r>
+              <a:rPr lang="en-US" altLang="ko-KR" sz="1000" dirty="0" err="1">
+                <a:latin typeface="Pretendard" panose="02000503000000020004" pitchFamily="50" charset="-127"/>
+                <a:ea typeface="Pretendard" panose="02000503000000020004" pitchFamily="50" charset="-127"/>
+                <a:cs typeface="Pretendard" panose="02000503000000020004" pitchFamily="50" charset="-127"/>
+              </a:rPr>
+              <a:t>mnt</a:t>
+            </a:r>
+            <a:r>
+              <a:rPr lang="en-US" altLang="ko-KR" sz="1000" dirty="0">
+                <a:latin typeface="Pretendard" panose="02000503000000020004" pitchFamily="50" charset="-127"/>
+                <a:ea typeface="Pretendard" panose="02000503000000020004" pitchFamily="50" charset="-127"/>
+                <a:cs typeface="Pretendard" panose="02000503000000020004" pitchFamily="50" charset="-127"/>
+              </a:rPr>
+              <a:t>/d/project/01_ENSO/01_data/03_input/reanalysis</a:t>
+            </a:r>
+            <a:br>
+              <a:rPr lang="en-US" altLang="ko-KR" sz="1000" dirty="0">
+                <a:latin typeface="Pretendard" panose="02000503000000020004" pitchFamily="50" charset="-127"/>
+                <a:ea typeface="Pretendard" panose="02000503000000020004" pitchFamily="50" charset="-127"/>
+                <a:cs typeface="Pretendard" panose="02000503000000020004" pitchFamily="50" charset="-127"/>
+              </a:rPr>
+            </a:br>
+            <a:br>
+              <a:rPr lang="en-US" altLang="ko-KR" sz="1000" dirty="0">
+                <a:latin typeface="Pretendard" panose="02000503000000020004" pitchFamily="50" charset="-127"/>
+                <a:ea typeface="Pretendard" panose="02000503000000020004" pitchFamily="50" charset="-127"/>
+                <a:cs typeface="Pretendard" panose="02000503000000020004" pitchFamily="50" charset="-127"/>
+              </a:rPr>
+            </a:br>
+            <a:r>
+              <a:rPr lang="en-US" altLang="ko-KR" sz="1000" dirty="0" err="1">
+                <a:latin typeface="Pretendard" panose="02000503000000020004" pitchFamily="50" charset="-127"/>
+                <a:ea typeface="Pretendard" panose="02000503000000020004" pitchFamily="50" charset="-127"/>
+                <a:cs typeface="Pretendard" panose="02000503000000020004" pitchFamily="50" charset="-127"/>
+              </a:rPr>
+              <a:t>cdo</a:t>
+            </a:r>
+            <a:r>
+              <a:rPr lang="en-US" altLang="ko-KR" sz="1000" dirty="0">
+                <a:latin typeface="Pretendard" panose="02000503000000020004" pitchFamily="50" charset="-127"/>
+                <a:ea typeface="Pretendard" panose="02000503000000020004" pitchFamily="50" charset="-127"/>
+                <a:cs typeface="Pretendard" panose="02000503000000020004" pitchFamily="50" charset="-127"/>
+              </a:rPr>
+              <a:t> -L -O seldate,1958-01-01,1978-12-31 \</a:t>
+            </a:r>
+            <a:br>
+              <a:rPr lang="en-US" altLang="ko-KR" sz="1000" dirty="0">
+                <a:latin typeface="Pretendard" panose="02000503000000020004" pitchFamily="50" charset="-127"/>
+                <a:ea typeface="Pretendard" panose="02000503000000020004" pitchFamily="50" charset="-127"/>
+                <a:cs typeface="Pretendard" panose="02000503000000020004" pitchFamily="50" charset="-127"/>
+              </a:rPr>
+            </a:br>
+            <a:r>
+              <a:rPr lang="en-US" altLang="ko-KR" sz="1000" dirty="0">
+                <a:latin typeface="Pretendard" panose="02000503000000020004" pitchFamily="50" charset="-127"/>
+                <a:ea typeface="Pretendard" panose="02000503000000020004" pitchFamily="50" charset="-127"/>
+                <a:cs typeface="Pretendard" panose="02000503000000020004" pitchFamily="50" charset="-127"/>
+              </a:rPr>
+              <a:t>/mnt/d/project/01_ENSO/01_data/03_input/reanalysis/oras5_era5_input.anom_1x2.nc \</a:t>
+            </a:r>
+            <a:br>
+              <a:rPr lang="en-US" altLang="ko-KR" sz="1000" dirty="0">
+                <a:latin typeface="Pretendard" panose="02000503000000020004" pitchFamily="50" charset="-127"/>
+                <a:ea typeface="Pretendard" panose="02000503000000020004" pitchFamily="50" charset="-127"/>
+                <a:cs typeface="Pretendard" panose="02000503000000020004" pitchFamily="50" charset="-127"/>
+              </a:rPr>
+            </a:br>
+            <a:r>
+              <a:rPr lang="en-US" altLang="ko-KR" sz="1000" dirty="0">
+                <a:latin typeface="Pretendard" panose="02000503000000020004" pitchFamily="50" charset="-127"/>
+                <a:ea typeface="Pretendard" panose="02000503000000020004" pitchFamily="50" charset="-127"/>
+                <a:cs typeface="Pretendard" panose="02000503000000020004" pitchFamily="50" charset="-127"/>
+              </a:rPr>
+              <a:t>/mnt/d/project/01_ENSO/01_data/03_input/reanalysis/validation_dataset.nc</a:t>
+            </a:r>
+            <a:br>
+              <a:rPr lang="en-US" altLang="ko-KR" sz="1000" dirty="0">
+                <a:latin typeface="Pretendard" panose="02000503000000020004" pitchFamily="50" charset="-127"/>
+                <a:ea typeface="Pretendard" panose="02000503000000020004" pitchFamily="50" charset="-127"/>
+                <a:cs typeface="Pretendard" panose="02000503000000020004" pitchFamily="50" charset="-127"/>
+              </a:rPr>
+            </a:br>
+            <a:br>
+              <a:rPr lang="en-US" altLang="ko-KR" sz="1000" dirty="0">
+                <a:latin typeface="Pretendard" panose="02000503000000020004" pitchFamily="50" charset="-127"/>
+                <a:ea typeface="Pretendard" panose="02000503000000020004" pitchFamily="50" charset="-127"/>
+                <a:cs typeface="Pretendard" panose="02000503000000020004" pitchFamily="50" charset="-127"/>
+              </a:rPr>
+            </a:br>
+            <a:r>
+              <a:rPr lang="en-US" altLang="ko-KR" sz="1000" dirty="0" err="1">
+                <a:latin typeface="Pretendard" panose="02000503000000020004" pitchFamily="50" charset="-127"/>
+                <a:ea typeface="Pretendard" panose="02000503000000020004" pitchFamily="50" charset="-127"/>
+                <a:cs typeface="Pretendard" panose="02000503000000020004" pitchFamily="50" charset="-127"/>
+              </a:rPr>
+              <a:t>cdo</a:t>
+            </a:r>
+            <a:r>
+              <a:rPr lang="en-US" altLang="ko-KR" sz="1000" dirty="0">
+                <a:latin typeface="Pretendard" panose="02000503000000020004" pitchFamily="50" charset="-127"/>
+                <a:ea typeface="Pretendard" panose="02000503000000020004" pitchFamily="50" charset="-127"/>
+                <a:cs typeface="Pretendard" panose="02000503000000020004" pitchFamily="50" charset="-127"/>
+              </a:rPr>
+              <a:t> -L -O seldate,1980-01-01,2025-12-31 \</a:t>
+            </a:r>
+            <a:br>
+              <a:rPr lang="en-US" altLang="ko-KR" sz="1000" dirty="0">
+                <a:latin typeface="Pretendard" panose="02000503000000020004" pitchFamily="50" charset="-127"/>
+                <a:ea typeface="Pretendard" panose="02000503000000020004" pitchFamily="50" charset="-127"/>
+                <a:cs typeface="Pretendard" panose="02000503000000020004" pitchFamily="50" charset="-127"/>
+              </a:rPr>
+            </a:br>
+            <a:r>
+              <a:rPr lang="en-US" altLang="ko-KR" sz="1000" dirty="0">
+                <a:latin typeface="Pretendard" panose="02000503000000020004" pitchFamily="50" charset="-127"/>
+                <a:ea typeface="Pretendard" panose="02000503000000020004" pitchFamily="50" charset="-127"/>
+                <a:cs typeface="Pretendard" panose="02000503000000020004" pitchFamily="50" charset="-127"/>
+              </a:rPr>
+              <a:t>/mnt/d/project/01_ENSO/01_data/03_input/reanalysis/godas_era5_input.anom_1x2.nc \</a:t>
+            </a:r>
+            <a:br>
+              <a:rPr lang="en-US" altLang="ko-KR" sz="1000" dirty="0">
+                <a:latin typeface="Pretendard" panose="02000503000000020004" pitchFamily="50" charset="-127"/>
+                <a:ea typeface="Pretendard" panose="02000503000000020004" pitchFamily="50" charset="-127"/>
+                <a:cs typeface="Pretendard" panose="02000503000000020004" pitchFamily="50" charset="-127"/>
+              </a:rPr>
+            </a:br>
+            <a:r>
+              <a:rPr lang="en-US" altLang="ko-KR" sz="1000" dirty="0">
+                <a:latin typeface="Pretendard" panose="02000503000000020004" pitchFamily="50" charset="-127"/>
+                <a:ea typeface="Pretendard" panose="02000503000000020004" pitchFamily="50" charset="-127"/>
+                <a:cs typeface="Pretendard" panose="02000503000000020004" pitchFamily="50" charset="-127"/>
+              </a:rPr>
+              <a:t>/mnt/d/project/01_ENSO/01_data/03_input/reanalysis/test_dataset.nc</a:t>
+            </a:r>
+          </a:p>
+          <a:p>
+            <a:endParaRPr lang="en-US" altLang="ko-KR" sz="1000" dirty="0">
+              <a:latin typeface="Pretendard" panose="02000503000000020004" pitchFamily="50" charset="-127"/>
+              <a:ea typeface="Pretendard" panose="02000503000000020004" pitchFamily="50" charset="-127"/>
+              <a:cs typeface="Pretendard" panose="02000503000000020004" pitchFamily="50" charset="-127"/>
+            </a:endParaRPr>
+          </a:p>
+          <a:p>
+            <a:endParaRPr lang="en-US" altLang="ko-KR" sz="1000" dirty="0">
+              <a:latin typeface="Pretendard" panose="02000503000000020004" pitchFamily="50" charset="-127"/>
+              <a:ea typeface="Pretendard" panose="02000503000000020004" pitchFamily="50" charset="-127"/>
+              <a:cs typeface="Pretendard" panose="02000503000000020004" pitchFamily="50" charset="-127"/>
+            </a:endParaRPr>
+          </a:p>
+          <a:p>
+            <a:r>
+              <a:rPr lang="ko-KR" altLang="en-US" sz="1000" b="1" dirty="0">
+                <a:latin typeface="Pretendard" panose="02000503000000020004" pitchFamily="50" charset="-127"/>
+                <a:ea typeface="Pretendard" panose="02000503000000020004" pitchFamily="50" charset="-127"/>
+                <a:cs typeface="Pretendard" panose="02000503000000020004" pitchFamily="50" charset="-127"/>
+              </a:rPr>
+              <a:t>검증</a:t>
+            </a:r>
+            <a:endParaRPr lang="en-US" altLang="ko-KR" sz="1000" b="1" dirty="0">
+              <a:latin typeface="Pretendard" panose="02000503000000020004" pitchFamily="50" charset="-127"/>
+              <a:ea typeface="Pretendard" panose="02000503000000020004" pitchFamily="50" charset="-127"/>
+              <a:cs typeface="Pretendard" panose="02000503000000020004" pitchFamily="50" charset="-127"/>
+            </a:endParaRPr>
+          </a:p>
+          <a:p>
+            <a:r>
+              <a:rPr lang="en-US" altLang="ko-KR" sz="1000" dirty="0" err="1">
+                <a:latin typeface="Pretendard" panose="02000503000000020004" pitchFamily="50" charset="-127"/>
+                <a:ea typeface="Pretendard" panose="02000503000000020004" pitchFamily="50" charset="-127"/>
+                <a:cs typeface="Pretendard" panose="02000503000000020004" pitchFamily="50" charset="-127"/>
+              </a:rPr>
+              <a:t>cdo</a:t>
+            </a:r>
+            <a:r>
+              <a:rPr lang="en-US" altLang="ko-KR" sz="1000" dirty="0">
+                <a:latin typeface="Pretendard" panose="02000503000000020004" pitchFamily="50" charset="-127"/>
+                <a:ea typeface="Pretendard" panose="02000503000000020004" pitchFamily="50" charset="-127"/>
+                <a:cs typeface="Pretendard" panose="02000503000000020004" pitchFamily="50" charset="-127"/>
+              </a:rPr>
+              <a:t> </a:t>
+            </a:r>
+            <a:r>
+              <a:rPr lang="en-US" altLang="ko-KR" sz="1000" dirty="0" err="1">
+                <a:latin typeface="Pretendard" panose="02000503000000020004" pitchFamily="50" charset="-127"/>
+                <a:ea typeface="Pretendard" panose="02000503000000020004" pitchFamily="50" charset="-127"/>
+                <a:cs typeface="Pretendard" panose="02000503000000020004" pitchFamily="50" charset="-127"/>
+              </a:rPr>
+              <a:t>ntime</a:t>
+            </a:r>
+            <a:r>
+              <a:rPr lang="en-US" altLang="ko-KR" sz="1000" dirty="0">
+                <a:latin typeface="Pretendard" panose="02000503000000020004" pitchFamily="50" charset="-127"/>
+                <a:ea typeface="Pretendard" panose="02000503000000020004" pitchFamily="50" charset="-127"/>
+                <a:cs typeface="Pretendard" panose="02000503000000020004" pitchFamily="50" charset="-127"/>
+              </a:rPr>
+              <a:t> /mnt/d/project/01_ENSO/01_data/03_input/reanalysis/test_dataset.nc</a:t>
+            </a:r>
+          </a:p>
+          <a:p>
+            <a:r>
+              <a:rPr lang="en-US" altLang="ko-KR" sz="1000" dirty="0" err="1">
+                <a:latin typeface="Pretendard" panose="02000503000000020004" pitchFamily="50" charset="-127"/>
+                <a:ea typeface="Pretendard" panose="02000503000000020004" pitchFamily="50" charset="-127"/>
+                <a:cs typeface="Pretendard" panose="02000503000000020004" pitchFamily="50" charset="-127"/>
+              </a:rPr>
+              <a:t>cdo</a:t>
+            </a:r>
+            <a:r>
+              <a:rPr lang="en-US" altLang="ko-KR" sz="1000" dirty="0">
+                <a:latin typeface="Pretendard" panose="02000503000000020004" pitchFamily="50" charset="-127"/>
+                <a:ea typeface="Pretendard" panose="02000503000000020004" pitchFamily="50" charset="-127"/>
+                <a:cs typeface="Pretendard" panose="02000503000000020004" pitchFamily="50" charset="-127"/>
+              </a:rPr>
+              <a:t> </a:t>
+            </a:r>
+            <a:r>
+              <a:rPr lang="en-US" altLang="ko-KR" sz="1000" dirty="0" err="1">
+                <a:latin typeface="Pretendard" panose="02000503000000020004" pitchFamily="50" charset="-127"/>
+                <a:ea typeface="Pretendard" panose="02000503000000020004" pitchFamily="50" charset="-127"/>
+                <a:cs typeface="Pretendard" panose="02000503000000020004" pitchFamily="50" charset="-127"/>
+              </a:rPr>
+              <a:t>showtimestamp</a:t>
+            </a:r>
+            <a:r>
+              <a:rPr lang="en-US" altLang="ko-KR" sz="1000" dirty="0">
+                <a:latin typeface="Pretendard" panose="02000503000000020004" pitchFamily="50" charset="-127"/>
+                <a:ea typeface="Pretendard" panose="02000503000000020004" pitchFamily="50" charset="-127"/>
+                <a:cs typeface="Pretendard" panose="02000503000000020004" pitchFamily="50" charset="-127"/>
+              </a:rPr>
+              <a:t> /mnt/d/project/01_ENSO/01_data/03_input/reanalysis/test_dataset.nc | head</a:t>
+            </a:r>
+          </a:p>
+          <a:p>
+            <a:r>
+              <a:rPr lang="en-US" altLang="ko-KR" sz="1000" dirty="0" err="1">
+                <a:latin typeface="Pretendard" panose="02000503000000020004" pitchFamily="50" charset="-127"/>
+                <a:ea typeface="Pretendard" panose="02000503000000020004" pitchFamily="50" charset="-127"/>
+                <a:cs typeface="Pretendard" panose="02000503000000020004" pitchFamily="50" charset="-127"/>
+              </a:rPr>
+              <a:t>cdo</a:t>
+            </a:r>
+            <a:r>
+              <a:rPr lang="en-US" altLang="ko-KR" sz="1000" dirty="0">
+                <a:latin typeface="Pretendard" panose="02000503000000020004" pitchFamily="50" charset="-127"/>
+                <a:ea typeface="Pretendard" panose="02000503000000020004" pitchFamily="50" charset="-127"/>
+                <a:cs typeface="Pretendard" panose="02000503000000020004" pitchFamily="50" charset="-127"/>
+              </a:rPr>
+              <a:t> </a:t>
+            </a:r>
+            <a:r>
+              <a:rPr lang="en-US" altLang="ko-KR" sz="1000" dirty="0" err="1">
+                <a:latin typeface="Pretendard" panose="02000503000000020004" pitchFamily="50" charset="-127"/>
+                <a:ea typeface="Pretendard" panose="02000503000000020004" pitchFamily="50" charset="-127"/>
+                <a:cs typeface="Pretendard" panose="02000503000000020004" pitchFamily="50" charset="-127"/>
+              </a:rPr>
+              <a:t>showtimestamp</a:t>
+            </a:r>
+            <a:r>
+              <a:rPr lang="en-US" altLang="ko-KR" sz="1000" dirty="0">
+                <a:latin typeface="Pretendard" panose="02000503000000020004" pitchFamily="50" charset="-127"/>
+                <a:ea typeface="Pretendard" panose="02000503000000020004" pitchFamily="50" charset="-127"/>
+                <a:cs typeface="Pretendard" panose="02000503000000020004" pitchFamily="50" charset="-127"/>
+              </a:rPr>
+              <a:t> /mnt/d/project/01_ENSO/01_data/03_input/reanalysis/test_dataset.nc | tail</a:t>
+            </a:r>
+            <a:endParaRPr lang="ko-KR" altLang="en-US" sz="1000" dirty="0">
+              <a:latin typeface="Pretendard" panose="02000503000000020004" pitchFamily="50" charset="-127"/>
+              <a:ea typeface="Pretendard" panose="02000503000000020004" pitchFamily="50" charset="-127"/>
+              <a:cs typeface="Pretendard" panose="02000503000000020004" pitchFamily="50" charset="-127"/>
+            </a:endParaRPr>
+          </a:p>
+        </p:txBody>
+      </p:sp>
+    </p:spTree>
+    <p:extLst>
+      <p:ext uri="{BB962C8B-B14F-4D97-AF65-F5344CB8AC3E}">
+        <p14:creationId xmlns:p14="http://schemas.microsoft.com/office/powerpoint/2010/main" val="3157303717"/>
+      </p:ext>
+    </p:extLst>
+  </p:cSld>
+  <p:clrMapOvr>
+    <a:masterClrMapping/>
+  </p:clrMapOvr>
+</p:sld>
+</file>
+
+<file path=ppt/slides/slide11.xml><?xml version="1.0" encoding="utf-8"?>
+<p:sld xmlns:a="http://schemas.openxmlformats.org/drawingml/2006/main" xmlns:r="http://schemas.openxmlformats.org/officeDocument/2006/relationships" xmlns:p="http://schemas.openxmlformats.org/presentationml/2006/main">
+  <p:cSld>
+    <p:spTree>
+      <p:nvGrpSpPr>
+        <p:cNvPr id="1" name="Shape 157">
+          <a:extLst>
+            <a:ext uri="{FF2B5EF4-FFF2-40B4-BE49-F238E27FC236}">
+              <a16:creationId xmlns:a16="http://schemas.microsoft.com/office/drawing/2014/main" id="{AF38A0C1-5D23-CCE3-D3BD-966878B92434}"/>
+            </a:ext>
+          </a:extLst>
+        </p:cNvPr>
+        <p:cNvGrpSpPr/>
+        <p:nvPr/>
+      </p:nvGrpSpPr>
+      <p:grpSpPr>
+        <a:xfrm>
+          <a:off x="0" y="0"/>
+          <a:ext cx="0" cy="0"/>
+          <a:chOff x="0" y="0"/>
+          <a:chExt cx="0" cy="0"/>
+        </a:xfrm>
+      </p:grpSpPr>
+      <p:pic>
+        <p:nvPicPr>
+          <p:cNvPr id="158" name="Google Shape;158;p18" descr="image.png">
+            <a:extLst>
+              <a:ext uri="{FF2B5EF4-FFF2-40B4-BE49-F238E27FC236}">
+                <a16:creationId xmlns:a16="http://schemas.microsoft.com/office/drawing/2014/main" id="{37497912-F838-80F3-9AF5-AA021DF18944}"/>
+              </a:ext>
+            </a:extLst>
+          </p:cNvPr>
+          <p:cNvPicPr preferRelativeResize="0">
+            <a:picLocks noGrp="1" noRot="1" noMove="1" noResize="1" noEditPoints="1" noAdjustHandles="1" noChangeArrowheads="1" noChangeShapeType="1" noCrop="1"/>
+          </p:cNvPicPr>
+          <p:nvPr/>
+        </p:nvPicPr>
+        <p:blipFill rotWithShape="1">
+          <a:blip r:embed="rId3">
+            <a:alphaModFix/>
+          </a:blip>
+          <a:srcRect/>
+          <a:stretch/>
+        </p:blipFill>
+        <p:spPr>
+          <a:xfrm>
+            <a:off x="0" y="0"/>
+            <a:ext cx="12192000" cy="6858000"/>
+          </a:xfrm>
+          <a:prstGeom prst="rect">
+            <a:avLst/>
+          </a:prstGeom>
+          <a:noFill/>
+          <a:ln>
+            <a:noFill/>
+          </a:ln>
+        </p:spPr>
+      </p:pic>
+      <p:sp>
+        <p:nvSpPr>
+          <p:cNvPr id="160" name="Google Shape;160;p18">
+            <a:extLst>
+              <a:ext uri="{FF2B5EF4-FFF2-40B4-BE49-F238E27FC236}">
+                <a16:creationId xmlns:a16="http://schemas.microsoft.com/office/drawing/2014/main" id="{124A25BC-E09A-A61E-123B-B86A899A9BD8}"/>
+              </a:ext>
+            </a:extLst>
+          </p:cNvPr>
+          <p:cNvSpPr txBox="1"/>
+          <p:nvPr/>
+        </p:nvSpPr>
+        <p:spPr>
+          <a:xfrm>
+            <a:off x="571500" y="476250"/>
+            <a:ext cx="11049000" cy="484748"/>
+          </a:xfrm>
+          <a:prstGeom prst="rect">
+            <a:avLst/>
+          </a:prstGeom>
+          <a:noFill/>
+          <a:ln>
+            <a:noFill/>
+          </a:ln>
+        </p:spPr>
+        <p:txBody>
+          <a:bodyPr spcFirstLastPara="1" wrap="square" lIns="0" tIns="0" rIns="0" bIns="0" anchor="t" anchorCtr="0">
+            <a:spAutoFit/>
+          </a:bodyPr>
+          <a:lstStyle/>
+          <a:p>
+            <a:pPr marL="0" marR="0" lvl="0" indent="0" algn="l" rtl="0">
+              <a:spcBef>
+                <a:spcPts val="0"/>
+              </a:spcBef>
+              <a:spcAft>
+                <a:spcPts val="0"/>
+              </a:spcAft>
+              <a:buNone/>
+            </a:pPr>
+            <a:r>
+              <a:rPr lang="en-US" sz="3150" b="1" i="0" u="none" strike="noStrike" cap="none" dirty="0">
+                <a:solidFill>
+                  <a:srgbClr val="001F3F"/>
+                </a:solidFill>
+                <a:latin typeface="Pretendard ExtraBold" panose="02000903000000020004" pitchFamily="50" charset="-127"/>
+                <a:ea typeface="Pretendard ExtraBold" panose="02000903000000020004" pitchFamily="50" charset="-127"/>
+                <a:cs typeface="Pretendard ExtraBold" panose="02000903000000020004" pitchFamily="50" charset="-127"/>
+                <a:sym typeface="Arial"/>
+              </a:rPr>
+              <a:t>Sample </a:t>
+            </a:r>
+            <a:endParaRPr dirty="0">
+              <a:latin typeface="Pretendard ExtraBold" panose="02000903000000020004" pitchFamily="50" charset="-127"/>
+              <a:ea typeface="Pretendard ExtraBold" panose="02000903000000020004" pitchFamily="50" charset="-127"/>
+              <a:cs typeface="Pretendard ExtraBold" panose="02000903000000020004" pitchFamily="50" charset="-127"/>
+            </a:endParaRPr>
+          </a:p>
+        </p:txBody>
+      </p:sp>
+      <p:sp>
+        <p:nvSpPr>
+          <p:cNvPr id="161" name="Google Shape;161;p18">
+            <a:extLst>
+              <a:ext uri="{FF2B5EF4-FFF2-40B4-BE49-F238E27FC236}">
+                <a16:creationId xmlns:a16="http://schemas.microsoft.com/office/drawing/2014/main" id="{8375F078-3F87-BC3F-62DD-FEBE0C8EF289}"/>
+              </a:ext>
+            </a:extLst>
+          </p:cNvPr>
+          <p:cNvSpPr/>
+          <p:nvPr/>
+        </p:nvSpPr>
+        <p:spPr>
+          <a:xfrm>
+            <a:off x="571500" y="1076325"/>
+            <a:ext cx="11049000" cy="19050"/>
+          </a:xfrm>
+          <a:prstGeom prst="rect">
+            <a:avLst/>
+          </a:prstGeom>
+          <a:solidFill>
+            <a:srgbClr val="EEEEEE"/>
+          </a:solidFill>
+          <a:ln>
+            <a:noFill/>
+          </a:ln>
+        </p:spPr>
+        <p:txBody>
+          <a:bodyPr spcFirstLastPara="1" wrap="square" lIns="91425" tIns="45700" rIns="91425" bIns="45700" anchor="ctr" anchorCtr="0">
+            <a:noAutofit/>
+          </a:bodyPr>
+          <a:lstStyle/>
+          <a:p>
+            <a:pPr marL="0" marR="0" lvl="0" indent="0" algn="ctr" rtl="0">
+              <a:spcBef>
+                <a:spcPts val="0"/>
+              </a:spcBef>
+              <a:spcAft>
+                <a:spcPts val="0"/>
+              </a:spcAft>
+              <a:buNone/>
+            </a:pPr>
+            <a:endParaRPr sz="1800" b="0" i="0" u="none" strike="noStrike" cap="none">
+              <a:solidFill>
+                <a:schemeClr val="dk1"/>
+              </a:solidFill>
+              <a:latin typeface="Calibri"/>
+              <a:ea typeface="Calibri"/>
+              <a:cs typeface="Calibri"/>
+              <a:sym typeface="Calibri"/>
+            </a:endParaRPr>
+          </a:p>
+        </p:txBody>
+      </p:sp>
+      <p:sp>
+        <p:nvSpPr>
+          <p:cNvPr id="4" name="슬라이드 번호 개체 틀 3">
+            <a:extLst>
+              <a:ext uri="{FF2B5EF4-FFF2-40B4-BE49-F238E27FC236}">
+                <a16:creationId xmlns:a16="http://schemas.microsoft.com/office/drawing/2014/main" id="{59C9025B-43DE-51DE-3593-A531066CA099}"/>
+              </a:ext>
+            </a:extLst>
+          </p:cNvPr>
+          <p:cNvSpPr>
+            <a:spLocks noGrp="1"/>
+          </p:cNvSpPr>
+          <p:nvPr>
+            <p:ph type="sldNum" idx="12"/>
+          </p:nvPr>
+        </p:nvSpPr>
+        <p:spPr/>
+        <p:txBody>
+          <a:bodyPr/>
+          <a:lstStyle/>
+          <a:p>
+            <a:pPr marL="0" lvl="0" indent="0" algn="r" rtl="0">
+              <a:spcBef>
+                <a:spcPts val="0"/>
+              </a:spcBef>
+              <a:spcAft>
+                <a:spcPts val="0"/>
+              </a:spcAft>
+              <a:buNone/>
+            </a:pPr>
+            <a:fld id="{00000000-1234-1234-1234-123412341234}" type="slidenum">
+              <a:rPr lang="en-US" smtClean="0"/>
+              <a:t>11</a:t>
+            </a:fld>
+            <a:endParaRPr lang="en-US"/>
+          </a:p>
+        </p:txBody>
+      </p:sp>
+      <p:sp>
+        <p:nvSpPr>
+          <p:cNvPr id="3" name="TextBox 2">
+            <a:extLst>
+              <a:ext uri="{FF2B5EF4-FFF2-40B4-BE49-F238E27FC236}">
+                <a16:creationId xmlns:a16="http://schemas.microsoft.com/office/drawing/2014/main" id="{8B036F74-AF38-7A15-2D48-2893FA2AADD3}"/>
+              </a:ext>
+            </a:extLst>
+          </p:cNvPr>
+          <p:cNvSpPr txBox="1"/>
+          <p:nvPr/>
+        </p:nvSpPr>
+        <p:spPr>
+          <a:xfrm>
+            <a:off x="571500" y="1210702"/>
+            <a:ext cx="11049000" cy="307777"/>
+          </a:xfrm>
+          <a:prstGeom prst="rect">
+            <a:avLst/>
+          </a:prstGeom>
+          <a:noFill/>
+        </p:spPr>
+        <p:txBody>
+          <a:bodyPr wrap="square" rtlCol="0">
+            <a:spAutoFit/>
+          </a:bodyPr>
+          <a:lstStyle/>
+          <a:p>
+            <a:pPr marL="285750" indent="-285750">
+              <a:buFont typeface="Arial" panose="020B0604020202020204" pitchFamily="34" charset="0"/>
+              <a:buChar char="•"/>
+            </a:pPr>
+            <a:r>
+              <a:rPr lang="ko-KR" altLang="en-US" dirty="0" err="1">
+                <a:latin typeface="Pretendard Light" panose="02000403000000020004" pitchFamily="50" charset="-127"/>
+                <a:ea typeface="Pretendard Light" panose="02000403000000020004" pitchFamily="50" charset="-127"/>
+                <a:cs typeface="Pretendard Light" panose="02000403000000020004" pitchFamily="50" charset="-127"/>
+              </a:rPr>
+              <a:t>ㅇㅇ</a:t>
+            </a:r>
+            <a:endParaRPr lang="ko-KR" altLang="en-US" dirty="0">
+              <a:latin typeface="Pretendard Light" panose="02000403000000020004" pitchFamily="50" charset="-127"/>
+              <a:ea typeface="Pretendard Light" panose="02000403000000020004" pitchFamily="50" charset="-127"/>
+              <a:cs typeface="Pretendard Light" panose="02000403000000020004" pitchFamily="50" charset="-127"/>
+            </a:endParaRPr>
+          </a:p>
+        </p:txBody>
+      </p:sp>
+    </p:spTree>
+    <p:extLst>
+      <p:ext uri="{BB962C8B-B14F-4D97-AF65-F5344CB8AC3E}">
+        <p14:creationId xmlns:p14="http://schemas.microsoft.com/office/powerpoint/2010/main" val="2838224310"/>
+      </p:ext>
+    </p:extLst>
+  </p:cSld>
+  <p:clrMapOvr>
+    <a:masterClrMapping/>
+  </p:clrMapOvr>
+</p:sld>
+</file>
+
 <file path=ppt/slides/slide2.xml><?xml version="1.0" encoding="utf-8"?>
 <p:sld xmlns:a="http://schemas.openxmlformats.org/drawingml/2006/main" xmlns:r="http://schemas.openxmlformats.org/officeDocument/2006/relationships" xmlns:p="http://schemas.openxmlformats.org/presentationml/2006/main">
   <p:cSld>
@@ -15274,7 +16533,7 @@
         <p:spPr>
           <a:xfrm>
             <a:off x="571500" y="2247022"/>
-            <a:ext cx="11049000" cy="1938992"/>
+            <a:ext cx="11049000" cy="2492990"/>
           </a:xfrm>
           <a:prstGeom prst="rect">
             <a:avLst/>
@@ -15416,6 +16675,38 @@
               <a:ea typeface="Pretendard Light" panose="02000403000000020004" pitchFamily="50" charset="-127"/>
               <a:cs typeface="Pretendard Light" panose="02000403000000020004" pitchFamily="50" charset="-127"/>
             </a:endParaRPr>
+          </a:p>
+          <a:p>
+            <a:endParaRPr lang="en-US" altLang="ko-KR" sz="1200" dirty="0">
+              <a:latin typeface="Pretendard Light" panose="02000403000000020004" pitchFamily="50" charset="-127"/>
+              <a:ea typeface="Pretendard Light" panose="02000403000000020004" pitchFamily="50" charset="-127"/>
+              <a:cs typeface="Pretendard Light" panose="02000403000000020004" pitchFamily="50" charset="-127"/>
+            </a:endParaRPr>
+          </a:p>
+          <a:p>
+            <a:r>
+              <a:rPr lang="ko-KR" altLang="en-US" sz="1200" dirty="0">
+                <a:latin typeface="Pretendard Light" panose="02000403000000020004" pitchFamily="50" charset="-127"/>
+                <a:ea typeface="Pretendard Light" panose="02000403000000020004" pitchFamily="50" charset="-127"/>
+                <a:cs typeface="Pretendard Light" panose="02000403000000020004" pitchFamily="50" charset="-127"/>
+              </a:rPr>
+              <a:t>사용 변수 </a:t>
+            </a:r>
+            <a:endParaRPr lang="en-US" altLang="ko-KR" sz="1200" dirty="0">
+              <a:latin typeface="Pretendard Light" panose="02000403000000020004" pitchFamily="50" charset="-127"/>
+              <a:ea typeface="Pretendard Light" panose="02000403000000020004" pitchFamily="50" charset="-127"/>
+              <a:cs typeface="Pretendard Light" panose="02000403000000020004" pitchFamily="50" charset="-127"/>
+            </a:endParaRPr>
+          </a:p>
+          <a:p>
+            <a:r>
+              <a:rPr lang="en-US" altLang="ko-KR" sz="1200" dirty="0">
+                <a:latin typeface="Pretendard Light" panose="02000403000000020004" pitchFamily="50" charset="-127"/>
+                <a:ea typeface="Pretendard Light" panose="02000403000000020004" pitchFamily="50" charset="-127"/>
+                <a:cs typeface="Pretendard Light" panose="02000403000000020004" pitchFamily="50" charset="-127"/>
+              </a:rPr>
+              <a:t>: SST, HC, MLD, SSS, SLP, UO, VO, U10, V10 + U10(daily)</a:t>
+            </a:r>
           </a:p>
         </p:txBody>
       </p:sp>
@@ -15539,7 +16830,7 @@
                 <a:ea typeface="Pretendard ExtraBold" panose="02000903000000020004" pitchFamily="50" charset="-127"/>
                 <a:cs typeface="Pretendard ExtraBold" panose="02000903000000020004" pitchFamily="50" charset="-127"/>
               </a:rPr>
-              <a:t>http </a:t>
+              <a:t>[CMIP6] http </a:t>
             </a:r>
             <a:r>
               <a:rPr lang="en-US" sz="3150" b="1" dirty="0">
@@ -16200,7 +17491,7 @@
               <a:buNone/>
             </a:pPr>
             <a:r>
-              <a:rPr lang="en-US" altLang="ko-KR" sz="3150" b="1" dirty="0">
+              <a:rPr lang="ko-KR" altLang="en-US" sz="3150" b="1" dirty="0" err="1">
                 <a:solidFill>
                   <a:srgbClr val="001F3F"/>
                 </a:solidFill>
@@ -16208,10 +17499,10 @@
                 <a:ea typeface="Pretendard ExtraBold" panose="02000903000000020004" pitchFamily="50" charset="-127"/>
                 <a:cs typeface="Pretendard ExtraBold" panose="02000903000000020004" pitchFamily="50" charset="-127"/>
               </a:rPr>
-              <a:t>[CMIP6] </a:t>
-            </a:r>
-            <a:r>
-              <a:rPr lang="en-US" altLang="ko-KR" sz="3150" b="1" dirty="0" err="1">
+              <a:t>표층장</a:t>
+            </a:r>
+            <a:r>
+              <a:rPr lang="ko-KR" altLang="en-US" sz="3150" b="1" dirty="0">
                 <a:solidFill>
                   <a:srgbClr val="001F3F"/>
                 </a:solidFill>
@@ -16219,40 +17510,19 @@
                 <a:ea typeface="Pretendard ExtraBold" panose="02000903000000020004" pitchFamily="50" charset="-127"/>
                 <a:cs typeface="Pretendard ExtraBold" panose="02000903000000020004" pitchFamily="50" charset="-127"/>
               </a:rPr>
-              <a:t>tos</a:t>
-            </a:r>
-            <a:r>
-              <a:rPr lang="en-US" altLang="ko-KR" sz="3150" b="1" dirty="0">
+              <a:t> </a:t>
+            </a:r>
+            <a:r>
+              <a:rPr lang="ko-KR" altLang="en-US" sz="3150" b="1" i="0" u="none" strike="noStrike" cap="none" dirty="0">
                 <a:solidFill>
                   <a:srgbClr val="001F3F"/>
                 </a:solidFill>
                 <a:latin typeface="Pretendard ExtraBold" panose="02000903000000020004" pitchFamily="50" charset="-127"/>
                 <a:ea typeface="Pretendard ExtraBold" panose="02000903000000020004" pitchFamily="50" charset="-127"/>
                 <a:cs typeface="Pretendard ExtraBold" panose="02000903000000020004" pitchFamily="50" charset="-127"/>
-              </a:rPr>
-              <a:t> &amp; </a:t>
-            </a:r>
-            <a:r>
-              <a:rPr lang="en-US" altLang="ko-KR" sz="3150" b="1" dirty="0" err="1">
-                <a:solidFill>
-                  <a:srgbClr val="001F3F"/>
-                </a:solidFill>
-                <a:latin typeface="Pretendard ExtraBold" panose="02000903000000020004" pitchFamily="50" charset="-127"/>
-                <a:ea typeface="Pretendard ExtraBold" panose="02000903000000020004" pitchFamily="50" charset="-127"/>
-                <a:cs typeface="Pretendard ExtraBold" panose="02000903000000020004" pitchFamily="50" charset="-127"/>
-              </a:rPr>
-              <a:t>uos</a:t>
-            </a:r>
-            <a:r>
-              <a:rPr lang="en-US" altLang="ko-KR" sz="3150" b="1" dirty="0">
-                <a:solidFill>
-                  <a:srgbClr val="001F3F"/>
-                </a:solidFill>
-                <a:latin typeface="Pretendard ExtraBold" panose="02000903000000020004" pitchFamily="50" charset="-127"/>
-                <a:ea typeface="Pretendard ExtraBold" panose="02000903000000020004" pitchFamily="50" charset="-127"/>
-                <a:cs typeface="Pretendard ExtraBold" panose="02000903000000020004" pitchFamily="50" charset="-127"/>
-              </a:rPr>
-              <a:t> </a:t>
+                <a:sym typeface="Arial"/>
+              </a:rPr>
+              <a:t>자료 생산 </a:t>
             </a:r>
             <a:r>
               <a:rPr lang="en-US" altLang="ko-KR" sz="3150" b="1" i="0" u="none" strike="noStrike" cap="none" dirty="0">
@@ -16264,7 +17534,7 @@
                 <a:cs typeface="Pretendard ExtraBold" panose="02000903000000020004" pitchFamily="50" charset="-127"/>
                 <a:sym typeface="Arial"/>
               </a:rPr>
-              <a:t>&amp; </a:t>
+              <a:t>(</a:t>
             </a:r>
             <a:r>
               <a:rPr lang="en-US" altLang="ko-KR" sz="3150" b="1" i="0" u="none" strike="noStrike" cap="none" dirty="0" err="1">
@@ -16276,7 +17546,7 @@
                 <a:cs typeface="Pretendard ExtraBold" panose="02000903000000020004" pitchFamily="50" charset="-127"/>
                 <a:sym typeface="Arial"/>
               </a:rPr>
-              <a:t>vos</a:t>
+              <a:t>tos</a:t>
             </a:r>
             <a:r>
               <a:rPr lang="en-US" altLang="ko-KR" sz="3150" b="1" i="0" u="none" strike="noStrike" cap="none" dirty="0">
@@ -16288,10 +17558,10 @@
                 <a:cs typeface="Pretendard ExtraBold" panose="02000903000000020004" pitchFamily="50" charset="-127"/>
                 <a:sym typeface="Arial"/>
               </a:rPr>
-              <a:t> </a:t>
-            </a:r>
-            <a:r>
-              <a:rPr lang="ko-KR" altLang="en-US" sz="3150" b="1" i="0" u="none" strike="noStrike" cap="none" dirty="0">
+              <a:t>/</a:t>
+            </a:r>
+            <a:r>
+              <a:rPr lang="en-US" altLang="ko-KR" sz="3150" b="1" i="0" u="none" strike="noStrike" cap="none" dirty="0" err="1">
                 <a:solidFill>
                   <a:srgbClr val="001F3F"/>
                 </a:solidFill>
@@ -16300,7 +17570,67 @@
                 <a:cs typeface="Pretendard ExtraBold" panose="02000903000000020004" pitchFamily="50" charset="-127"/>
                 <a:sym typeface="Arial"/>
               </a:rPr>
-              <a:t>자료 생산</a:t>
+              <a:t>sos</a:t>
+            </a:r>
+            <a:r>
+              <a:rPr lang="en-US" altLang="ko-KR" sz="3150" b="1" i="0" u="none" strike="noStrike" cap="none" dirty="0">
+                <a:solidFill>
+                  <a:srgbClr val="001F3F"/>
+                </a:solidFill>
+                <a:latin typeface="Pretendard ExtraBold" panose="02000903000000020004" pitchFamily="50" charset="-127"/>
+                <a:ea typeface="Pretendard ExtraBold" panose="02000903000000020004" pitchFamily="50" charset="-127"/>
+                <a:cs typeface="Pretendard ExtraBold" panose="02000903000000020004" pitchFamily="50" charset="-127"/>
+                <a:sym typeface="Arial"/>
+              </a:rPr>
+              <a:t>/</a:t>
+            </a:r>
+            <a:r>
+              <a:rPr lang="en-US" altLang="ko-KR" sz="3150" b="1" i="0" u="none" strike="noStrike" cap="none" dirty="0" err="1">
+                <a:solidFill>
+                  <a:srgbClr val="001F3F"/>
+                </a:solidFill>
+                <a:latin typeface="Pretendard ExtraBold" panose="02000903000000020004" pitchFamily="50" charset="-127"/>
+                <a:ea typeface="Pretendard ExtraBold" panose="02000903000000020004" pitchFamily="50" charset="-127"/>
+                <a:cs typeface="Pretendard ExtraBold" panose="02000903000000020004" pitchFamily="50" charset="-127"/>
+                <a:sym typeface="Arial"/>
+              </a:rPr>
+              <a:t>uos</a:t>
+            </a:r>
+            <a:r>
+              <a:rPr lang="en-US" altLang="ko-KR" sz="3150" b="1" i="0" u="none" strike="noStrike" cap="none" dirty="0">
+                <a:solidFill>
+                  <a:srgbClr val="001F3F"/>
+                </a:solidFill>
+                <a:latin typeface="Pretendard ExtraBold" panose="02000903000000020004" pitchFamily="50" charset="-127"/>
+                <a:ea typeface="Pretendard ExtraBold" panose="02000903000000020004" pitchFamily="50" charset="-127"/>
+                <a:cs typeface="Pretendard ExtraBold" panose="02000903000000020004" pitchFamily="50" charset="-127"/>
+                <a:sym typeface="Arial"/>
+              </a:rPr>
+              <a:t>/</a:t>
+            </a:r>
+            <a:r>
+              <a:rPr lang="en-US" altLang="ko-KR" sz="3150" b="1" i="0" u="none" strike="noStrike" cap="none" dirty="0" err="1">
+                <a:solidFill>
+                  <a:srgbClr val="001F3F"/>
+                </a:solidFill>
+                <a:latin typeface="Pretendard ExtraBold" panose="02000903000000020004" pitchFamily="50" charset="-127"/>
+                <a:ea typeface="Pretendard ExtraBold" panose="02000903000000020004" pitchFamily="50" charset="-127"/>
+                <a:cs typeface="Pretendard ExtraBold" panose="02000903000000020004" pitchFamily="50" charset="-127"/>
+                <a:sym typeface="Arial"/>
+              </a:rPr>
+              <a:t>vos</a:t>
+            </a:r>
+            <a:r>
+              <a:rPr lang="en-US" altLang="ko-KR" sz="3150" b="1" i="0" u="none" strike="noStrike" cap="none" dirty="0">
+                <a:solidFill>
+                  <a:srgbClr val="001F3F"/>
+                </a:solidFill>
+                <a:latin typeface="Pretendard ExtraBold" panose="02000903000000020004" pitchFamily="50" charset="-127"/>
+                <a:ea typeface="Pretendard ExtraBold" panose="02000903000000020004" pitchFamily="50" charset="-127"/>
+                <a:cs typeface="Pretendard ExtraBold" panose="02000903000000020004" pitchFamily="50" charset="-127"/>
+                <a:sym typeface="Arial"/>
+              </a:rPr>
+              <a:t>)</a:t>
             </a:r>
             <a:endParaRPr dirty="0">
               <a:latin typeface="Pretendard ExtraBold" panose="02000903000000020004" pitchFamily="50" charset="-127"/>
@@ -16417,7 +17747,7 @@
         <p:spPr>
           <a:xfrm>
             <a:off x="571500" y="1210702"/>
-            <a:ext cx="11049000" cy="830997"/>
+            <a:ext cx="11049000" cy="2677656"/>
           </a:xfrm>
           <a:prstGeom prst="rect">
             <a:avLst/>
@@ -16431,33 +17761,13 @@
           <a:lstStyle/>
           <a:p>
             <a:r>
-              <a:rPr lang="en-US" altLang="ko-KR" sz="1200" b="1" dirty="0" err="1">
-                <a:latin typeface="Pretendard Light" panose="02000403000000020004" pitchFamily="50" charset="-127"/>
-                <a:ea typeface="Pretendard Light" panose="02000403000000020004" pitchFamily="50" charset="-127"/>
-                <a:cs typeface="Pretendard Light" panose="02000403000000020004" pitchFamily="50" charset="-127"/>
-              </a:rPr>
-              <a:t>chmod</a:t>
-            </a:r>
-            <a:r>
               <a:rPr lang="en-US" altLang="ko-KR" sz="1200" b="1" dirty="0">
                 <a:latin typeface="Pretendard Light" panose="02000403000000020004" pitchFamily="50" charset="-127"/>
                 <a:ea typeface="Pretendard Light" panose="02000403000000020004" pitchFamily="50" charset="-127"/>
                 <a:cs typeface="Pretendard Light" panose="02000403000000020004" pitchFamily="50" charset="-127"/>
               </a:rPr>
-              <a:t> +x make_surface_fields_cmip6.sh</a:t>
-            </a:r>
-          </a:p>
-          <a:p>
-            <a:r>
-              <a:rPr lang="en-US" altLang="ko-KR" sz="1200" b="1" dirty="0">
-                <a:latin typeface="Pretendard Light" panose="02000403000000020004" pitchFamily="50" charset="-127"/>
-                <a:ea typeface="Pretendard Light" panose="02000403000000020004" pitchFamily="50" charset="-127"/>
-                <a:cs typeface="Pretendard Light" panose="02000403000000020004" pitchFamily="50" charset="-127"/>
-              </a:rPr>
-              <a:t>./make_surface_fields_cmip6.sh </a:t>
-            </a:r>
-          </a:p>
-          <a:p>
+              <a:t>make_surface_fields_cmip6.sh </a:t>
+            </a:r>
             <a:br>
               <a:rPr lang="en-US" altLang="ko-KR" sz="1200" dirty="0">
                 <a:latin typeface="Pretendard Light" panose="02000403000000020004" pitchFamily="50" charset="-127"/>
@@ -16471,7 +17781,7 @@
                 <a:ea typeface="Pretendard Light" panose="02000403000000020004" pitchFamily="50" charset="-127"/>
                 <a:cs typeface="Pretendard Light" panose="02000403000000020004" pitchFamily="50" charset="-127"/>
               </a:rPr>
-              <a:t>: CDO </a:t>
+              <a:t>: </a:t>
             </a:r>
             <a:r>
               <a:rPr lang="ko-KR" altLang="en-US" sz="1200" dirty="0">
@@ -16479,7 +17789,7 @@
                 <a:ea typeface="Pretendard Light" panose="02000403000000020004" pitchFamily="50" charset="-127"/>
                 <a:cs typeface="Pretendard Light" panose="02000403000000020004" pitchFamily="50" charset="-127"/>
               </a:rPr>
-              <a:t>일괄 처리 스크립트 </a:t>
+              <a:t>표층 </a:t>
             </a:r>
             <a:r>
               <a:rPr lang="en-US" altLang="ko-KR" sz="1200" dirty="0">
@@ -16487,55 +17797,7 @@
                 <a:ea typeface="Pretendard Light" panose="02000403000000020004" pitchFamily="50" charset="-127"/>
                 <a:cs typeface="Pretendard Light" panose="02000403000000020004" pitchFamily="50" charset="-127"/>
               </a:rPr>
-              <a:t>(</a:t>
-            </a:r>
-            <a:r>
-              <a:rPr lang="en-US" altLang="ko-KR" sz="1200" dirty="0" err="1">
-                <a:latin typeface="Pretendard Light" panose="02000403000000020004" pitchFamily="50" charset="-127"/>
-                <a:ea typeface="Pretendard Light" panose="02000403000000020004" pitchFamily="50" charset="-127"/>
-                <a:cs typeface="Pretendard Light" panose="02000403000000020004" pitchFamily="50" charset="-127"/>
-              </a:rPr>
-              <a:t>thetao→tos</a:t>
-            </a:r>
-            <a:r>
-              <a:rPr lang="en-US" altLang="ko-KR" sz="1200" dirty="0">
-                <a:latin typeface="Pretendard Light" panose="02000403000000020004" pitchFamily="50" charset="-127"/>
-                <a:ea typeface="Pretendard Light" panose="02000403000000020004" pitchFamily="50" charset="-127"/>
-                <a:cs typeface="Pretendard Light" panose="02000403000000020004" pitchFamily="50" charset="-127"/>
-              </a:rPr>
-              <a:t> &amp; </a:t>
-            </a:r>
-            <a:r>
-              <a:rPr lang="en-US" altLang="ko-KR" sz="1200" dirty="0" err="1">
-                <a:latin typeface="Pretendard Light" panose="02000403000000020004" pitchFamily="50" charset="-127"/>
-                <a:ea typeface="Pretendard Light" panose="02000403000000020004" pitchFamily="50" charset="-127"/>
-                <a:cs typeface="Pretendard Light" panose="02000403000000020004" pitchFamily="50" charset="-127"/>
-              </a:rPr>
-              <a:t>uo→uos</a:t>
-            </a:r>
-            <a:r>
-              <a:rPr lang="en-US" altLang="ko-KR" sz="1200" dirty="0">
-                <a:latin typeface="Pretendard Light" panose="02000403000000020004" pitchFamily="50" charset="-127"/>
-                <a:ea typeface="Pretendard Light" panose="02000403000000020004" pitchFamily="50" charset="-127"/>
-                <a:cs typeface="Pretendard Light" panose="02000403000000020004" pitchFamily="50" charset="-127"/>
-              </a:rPr>
-              <a:t> &amp; </a:t>
-            </a:r>
-            <a:r>
-              <a:rPr lang="en-US" altLang="ko-KR" sz="1200" dirty="0" err="1">
-                <a:latin typeface="Pretendard Light" panose="02000403000000020004" pitchFamily="50" charset="-127"/>
-                <a:ea typeface="Pretendard Light" panose="02000403000000020004" pitchFamily="50" charset="-127"/>
-                <a:cs typeface="Pretendard Light" panose="02000403000000020004" pitchFamily="50" charset="-127"/>
-              </a:rPr>
-              <a:t>vo→vos</a:t>
-            </a:r>
-            <a:r>
-              <a:rPr lang="en-US" altLang="ko-KR" sz="1200" dirty="0">
-                <a:latin typeface="Pretendard Light" panose="02000403000000020004" pitchFamily="50" charset="-127"/>
-                <a:ea typeface="Pretendard Light" panose="02000403000000020004" pitchFamily="50" charset="-127"/>
-                <a:cs typeface="Pretendard Light" panose="02000403000000020004" pitchFamily="50" charset="-127"/>
-              </a:rPr>
-              <a:t> </a:t>
+              <a:t>level </a:t>
             </a:r>
             <a:r>
               <a:rPr lang="ko-KR" altLang="en-US" sz="1200" dirty="0">
@@ -16543,104 +17805,9 @@
                 <a:ea typeface="Pretendard Light" panose="02000403000000020004" pitchFamily="50" charset="-127"/>
                 <a:cs typeface="Pretendard Light" panose="02000403000000020004" pitchFamily="50" charset="-127"/>
               </a:rPr>
-              <a:t>로 파일명</a:t>
-            </a:r>
-            <a:r>
-              <a:rPr lang="en-US" altLang="ko-KR" sz="1200" dirty="0">
-                <a:latin typeface="Pretendard Light" panose="02000403000000020004" pitchFamily="50" charset="-127"/>
-                <a:ea typeface="Pretendard Light" panose="02000403000000020004" pitchFamily="50" charset="-127"/>
-                <a:cs typeface="Pretendard Light" panose="02000403000000020004" pitchFamily="50" charset="-127"/>
-              </a:rPr>
-              <a:t>/</a:t>
-            </a:r>
-            <a:r>
-              <a:rPr lang="ko-KR" altLang="en-US" sz="1200" dirty="0" err="1">
-                <a:latin typeface="Pretendard Light" panose="02000403000000020004" pitchFamily="50" charset="-127"/>
-                <a:ea typeface="Pretendard Light" panose="02000403000000020004" pitchFamily="50" charset="-127"/>
-                <a:cs typeface="Pretendard Light" panose="02000403000000020004" pitchFamily="50" charset="-127"/>
-              </a:rPr>
-              <a:t>변수명</a:t>
-            </a:r>
-            <a:r>
-              <a:rPr lang="ko-KR" altLang="en-US" sz="1200" dirty="0">
-                <a:latin typeface="Pretendard Light" panose="02000403000000020004" pitchFamily="50" charset="-127"/>
-                <a:ea typeface="Pretendard Light" panose="02000403000000020004" pitchFamily="50" charset="-127"/>
-                <a:cs typeface="Pretendard Light" panose="02000403000000020004" pitchFamily="50" charset="-127"/>
-              </a:rPr>
-              <a:t> 변경</a:t>
-            </a:r>
-            <a:r>
-              <a:rPr lang="en-US" altLang="ko-KR" sz="1200" dirty="0">
-                <a:latin typeface="Pretendard Light" panose="02000403000000020004" pitchFamily="50" charset="-127"/>
-                <a:ea typeface="Pretendard Light" panose="02000403000000020004" pitchFamily="50" charset="-127"/>
-                <a:cs typeface="Pretendard Light" panose="02000403000000020004" pitchFamily="50" charset="-127"/>
-              </a:rPr>
-              <a:t>)</a:t>
-            </a:r>
-          </a:p>
-        </p:txBody>
-      </p:sp>
-      <p:sp>
-        <p:nvSpPr>
-          <p:cNvPr id="5" name="TextBox 4">
-            <a:extLst>
-              <a:ext uri="{FF2B5EF4-FFF2-40B4-BE49-F238E27FC236}">
-                <a16:creationId xmlns:a16="http://schemas.microsoft.com/office/drawing/2014/main" id="{D1659F11-CC5F-858B-F92E-5B14F39E5FEF}"/>
-              </a:ext>
-            </a:extLst>
-          </p:cNvPr>
-          <p:cNvSpPr txBox="1"/>
-          <p:nvPr/>
-        </p:nvSpPr>
-        <p:spPr>
-          <a:xfrm>
-            <a:off x="571500" y="2341178"/>
-            <a:ext cx="6115050" cy="3647152"/>
-          </a:xfrm>
-          <a:prstGeom prst="rect">
-            <a:avLst/>
-          </a:prstGeom>
-          <a:noFill/>
-        </p:spPr>
-        <p:txBody>
-          <a:bodyPr wrap="square">
-            <a:spAutoFit/>
-          </a:bodyPr>
-          <a:lstStyle/>
-          <a:p>
-            <a:r>
-              <a:rPr lang="en-US" altLang="ko-KR" sz="1100" dirty="0">
-                <a:latin typeface="Pretendard Light" panose="02000403000000020004" pitchFamily="50" charset="-127"/>
-                <a:ea typeface="Pretendard Light" panose="02000403000000020004" pitchFamily="50" charset="-127"/>
-                <a:cs typeface="Pretendard Light" panose="02000403000000020004" pitchFamily="50" charset="-127"/>
-              </a:rPr>
-              <a:t>[ORAS5] </a:t>
-            </a:r>
-            <a:r>
-              <a:rPr lang="en-US" altLang="ko-KR" sz="1100" dirty="0" err="1">
-                <a:latin typeface="Pretendard Light" panose="02000403000000020004" pitchFamily="50" charset="-127"/>
-                <a:ea typeface="Pretendard Light" panose="02000403000000020004" pitchFamily="50" charset="-127"/>
-                <a:cs typeface="Pretendard Light" panose="02000403000000020004" pitchFamily="50" charset="-127"/>
-              </a:rPr>
-              <a:t>uos</a:t>
-            </a:r>
-            <a:r>
-              <a:rPr lang="en-US" altLang="ko-KR" sz="1100" dirty="0">
-                <a:latin typeface="Pretendard Light" panose="02000403000000020004" pitchFamily="50" charset="-127"/>
-                <a:ea typeface="Pretendard Light" panose="02000403000000020004" pitchFamily="50" charset="-127"/>
-                <a:cs typeface="Pretendard Light" panose="02000403000000020004" pitchFamily="50" charset="-127"/>
-              </a:rPr>
-              <a:t>  </a:t>
-            </a:r>
-            <a:r>
-              <a:rPr lang="ko-KR" altLang="en-US" sz="1100" dirty="0">
-                <a:latin typeface="Pretendard Light" panose="02000403000000020004" pitchFamily="50" charset="-127"/>
-                <a:ea typeface="Pretendard Light" panose="02000403000000020004" pitchFamily="50" charset="-127"/>
-                <a:cs typeface="Pretendard Light" panose="02000403000000020004" pitchFamily="50" charset="-127"/>
-              </a:rPr>
-              <a:t>생산</a:t>
-            </a:r>
-            <a:endParaRPr lang="en-US" altLang="ko-KR" sz="1100" dirty="0">
+              <a:t>선택</a:t>
+            </a:r>
+            <a:endParaRPr lang="en-US" altLang="ko-KR" sz="1200" dirty="0">
               <a:latin typeface="Pretendard Light" panose="02000403000000020004" pitchFamily="50" charset="-127"/>
               <a:ea typeface="Pretendard Light" panose="02000403000000020004" pitchFamily="50" charset="-127"/>
               <a:cs typeface="Pretendard Light" panose="02000403000000020004" pitchFamily="50" charset="-127"/>
@@ -16648,16 +17815,104 @@
           </a:p>
           <a:p>
             <a:r>
-              <a:rPr lang="pt-BR" altLang="ko-KR" sz="1100" dirty="0">
-                <a:latin typeface="Pretendard Light" panose="02000403000000020004" pitchFamily="50" charset="-127"/>
-                <a:ea typeface="Pretendard Light" panose="02000403000000020004" pitchFamily="50" charset="-127"/>
-                <a:cs typeface="Pretendard Light" panose="02000403000000020004" pitchFamily="50" charset="-127"/>
-              </a:rPr>
-              <a:t>cd /mnt/d/project/01_ENSO/01_data/01_raw/oras5/zonal_velocity</a:t>
-            </a:r>
-          </a:p>
-          <a:p>
-            <a:endParaRPr lang="pt-BR" altLang="ko-KR" sz="1100" dirty="0">
+              <a:rPr lang="en-US" altLang="ko-KR" sz="1200" dirty="0">
+                <a:latin typeface="Pretendard Light" panose="02000403000000020004" pitchFamily="50" charset="-127"/>
+                <a:ea typeface="Pretendard Light" panose="02000403000000020004" pitchFamily="50" charset="-127"/>
+                <a:cs typeface="Pretendard Light" panose="02000403000000020004" pitchFamily="50" charset="-127"/>
+              </a:rPr>
+              <a:t>: </a:t>
+            </a:r>
+            <a:r>
+              <a:rPr lang="ko-KR" altLang="en-US" sz="1200" dirty="0">
+                <a:latin typeface="Pretendard Light" panose="02000403000000020004" pitchFamily="50" charset="-127"/>
+                <a:ea typeface="Pretendard Light" panose="02000403000000020004" pitchFamily="50" charset="-127"/>
+                <a:cs typeface="Pretendard Light" panose="02000403000000020004" pitchFamily="50" charset="-127"/>
+              </a:rPr>
+              <a:t>파일명</a:t>
+            </a:r>
+            <a:r>
+              <a:rPr lang="en-US" altLang="ko-KR" sz="1200" dirty="0">
+                <a:latin typeface="Pretendard Light" panose="02000403000000020004" pitchFamily="50" charset="-127"/>
+                <a:ea typeface="Pretendard Light" panose="02000403000000020004" pitchFamily="50" charset="-127"/>
+                <a:cs typeface="Pretendard Light" panose="02000403000000020004" pitchFamily="50" charset="-127"/>
+              </a:rPr>
+              <a:t>/</a:t>
+            </a:r>
+            <a:r>
+              <a:rPr lang="ko-KR" altLang="en-US" sz="1200" dirty="0" err="1">
+                <a:latin typeface="Pretendard Light" panose="02000403000000020004" pitchFamily="50" charset="-127"/>
+                <a:ea typeface="Pretendard Light" panose="02000403000000020004" pitchFamily="50" charset="-127"/>
+                <a:cs typeface="Pretendard Light" panose="02000403000000020004" pitchFamily="50" charset="-127"/>
+              </a:rPr>
+              <a:t>변수명</a:t>
+            </a:r>
+            <a:r>
+              <a:rPr lang="ko-KR" altLang="en-US" sz="1200" dirty="0">
+                <a:latin typeface="Pretendard Light" panose="02000403000000020004" pitchFamily="50" charset="-127"/>
+                <a:ea typeface="Pretendard Light" panose="02000403000000020004" pitchFamily="50" charset="-127"/>
+                <a:cs typeface="Pretendard Light" panose="02000403000000020004" pitchFamily="50" charset="-127"/>
+              </a:rPr>
+              <a:t> 변경</a:t>
+            </a:r>
+            <a:r>
+              <a:rPr lang="en-US" altLang="ko-KR" sz="1200" dirty="0">
+                <a:latin typeface="Pretendard Light" panose="02000403000000020004" pitchFamily="50" charset="-127"/>
+                <a:ea typeface="Pretendard Light" panose="02000403000000020004" pitchFamily="50" charset="-127"/>
+                <a:cs typeface="Pretendard Light" panose="02000403000000020004" pitchFamily="50" charset="-127"/>
+              </a:rPr>
+              <a:t> (</a:t>
+            </a:r>
+            <a:r>
+              <a:rPr lang="en-US" altLang="ko-KR" sz="1200" dirty="0" err="1">
+                <a:latin typeface="Pretendard Light" panose="02000403000000020004" pitchFamily="50" charset="-127"/>
+                <a:ea typeface="Pretendard Light" panose="02000403000000020004" pitchFamily="50" charset="-127"/>
+                <a:cs typeface="Pretendard Light" panose="02000403000000020004" pitchFamily="50" charset="-127"/>
+              </a:rPr>
+              <a:t>thetao→tos</a:t>
+            </a:r>
+            <a:r>
+              <a:rPr lang="en-US" altLang="ko-KR" sz="1200" dirty="0">
+                <a:latin typeface="Pretendard Light" panose="02000403000000020004" pitchFamily="50" charset="-127"/>
+                <a:ea typeface="Pretendard Light" panose="02000403000000020004" pitchFamily="50" charset="-127"/>
+                <a:cs typeface="Pretendard Light" panose="02000403000000020004" pitchFamily="50" charset="-127"/>
+              </a:rPr>
+              <a:t> / </a:t>
+            </a:r>
+            <a:r>
+              <a:rPr lang="en-US" altLang="ko-KR" sz="1200" dirty="0" err="1">
+                <a:latin typeface="Pretendard Light" panose="02000403000000020004" pitchFamily="50" charset="-127"/>
+                <a:ea typeface="Pretendard Light" panose="02000403000000020004" pitchFamily="50" charset="-127"/>
+                <a:cs typeface="Pretendard Light" panose="02000403000000020004" pitchFamily="50" charset="-127"/>
+              </a:rPr>
+              <a:t>uo→uos</a:t>
+            </a:r>
+            <a:r>
+              <a:rPr lang="en-US" altLang="ko-KR" sz="1200" dirty="0">
+                <a:latin typeface="Pretendard Light" panose="02000403000000020004" pitchFamily="50" charset="-127"/>
+                <a:ea typeface="Pretendard Light" panose="02000403000000020004" pitchFamily="50" charset="-127"/>
+                <a:cs typeface="Pretendard Light" panose="02000403000000020004" pitchFamily="50" charset="-127"/>
+              </a:rPr>
+              <a:t> / </a:t>
+            </a:r>
+            <a:r>
+              <a:rPr lang="en-US" altLang="ko-KR" sz="1200" dirty="0" err="1">
+                <a:latin typeface="Pretendard Light" panose="02000403000000020004" pitchFamily="50" charset="-127"/>
+                <a:ea typeface="Pretendard Light" panose="02000403000000020004" pitchFamily="50" charset="-127"/>
+                <a:cs typeface="Pretendard Light" panose="02000403000000020004" pitchFamily="50" charset="-127"/>
+              </a:rPr>
+              <a:t>vo→vos</a:t>
+            </a:r>
+            <a:r>
+              <a:rPr lang="en-US" altLang="ko-KR" sz="1200" dirty="0">
+                <a:latin typeface="Pretendard Light" panose="02000403000000020004" pitchFamily="50" charset="-127"/>
+                <a:ea typeface="Pretendard Light" panose="02000403000000020004" pitchFamily="50" charset="-127"/>
+                <a:cs typeface="Pretendard Light" panose="02000403000000020004" pitchFamily="50" charset="-127"/>
+              </a:rPr>
+              <a:t>)</a:t>
+            </a:r>
+          </a:p>
+          <a:p>
+            <a:endParaRPr lang="en-US" altLang="ko-KR" sz="1200" dirty="0">
               <a:latin typeface="Pretendard Light" panose="02000403000000020004" pitchFamily="50" charset="-127"/>
               <a:ea typeface="Pretendard Light" panose="02000403000000020004" pitchFamily="50" charset="-127"/>
               <a:cs typeface="Pretendard Light" panose="02000403000000020004" pitchFamily="50" charset="-127"/>
@@ -16665,40 +17920,64 @@
           </a:p>
           <a:p>
             <a:r>
-              <a:rPr lang="en-US" altLang="ko-KR" sz="1100" dirty="0" err="1">
-                <a:latin typeface="Pretendard Light" panose="02000403000000020004" pitchFamily="50" charset="-127"/>
-                <a:ea typeface="Pretendard Light" panose="02000403000000020004" pitchFamily="50" charset="-127"/>
-                <a:cs typeface="Pretendard Light" panose="02000403000000020004" pitchFamily="50" charset="-127"/>
-              </a:rPr>
-              <a:t>cdo</a:t>
-            </a:r>
-            <a:r>
-              <a:rPr lang="en-US" altLang="ko-KR" sz="1100" dirty="0">
-                <a:latin typeface="Pretendard Light" panose="02000403000000020004" pitchFamily="50" charset="-127"/>
-                <a:ea typeface="Pretendard Light" panose="02000403000000020004" pitchFamily="50" charset="-127"/>
-                <a:cs typeface="Pretendard Light" panose="02000403000000020004" pitchFamily="50" charset="-127"/>
-              </a:rPr>
-              <a:t> </a:t>
-            </a:r>
-            <a:r>
-              <a:rPr lang="en-US" altLang="ko-KR" sz="1100" dirty="0" err="1">
-                <a:latin typeface="Pretendard Light" panose="02000403000000020004" pitchFamily="50" charset="-127"/>
-                <a:ea typeface="Pretendard Light" panose="02000403000000020004" pitchFamily="50" charset="-127"/>
-                <a:cs typeface="Pretendard Light" panose="02000403000000020004" pitchFamily="50" charset="-127"/>
-              </a:rPr>
-              <a:t>showlevel</a:t>
-            </a:r>
-            <a:r>
-              <a:rPr lang="en-US" altLang="ko-KR" sz="1100" dirty="0">
-                <a:latin typeface="Pretendard Light" panose="02000403000000020004" pitchFamily="50" charset="-127"/>
-                <a:ea typeface="Pretendard Light" panose="02000403000000020004" pitchFamily="50" charset="-127"/>
-                <a:cs typeface="Pretendard Light" panose="02000403000000020004" pitchFamily="50" charset="-127"/>
-              </a:rPr>
-              <a:t> vozocrtx_control_monthly_highres_3D_195801_CONS_v0.1.nc</a:t>
-            </a:r>
-          </a:p>
-          <a:p>
-            <a:endParaRPr lang="en-US" altLang="ko-KR" sz="1100" dirty="0">
+              <a:rPr lang="en-US" altLang="ko-KR" sz="1200" dirty="0">
+                <a:latin typeface="Pretendard Light" panose="02000403000000020004" pitchFamily="50" charset="-127"/>
+                <a:ea typeface="Pretendard Light" panose="02000403000000020004" pitchFamily="50" charset="-127"/>
+                <a:cs typeface="Pretendard Light" panose="02000403000000020004" pitchFamily="50" charset="-127"/>
+              </a:rPr>
+              <a:t>make_surface_fields_godas.py</a:t>
+            </a:r>
+          </a:p>
+          <a:p>
+            <a:r>
+              <a:rPr lang="en-US" altLang="ko-KR" sz="1200" dirty="0">
+                <a:latin typeface="Pretendard Light" panose="02000403000000020004" pitchFamily="50" charset="-127"/>
+                <a:ea typeface="Pretendard Light" panose="02000403000000020004" pitchFamily="50" charset="-127"/>
+                <a:cs typeface="Pretendard Light" panose="02000403000000020004" pitchFamily="50" charset="-127"/>
+              </a:rPr>
+              <a:t>: </a:t>
+            </a:r>
+            <a:r>
+              <a:rPr lang="ko-KR" altLang="en-US" sz="1200" dirty="0">
+                <a:latin typeface="Pretendard Light" panose="02000403000000020004" pitchFamily="50" charset="-127"/>
+                <a:ea typeface="Pretendard Light" panose="02000403000000020004" pitchFamily="50" charset="-127"/>
+                <a:cs typeface="Pretendard Light" panose="02000403000000020004" pitchFamily="50" charset="-127"/>
+              </a:rPr>
+              <a:t>표층 </a:t>
+            </a:r>
+            <a:r>
+              <a:rPr lang="en-US" altLang="ko-KR" sz="1200" dirty="0">
+                <a:latin typeface="Pretendard Light" panose="02000403000000020004" pitchFamily="50" charset="-127"/>
+                <a:ea typeface="Pretendard Light" panose="02000403000000020004" pitchFamily="50" charset="-127"/>
+                <a:cs typeface="Pretendard Light" panose="02000403000000020004" pitchFamily="50" charset="-127"/>
+              </a:rPr>
+              <a:t>level </a:t>
+            </a:r>
+            <a:r>
+              <a:rPr lang="ko-KR" altLang="en-US" sz="1200" dirty="0">
+                <a:latin typeface="Pretendard Light" panose="02000403000000020004" pitchFamily="50" charset="-127"/>
+                <a:ea typeface="Pretendard Light" panose="02000403000000020004" pitchFamily="50" charset="-127"/>
+                <a:cs typeface="Pretendard Light" panose="02000403000000020004" pitchFamily="50" charset="-127"/>
+              </a:rPr>
+              <a:t>선택 </a:t>
+            </a:r>
+            <a:r>
+              <a:rPr lang="en-US" altLang="ko-KR" sz="1200" dirty="0">
+                <a:latin typeface="Pretendard Light" panose="02000403000000020004" pitchFamily="50" charset="-127"/>
+                <a:ea typeface="Pretendard Light" panose="02000403000000020004" pitchFamily="50" charset="-127"/>
+                <a:cs typeface="Pretendard Light" panose="02000403000000020004" pitchFamily="50" charset="-127"/>
+              </a:rPr>
+              <a:t>&amp; </a:t>
+            </a:r>
+            <a:r>
+              <a:rPr lang="ko-KR" altLang="en-US" sz="1200" dirty="0">
+                <a:latin typeface="Pretendard Light" panose="02000403000000020004" pitchFamily="50" charset="-127"/>
+                <a:ea typeface="Pretendard Light" panose="02000403000000020004" pitchFamily="50" charset="-127"/>
+                <a:cs typeface="Pretendard Light" panose="02000403000000020004" pitchFamily="50" charset="-127"/>
+              </a:rPr>
+              <a:t>수직 차원 제거</a:t>
+            </a:r>
+            <a:endParaRPr lang="en-US" altLang="ko-KR" sz="1200" dirty="0">
               <a:latin typeface="Pretendard Light" panose="02000403000000020004" pitchFamily="50" charset="-127"/>
               <a:ea typeface="Pretendard Light" panose="02000403000000020004" pitchFamily="50" charset="-127"/>
               <a:cs typeface="Pretendard Light" panose="02000403000000020004" pitchFamily="50" charset="-127"/>
@@ -16706,127 +17985,159 @@
           </a:p>
           <a:p>
             <a:r>
-              <a:rPr lang="en-US" altLang="ko-KR" sz="1100" dirty="0" err="1">
-                <a:latin typeface="Pretendard Light" panose="02000403000000020004" pitchFamily="50" charset="-127"/>
-                <a:ea typeface="Pretendard Light" panose="02000403000000020004" pitchFamily="50" charset="-127"/>
-                <a:cs typeface="Pretendard Light" panose="02000403000000020004" pitchFamily="50" charset="-127"/>
-              </a:rPr>
-              <a:t>mkdir</a:t>
-            </a:r>
-            <a:r>
-              <a:rPr lang="en-US" altLang="ko-KR" sz="1100" dirty="0">
-                <a:latin typeface="Pretendard Light" panose="02000403000000020004" pitchFamily="50" charset="-127"/>
-                <a:ea typeface="Pretendard Light" panose="02000403000000020004" pitchFamily="50" charset="-127"/>
-                <a:cs typeface="Pretendard Light" panose="02000403000000020004" pitchFamily="50" charset="-127"/>
-              </a:rPr>
-              <a:t> -p _surf</a:t>
-            </a:r>
-          </a:p>
-          <a:p>
-            <a:endParaRPr lang="en-US" altLang="ko-KR" sz="1100" dirty="0">
+              <a:rPr lang="en-US" altLang="ko-KR" sz="1200" dirty="0">
+                <a:latin typeface="Pretendard Light" panose="02000403000000020004" pitchFamily="50" charset="-127"/>
+                <a:ea typeface="Pretendard Light" panose="02000403000000020004" pitchFamily="50" charset="-127"/>
+                <a:cs typeface="Pretendard Light" panose="02000403000000020004" pitchFamily="50" charset="-127"/>
+              </a:rPr>
+              <a:t>: </a:t>
+            </a:r>
+            <a:r>
+              <a:rPr lang="ko-KR" altLang="en-US" sz="1200" dirty="0">
+                <a:latin typeface="Pretendard Light" panose="02000403000000020004" pitchFamily="50" charset="-127"/>
+                <a:ea typeface="Pretendard Light" panose="02000403000000020004" pitchFamily="50" charset="-127"/>
+                <a:cs typeface="Pretendard Light" panose="02000403000000020004" pitchFamily="50" charset="-127"/>
+              </a:rPr>
+              <a:t>파일명</a:t>
+            </a:r>
+            <a:r>
+              <a:rPr lang="en-US" altLang="ko-KR" sz="1200" dirty="0">
+                <a:latin typeface="Pretendard Light" panose="02000403000000020004" pitchFamily="50" charset="-127"/>
+                <a:ea typeface="Pretendard Light" panose="02000403000000020004" pitchFamily="50" charset="-127"/>
+                <a:cs typeface="Pretendard Light" panose="02000403000000020004" pitchFamily="50" charset="-127"/>
+              </a:rPr>
+              <a:t>/</a:t>
+            </a:r>
+            <a:r>
+              <a:rPr lang="ko-KR" altLang="en-US" sz="1200" dirty="0" err="1">
+                <a:latin typeface="Pretendard Light" panose="02000403000000020004" pitchFamily="50" charset="-127"/>
+                <a:ea typeface="Pretendard Light" panose="02000403000000020004" pitchFamily="50" charset="-127"/>
+                <a:cs typeface="Pretendard Light" panose="02000403000000020004" pitchFamily="50" charset="-127"/>
+              </a:rPr>
+              <a:t>변수명</a:t>
+            </a:r>
+            <a:r>
+              <a:rPr lang="ko-KR" altLang="en-US" sz="1200" dirty="0">
+                <a:latin typeface="Pretendard Light" panose="02000403000000020004" pitchFamily="50" charset="-127"/>
+                <a:ea typeface="Pretendard Light" panose="02000403000000020004" pitchFamily="50" charset="-127"/>
+                <a:cs typeface="Pretendard Light" panose="02000403000000020004" pitchFamily="50" charset="-127"/>
+              </a:rPr>
+              <a:t> 변경 </a:t>
+            </a:r>
+            <a:r>
+              <a:rPr lang="en-US" altLang="ko-KR" sz="1200" dirty="0">
+                <a:latin typeface="Pretendard Light" panose="02000403000000020004" pitchFamily="50" charset="-127"/>
+                <a:ea typeface="Pretendard Light" panose="02000403000000020004" pitchFamily="50" charset="-127"/>
+                <a:cs typeface="Pretendard Light" panose="02000403000000020004" pitchFamily="50" charset="-127"/>
+              </a:rPr>
+              <a:t>(</a:t>
+            </a:r>
+            <a:r>
+              <a:rPr lang="en-US" altLang="ko-KR" sz="1200" dirty="0" err="1">
+                <a:latin typeface="Pretendard Light" panose="02000403000000020004" pitchFamily="50" charset="-127"/>
+                <a:ea typeface="Pretendard Light" panose="02000403000000020004" pitchFamily="50" charset="-127"/>
+                <a:cs typeface="Pretendard Light" panose="02000403000000020004" pitchFamily="50" charset="-127"/>
+              </a:rPr>
+              <a:t>pottmp→tos</a:t>
+            </a:r>
+            <a:r>
+              <a:rPr lang="en-US" altLang="ko-KR" sz="1200" dirty="0">
+                <a:latin typeface="Pretendard Light" panose="02000403000000020004" pitchFamily="50" charset="-127"/>
+                <a:ea typeface="Pretendard Light" panose="02000403000000020004" pitchFamily="50" charset="-127"/>
+                <a:cs typeface="Pretendard Light" panose="02000403000000020004" pitchFamily="50" charset="-127"/>
+              </a:rPr>
+              <a:t> / </a:t>
+            </a:r>
+            <a:r>
+              <a:rPr lang="en-US" altLang="ko-KR" sz="1200" dirty="0" err="1">
+                <a:latin typeface="Pretendard Light" panose="02000403000000020004" pitchFamily="50" charset="-127"/>
+                <a:ea typeface="Pretendard Light" panose="02000403000000020004" pitchFamily="50" charset="-127"/>
+                <a:cs typeface="Pretendard Light" panose="02000403000000020004" pitchFamily="50" charset="-127"/>
+              </a:rPr>
+              <a:t>salt→sos</a:t>
+            </a:r>
+            <a:r>
+              <a:rPr lang="en-US" altLang="ko-KR" sz="1200" dirty="0">
+                <a:latin typeface="Pretendard Light" panose="02000403000000020004" pitchFamily="50" charset="-127"/>
+                <a:ea typeface="Pretendard Light" panose="02000403000000020004" pitchFamily="50" charset="-127"/>
+                <a:cs typeface="Pretendard Light" panose="02000403000000020004" pitchFamily="50" charset="-127"/>
+              </a:rPr>
+              <a:t> / </a:t>
+            </a:r>
+            <a:r>
+              <a:rPr lang="en-US" altLang="ko-KR" sz="1200" dirty="0" err="1">
+                <a:latin typeface="Pretendard Light" panose="02000403000000020004" pitchFamily="50" charset="-127"/>
+                <a:ea typeface="Pretendard Light" panose="02000403000000020004" pitchFamily="50" charset="-127"/>
+                <a:cs typeface="Pretendard Light" panose="02000403000000020004" pitchFamily="50" charset="-127"/>
+              </a:rPr>
+              <a:t>ucur→uos</a:t>
+            </a:r>
+            <a:r>
+              <a:rPr lang="en-US" altLang="ko-KR" sz="1200" dirty="0">
+                <a:latin typeface="Pretendard Light" panose="02000403000000020004" pitchFamily="50" charset="-127"/>
+                <a:ea typeface="Pretendard Light" panose="02000403000000020004" pitchFamily="50" charset="-127"/>
+                <a:cs typeface="Pretendard Light" panose="02000403000000020004" pitchFamily="50" charset="-127"/>
+              </a:rPr>
+              <a:t> / </a:t>
+            </a:r>
+            <a:r>
+              <a:rPr lang="en-US" altLang="ko-KR" sz="1200" dirty="0" err="1">
+                <a:latin typeface="Pretendard Light" panose="02000403000000020004" pitchFamily="50" charset="-127"/>
+                <a:ea typeface="Pretendard Light" panose="02000403000000020004" pitchFamily="50" charset="-127"/>
+                <a:cs typeface="Pretendard Light" panose="02000403000000020004" pitchFamily="50" charset="-127"/>
+              </a:rPr>
+              <a:t>vcur→vos</a:t>
+            </a:r>
+            <a:r>
+              <a:rPr lang="en-US" altLang="ko-KR" sz="1200" dirty="0">
+                <a:latin typeface="Pretendard Light" panose="02000403000000020004" pitchFamily="50" charset="-127"/>
+                <a:ea typeface="Pretendard Light" panose="02000403000000020004" pitchFamily="50" charset="-127"/>
+                <a:cs typeface="Pretendard Light" panose="02000403000000020004" pitchFamily="50" charset="-127"/>
+              </a:rPr>
+              <a:t>)</a:t>
+            </a:r>
+          </a:p>
+          <a:p>
+            <a:r>
+              <a:rPr lang="en-US" altLang="ko-KR" sz="1200" dirty="0">
+                <a:latin typeface="Pretendard Light" panose="02000403000000020004" pitchFamily="50" charset="-127"/>
+                <a:ea typeface="Pretendard Light" panose="02000403000000020004" pitchFamily="50" charset="-127"/>
+                <a:cs typeface="Pretendard Light" panose="02000403000000020004" pitchFamily="50" charset="-127"/>
+              </a:rPr>
+              <a:t>: salt[kg/kg] → x1000 → </a:t>
+            </a:r>
+            <a:r>
+              <a:rPr lang="en-US" altLang="ko-KR" sz="1200" dirty="0" err="1">
+                <a:latin typeface="Pretendard Light" panose="02000403000000020004" pitchFamily="50" charset="-127"/>
+                <a:ea typeface="Pretendard Light" panose="02000403000000020004" pitchFamily="50" charset="-127"/>
+                <a:cs typeface="Pretendard Light" panose="02000403000000020004" pitchFamily="50" charset="-127"/>
+              </a:rPr>
+              <a:t>sos</a:t>
+            </a:r>
+            <a:r>
+              <a:rPr lang="en-US" altLang="ko-KR" sz="1200" dirty="0">
+                <a:latin typeface="Pretendard Light" panose="02000403000000020004" pitchFamily="50" charset="-127"/>
+                <a:ea typeface="Pretendard Light" panose="02000403000000020004" pitchFamily="50" charset="-127"/>
+                <a:cs typeface="Pretendard Light" panose="02000403000000020004" pitchFamily="50" charset="-127"/>
+              </a:rPr>
+              <a:t>[g/kg] </a:t>
+            </a:r>
+            <a:r>
+              <a:rPr lang="ko-KR" altLang="en-US" sz="1200" dirty="0">
+                <a:latin typeface="Pretendard Light" panose="02000403000000020004" pitchFamily="50" charset="-127"/>
+                <a:ea typeface="Pretendard Light" panose="02000403000000020004" pitchFamily="50" charset="-127"/>
+                <a:cs typeface="Pretendard Light" panose="02000403000000020004" pitchFamily="50" charset="-127"/>
+              </a:rPr>
+              <a:t>적용</a:t>
+            </a:r>
+            <a:endParaRPr lang="en-US" altLang="ko-KR" sz="1200" dirty="0">
               <a:latin typeface="Pretendard Light" panose="02000403000000020004" pitchFamily="50" charset="-127"/>
               <a:ea typeface="Pretendard Light" panose="02000403000000020004" pitchFamily="50" charset="-127"/>
               <a:cs typeface="Pretendard Light" panose="02000403000000020004" pitchFamily="50" charset="-127"/>
             </a:endParaRPr>
           </a:p>
           <a:p>
-            <a:r>
-              <a:rPr lang="en-US" altLang="ko-KR" sz="1100" dirty="0">
-                <a:latin typeface="Pretendard Light" panose="02000403000000020004" pitchFamily="50" charset="-127"/>
-                <a:ea typeface="Pretendard Light" panose="02000403000000020004" pitchFamily="50" charset="-127"/>
-                <a:cs typeface="Pretendard Light" panose="02000403000000020004" pitchFamily="50" charset="-127"/>
-              </a:rPr>
-              <a:t># 1. </a:t>
-            </a:r>
-            <a:r>
-              <a:rPr lang="ko-KR" altLang="en-US" sz="1100" dirty="0">
-                <a:latin typeface="Pretendard Light" panose="02000403000000020004" pitchFamily="50" charset="-127"/>
-                <a:ea typeface="Pretendard Light" panose="02000403000000020004" pitchFamily="50" charset="-127"/>
-                <a:cs typeface="Pretendard Light" panose="02000403000000020004" pitchFamily="50" charset="-127"/>
-              </a:rPr>
-              <a:t>각 파일에서 표층</a:t>
-            </a:r>
-            <a:r>
-              <a:rPr lang="en-US" altLang="ko-KR" sz="1100" dirty="0">
-                <a:latin typeface="Pretendard Light" panose="02000403000000020004" pitchFamily="50" charset="-127"/>
-                <a:ea typeface="Pretendard Light" panose="02000403000000020004" pitchFamily="50" charset="-127"/>
-                <a:cs typeface="Pretendard Light" panose="02000403000000020004" pitchFamily="50" charset="-127"/>
-              </a:rPr>
-              <a:t>(level index 1)</a:t>
-            </a:r>
-            <a:r>
-              <a:rPr lang="ko-KR" altLang="en-US" sz="1100" dirty="0">
-                <a:latin typeface="Pretendard Light" panose="02000403000000020004" pitchFamily="50" charset="-127"/>
-                <a:ea typeface="Pretendard Light" panose="02000403000000020004" pitchFamily="50" charset="-127"/>
-                <a:cs typeface="Pretendard Light" panose="02000403000000020004" pitchFamily="50" charset="-127"/>
-              </a:rPr>
-              <a:t>만 추출</a:t>
-            </a:r>
-          </a:p>
-          <a:p>
-            <a:r>
-              <a:rPr lang="en-US" altLang="ko-KR" sz="1100" dirty="0">
-                <a:latin typeface="Pretendard Light" panose="02000403000000020004" pitchFamily="50" charset="-127"/>
-                <a:ea typeface="Pretendard Light" panose="02000403000000020004" pitchFamily="50" charset="-127"/>
-                <a:cs typeface="Pretendard Light" panose="02000403000000020004" pitchFamily="50" charset="-127"/>
-              </a:rPr>
-              <a:t>for f in vozocrtx_control_monthly_highres_3D_*.</a:t>
-            </a:r>
-            <a:r>
-              <a:rPr lang="en-US" altLang="ko-KR" sz="1100" dirty="0" err="1">
-                <a:latin typeface="Pretendard Light" panose="02000403000000020004" pitchFamily="50" charset="-127"/>
-                <a:ea typeface="Pretendard Light" panose="02000403000000020004" pitchFamily="50" charset="-127"/>
-                <a:cs typeface="Pretendard Light" panose="02000403000000020004" pitchFamily="50" charset="-127"/>
-              </a:rPr>
-              <a:t>nc</a:t>
-            </a:r>
-            <a:r>
-              <a:rPr lang="en-US" altLang="ko-KR" sz="1100" dirty="0">
-                <a:latin typeface="Pretendard Light" panose="02000403000000020004" pitchFamily="50" charset="-127"/>
-                <a:ea typeface="Pretendard Light" panose="02000403000000020004" pitchFamily="50" charset="-127"/>
-                <a:cs typeface="Pretendard Light" panose="02000403000000020004" pitchFamily="50" charset="-127"/>
-              </a:rPr>
-              <a:t>; do</a:t>
-            </a:r>
-          </a:p>
-          <a:p>
-            <a:r>
-              <a:rPr lang="en-US" altLang="ko-KR" sz="1100" dirty="0">
-                <a:latin typeface="Pretendard Light" panose="02000403000000020004" pitchFamily="50" charset="-127"/>
-                <a:ea typeface="Pretendard Light" panose="02000403000000020004" pitchFamily="50" charset="-127"/>
-                <a:cs typeface="Pretendard Light" panose="02000403000000020004" pitchFamily="50" charset="-127"/>
-              </a:rPr>
-              <a:t>    </a:t>
-            </a:r>
-            <a:r>
-              <a:rPr lang="en-US" altLang="ko-KR" sz="1100" dirty="0" err="1">
-                <a:latin typeface="Pretendard Light" panose="02000403000000020004" pitchFamily="50" charset="-127"/>
-                <a:ea typeface="Pretendard Light" panose="02000403000000020004" pitchFamily="50" charset="-127"/>
-                <a:cs typeface="Pretendard Light" panose="02000403000000020004" pitchFamily="50" charset="-127"/>
-              </a:rPr>
-              <a:t>cdo</a:t>
-            </a:r>
-            <a:r>
-              <a:rPr lang="en-US" altLang="ko-KR" sz="1100" dirty="0">
-                <a:latin typeface="Pretendard Light" panose="02000403000000020004" pitchFamily="50" charset="-127"/>
-                <a:ea typeface="Pretendard Light" panose="02000403000000020004" pitchFamily="50" charset="-127"/>
-                <a:cs typeface="Pretendard Light" panose="02000403000000020004" pitchFamily="50" charset="-127"/>
-              </a:rPr>
-              <a:t> -L -O sellevidx,1 "$f" "_surf/$f"</a:t>
-            </a:r>
-          </a:p>
-          <a:p>
-            <a:r>
-              <a:rPr lang="en-US" altLang="ko-KR" sz="1100" dirty="0">
-                <a:latin typeface="Pretendard Light" panose="02000403000000020004" pitchFamily="50" charset="-127"/>
-                <a:ea typeface="Pretendard Light" panose="02000403000000020004" pitchFamily="50" charset="-127"/>
-                <a:cs typeface="Pretendard Light" panose="02000403000000020004" pitchFamily="50" charset="-127"/>
-              </a:rPr>
-              <a:t>done</a:t>
-            </a:r>
-          </a:p>
-          <a:p>
-            <a:endParaRPr lang="en-US" altLang="ko-KR" sz="1100" dirty="0">
+            <a:endParaRPr lang="en-US" altLang="ko-KR" sz="1200" dirty="0">
               <a:latin typeface="Pretendard Light" panose="02000403000000020004" pitchFamily="50" charset="-127"/>
               <a:ea typeface="Pretendard Light" panose="02000403000000020004" pitchFamily="50" charset="-127"/>
               <a:cs typeface="Pretendard Light" panose="02000403000000020004" pitchFamily="50" charset="-127"/>
@@ -16834,86 +18145,48 @@
           </a:p>
           <a:p>
             <a:r>
-              <a:rPr lang="en-US" altLang="ko-KR" sz="1100" dirty="0">
-                <a:latin typeface="Pretendard Light" panose="02000403000000020004" pitchFamily="50" charset="-127"/>
-                <a:ea typeface="Pretendard Light" panose="02000403000000020004" pitchFamily="50" charset="-127"/>
-                <a:cs typeface="Pretendard Light" panose="02000403000000020004" pitchFamily="50" charset="-127"/>
-              </a:rPr>
-              <a:t># 2. </a:t>
-            </a:r>
-            <a:r>
-              <a:rPr lang="ko-KR" altLang="en-US" sz="1100" dirty="0" err="1">
-                <a:latin typeface="Pretendard Light" panose="02000403000000020004" pitchFamily="50" charset="-127"/>
-                <a:ea typeface="Pretendard Light" panose="02000403000000020004" pitchFamily="50" charset="-127"/>
-                <a:cs typeface="Pretendard Light" panose="02000403000000020004" pitchFamily="50" charset="-127"/>
-              </a:rPr>
-              <a:t>시간축으로</a:t>
-            </a:r>
-            <a:r>
-              <a:rPr lang="ko-KR" altLang="en-US" sz="1100" dirty="0">
-                <a:latin typeface="Pretendard Light" panose="02000403000000020004" pitchFamily="50" charset="-127"/>
-                <a:ea typeface="Pretendard Light" panose="02000403000000020004" pitchFamily="50" charset="-127"/>
-                <a:cs typeface="Pretendard Light" panose="02000403000000020004" pitchFamily="50" charset="-127"/>
-              </a:rPr>
-              <a:t> 병합</a:t>
-            </a:r>
-          </a:p>
-          <a:p>
-            <a:r>
-              <a:rPr lang="en-US" altLang="ko-KR" sz="1100" dirty="0" err="1">
-                <a:latin typeface="Pretendard Light" panose="02000403000000020004" pitchFamily="50" charset="-127"/>
-                <a:ea typeface="Pretendard Light" panose="02000403000000020004" pitchFamily="50" charset="-127"/>
-                <a:cs typeface="Pretendard Light" panose="02000403000000020004" pitchFamily="50" charset="-127"/>
-              </a:rPr>
-              <a:t>cdo</a:t>
-            </a:r>
-            <a:r>
-              <a:rPr lang="en-US" altLang="ko-KR" sz="1100" dirty="0">
-                <a:latin typeface="Pretendard Light" panose="02000403000000020004" pitchFamily="50" charset="-127"/>
-                <a:ea typeface="Pretendard Light" panose="02000403000000020004" pitchFamily="50" charset="-127"/>
-                <a:cs typeface="Pretendard Light" panose="02000403000000020004" pitchFamily="50" charset="-127"/>
-              </a:rPr>
-              <a:t> -L -O </a:t>
-            </a:r>
-            <a:r>
-              <a:rPr lang="en-US" altLang="ko-KR" sz="1100" dirty="0" err="1">
-                <a:latin typeface="Pretendard Light" panose="02000403000000020004" pitchFamily="50" charset="-127"/>
-                <a:ea typeface="Pretendard Light" panose="02000403000000020004" pitchFamily="50" charset="-127"/>
-                <a:cs typeface="Pretendard Light" panose="02000403000000020004" pitchFamily="50" charset="-127"/>
-              </a:rPr>
-              <a:t>mergetime</a:t>
-            </a:r>
-            <a:r>
-              <a:rPr lang="en-US" altLang="ko-KR" sz="1100" dirty="0">
-                <a:latin typeface="Pretendard Light" panose="02000403000000020004" pitchFamily="50" charset="-127"/>
-                <a:ea typeface="Pretendard Light" panose="02000403000000020004" pitchFamily="50" charset="-127"/>
-                <a:cs typeface="Pretendard Light" panose="02000403000000020004" pitchFamily="50" charset="-127"/>
-              </a:rPr>
-              <a:t> \</a:t>
-            </a:r>
-          </a:p>
-          <a:p>
-            <a:r>
-              <a:rPr lang="en-US" altLang="ko-KR" sz="1100" dirty="0">
-                <a:latin typeface="Pretendard Light" panose="02000403000000020004" pitchFamily="50" charset="-127"/>
-                <a:ea typeface="Pretendard Light" panose="02000403000000020004" pitchFamily="50" charset="-127"/>
-                <a:cs typeface="Pretendard Light" panose="02000403000000020004" pitchFamily="50" charset="-127"/>
-              </a:rPr>
-              <a:t>    _surf/vozocrtx_control_monthly_highres_3D_*.nc \</a:t>
-            </a:r>
-          </a:p>
-          <a:p>
-            <a:r>
-              <a:rPr lang="en-US" altLang="ko-KR" sz="1100" dirty="0">
-                <a:latin typeface="Pretendard Light" panose="02000403000000020004" pitchFamily="50" charset="-127"/>
-                <a:ea typeface="Pretendard Light" panose="02000403000000020004" pitchFamily="50" charset="-127"/>
-                <a:cs typeface="Pretendard Light" panose="02000403000000020004" pitchFamily="50" charset="-127"/>
-              </a:rPr>
-              <a:t>    _surf/vozocrtx_surface_1958-1978.nc</a:t>
-            </a:r>
-          </a:p>
-          <a:p>
-            <a:endParaRPr lang="en-US" altLang="ko-KR" sz="1100" dirty="0">
+              <a:rPr lang="en-US" altLang="ko-KR" sz="1200" dirty="0">
+                <a:latin typeface="Pretendard Light" panose="02000403000000020004" pitchFamily="50" charset="-127"/>
+                <a:ea typeface="Pretendard Light" panose="02000403000000020004" pitchFamily="50" charset="-127"/>
+                <a:cs typeface="Pretendard Light" panose="02000403000000020004" pitchFamily="50" charset="-127"/>
+              </a:rPr>
+              <a:t>make_surface_fields_oras5.sh</a:t>
+            </a:r>
+          </a:p>
+          <a:p>
+            <a:r>
+              <a:rPr lang="en-US" altLang="ko-KR" sz="1200" dirty="0">
+                <a:latin typeface="Pretendard Light" panose="02000403000000020004" pitchFamily="50" charset="-127"/>
+                <a:ea typeface="Pretendard Light" panose="02000403000000020004" pitchFamily="50" charset="-127"/>
+                <a:cs typeface="Pretendard Light" panose="02000403000000020004" pitchFamily="50" charset="-127"/>
+              </a:rPr>
+              <a:t>: </a:t>
+            </a:r>
+            <a:r>
+              <a:rPr lang="ko-KR" altLang="en-US" sz="1200" dirty="0">
+                <a:latin typeface="Pretendard Light" panose="02000403000000020004" pitchFamily="50" charset="-127"/>
+                <a:ea typeface="Pretendard Light" panose="02000403000000020004" pitchFamily="50" charset="-127"/>
+                <a:cs typeface="Pretendard Light" panose="02000403000000020004" pitchFamily="50" charset="-127"/>
+              </a:rPr>
+              <a:t>표층 </a:t>
+            </a:r>
+            <a:r>
+              <a:rPr lang="en-US" altLang="ko-KR" sz="1200" dirty="0">
+                <a:latin typeface="Pretendard Light" panose="02000403000000020004" pitchFamily="50" charset="-127"/>
+                <a:ea typeface="Pretendard Light" panose="02000403000000020004" pitchFamily="50" charset="-127"/>
+                <a:cs typeface="Pretendard Light" panose="02000403000000020004" pitchFamily="50" charset="-127"/>
+              </a:rPr>
+              <a:t>level </a:t>
+            </a:r>
+            <a:r>
+              <a:rPr lang="ko-KR" altLang="en-US" sz="1200" dirty="0">
+                <a:latin typeface="Pretendard Light" panose="02000403000000020004" pitchFamily="50" charset="-127"/>
+                <a:ea typeface="Pretendard Light" panose="02000403000000020004" pitchFamily="50" charset="-127"/>
+                <a:cs typeface="Pretendard Light" panose="02000403000000020004" pitchFamily="50" charset="-127"/>
+              </a:rPr>
+              <a:t>선택</a:t>
+            </a:r>
+            <a:endParaRPr lang="en-US" altLang="ko-KR" sz="1200" dirty="0">
               <a:latin typeface="Pretendard Light" panose="02000403000000020004" pitchFamily="50" charset="-127"/>
               <a:ea typeface="Pretendard Light" panose="02000403000000020004" pitchFamily="50" charset="-127"/>
               <a:cs typeface="Pretendard Light" panose="02000403000000020004" pitchFamily="50" charset="-127"/>
@@ -16921,31 +18194,33 @@
           </a:p>
           <a:p>
             <a:r>
-              <a:rPr lang="en-US" altLang="ko-KR" sz="1100" dirty="0">
-                <a:latin typeface="Pretendard Light" panose="02000403000000020004" pitchFamily="50" charset="-127"/>
-                <a:ea typeface="Pretendard Light" panose="02000403000000020004" pitchFamily="50" charset="-127"/>
-                <a:cs typeface="Pretendard Light" panose="02000403000000020004" pitchFamily="50" charset="-127"/>
-              </a:rPr>
-              <a:t># 3. </a:t>
-            </a:r>
-            <a:r>
-              <a:rPr lang="ko-KR" altLang="en-US" sz="1100" dirty="0" err="1">
-                <a:latin typeface="Pretendard Light" panose="02000403000000020004" pitchFamily="50" charset="-127"/>
-                <a:ea typeface="Pretendard Light" panose="02000403000000020004" pitchFamily="50" charset="-127"/>
-                <a:cs typeface="Pretendard Light" panose="02000403000000020004" pitchFamily="50" charset="-127"/>
-              </a:rPr>
-              <a:t>변수명</a:t>
-            </a:r>
-            <a:r>
-              <a:rPr lang="ko-KR" altLang="en-US" sz="1100" dirty="0">
-                <a:latin typeface="Pretendard Light" panose="02000403000000020004" pitchFamily="50" charset="-127"/>
-                <a:ea typeface="Pretendard Light" panose="02000403000000020004" pitchFamily="50" charset="-127"/>
-                <a:cs typeface="Pretendard Light" panose="02000403000000020004" pitchFamily="50" charset="-127"/>
-              </a:rPr>
-              <a:t> 변경</a:t>
-            </a:r>
-            <a:r>
-              <a:rPr lang="en-US" altLang="ko-KR" sz="1100" dirty="0">
+              <a:rPr lang="en-US" altLang="ko-KR" sz="1200" dirty="0">
+                <a:latin typeface="Pretendard Light" panose="02000403000000020004" pitchFamily="50" charset="-127"/>
+                <a:ea typeface="Pretendard Light" panose="02000403000000020004" pitchFamily="50" charset="-127"/>
+                <a:cs typeface="Pretendard Light" panose="02000403000000020004" pitchFamily="50" charset="-127"/>
+              </a:rPr>
+              <a:t>: merge</a:t>
+            </a:r>
+            <a:r>
+              <a:rPr lang="ko-KR" altLang="en-US" sz="1200" dirty="0">
+                <a:latin typeface="Pretendard Light" panose="02000403000000020004" pitchFamily="50" charset="-127"/>
+                <a:ea typeface="Pretendard Light" panose="02000403000000020004" pitchFamily="50" charset="-127"/>
+                <a:cs typeface="Pretendard Light" panose="02000403000000020004" pitchFamily="50" charset="-127"/>
+              </a:rPr>
+              <a:t> </a:t>
+            </a:r>
+            <a:r>
+              <a:rPr lang="en-US" altLang="ko-KR" sz="1200" dirty="0">
+                <a:latin typeface="Pretendard Light" panose="02000403000000020004" pitchFamily="50" charset="-127"/>
+                <a:ea typeface="Pretendard Light" panose="02000403000000020004" pitchFamily="50" charset="-127"/>
+                <a:cs typeface="Pretendard Light" panose="02000403000000020004" pitchFamily="50" charset="-127"/>
+              </a:rPr>
+              <a:t>time</a:t>
+            </a:r>
+          </a:p>
+          <a:p>
+            <a:r>
+              <a:rPr lang="en-US" altLang="ko-KR" sz="1200" dirty="0">
                 <a:latin typeface="Pretendard Light" panose="02000403000000020004" pitchFamily="50" charset="-127"/>
                 <a:ea typeface="Pretendard Light" panose="02000403000000020004" pitchFamily="50" charset="-127"/>
                 <a:cs typeface="Pretendard Light" panose="02000403000000020004" pitchFamily="50" charset="-127"/>
@@ -16953,30 +18228,14 @@
               <a:t>: </a:t>
             </a:r>
             <a:r>
-              <a:rPr lang="en-US" altLang="ko-KR" sz="1100" dirty="0" err="1">
-                <a:latin typeface="Pretendard Light" panose="02000403000000020004" pitchFamily="50" charset="-127"/>
-                <a:ea typeface="Pretendard Light" panose="02000403000000020004" pitchFamily="50" charset="-127"/>
-                <a:cs typeface="Pretendard Light" panose="02000403000000020004" pitchFamily="50" charset="-127"/>
-              </a:rPr>
-              <a:t>vozocrtx</a:t>
-            </a:r>
-            <a:r>
-              <a:rPr lang="en-US" altLang="ko-KR" sz="1100" dirty="0">
-                <a:latin typeface="Pretendard Light" panose="02000403000000020004" pitchFamily="50" charset="-127"/>
-                <a:ea typeface="Pretendard Light" panose="02000403000000020004" pitchFamily="50" charset="-127"/>
-                <a:cs typeface="Pretendard Light" panose="02000403000000020004" pitchFamily="50" charset="-127"/>
-              </a:rPr>
-              <a:t> -&gt; </a:t>
-            </a:r>
-            <a:r>
-              <a:rPr lang="en-US" altLang="ko-KR" sz="1100" dirty="0" err="1">
-                <a:latin typeface="Pretendard Light" panose="02000403000000020004" pitchFamily="50" charset="-127"/>
-                <a:ea typeface="Pretendard Light" panose="02000403000000020004" pitchFamily="50" charset="-127"/>
-                <a:cs typeface="Pretendard Light" panose="02000403000000020004" pitchFamily="50" charset="-127"/>
-              </a:rPr>
-              <a:t>uos</a:t>
-            </a:r>
-            <a:endParaRPr lang="en-US" altLang="ko-KR" sz="1100" dirty="0">
+              <a:rPr lang="ko-KR" altLang="en-US" sz="1200" dirty="0">
+                <a:latin typeface="Pretendard Light" panose="02000403000000020004" pitchFamily="50" charset="-127"/>
+                <a:ea typeface="Pretendard Light" panose="02000403000000020004" pitchFamily="50" charset="-127"/>
+                <a:cs typeface="Pretendard Light" panose="02000403000000020004" pitchFamily="50" charset="-127"/>
+              </a:rPr>
+              <a:t>수직 차원 제거</a:t>
+            </a:r>
+            <a:endParaRPr lang="en-US" altLang="ko-KR" sz="1200" dirty="0">
               <a:latin typeface="Pretendard Light" panose="02000403000000020004" pitchFamily="50" charset="-127"/>
               <a:ea typeface="Pretendard Light" panose="02000403000000020004" pitchFamily="50" charset="-127"/>
               <a:cs typeface="Pretendard Light" panose="02000403000000020004" pitchFamily="50" charset="-127"/>
@@ -16984,427 +18243,84 @@
           </a:p>
           <a:p>
             <a:r>
-              <a:rPr lang="en-US" altLang="ko-KR" sz="1100" dirty="0" err="1">
-                <a:latin typeface="Pretendard Light" panose="02000403000000020004" pitchFamily="50" charset="-127"/>
-                <a:ea typeface="Pretendard Light" panose="02000403000000020004" pitchFamily="50" charset="-127"/>
-                <a:cs typeface="Pretendard Light" panose="02000403000000020004" pitchFamily="50" charset="-127"/>
-              </a:rPr>
-              <a:t>cdo</a:t>
-            </a:r>
-            <a:r>
-              <a:rPr lang="en-US" altLang="ko-KR" sz="1100" dirty="0">
-                <a:latin typeface="Pretendard Light" panose="02000403000000020004" pitchFamily="50" charset="-127"/>
-                <a:ea typeface="Pretendard Light" panose="02000403000000020004" pitchFamily="50" charset="-127"/>
-                <a:cs typeface="Pretendard Light" panose="02000403000000020004" pitchFamily="50" charset="-127"/>
-              </a:rPr>
-              <a:t> -L -O </a:t>
-            </a:r>
-            <a:r>
-              <a:rPr lang="en-US" altLang="ko-KR" sz="1100" dirty="0" err="1">
-                <a:latin typeface="Pretendard Light" panose="02000403000000020004" pitchFamily="50" charset="-127"/>
-                <a:ea typeface="Pretendard Light" panose="02000403000000020004" pitchFamily="50" charset="-127"/>
-                <a:cs typeface="Pretendard Light" panose="02000403000000020004" pitchFamily="50" charset="-127"/>
-              </a:rPr>
-              <a:t>chname,vozocrtx,uos</a:t>
-            </a:r>
-            <a:r>
-              <a:rPr lang="en-US" altLang="ko-KR" sz="1100" dirty="0">
-                <a:latin typeface="Pretendard Light" panose="02000403000000020004" pitchFamily="50" charset="-127"/>
-                <a:ea typeface="Pretendard Light" panose="02000403000000020004" pitchFamily="50" charset="-127"/>
-                <a:cs typeface="Pretendard Light" panose="02000403000000020004" pitchFamily="50" charset="-127"/>
-              </a:rPr>
-              <a:t> \</a:t>
-            </a:r>
-          </a:p>
-          <a:p>
-            <a:r>
-              <a:rPr lang="en-US" altLang="ko-KR" sz="1100" dirty="0">
-                <a:latin typeface="Pretendard Light" panose="02000403000000020004" pitchFamily="50" charset="-127"/>
-                <a:ea typeface="Pretendard Light" panose="02000403000000020004" pitchFamily="50" charset="-127"/>
-                <a:cs typeface="Pretendard Light" panose="02000403000000020004" pitchFamily="50" charset="-127"/>
-              </a:rPr>
-              <a:t>    _surf/vozocrtx_surface_1958-1978.nc \</a:t>
-            </a:r>
-          </a:p>
-          <a:p>
-            <a:r>
-              <a:rPr lang="en-US" altLang="ko-KR" sz="1100" dirty="0">
-                <a:latin typeface="Pretendard Light" panose="02000403000000020004" pitchFamily="50" charset="-127"/>
-                <a:ea typeface="Pretendard Light" panose="02000403000000020004" pitchFamily="50" charset="-127"/>
-                <a:cs typeface="Pretendard Light" panose="02000403000000020004" pitchFamily="50" charset="-127"/>
-              </a:rPr>
-              <a:t>    ../uos.1958-1978.nc</a:t>
-            </a:r>
-          </a:p>
-        </p:txBody>
-      </p:sp>
-      <p:sp>
-        <p:nvSpPr>
-          <p:cNvPr id="6" name="TextBox 5">
-            <a:extLst>
-              <a:ext uri="{FF2B5EF4-FFF2-40B4-BE49-F238E27FC236}">
-                <a16:creationId xmlns:a16="http://schemas.microsoft.com/office/drawing/2014/main" id="{5BB4CFBA-6053-F1BA-2E51-8CB813DAFF94}"/>
-              </a:ext>
-            </a:extLst>
-          </p:cNvPr>
-          <p:cNvSpPr txBox="1"/>
-          <p:nvPr/>
-        </p:nvSpPr>
-        <p:spPr>
-          <a:xfrm>
-            <a:off x="5505450" y="2409441"/>
-            <a:ext cx="6115050" cy="3308598"/>
-          </a:xfrm>
-          <a:prstGeom prst="rect">
-            <a:avLst/>
-          </a:prstGeom>
-          <a:noFill/>
-        </p:spPr>
-        <p:txBody>
-          <a:bodyPr wrap="square">
-            <a:spAutoFit/>
-          </a:bodyPr>
-          <a:lstStyle/>
-          <a:p>
-            <a:r>
-              <a:rPr lang="en-US" altLang="ko-KR" sz="1100" dirty="0">
-                <a:latin typeface="Pretendard Light" panose="02000403000000020004" pitchFamily="50" charset="-127"/>
-                <a:ea typeface="Pretendard Light" panose="02000403000000020004" pitchFamily="50" charset="-127"/>
-                <a:cs typeface="Pretendard Light" panose="02000403000000020004" pitchFamily="50" charset="-127"/>
-              </a:rPr>
-              <a:t>[ORAS5] </a:t>
-            </a:r>
-            <a:r>
-              <a:rPr lang="en-US" altLang="ko-KR" sz="1100" dirty="0" err="1">
-                <a:latin typeface="Pretendard Light" panose="02000403000000020004" pitchFamily="50" charset="-127"/>
-                <a:ea typeface="Pretendard Light" panose="02000403000000020004" pitchFamily="50" charset="-127"/>
-                <a:cs typeface="Pretendard Light" panose="02000403000000020004" pitchFamily="50" charset="-127"/>
-              </a:rPr>
-              <a:t>vos</a:t>
-            </a:r>
-            <a:r>
-              <a:rPr lang="en-US" altLang="ko-KR" sz="1100" dirty="0">
-                <a:latin typeface="Pretendard Light" panose="02000403000000020004" pitchFamily="50" charset="-127"/>
-                <a:ea typeface="Pretendard Light" panose="02000403000000020004" pitchFamily="50" charset="-127"/>
-                <a:cs typeface="Pretendard Light" panose="02000403000000020004" pitchFamily="50" charset="-127"/>
-              </a:rPr>
-              <a:t> </a:t>
-            </a:r>
-            <a:r>
-              <a:rPr lang="ko-KR" altLang="en-US" sz="1100" dirty="0">
-                <a:latin typeface="Pretendard Light" panose="02000403000000020004" pitchFamily="50" charset="-127"/>
-                <a:ea typeface="Pretendard Light" panose="02000403000000020004" pitchFamily="50" charset="-127"/>
-                <a:cs typeface="Pretendard Light" panose="02000403000000020004" pitchFamily="50" charset="-127"/>
-              </a:rPr>
-              <a:t>생산</a:t>
-            </a:r>
-            <a:endParaRPr lang="en-US" altLang="ko-KR" sz="1100" dirty="0">
-              <a:latin typeface="Pretendard Light" panose="02000403000000020004" pitchFamily="50" charset="-127"/>
-              <a:ea typeface="Pretendard Light" panose="02000403000000020004" pitchFamily="50" charset="-127"/>
-              <a:cs typeface="Pretendard Light" panose="02000403000000020004" pitchFamily="50" charset="-127"/>
-            </a:endParaRPr>
-          </a:p>
-          <a:p>
-            <a:endParaRPr lang="en-US" altLang="ko-KR" sz="1100" dirty="0">
-              <a:latin typeface="Pretendard Light" panose="02000403000000020004" pitchFamily="50" charset="-127"/>
-              <a:ea typeface="Pretendard Light" panose="02000403000000020004" pitchFamily="50" charset="-127"/>
-              <a:cs typeface="Pretendard Light" panose="02000403000000020004" pitchFamily="50" charset="-127"/>
-            </a:endParaRPr>
-          </a:p>
-          <a:p>
-            <a:r>
-              <a:rPr lang="en-US" altLang="ko-KR" sz="1100" dirty="0">
-                <a:latin typeface="Pretendard Light" panose="02000403000000020004" pitchFamily="50" charset="-127"/>
-                <a:ea typeface="Pretendard Light" panose="02000403000000020004" pitchFamily="50" charset="-127"/>
-                <a:cs typeface="Pretendard Light" panose="02000403000000020004" pitchFamily="50" charset="-127"/>
-              </a:rPr>
-              <a:t>cd /</a:t>
-            </a:r>
-            <a:r>
-              <a:rPr lang="en-US" altLang="ko-KR" sz="1100" dirty="0" err="1">
-                <a:latin typeface="Pretendard Light" panose="02000403000000020004" pitchFamily="50" charset="-127"/>
-                <a:ea typeface="Pretendard Light" panose="02000403000000020004" pitchFamily="50" charset="-127"/>
-                <a:cs typeface="Pretendard Light" panose="02000403000000020004" pitchFamily="50" charset="-127"/>
-              </a:rPr>
-              <a:t>mnt</a:t>
-            </a:r>
-            <a:r>
-              <a:rPr lang="en-US" altLang="ko-KR" sz="1100" dirty="0">
-                <a:latin typeface="Pretendard Light" panose="02000403000000020004" pitchFamily="50" charset="-127"/>
-                <a:ea typeface="Pretendard Light" panose="02000403000000020004" pitchFamily="50" charset="-127"/>
-                <a:cs typeface="Pretendard Light" panose="02000403000000020004" pitchFamily="50" charset="-127"/>
-              </a:rPr>
-              <a:t>/d/project/01_ENSO/01_data/01_raw/oras5/</a:t>
-            </a:r>
-            <a:r>
-              <a:rPr lang="en-US" altLang="ko-KR" sz="1100" dirty="0" err="1">
-                <a:latin typeface="Pretendard Light" panose="02000403000000020004" pitchFamily="50" charset="-127"/>
-                <a:ea typeface="Pretendard Light" panose="02000403000000020004" pitchFamily="50" charset="-127"/>
-                <a:cs typeface="Pretendard Light" panose="02000403000000020004" pitchFamily="50" charset="-127"/>
-              </a:rPr>
-              <a:t>meridional_velocity</a:t>
-            </a:r>
-            <a:endParaRPr lang="en-US" altLang="ko-KR" sz="1100" dirty="0">
-              <a:latin typeface="Pretendard Light" panose="02000403000000020004" pitchFamily="50" charset="-127"/>
-              <a:ea typeface="Pretendard Light" panose="02000403000000020004" pitchFamily="50" charset="-127"/>
-              <a:cs typeface="Pretendard Light" panose="02000403000000020004" pitchFamily="50" charset="-127"/>
-            </a:endParaRPr>
-          </a:p>
-          <a:p>
-            <a:endParaRPr lang="en-US" altLang="ko-KR" sz="1100" dirty="0">
-              <a:latin typeface="Pretendard Light" panose="02000403000000020004" pitchFamily="50" charset="-127"/>
-              <a:ea typeface="Pretendard Light" panose="02000403000000020004" pitchFamily="50" charset="-127"/>
-              <a:cs typeface="Pretendard Light" panose="02000403000000020004" pitchFamily="50" charset="-127"/>
-            </a:endParaRPr>
-          </a:p>
-          <a:p>
-            <a:r>
-              <a:rPr lang="en-US" altLang="ko-KR" sz="1100" dirty="0" err="1">
-                <a:latin typeface="Pretendard Light" panose="02000403000000020004" pitchFamily="50" charset="-127"/>
-                <a:ea typeface="Pretendard Light" panose="02000403000000020004" pitchFamily="50" charset="-127"/>
-                <a:cs typeface="Pretendard Light" panose="02000403000000020004" pitchFamily="50" charset="-127"/>
-              </a:rPr>
-              <a:t>cdo</a:t>
-            </a:r>
-            <a:r>
-              <a:rPr lang="en-US" altLang="ko-KR" sz="1100" dirty="0">
-                <a:latin typeface="Pretendard Light" panose="02000403000000020004" pitchFamily="50" charset="-127"/>
-                <a:ea typeface="Pretendard Light" panose="02000403000000020004" pitchFamily="50" charset="-127"/>
-                <a:cs typeface="Pretendard Light" panose="02000403000000020004" pitchFamily="50" charset="-127"/>
-              </a:rPr>
-              <a:t> </a:t>
-            </a:r>
-            <a:r>
-              <a:rPr lang="en-US" altLang="ko-KR" sz="1100" dirty="0" err="1">
-                <a:latin typeface="Pretendard Light" panose="02000403000000020004" pitchFamily="50" charset="-127"/>
-                <a:ea typeface="Pretendard Light" panose="02000403000000020004" pitchFamily="50" charset="-127"/>
-                <a:cs typeface="Pretendard Light" panose="02000403000000020004" pitchFamily="50" charset="-127"/>
-              </a:rPr>
-              <a:t>showlevel</a:t>
-            </a:r>
-            <a:r>
-              <a:rPr lang="en-US" altLang="ko-KR" sz="1100" dirty="0">
-                <a:latin typeface="Pretendard Light" panose="02000403000000020004" pitchFamily="50" charset="-127"/>
-                <a:ea typeface="Pretendard Light" panose="02000403000000020004" pitchFamily="50" charset="-127"/>
-                <a:cs typeface="Pretendard Light" panose="02000403000000020004" pitchFamily="50" charset="-127"/>
-              </a:rPr>
-              <a:t> vomecrty_control_monthly_highres_3D_195801_CONS_v0.1.nc</a:t>
-            </a:r>
-          </a:p>
-          <a:p>
-            <a:endParaRPr lang="en-US" altLang="ko-KR" sz="1100" dirty="0">
-              <a:latin typeface="Pretendard Light" panose="02000403000000020004" pitchFamily="50" charset="-127"/>
-              <a:ea typeface="Pretendard Light" panose="02000403000000020004" pitchFamily="50" charset="-127"/>
-              <a:cs typeface="Pretendard Light" panose="02000403000000020004" pitchFamily="50" charset="-127"/>
-            </a:endParaRPr>
-          </a:p>
-          <a:p>
-            <a:r>
-              <a:rPr lang="en-US" altLang="ko-KR" sz="1100" dirty="0" err="1">
-                <a:latin typeface="Pretendard Light" panose="02000403000000020004" pitchFamily="50" charset="-127"/>
-                <a:ea typeface="Pretendard Light" panose="02000403000000020004" pitchFamily="50" charset="-127"/>
-                <a:cs typeface="Pretendard Light" panose="02000403000000020004" pitchFamily="50" charset="-127"/>
-              </a:rPr>
-              <a:t>mkdir</a:t>
-            </a:r>
-            <a:r>
-              <a:rPr lang="en-US" altLang="ko-KR" sz="1100" dirty="0">
-                <a:latin typeface="Pretendard Light" panose="02000403000000020004" pitchFamily="50" charset="-127"/>
-                <a:ea typeface="Pretendard Light" panose="02000403000000020004" pitchFamily="50" charset="-127"/>
-                <a:cs typeface="Pretendard Light" panose="02000403000000020004" pitchFamily="50" charset="-127"/>
-              </a:rPr>
-              <a:t> -p _surf</a:t>
-            </a:r>
-          </a:p>
-          <a:p>
-            <a:endParaRPr lang="en-US" altLang="ko-KR" sz="1100" dirty="0">
-              <a:latin typeface="Pretendard Light" panose="02000403000000020004" pitchFamily="50" charset="-127"/>
-              <a:ea typeface="Pretendard Light" panose="02000403000000020004" pitchFamily="50" charset="-127"/>
-              <a:cs typeface="Pretendard Light" panose="02000403000000020004" pitchFamily="50" charset="-127"/>
-            </a:endParaRPr>
-          </a:p>
-          <a:p>
-            <a:r>
-              <a:rPr lang="en-US" altLang="ko-KR" sz="1100" dirty="0">
-                <a:latin typeface="Pretendard Light" panose="02000403000000020004" pitchFamily="50" charset="-127"/>
-                <a:ea typeface="Pretendard Light" panose="02000403000000020004" pitchFamily="50" charset="-127"/>
-                <a:cs typeface="Pretendard Light" panose="02000403000000020004" pitchFamily="50" charset="-127"/>
-              </a:rPr>
-              <a:t>for f in vomecrty_control_monthly_highres_3D_*.</a:t>
-            </a:r>
-            <a:r>
-              <a:rPr lang="en-US" altLang="ko-KR" sz="1100" dirty="0" err="1">
-                <a:latin typeface="Pretendard Light" panose="02000403000000020004" pitchFamily="50" charset="-127"/>
-                <a:ea typeface="Pretendard Light" panose="02000403000000020004" pitchFamily="50" charset="-127"/>
-                <a:cs typeface="Pretendard Light" panose="02000403000000020004" pitchFamily="50" charset="-127"/>
-              </a:rPr>
-              <a:t>nc</a:t>
-            </a:r>
-            <a:r>
-              <a:rPr lang="en-US" altLang="ko-KR" sz="1100" dirty="0">
-                <a:latin typeface="Pretendard Light" panose="02000403000000020004" pitchFamily="50" charset="-127"/>
-                <a:ea typeface="Pretendard Light" panose="02000403000000020004" pitchFamily="50" charset="-127"/>
-                <a:cs typeface="Pretendard Light" panose="02000403000000020004" pitchFamily="50" charset="-127"/>
-              </a:rPr>
-              <a:t>; do</a:t>
-            </a:r>
-          </a:p>
-          <a:p>
-            <a:r>
-              <a:rPr lang="en-US" altLang="ko-KR" sz="1100" dirty="0">
-                <a:latin typeface="Pretendard Light" panose="02000403000000020004" pitchFamily="50" charset="-127"/>
-                <a:ea typeface="Pretendard Light" panose="02000403000000020004" pitchFamily="50" charset="-127"/>
-                <a:cs typeface="Pretendard Light" panose="02000403000000020004" pitchFamily="50" charset="-127"/>
-              </a:rPr>
-              <a:t>    </a:t>
-            </a:r>
-            <a:r>
-              <a:rPr lang="en-US" altLang="ko-KR" sz="1100" dirty="0" err="1">
-                <a:latin typeface="Pretendard Light" panose="02000403000000020004" pitchFamily="50" charset="-127"/>
-                <a:ea typeface="Pretendard Light" panose="02000403000000020004" pitchFamily="50" charset="-127"/>
-                <a:cs typeface="Pretendard Light" panose="02000403000000020004" pitchFamily="50" charset="-127"/>
-              </a:rPr>
-              <a:t>cdo</a:t>
-            </a:r>
-            <a:r>
-              <a:rPr lang="en-US" altLang="ko-KR" sz="1100" dirty="0">
-                <a:latin typeface="Pretendard Light" panose="02000403000000020004" pitchFamily="50" charset="-127"/>
-                <a:ea typeface="Pretendard Light" panose="02000403000000020004" pitchFamily="50" charset="-127"/>
-                <a:cs typeface="Pretendard Light" panose="02000403000000020004" pitchFamily="50" charset="-127"/>
-              </a:rPr>
-              <a:t> -L -O sellevidx,1 "$f" "_surf/$f"</a:t>
-            </a:r>
-          </a:p>
-          <a:p>
-            <a:r>
-              <a:rPr lang="en-US" altLang="ko-KR" sz="1100" dirty="0">
-                <a:latin typeface="Pretendard Light" panose="02000403000000020004" pitchFamily="50" charset="-127"/>
-                <a:ea typeface="Pretendard Light" panose="02000403000000020004" pitchFamily="50" charset="-127"/>
-                <a:cs typeface="Pretendard Light" panose="02000403000000020004" pitchFamily="50" charset="-127"/>
-              </a:rPr>
-              <a:t>done</a:t>
-            </a:r>
-          </a:p>
-          <a:p>
-            <a:endParaRPr lang="en-US" altLang="ko-KR" sz="1100" dirty="0">
-              <a:latin typeface="Pretendard Light" panose="02000403000000020004" pitchFamily="50" charset="-127"/>
-              <a:ea typeface="Pretendard Light" panose="02000403000000020004" pitchFamily="50" charset="-127"/>
-              <a:cs typeface="Pretendard Light" panose="02000403000000020004" pitchFamily="50" charset="-127"/>
-            </a:endParaRPr>
-          </a:p>
-          <a:p>
-            <a:r>
-              <a:rPr lang="en-US" altLang="ko-KR" sz="1100" dirty="0" err="1">
-                <a:latin typeface="Pretendard Light" panose="02000403000000020004" pitchFamily="50" charset="-127"/>
-                <a:ea typeface="Pretendard Light" panose="02000403000000020004" pitchFamily="50" charset="-127"/>
-                <a:cs typeface="Pretendard Light" panose="02000403000000020004" pitchFamily="50" charset="-127"/>
-              </a:rPr>
-              <a:t>cdo</a:t>
-            </a:r>
-            <a:r>
-              <a:rPr lang="en-US" altLang="ko-KR" sz="1100" dirty="0">
-                <a:latin typeface="Pretendard Light" panose="02000403000000020004" pitchFamily="50" charset="-127"/>
-                <a:ea typeface="Pretendard Light" panose="02000403000000020004" pitchFamily="50" charset="-127"/>
-                <a:cs typeface="Pretendard Light" panose="02000403000000020004" pitchFamily="50" charset="-127"/>
-              </a:rPr>
-              <a:t> -L -O </a:t>
-            </a:r>
-            <a:r>
-              <a:rPr lang="en-US" altLang="ko-KR" sz="1100" dirty="0" err="1">
-                <a:latin typeface="Pretendard Light" panose="02000403000000020004" pitchFamily="50" charset="-127"/>
-                <a:ea typeface="Pretendard Light" panose="02000403000000020004" pitchFamily="50" charset="-127"/>
-                <a:cs typeface="Pretendard Light" panose="02000403000000020004" pitchFamily="50" charset="-127"/>
-              </a:rPr>
-              <a:t>mergetime</a:t>
-            </a:r>
-            <a:r>
-              <a:rPr lang="en-US" altLang="ko-KR" sz="1100" dirty="0">
-                <a:latin typeface="Pretendard Light" panose="02000403000000020004" pitchFamily="50" charset="-127"/>
-                <a:ea typeface="Pretendard Light" panose="02000403000000020004" pitchFamily="50" charset="-127"/>
-                <a:cs typeface="Pretendard Light" panose="02000403000000020004" pitchFamily="50" charset="-127"/>
-              </a:rPr>
-              <a:t> \</a:t>
-            </a:r>
-          </a:p>
-          <a:p>
-            <a:r>
-              <a:rPr lang="en-US" altLang="ko-KR" sz="1100" dirty="0">
-                <a:latin typeface="Pretendard Light" panose="02000403000000020004" pitchFamily="50" charset="-127"/>
-                <a:ea typeface="Pretendard Light" panose="02000403000000020004" pitchFamily="50" charset="-127"/>
-                <a:cs typeface="Pretendard Light" panose="02000403000000020004" pitchFamily="50" charset="-127"/>
-              </a:rPr>
-              <a:t>    _surf/vomecrty_control_monthly_highres_3D_*.nc \</a:t>
-            </a:r>
-          </a:p>
-          <a:p>
-            <a:r>
-              <a:rPr lang="en-US" altLang="ko-KR" sz="1100" dirty="0">
-                <a:latin typeface="Pretendard Light" panose="02000403000000020004" pitchFamily="50" charset="-127"/>
-                <a:ea typeface="Pretendard Light" panose="02000403000000020004" pitchFamily="50" charset="-127"/>
-                <a:cs typeface="Pretendard Light" panose="02000403000000020004" pitchFamily="50" charset="-127"/>
-              </a:rPr>
-              <a:t>    _surf/vomecrty_surface_1958-1978.nc</a:t>
-            </a:r>
-          </a:p>
-          <a:p>
-            <a:endParaRPr lang="en-US" altLang="ko-KR" sz="1100" dirty="0">
-              <a:latin typeface="Pretendard Light" panose="02000403000000020004" pitchFamily="50" charset="-127"/>
-              <a:ea typeface="Pretendard Light" panose="02000403000000020004" pitchFamily="50" charset="-127"/>
-              <a:cs typeface="Pretendard Light" panose="02000403000000020004" pitchFamily="50" charset="-127"/>
-            </a:endParaRPr>
-          </a:p>
-          <a:p>
-            <a:r>
-              <a:rPr lang="en-US" altLang="ko-KR" sz="1100" dirty="0" err="1">
-                <a:latin typeface="Pretendard Light" panose="02000403000000020004" pitchFamily="50" charset="-127"/>
-                <a:ea typeface="Pretendard Light" panose="02000403000000020004" pitchFamily="50" charset="-127"/>
-                <a:cs typeface="Pretendard Light" panose="02000403000000020004" pitchFamily="50" charset="-127"/>
-              </a:rPr>
-              <a:t>cdo</a:t>
-            </a:r>
-            <a:r>
-              <a:rPr lang="en-US" altLang="ko-KR" sz="1100" dirty="0">
-                <a:latin typeface="Pretendard Light" panose="02000403000000020004" pitchFamily="50" charset="-127"/>
-                <a:ea typeface="Pretendard Light" panose="02000403000000020004" pitchFamily="50" charset="-127"/>
-                <a:cs typeface="Pretendard Light" panose="02000403000000020004" pitchFamily="50" charset="-127"/>
-              </a:rPr>
-              <a:t> -L -O </a:t>
-            </a:r>
-            <a:r>
-              <a:rPr lang="en-US" altLang="ko-KR" sz="1100" dirty="0" err="1">
-                <a:latin typeface="Pretendard Light" panose="02000403000000020004" pitchFamily="50" charset="-127"/>
-                <a:ea typeface="Pretendard Light" panose="02000403000000020004" pitchFamily="50" charset="-127"/>
-                <a:cs typeface="Pretendard Light" panose="02000403000000020004" pitchFamily="50" charset="-127"/>
-              </a:rPr>
-              <a:t>chname,vomecrty,vos</a:t>
-            </a:r>
-            <a:r>
-              <a:rPr lang="en-US" altLang="ko-KR" sz="1100" dirty="0">
-                <a:latin typeface="Pretendard Light" panose="02000403000000020004" pitchFamily="50" charset="-127"/>
-                <a:ea typeface="Pretendard Light" panose="02000403000000020004" pitchFamily="50" charset="-127"/>
-                <a:cs typeface="Pretendard Light" panose="02000403000000020004" pitchFamily="50" charset="-127"/>
-              </a:rPr>
-              <a:t> \</a:t>
-            </a:r>
-          </a:p>
-          <a:p>
-            <a:r>
-              <a:rPr lang="en-US" altLang="ko-KR" sz="1100" dirty="0">
-                <a:latin typeface="Pretendard Light" panose="02000403000000020004" pitchFamily="50" charset="-127"/>
-                <a:ea typeface="Pretendard Light" panose="02000403000000020004" pitchFamily="50" charset="-127"/>
-                <a:cs typeface="Pretendard Light" panose="02000403000000020004" pitchFamily="50" charset="-127"/>
-              </a:rPr>
-              <a:t>    _surf/vomecrty_surface_1958-1978.nc \</a:t>
-            </a:r>
-          </a:p>
-          <a:p>
-            <a:r>
-              <a:rPr lang="en-US" altLang="ko-KR" sz="1100" dirty="0">
-                <a:latin typeface="Pretendard Light" panose="02000403000000020004" pitchFamily="50" charset="-127"/>
-                <a:ea typeface="Pretendard Light" panose="02000403000000020004" pitchFamily="50" charset="-127"/>
-                <a:cs typeface="Pretendard Light" panose="02000403000000020004" pitchFamily="50" charset="-127"/>
-              </a:rPr>
-              <a:t>    ../vos.1958-1978.nc</a:t>
+              <a:rPr lang="en-US" altLang="ko-KR" sz="1200" dirty="0">
+                <a:latin typeface="Pretendard Light" panose="02000403000000020004" pitchFamily="50" charset="-127"/>
+                <a:ea typeface="Pretendard Light" panose="02000403000000020004" pitchFamily="50" charset="-127"/>
+                <a:cs typeface="Pretendard Light" panose="02000403000000020004" pitchFamily="50" charset="-127"/>
+              </a:rPr>
+              <a:t>: </a:t>
+            </a:r>
+            <a:r>
+              <a:rPr lang="ko-KR" altLang="en-US" sz="1200" dirty="0">
+                <a:latin typeface="Pretendard Light" panose="02000403000000020004" pitchFamily="50" charset="-127"/>
+                <a:ea typeface="Pretendard Light" panose="02000403000000020004" pitchFamily="50" charset="-127"/>
+                <a:cs typeface="Pretendard Light" panose="02000403000000020004" pitchFamily="50" charset="-127"/>
+              </a:rPr>
+              <a:t>파일명</a:t>
+            </a:r>
+            <a:r>
+              <a:rPr lang="en-US" altLang="ko-KR" sz="1200" dirty="0">
+                <a:latin typeface="Pretendard Light" panose="02000403000000020004" pitchFamily="50" charset="-127"/>
+                <a:ea typeface="Pretendard Light" panose="02000403000000020004" pitchFamily="50" charset="-127"/>
+                <a:cs typeface="Pretendard Light" panose="02000403000000020004" pitchFamily="50" charset="-127"/>
+              </a:rPr>
+              <a:t>/</a:t>
+            </a:r>
+            <a:r>
+              <a:rPr lang="ko-KR" altLang="en-US" sz="1200" dirty="0" err="1">
+                <a:latin typeface="Pretendard Light" panose="02000403000000020004" pitchFamily="50" charset="-127"/>
+                <a:ea typeface="Pretendard Light" panose="02000403000000020004" pitchFamily="50" charset="-127"/>
+                <a:cs typeface="Pretendard Light" panose="02000403000000020004" pitchFamily="50" charset="-127"/>
+              </a:rPr>
+              <a:t>변수명</a:t>
+            </a:r>
+            <a:r>
+              <a:rPr lang="ko-KR" altLang="en-US" sz="1200" dirty="0">
+                <a:latin typeface="Pretendard Light" panose="02000403000000020004" pitchFamily="50" charset="-127"/>
+                <a:ea typeface="Pretendard Light" panose="02000403000000020004" pitchFamily="50" charset="-127"/>
+                <a:cs typeface="Pretendard Light" panose="02000403000000020004" pitchFamily="50" charset="-127"/>
+              </a:rPr>
+              <a:t> 변경 </a:t>
+            </a:r>
+            <a:r>
+              <a:rPr lang="en-US" altLang="ko-KR" sz="1200" dirty="0">
+                <a:latin typeface="Pretendard Light" panose="02000403000000020004" pitchFamily="50" charset="-127"/>
+                <a:ea typeface="Pretendard Light" panose="02000403000000020004" pitchFamily="50" charset="-127"/>
+                <a:cs typeface="Pretendard Light" panose="02000403000000020004" pitchFamily="50" charset="-127"/>
+              </a:rPr>
+              <a:t>(</a:t>
+            </a:r>
+            <a:r>
+              <a:rPr lang="en-US" altLang="ko-KR" sz="1200" dirty="0" err="1">
+                <a:latin typeface="Pretendard Light" panose="02000403000000020004" pitchFamily="50" charset="-127"/>
+                <a:ea typeface="Pretendard Light" panose="02000403000000020004" pitchFamily="50" charset="-127"/>
+                <a:cs typeface="Pretendard Light" panose="02000403000000020004" pitchFamily="50" charset="-127"/>
+              </a:rPr>
+              <a:t>vozocrtx→uos</a:t>
+            </a:r>
+            <a:r>
+              <a:rPr lang="en-US" altLang="ko-KR" sz="1200" dirty="0">
+                <a:latin typeface="Pretendard Light" panose="02000403000000020004" pitchFamily="50" charset="-127"/>
+                <a:ea typeface="Pretendard Light" panose="02000403000000020004" pitchFamily="50" charset="-127"/>
+                <a:cs typeface="Pretendard Light" panose="02000403000000020004" pitchFamily="50" charset="-127"/>
+              </a:rPr>
+              <a:t> / </a:t>
+            </a:r>
+            <a:r>
+              <a:rPr lang="en-US" altLang="ko-KR" sz="1200" dirty="0" err="1">
+                <a:latin typeface="Pretendard Light" panose="02000403000000020004" pitchFamily="50" charset="-127"/>
+                <a:ea typeface="Pretendard Light" panose="02000403000000020004" pitchFamily="50" charset="-127"/>
+                <a:cs typeface="Pretendard Light" panose="02000403000000020004" pitchFamily="50" charset="-127"/>
+              </a:rPr>
+              <a:t>vomecrty→vos</a:t>
+            </a:r>
+            <a:r>
+              <a:rPr lang="en-US" altLang="ko-KR" sz="1200" dirty="0">
+                <a:latin typeface="Pretendard Light" panose="02000403000000020004" pitchFamily="50" charset="-127"/>
+                <a:ea typeface="Pretendard Light" panose="02000403000000020004" pitchFamily="50" charset="-127"/>
+                <a:cs typeface="Pretendard Light" panose="02000403000000020004" pitchFamily="50" charset="-127"/>
+              </a:rPr>
+              <a:t>)</a:t>
             </a:r>
           </a:p>
         </p:txBody>
@@ -17423,6 +18339,498 @@
 </file>
 
 <file path=ppt/slides/slide6.xml><?xml version="1.0" encoding="utf-8"?>
+<p:sld xmlns:a="http://schemas.openxmlformats.org/drawingml/2006/main" xmlns:r="http://schemas.openxmlformats.org/officeDocument/2006/relationships" xmlns:p="http://schemas.openxmlformats.org/presentationml/2006/main">
+  <p:cSld>
+    <p:spTree>
+      <p:nvGrpSpPr>
+        <p:cNvPr id="1" name="Shape 157">
+          <a:extLst>
+            <a:ext uri="{FF2B5EF4-FFF2-40B4-BE49-F238E27FC236}">
+              <a16:creationId xmlns:a16="http://schemas.microsoft.com/office/drawing/2014/main" id="{0A95CC74-0609-393F-A7EA-9E56010CA0D7}"/>
+            </a:ext>
+          </a:extLst>
+        </p:cNvPr>
+        <p:cNvGrpSpPr/>
+        <p:nvPr/>
+      </p:nvGrpSpPr>
+      <p:grpSpPr>
+        <a:xfrm>
+          <a:off x="0" y="0"/>
+          <a:ext cx="0" cy="0"/>
+          <a:chOff x="0" y="0"/>
+          <a:chExt cx="0" cy="0"/>
+        </a:xfrm>
+      </p:grpSpPr>
+      <p:pic>
+        <p:nvPicPr>
+          <p:cNvPr id="158" name="Google Shape;158;p18" descr="image.png">
+            <a:extLst>
+              <a:ext uri="{FF2B5EF4-FFF2-40B4-BE49-F238E27FC236}">
+                <a16:creationId xmlns:a16="http://schemas.microsoft.com/office/drawing/2014/main" id="{D98783BB-0595-0E0B-6181-6858D47834C4}"/>
+              </a:ext>
+            </a:extLst>
+          </p:cNvPr>
+          <p:cNvPicPr preferRelativeResize="0">
+            <a:picLocks noGrp="1" noRot="1" noMove="1" noResize="1" noEditPoints="1" noAdjustHandles="1" noChangeArrowheads="1" noChangeShapeType="1" noCrop="1"/>
+          </p:cNvPicPr>
+          <p:nvPr/>
+        </p:nvPicPr>
+        <p:blipFill rotWithShape="1">
+          <a:blip r:embed="rId3">
+            <a:alphaModFix/>
+          </a:blip>
+          <a:srcRect/>
+          <a:stretch/>
+        </p:blipFill>
+        <p:spPr>
+          <a:xfrm>
+            <a:off x="0" y="0"/>
+            <a:ext cx="12192000" cy="6858000"/>
+          </a:xfrm>
+          <a:prstGeom prst="rect">
+            <a:avLst/>
+          </a:prstGeom>
+          <a:noFill/>
+          <a:ln>
+            <a:noFill/>
+          </a:ln>
+        </p:spPr>
+      </p:pic>
+      <p:sp>
+        <p:nvSpPr>
+          <p:cNvPr id="160" name="Google Shape;160;p18">
+            <a:extLst>
+              <a:ext uri="{FF2B5EF4-FFF2-40B4-BE49-F238E27FC236}">
+                <a16:creationId xmlns:a16="http://schemas.microsoft.com/office/drawing/2014/main" id="{1B8D933D-8363-3ED5-177A-D5036C923254}"/>
+              </a:ext>
+            </a:extLst>
+          </p:cNvPr>
+          <p:cNvSpPr txBox="1"/>
+          <p:nvPr/>
+        </p:nvSpPr>
+        <p:spPr>
+          <a:xfrm>
+            <a:off x="571500" y="476250"/>
+            <a:ext cx="11049000" cy="484748"/>
+          </a:xfrm>
+          <a:prstGeom prst="rect">
+            <a:avLst/>
+          </a:prstGeom>
+          <a:noFill/>
+          <a:ln>
+            <a:noFill/>
+          </a:ln>
+        </p:spPr>
+        <p:txBody>
+          <a:bodyPr spcFirstLastPara="1" wrap="square" lIns="0" tIns="0" rIns="0" bIns="0" anchor="t" anchorCtr="0">
+            <a:spAutoFit/>
+          </a:bodyPr>
+          <a:lstStyle/>
+          <a:p>
+            <a:pPr marL="0" marR="0" lvl="0" indent="0" algn="l" rtl="0">
+              <a:spcBef>
+                <a:spcPts val="0"/>
+              </a:spcBef>
+              <a:spcAft>
+                <a:spcPts val="0"/>
+              </a:spcAft>
+              <a:buNone/>
+            </a:pPr>
+            <a:r>
+              <a:rPr lang="en-US" altLang="ko-KR" sz="3150" b="1" dirty="0">
+                <a:solidFill>
+                  <a:srgbClr val="001F3F"/>
+                </a:solidFill>
+                <a:latin typeface="Pretendard ExtraBold" panose="02000903000000020004" pitchFamily="50" charset="-127"/>
+                <a:ea typeface="Pretendard ExtraBold" panose="02000903000000020004" pitchFamily="50" charset="-127"/>
+                <a:cs typeface="Pretendard ExtraBold" panose="02000903000000020004" pitchFamily="50" charset="-127"/>
+              </a:rPr>
+              <a:t>ohc300</a:t>
+            </a:r>
+            <a:r>
+              <a:rPr lang="en-US" altLang="ko-KR" sz="3150" b="1" i="0" u="none" strike="noStrike" cap="none" dirty="0">
+                <a:solidFill>
+                  <a:srgbClr val="001F3F"/>
+                </a:solidFill>
+                <a:latin typeface="Pretendard ExtraBold" panose="02000903000000020004" pitchFamily="50" charset="-127"/>
+                <a:ea typeface="Pretendard ExtraBold" panose="02000903000000020004" pitchFamily="50" charset="-127"/>
+                <a:cs typeface="Pretendard ExtraBold" panose="02000903000000020004" pitchFamily="50" charset="-127"/>
+                <a:sym typeface="Arial"/>
+              </a:rPr>
+              <a:t> </a:t>
+            </a:r>
+            <a:r>
+              <a:rPr lang="ko-KR" altLang="en-US" sz="3150" b="1" i="0" u="none" strike="noStrike" cap="none" dirty="0">
+                <a:solidFill>
+                  <a:srgbClr val="001F3F"/>
+                </a:solidFill>
+                <a:latin typeface="Pretendard ExtraBold" panose="02000903000000020004" pitchFamily="50" charset="-127"/>
+                <a:ea typeface="Pretendard ExtraBold" panose="02000903000000020004" pitchFamily="50" charset="-127"/>
+                <a:cs typeface="Pretendard ExtraBold" panose="02000903000000020004" pitchFamily="50" charset="-127"/>
+                <a:sym typeface="Arial"/>
+              </a:rPr>
+              <a:t>자료 생산</a:t>
+            </a:r>
+            <a:endParaRPr dirty="0">
+              <a:latin typeface="Pretendard ExtraBold" panose="02000903000000020004" pitchFamily="50" charset="-127"/>
+              <a:ea typeface="Pretendard ExtraBold" panose="02000903000000020004" pitchFamily="50" charset="-127"/>
+              <a:cs typeface="Pretendard ExtraBold" panose="02000903000000020004" pitchFamily="50" charset="-127"/>
+            </a:endParaRPr>
+          </a:p>
+        </p:txBody>
+      </p:sp>
+      <p:sp>
+        <p:nvSpPr>
+          <p:cNvPr id="161" name="Google Shape;161;p18">
+            <a:extLst>
+              <a:ext uri="{FF2B5EF4-FFF2-40B4-BE49-F238E27FC236}">
+                <a16:creationId xmlns:a16="http://schemas.microsoft.com/office/drawing/2014/main" id="{5EFCDB68-3F23-7029-E5C4-316B22FA516E}"/>
+              </a:ext>
+            </a:extLst>
+          </p:cNvPr>
+          <p:cNvSpPr/>
+          <p:nvPr/>
+        </p:nvSpPr>
+        <p:spPr>
+          <a:xfrm>
+            <a:off x="571500" y="1076325"/>
+            <a:ext cx="11049000" cy="19050"/>
+          </a:xfrm>
+          <a:prstGeom prst="rect">
+            <a:avLst/>
+          </a:prstGeom>
+          <a:solidFill>
+            <a:srgbClr val="EEEEEE"/>
+          </a:solidFill>
+          <a:ln>
+            <a:noFill/>
+          </a:ln>
+        </p:spPr>
+        <p:txBody>
+          <a:bodyPr spcFirstLastPara="1" wrap="square" lIns="91425" tIns="45700" rIns="91425" bIns="45700" anchor="ctr" anchorCtr="0">
+            <a:noAutofit/>
+          </a:bodyPr>
+          <a:lstStyle/>
+          <a:p>
+            <a:pPr marL="0" marR="0" lvl="0" indent="0" algn="ctr" rtl="0">
+              <a:spcBef>
+                <a:spcPts val="0"/>
+              </a:spcBef>
+              <a:spcAft>
+                <a:spcPts val="0"/>
+              </a:spcAft>
+              <a:buNone/>
+            </a:pPr>
+            <a:endParaRPr sz="1800" b="0" i="0" u="none" strike="noStrike" cap="none">
+              <a:solidFill>
+                <a:schemeClr val="dk1"/>
+              </a:solidFill>
+              <a:latin typeface="Calibri"/>
+              <a:ea typeface="Calibri"/>
+              <a:cs typeface="Calibri"/>
+              <a:sym typeface="Calibri"/>
+            </a:endParaRPr>
+          </a:p>
+        </p:txBody>
+      </p:sp>
+      <p:sp>
+        <p:nvSpPr>
+          <p:cNvPr id="4" name="슬라이드 번호 개체 틀 3">
+            <a:extLst>
+              <a:ext uri="{FF2B5EF4-FFF2-40B4-BE49-F238E27FC236}">
+                <a16:creationId xmlns:a16="http://schemas.microsoft.com/office/drawing/2014/main" id="{24D90EAC-08E8-A137-5F9C-84CA8A9159F0}"/>
+              </a:ext>
+            </a:extLst>
+          </p:cNvPr>
+          <p:cNvSpPr>
+            <a:spLocks noGrp="1"/>
+          </p:cNvSpPr>
+          <p:nvPr>
+            <p:ph type="sldNum" idx="12"/>
+          </p:nvPr>
+        </p:nvSpPr>
+        <p:spPr/>
+        <p:txBody>
+          <a:bodyPr/>
+          <a:lstStyle/>
+          <a:p>
+            <a:pPr marL="0" lvl="0" indent="0" algn="r" rtl="0">
+              <a:spcBef>
+                <a:spcPts val="0"/>
+              </a:spcBef>
+              <a:spcAft>
+                <a:spcPts val="0"/>
+              </a:spcAft>
+              <a:buNone/>
+            </a:pPr>
+            <a:fld id="{00000000-1234-1234-1234-123412341234}" type="slidenum">
+              <a:rPr lang="en-US" smtClean="0"/>
+              <a:t>6</a:t>
+            </a:fld>
+            <a:endParaRPr lang="en-US"/>
+          </a:p>
+        </p:txBody>
+      </p:sp>
+      <p:sp>
+        <p:nvSpPr>
+          <p:cNvPr id="2" name="TextBox 1">
+            <a:extLst>
+              <a:ext uri="{FF2B5EF4-FFF2-40B4-BE49-F238E27FC236}">
+                <a16:creationId xmlns:a16="http://schemas.microsoft.com/office/drawing/2014/main" id="{128FF2D0-3A9A-11BC-044C-17FD79F4C735}"/>
+              </a:ext>
+            </a:extLst>
+          </p:cNvPr>
+          <p:cNvSpPr txBox="1"/>
+          <p:nvPr/>
+        </p:nvSpPr>
+        <p:spPr>
+          <a:xfrm>
+            <a:off x="571500" y="1210702"/>
+            <a:ext cx="11049000" cy="2123658"/>
+          </a:xfrm>
+          <a:prstGeom prst="rect">
+            <a:avLst/>
+          </a:prstGeom>
+          <a:noFill/>
+        </p:spPr>
+        <p:txBody>
+          <a:bodyPr wrap="square" rtlCol="0">
+            <a:spAutoFit/>
+          </a:bodyPr>
+          <a:lstStyle/>
+          <a:p>
+            <a:r>
+              <a:rPr lang="en-US" altLang="ko-KR" sz="1200" dirty="0">
+                <a:latin typeface="Pretendard Light" panose="02000403000000020004" pitchFamily="50" charset="-127"/>
+                <a:ea typeface="Pretendard Light" panose="02000403000000020004" pitchFamily="50" charset="-127"/>
+                <a:cs typeface="Pretendard Light" panose="02000403000000020004" pitchFamily="50" charset="-127"/>
+              </a:rPr>
+              <a:t>python make_ohc300_cmip6.py \</a:t>
+            </a:r>
+          </a:p>
+          <a:p>
+            <a:r>
+              <a:rPr lang="en-US" altLang="ko-KR" sz="1200" dirty="0">
+                <a:latin typeface="Pretendard Light" panose="02000403000000020004" pitchFamily="50" charset="-127"/>
+                <a:ea typeface="Pretendard Light" panose="02000403000000020004" pitchFamily="50" charset="-127"/>
+                <a:cs typeface="Pretendard Light" panose="02000403000000020004" pitchFamily="50" charset="-127"/>
+              </a:rPr>
+              <a:t>  --</a:t>
+            </a:r>
+            <a:r>
+              <a:rPr lang="en-US" altLang="ko-KR" sz="1200" dirty="0" err="1">
+                <a:latin typeface="Pretendard Light" panose="02000403000000020004" pitchFamily="50" charset="-127"/>
+                <a:ea typeface="Pretendard Light" panose="02000403000000020004" pitchFamily="50" charset="-127"/>
+                <a:cs typeface="Pretendard Light" panose="02000403000000020004" pitchFamily="50" charset="-127"/>
+              </a:rPr>
+              <a:t>inroot</a:t>
+            </a:r>
+            <a:r>
+              <a:rPr lang="en-US" altLang="ko-KR" sz="1200" dirty="0">
+                <a:latin typeface="Pretendard Light" panose="02000403000000020004" pitchFamily="50" charset="-127"/>
+                <a:ea typeface="Pretendard Light" panose="02000403000000020004" pitchFamily="50" charset="-127"/>
+                <a:cs typeface="Pretendard Light" panose="02000403000000020004" pitchFamily="50" charset="-127"/>
+              </a:rPr>
+              <a:t>  /</a:t>
+            </a:r>
+            <a:r>
+              <a:rPr lang="en-US" altLang="ko-KR" sz="1200" dirty="0" err="1">
+                <a:latin typeface="Pretendard Light" panose="02000403000000020004" pitchFamily="50" charset="-127"/>
+                <a:ea typeface="Pretendard Light" panose="02000403000000020004" pitchFamily="50" charset="-127"/>
+                <a:cs typeface="Pretendard Light" panose="02000403000000020004" pitchFamily="50" charset="-127"/>
+              </a:rPr>
+              <a:t>mnt</a:t>
+            </a:r>
+            <a:r>
+              <a:rPr lang="en-US" altLang="ko-KR" sz="1200" dirty="0">
+                <a:latin typeface="Pretendard Light" panose="02000403000000020004" pitchFamily="50" charset="-127"/>
+                <a:ea typeface="Pretendard Light" panose="02000403000000020004" pitchFamily="50" charset="-127"/>
+                <a:cs typeface="Pretendard Light" panose="02000403000000020004" pitchFamily="50" charset="-127"/>
+              </a:rPr>
+              <a:t>/d/project/01_ENSO/01_data/01_raw/cmip6/ssp370 \</a:t>
+            </a:r>
+          </a:p>
+          <a:p>
+            <a:r>
+              <a:rPr lang="en-US" altLang="ko-KR" sz="1200" dirty="0">
+                <a:latin typeface="Pretendard Light" panose="02000403000000020004" pitchFamily="50" charset="-127"/>
+                <a:ea typeface="Pretendard Light" panose="02000403000000020004" pitchFamily="50" charset="-127"/>
+                <a:cs typeface="Pretendard Light" panose="02000403000000020004" pitchFamily="50" charset="-127"/>
+              </a:rPr>
+              <a:t>  --outroot /</a:t>
+            </a:r>
+            <a:r>
+              <a:rPr lang="en-US" altLang="ko-KR" sz="1200" dirty="0" err="1">
+                <a:latin typeface="Pretendard Light" panose="02000403000000020004" pitchFamily="50" charset="-127"/>
+                <a:ea typeface="Pretendard Light" panose="02000403000000020004" pitchFamily="50" charset="-127"/>
+                <a:cs typeface="Pretendard Light" panose="02000403000000020004" pitchFamily="50" charset="-127"/>
+              </a:rPr>
+              <a:t>mnt</a:t>
+            </a:r>
+            <a:r>
+              <a:rPr lang="en-US" altLang="ko-KR" sz="1200" dirty="0">
+                <a:latin typeface="Pretendard Light" panose="02000403000000020004" pitchFamily="50" charset="-127"/>
+                <a:ea typeface="Pretendard Light" panose="02000403000000020004" pitchFamily="50" charset="-127"/>
+                <a:cs typeface="Pretendard Light" panose="02000403000000020004" pitchFamily="50" charset="-127"/>
+              </a:rPr>
+              <a:t>/d/project/01_ENSO/01_data/01_raw/cmip6/ssp370 \</a:t>
+            </a:r>
+          </a:p>
+          <a:p>
+            <a:r>
+              <a:rPr lang="en-US" altLang="ko-KR" sz="1200" dirty="0">
+                <a:latin typeface="Pretendard Light" panose="02000403000000020004" pitchFamily="50" charset="-127"/>
+                <a:ea typeface="Pretendard Light" panose="02000403000000020004" pitchFamily="50" charset="-127"/>
+                <a:cs typeface="Pretendard Light" panose="02000403000000020004" pitchFamily="50" charset="-127"/>
+              </a:rPr>
+              <a:t>  --</a:t>
+            </a:r>
+            <a:r>
+              <a:rPr lang="en-US" altLang="ko-KR" sz="1200" dirty="0" err="1">
+                <a:latin typeface="Pretendard Light" panose="02000403000000020004" pitchFamily="50" charset="-127"/>
+                <a:ea typeface="Pretendard Light" panose="02000403000000020004" pitchFamily="50" charset="-127"/>
+                <a:cs typeface="Pretendard Light" panose="02000403000000020004" pitchFamily="50" charset="-127"/>
+              </a:rPr>
+              <a:t>zmax</a:t>
+            </a:r>
+            <a:r>
+              <a:rPr lang="en-US" altLang="ko-KR" sz="1200" dirty="0">
+                <a:latin typeface="Pretendard Light" panose="02000403000000020004" pitchFamily="50" charset="-127"/>
+                <a:ea typeface="Pretendard Light" panose="02000403000000020004" pitchFamily="50" charset="-127"/>
+                <a:cs typeface="Pretendard Light" panose="02000403000000020004" pitchFamily="50" charset="-127"/>
+              </a:rPr>
+              <a:t> 300 \</a:t>
+            </a:r>
+          </a:p>
+          <a:p>
+            <a:r>
+              <a:rPr lang="en-US" altLang="ko-KR" sz="1200" dirty="0">
+                <a:latin typeface="Pretendard Light" panose="02000403000000020004" pitchFamily="50" charset="-127"/>
+                <a:ea typeface="Pretendard Light" panose="02000403000000020004" pitchFamily="50" charset="-127"/>
+                <a:cs typeface="Pretendard Light" panose="02000403000000020004" pitchFamily="50" charset="-127"/>
+              </a:rPr>
+              <a:t>  --rho0 1025 --cp0 3992 \</a:t>
+            </a:r>
+          </a:p>
+          <a:p>
+            <a:r>
+              <a:rPr lang="en-US" altLang="ko-KR" sz="1200" dirty="0">
+                <a:latin typeface="Pretendard Light" panose="02000403000000020004" pitchFamily="50" charset="-127"/>
+                <a:ea typeface="Pretendard Light" panose="02000403000000020004" pitchFamily="50" charset="-127"/>
+                <a:cs typeface="Pretendard Light" panose="02000403000000020004" pitchFamily="50" charset="-127"/>
+              </a:rPr>
+              <a:t>  --to-</a:t>
+            </a:r>
+            <a:r>
+              <a:rPr lang="en-US" altLang="ko-KR" sz="1200" dirty="0" err="1">
+                <a:latin typeface="Pretendard Light" panose="02000403000000020004" pitchFamily="50" charset="-127"/>
+                <a:ea typeface="Pretendard Light" panose="02000403000000020004" pitchFamily="50" charset="-127"/>
+                <a:cs typeface="Pretendard Light" panose="02000403000000020004" pitchFamily="50" charset="-127"/>
+              </a:rPr>
+              <a:t>degC</a:t>
+            </a:r>
+            <a:r>
+              <a:rPr lang="en-US" altLang="ko-KR" sz="1200" dirty="0">
+                <a:latin typeface="Pretendard Light" panose="02000403000000020004" pitchFamily="50" charset="-127"/>
+                <a:ea typeface="Pretendard Light" panose="02000403000000020004" pitchFamily="50" charset="-127"/>
+                <a:cs typeface="Pretendard Light" panose="02000403000000020004" pitchFamily="50" charset="-127"/>
+              </a:rPr>
+              <a:t> \</a:t>
+            </a:r>
+          </a:p>
+          <a:p>
+            <a:r>
+              <a:rPr lang="en-US" altLang="ko-KR" sz="1200" dirty="0">
+                <a:latin typeface="Pretendard Light" panose="02000403000000020004" pitchFamily="50" charset="-127"/>
+                <a:ea typeface="Pretendard Light" panose="02000403000000020004" pitchFamily="50" charset="-127"/>
+                <a:cs typeface="Pretendard Light" panose="02000403000000020004" pitchFamily="50" charset="-127"/>
+              </a:rPr>
+              <a:t>  --time-chunk 12 \</a:t>
+            </a:r>
+          </a:p>
+          <a:p>
+            <a:r>
+              <a:rPr lang="en-US" altLang="ko-KR" sz="1200" dirty="0">
+                <a:latin typeface="Pretendard Light" panose="02000403000000020004" pitchFamily="50" charset="-127"/>
+                <a:ea typeface="Pretendard Light" panose="02000403000000020004" pitchFamily="50" charset="-127"/>
+                <a:cs typeface="Pretendard Light" panose="02000403000000020004" pitchFamily="50" charset="-127"/>
+              </a:rPr>
+              <a:t>: </a:t>
+            </a:r>
+            <a:r>
+              <a:rPr lang="ko-KR" altLang="en-US" sz="1200" dirty="0">
+                <a:latin typeface="Pretendard Light" panose="02000403000000020004" pitchFamily="50" charset="-127"/>
+                <a:ea typeface="Pretendard Light" panose="02000403000000020004" pitchFamily="50" charset="-127"/>
+                <a:cs typeface="Pretendard Light" panose="02000403000000020004" pitchFamily="50" charset="-127"/>
+              </a:rPr>
+              <a:t>섭씨로 변환해서 적분</a:t>
+            </a:r>
+            <a:endParaRPr lang="en-US" altLang="ko-KR" sz="1200" dirty="0">
+              <a:latin typeface="Pretendard Light" panose="02000403000000020004" pitchFamily="50" charset="-127"/>
+              <a:ea typeface="Pretendard Light" panose="02000403000000020004" pitchFamily="50" charset="-127"/>
+              <a:cs typeface="Pretendard Light" panose="02000403000000020004" pitchFamily="50" charset="-127"/>
+            </a:endParaRPr>
+          </a:p>
+          <a:p>
+            <a:endParaRPr lang="en-US" altLang="ko-KR" sz="1200" dirty="0">
+              <a:latin typeface="Pretendard Light" panose="02000403000000020004" pitchFamily="50" charset="-127"/>
+              <a:ea typeface="Pretendard Light" panose="02000403000000020004" pitchFamily="50" charset="-127"/>
+              <a:cs typeface="Pretendard Light" panose="02000403000000020004" pitchFamily="50" charset="-127"/>
+            </a:endParaRPr>
+          </a:p>
+          <a:p>
+            <a:r>
+              <a:rPr lang="en-US" altLang="ko-KR" sz="1200" dirty="0"/>
+              <a:t>python make_ohc300_godas.py --to-</a:t>
+            </a:r>
+            <a:r>
+              <a:rPr lang="en-US" altLang="ko-KR" sz="1200" dirty="0" err="1"/>
+              <a:t>degC</a:t>
+            </a:r>
+            <a:r>
+              <a:rPr lang="en-US" altLang="ko-KR" sz="1200" dirty="0"/>
+              <a:t> --overwrite</a:t>
+            </a:r>
+          </a:p>
+          <a:p>
+            <a:r>
+              <a:rPr lang="en-US" altLang="ko-KR" sz="1200" dirty="0">
+                <a:latin typeface="Pretendard Light" panose="02000403000000020004" pitchFamily="50" charset="-127"/>
+                <a:ea typeface="Pretendard Light" panose="02000403000000020004" pitchFamily="50" charset="-127"/>
+                <a:cs typeface="Pretendard Light" panose="02000403000000020004" pitchFamily="50" charset="-127"/>
+              </a:rPr>
+              <a:t>: </a:t>
+            </a:r>
+            <a:r>
+              <a:rPr lang="ko-KR" altLang="en-US" sz="1200" dirty="0">
+                <a:latin typeface="Pretendard Light" panose="02000403000000020004" pitchFamily="50" charset="-127"/>
+                <a:ea typeface="Pretendard Light" panose="02000403000000020004" pitchFamily="50" charset="-127"/>
+                <a:cs typeface="Pretendard Light" panose="02000403000000020004" pitchFamily="50" charset="-127"/>
+              </a:rPr>
+              <a:t>섭씨로 변환해서 적분</a:t>
+            </a:r>
+            <a:endParaRPr lang="en-US" altLang="ko-KR" sz="1200" dirty="0">
+              <a:latin typeface="Pretendard Light" panose="02000403000000020004" pitchFamily="50" charset="-127"/>
+              <a:ea typeface="Pretendard Light" panose="02000403000000020004" pitchFamily="50" charset="-127"/>
+              <a:cs typeface="Pretendard Light" panose="02000403000000020004" pitchFamily="50" charset="-127"/>
+            </a:endParaRPr>
+          </a:p>
+        </p:txBody>
+      </p:sp>
+    </p:spTree>
+    <p:extLst>
+      <p:ext uri="{BB962C8B-B14F-4D97-AF65-F5344CB8AC3E}">
+        <p14:creationId xmlns:p14="http://schemas.microsoft.com/office/powerpoint/2010/main" val="1371844329"/>
+      </p:ext>
+    </p:extLst>
+  </p:cSld>
+  <p:clrMapOvr>
+    <a:masterClrMapping/>
+  </p:clrMapOvr>
+</p:sld>
+</file>
+
+<file path=ppt/slides/slide7.xml><?xml version="1.0" encoding="utf-8"?>
 <p:sld xmlns:a="http://schemas.openxmlformats.org/drawingml/2006/main" xmlns:r="http://schemas.openxmlformats.org/officeDocument/2006/relationships" xmlns:p="http://schemas.openxmlformats.org/presentationml/2006/main">
   <p:cSld>
     <p:spTree>
@@ -17529,40 +18937,7 @@
                 <a:ea typeface="Pretendard ExtraBold" panose="02000903000000020004" pitchFamily="50" charset="-127"/>
                 <a:cs typeface="Pretendard ExtraBold" panose="02000903000000020004" pitchFamily="50" charset="-127"/>
               </a:rPr>
-              <a:t>[CMIP6] </a:t>
-            </a:r>
-            <a:r>
-              <a:rPr lang="en-US" altLang="ko-KR" sz="3150" b="1" dirty="0" err="1">
-                <a:solidFill>
-                  <a:srgbClr val="001F3F"/>
-                </a:solidFill>
-                <a:latin typeface="Pretendard ExtraBold" panose="02000903000000020004" pitchFamily="50" charset="-127"/>
-                <a:ea typeface="Pretendard ExtraBold" panose="02000903000000020004" pitchFamily="50" charset="-127"/>
-                <a:cs typeface="Pretendard ExtraBold" panose="02000903000000020004" pitchFamily="50" charset="-127"/>
-              </a:rPr>
-              <a:t>thetao</a:t>
-            </a:r>
-            <a:r>
-              <a:rPr lang="en-US" altLang="ko-KR" sz="3150" b="1" dirty="0">
-                <a:solidFill>
-                  <a:srgbClr val="001F3F"/>
-                </a:solidFill>
-                <a:latin typeface="Pretendard ExtraBold" panose="02000903000000020004" pitchFamily="50" charset="-127"/>
-                <a:ea typeface="Pretendard ExtraBold" panose="02000903000000020004" pitchFamily="50" charset="-127"/>
-                <a:cs typeface="Pretendard ExtraBold" panose="02000903000000020004" pitchFamily="50" charset="-127"/>
-              </a:rPr>
-              <a:t> </a:t>
-            </a:r>
-            <a:r>
-              <a:rPr lang="ko-KR" altLang="en-US" sz="3150" b="1" dirty="0">
-                <a:solidFill>
-                  <a:srgbClr val="001F3F"/>
-                </a:solidFill>
-                <a:latin typeface="Pretendard ExtraBold" panose="02000903000000020004" pitchFamily="50" charset="-127"/>
-                <a:ea typeface="Pretendard ExtraBold" panose="02000903000000020004" pitchFamily="50" charset="-127"/>
-                <a:cs typeface="Pretendard ExtraBold" panose="02000903000000020004" pitchFamily="50" charset="-127"/>
-              </a:rPr>
-              <a:t>자료 서버에 업로드 </a:t>
+              <a:t>[ETC]</a:t>
             </a:r>
             <a:endParaRPr dirty="0">
               <a:latin typeface="Pretendard ExtraBold" panose="02000903000000020004" pitchFamily="50" charset="-127"/>
@@ -17658,7 +19033,7 @@
             </a:pPr>
             <a:fld id="{00000000-1234-1234-1234-123412341234}" type="slidenum">
               <a:rPr lang="en-US" smtClean="0"/>
-              <a:t>6</a:t>
+              <a:t>7</a:t>
             </a:fld>
             <a:endParaRPr lang="en-US"/>
           </a:p>
@@ -17678,8 +19053,8 @@
         </p:nvSpPr>
         <p:spPr>
           <a:xfrm>
-            <a:off x="571500" y="1210702"/>
-            <a:ext cx="11049000" cy="10679847"/>
+            <a:off x="571500" y="1471910"/>
+            <a:ext cx="2733675" cy="5386090"/>
           </a:xfrm>
           <a:prstGeom prst="rect">
             <a:avLst/>
@@ -17693,7 +19068,7 @@
           <a:lstStyle/>
           <a:p>
             <a:r>
-              <a:rPr lang="en-US" altLang="ko-KR" sz="800" dirty="0">
+              <a:rPr lang="en-US" altLang="ko-KR" sz="400" dirty="0">
                 <a:latin typeface="Pretendard Light" panose="02000403000000020004" pitchFamily="50" charset="-127"/>
                 <a:ea typeface="Pretendard Light" panose="02000403000000020004" pitchFamily="50" charset="-127"/>
                 <a:cs typeface="Pretendard Light" panose="02000403000000020004" pitchFamily="50" charset="-127"/>
@@ -17703,7 +19078,7 @@
           </a:p>
           <a:p>
             <a:r>
-              <a:rPr lang="en-US" altLang="ko-KR" sz="800" dirty="0">
+              <a:rPr lang="en-US" altLang="ko-KR" sz="400" dirty="0">
                 <a:latin typeface="Pretendard Light" panose="02000403000000020004" pitchFamily="50" charset="-127"/>
                 <a:ea typeface="Pretendard Light" panose="02000403000000020004" pitchFamily="50" charset="-127"/>
                 <a:cs typeface="Pretendard Light" panose="02000403000000020004" pitchFamily="50" charset="-127"/>
@@ -17713,7 +19088,7 @@
           </a:p>
           <a:p>
             <a:r>
-              <a:rPr lang="en-US" altLang="ko-KR" sz="800" dirty="0">
+              <a:rPr lang="en-US" altLang="ko-KR" sz="400" dirty="0">
                 <a:latin typeface="Pretendard Light" panose="02000403000000020004" pitchFamily="50" charset="-127"/>
                 <a:ea typeface="Pretendard Light" panose="02000403000000020004" pitchFamily="50" charset="-127"/>
                 <a:cs typeface="Pretendard Light" panose="02000403000000020004" pitchFamily="50" charset="-127"/>
@@ -17721,7 +19096,7 @@
               <a:t>lcd /</a:t>
             </a:r>
             <a:r>
-              <a:rPr lang="en-US" altLang="ko-KR" sz="800" dirty="0" err="1">
+              <a:rPr lang="en-US" altLang="ko-KR" sz="400" dirty="0" err="1">
                 <a:latin typeface="Pretendard Light" panose="02000403000000020004" pitchFamily="50" charset="-127"/>
                 <a:ea typeface="Pretendard Light" panose="02000403000000020004" pitchFamily="50" charset="-127"/>
                 <a:cs typeface="Pretendard Light" panose="02000403000000020004" pitchFamily="50" charset="-127"/>
@@ -17729,7 +19104,7 @@
               <a:t>mnt</a:t>
             </a:r>
             <a:r>
-              <a:rPr lang="en-US" altLang="ko-KR" sz="800" dirty="0">
+              <a:rPr lang="en-US" altLang="ko-KR" sz="400" dirty="0">
                 <a:latin typeface="Pretendard Light" panose="02000403000000020004" pitchFamily="50" charset="-127"/>
                 <a:ea typeface="Pretendard Light" panose="02000403000000020004" pitchFamily="50" charset="-127"/>
                 <a:cs typeface="Pretendard Light" panose="02000403000000020004" pitchFamily="50" charset="-127"/>
@@ -17739,7 +19114,7 @@
           </a:p>
           <a:p>
             <a:r>
-              <a:rPr lang="en-US" altLang="ko-KR" sz="800" dirty="0">
+              <a:rPr lang="en-US" altLang="ko-KR" sz="400" dirty="0">
                 <a:latin typeface="Pretendard Light" panose="02000403000000020004" pitchFamily="50" charset="-127"/>
                 <a:ea typeface="Pretendard Light" panose="02000403000000020004" pitchFamily="50" charset="-127"/>
                 <a:cs typeface="Pretendard Light" panose="02000403000000020004" pitchFamily="50" charset="-127"/>
@@ -17748,7 +19123,7 @@
             </a:r>
           </a:p>
           <a:p>
-            <a:endParaRPr lang="en-US" altLang="ko-KR" sz="800" dirty="0">
+            <a:endParaRPr lang="en-US" altLang="ko-KR" sz="400" dirty="0">
               <a:latin typeface="Pretendard Light" panose="02000403000000020004" pitchFamily="50" charset="-127"/>
               <a:ea typeface="Pretendard Light" panose="02000403000000020004" pitchFamily="50" charset="-127"/>
               <a:cs typeface="Pretendard Light" panose="02000403000000020004" pitchFamily="50" charset="-127"/>
@@ -17756,7 +19131,7 @@
           </a:p>
           <a:p>
             <a:r>
-              <a:rPr lang="en-US" altLang="ko-KR" sz="800" dirty="0">
+              <a:rPr lang="en-US" altLang="ko-KR" sz="400" dirty="0">
                 <a:latin typeface="Pretendard Light" panose="02000403000000020004" pitchFamily="50" charset="-127"/>
                 <a:ea typeface="Pretendard Light" panose="02000403000000020004" pitchFamily="50" charset="-127"/>
                 <a:cs typeface="Pretendard Light" panose="02000403000000020004" pitchFamily="50" charset="-127"/>
@@ -17766,7 +19141,7 @@
           </a:p>
           <a:p>
             <a:r>
-              <a:rPr lang="en-US" altLang="ko-KR" sz="800" dirty="0">
+              <a:rPr lang="en-US" altLang="ko-KR" sz="400" dirty="0">
                 <a:latin typeface="Pretendard Light" panose="02000403000000020004" pitchFamily="50" charset="-127"/>
                 <a:ea typeface="Pretendard Light" panose="02000403000000020004" pitchFamily="50" charset="-127"/>
                 <a:cs typeface="Pretendard Light" panose="02000403000000020004" pitchFamily="50" charset="-127"/>
@@ -17776,7 +19151,7 @@
           </a:p>
           <a:p>
             <a:r>
-              <a:rPr lang="en-US" altLang="ko-KR" sz="800" dirty="0">
+              <a:rPr lang="en-US" altLang="ko-KR" sz="400" dirty="0">
                 <a:latin typeface="Pretendard Light" panose="02000403000000020004" pitchFamily="50" charset="-127"/>
                 <a:ea typeface="Pretendard Light" panose="02000403000000020004" pitchFamily="50" charset="-127"/>
                 <a:cs typeface="Pretendard Light" panose="02000403000000020004" pitchFamily="50" charset="-127"/>
@@ -17784,7 +19159,7 @@
               <a:t>lcd /</a:t>
             </a:r>
             <a:r>
-              <a:rPr lang="en-US" altLang="ko-KR" sz="800" dirty="0" err="1">
+              <a:rPr lang="en-US" altLang="ko-KR" sz="400" dirty="0" err="1">
                 <a:latin typeface="Pretendard Light" panose="02000403000000020004" pitchFamily="50" charset="-127"/>
                 <a:ea typeface="Pretendard Light" panose="02000403000000020004" pitchFamily="50" charset="-127"/>
                 <a:cs typeface="Pretendard Light" panose="02000403000000020004" pitchFamily="50" charset="-127"/>
@@ -17792,7 +19167,7 @@
               <a:t>mnt</a:t>
             </a:r>
             <a:r>
-              <a:rPr lang="en-US" altLang="ko-KR" sz="800" dirty="0">
+              <a:rPr lang="en-US" altLang="ko-KR" sz="400" dirty="0">
                 <a:latin typeface="Pretendard Light" panose="02000403000000020004" pitchFamily="50" charset="-127"/>
                 <a:ea typeface="Pretendard Light" panose="02000403000000020004" pitchFamily="50" charset="-127"/>
                 <a:cs typeface="Pretendard Light" panose="02000403000000020004" pitchFamily="50" charset="-127"/>
@@ -17802,7 +19177,7 @@
           </a:p>
           <a:p>
             <a:r>
-              <a:rPr lang="en-US" altLang="ko-KR" sz="800" dirty="0">
+              <a:rPr lang="en-US" altLang="ko-KR" sz="400" dirty="0">
                 <a:latin typeface="Pretendard Light" panose="02000403000000020004" pitchFamily="50" charset="-127"/>
                 <a:ea typeface="Pretendard Light" panose="02000403000000020004" pitchFamily="50" charset="-127"/>
                 <a:cs typeface="Pretendard Light" panose="02000403000000020004" pitchFamily="50" charset="-127"/>
@@ -17811,7 +19186,7 @@
             </a:r>
           </a:p>
           <a:p>
-            <a:endParaRPr lang="en-US" altLang="ko-KR" sz="800" dirty="0">
+            <a:endParaRPr lang="en-US" altLang="ko-KR" sz="400" dirty="0">
               <a:latin typeface="Pretendard Light" panose="02000403000000020004" pitchFamily="50" charset="-127"/>
               <a:ea typeface="Pretendard Light" panose="02000403000000020004" pitchFamily="50" charset="-127"/>
               <a:cs typeface="Pretendard Light" panose="02000403000000020004" pitchFamily="50" charset="-127"/>
@@ -17819,7 +19194,7 @@
           </a:p>
           <a:p>
             <a:r>
-              <a:rPr lang="en-US" altLang="ko-KR" sz="800" dirty="0">
+              <a:rPr lang="en-US" altLang="ko-KR" sz="400" dirty="0">
                 <a:latin typeface="Pretendard Light" panose="02000403000000020004" pitchFamily="50" charset="-127"/>
                 <a:ea typeface="Pretendard Light" panose="02000403000000020004" pitchFamily="50" charset="-127"/>
                 <a:cs typeface="Pretendard Light" panose="02000403000000020004" pitchFamily="50" charset="-127"/>
@@ -17829,7 +19204,7 @@
           </a:p>
           <a:p>
             <a:r>
-              <a:rPr lang="en-US" altLang="ko-KR" sz="800" dirty="0">
+              <a:rPr lang="en-US" altLang="ko-KR" sz="400" dirty="0">
                 <a:latin typeface="Pretendard Light" panose="02000403000000020004" pitchFamily="50" charset="-127"/>
                 <a:ea typeface="Pretendard Light" panose="02000403000000020004" pitchFamily="50" charset="-127"/>
                 <a:cs typeface="Pretendard Light" panose="02000403000000020004" pitchFamily="50" charset="-127"/>
@@ -17839,7 +19214,7 @@
           </a:p>
           <a:p>
             <a:r>
-              <a:rPr lang="en-US" altLang="ko-KR" sz="800" dirty="0">
+              <a:rPr lang="en-US" altLang="ko-KR" sz="400" dirty="0">
                 <a:latin typeface="Pretendard Light" panose="02000403000000020004" pitchFamily="50" charset="-127"/>
                 <a:ea typeface="Pretendard Light" panose="02000403000000020004" pitchFamily="50" charset="-127"/>
                 <a:cs typeface="Pretendard Light" panose="02000403000000020004" pitchFamily="50" charset="-127"/>
@@ -17847,7 +19222,7 @@
               <a:t>lcd /</a:t>
             </a:r>
             <a:r>
-              <a:rPr lang="en-US" altLang="ko-KR" sz="800" dirty="0" err="1">
+              <a:rPr lang="en-US" altLang="ko-KR" sz="400" dirty="0" err="1">
                 <a:latin typeface="Pretendard Light" panose="02000403000000020004" pitchFamily="50" charset="-127"/>
                 <a:ea typeface="Pretendard Light" panose="02000403000000020004" pitchFamily="50" charset="-127"/>
                 <a:cs typeface="Pretendard Light" panose="02000403000000020004" pitchFamily="50" charset="-127"/>
@@ -17855,7 +19230,7 @@
               <a:t>mnt</a:t>
             </a:r>
             <a:r>
-              <a:rPr lang="en-US" altLang="ko-KR" sz="800" dirty="0">
+              <a:rPr lang="en-US" altLang="ko-KR" sz="400" dirty="0">
                 <a:latin typeface="Pretendard Light" panose="02000403000000020004" pitchFamily="50" charset="-127"/>
                 <a:ea typeface="Pretendard Light" panose="02000403000000020004" pitchFamily="50" charset="-127"/>
                 <a:cs typeface="Pretendard Light" panose="02000403000000020004" pitchFamily="50" charset="-127"/>
@@ -17865,7 +19240,7 @@
           </a:p>
           <a:p>
             <a:r>
-              <a:rPr lang="en-US" altLang="ko-KR" sz="800" dirty="0">
+              <a:rPr lang="en-US" altLang="ko-KR" sz="400" dirty="0">
                 <a:latin typeface="Pretendard Light" panose="02000403000000020004" pitchFamily="50" charset="-127"/>
                 <a:ea typeface="Pretendard Light" panose="02000403000000020004" pitchFamily="50" charset="-127"/>
                 <a:cs typeface="Pretendard Light" panose="02000403000000020004" pitchFamily="50" charset="-127"/>
@@ -17874,7 +19249,7 @@
             </a:r>
           </a:p>
           <a:p>
-            <a:endParaRPr lang="en-US" altLang="ko-KR" sz="800" dirty="0">
+            <a:endParaRPr lang="en-US" altLang="ko-KR" sz="400" dirty="0">
               <a:latin typeface="Pretendard Light" panose="02000403000000020004" pitchFamily="50" charset="-127"/>
               <a:ea typeface="Pretendard Light" panose="02000403000000020004" pitchFamily="50" charset="-127"/>
               <a:cs typeface="Pretendard Light" panose="02000403000000020004" pitchFamily="50" charset="-127"/>
@@ -17882,7 +19257,7 @@
           </a:p>
           <a:p>
             <a:r>
-              <a:rPr lang="en-US" altLang="ko-KR" sz="800" dirty="0">
+              <a:rPr lang="en-US" altLang="ko-KR" sz="400" dirty="0">
                 <a:latin typeface="Pretendard Light" panose="02000403000000020004" pitchFamily="50" charset="-127"/>
                 <a:ea typeface="Pretendard Light" panose="02000403000000020004" pitchFamily="50" charset="-127"/>
                 <a:cs typeface="Pretendard Light" panose="02000403000000020004" pitchFamily="50" charset="-127"/>
@@ -17892,7 +19267,7 @@
           </a:p>
           <a:p>
             <a:r>
-              <a:rPr lang="en-US" altLang="ko-KR" sz="800" dirty="0">
+              <a:rPr lang="en-US" altLang="ko-KR" sz="400" dirty="0">
                 <a:latin typeface="Pretendard Light" panose="02000403000000020004" pitchFamily="50" charset="-127"/>
                 <a:ea typeface="Pretendard Light" panose="02000403000000020004" pitchFamily="50" charset="-127"/>
                 <a:cs typeface="Pretendard Light" panose="02000403000000020004" pitchFamily="50" charset="-127"/>
@@ -17902,7 +19277,7 @@
           </a:p>
           <a:p>
             <a:r>
-              <a:rPr lang="en-US" altLang="ko-KR" sz="800" dirty="0">
+              <a:rPr lang="en-US" altLang="ko-KR" sz="400" dirty="0">
                 <a:latin typeface="Pretendard Light" panose="02000403000000020004" pitchFamily="50" charset="-127"/>
                 <a:ea typeface="Pretendard Light" panose="02000403000000020004" pitchFamily="50" charset="-127"/>
                 <a:cs typeface="Pretendard Light" panose="02000403000000020004" pitchFamily="50" charset="-127"/>
@@ -17910,7 +19285,7 @@
               <a:t>lcd /</a:t>
             </a:r>
             <a:r>
-              <a:rPr lang="en-US" altLang="ko-KR" sz="800" dirty="0" err="1">
+              <a:rPr lang="en-US" altLang="ko-KR" sz="400" dirty="0" err="1">
                 <a:latin typeface="Pretendard Light" panose="02000403000000020004" pitchFamily="50" charset="-127"/>
                 <a:ea typeface="Pretendard Light" panose="02000403000000020004" pitchFamily="50" charset="-127"/>
                 <a:cs typeface="Pretendard Light" panose="02000403000000020004" pitchFamily="50" charset="-127"/>
@@ -17918,7 +19293,7 @@
               <a:t>mnt</a:t>
             </a:r>
             <a:r>
-              <a:rPr lang="en-US" altLang="ko-KR" sz="800" dirty="0">
+              <a:rPr lang="en-US" altLang="ko-KR" sz="400" dirty="0">
                 <a:latin typeface="Pretendard Light" panose="02000403000000020004" pitchFamily="50" charset="-127"/>
                 <a:ea typeface="Pretendard Light" panose="02000403000000020004" pitchFamily="50" charset="-127"/>
                 <a:cs typeface="Pretendard Light" panose="02000403000000020004" pitchFamily="50" charset="-127"/>
@@ -17928,7 +19303,7 @@
           </a:p>
           <a:p>
             <a:r>
-              <a:rPr lang="en-US" altLang="ko-KR" sz="800" dirty="0">
+              <a:rPr lang="en-US" altLang="ko-KR" sz="400" dirty="0">
                 <a:latin typeface="Pretendard Light" panose="02000403000000020004" pitchFamily="50" charset="-127"/>
                 <a:ea typeface="Pretendard Light" panose="02000403000000020004" pitchFamily="50" charset="-127"/>
                 <a:cs typeface="Pretendard Light" panose="02000403000000020004" pitchFamily="50" charset="-127"/>
@@ -17937,7 +19312,7 @@
             </a:r>
           </a:p>
           <a:p>
-            <a:endParaRPr lang="en-US" altLang="ko-KR" sz="800" dirty="0">
+            <a:endParaRPr lang="en-US" altLang="ko-KR" sz="400" dirty="0">
               <a:latin typeface="Pretendard Light" panose="02000403000000020004" pitchFamily="50" charset="-127"/>
               <a:ea typeface="Pretendard Light" panose="02000403000000020004" pitchFamily="50" charset="-127"/>
               <a:cs typeface="Pretendard Light" panose="02000403000000020004" pitchFamily="50" charset="-127"/>
@@ -17945,7 +19320,7 @@
           </a:p>
           <a:p>
             <a:r>
-              <a:rPr lang="en-US" altLang="ko-KR" sz="800" dirty="0">
+              <a:rPr lang="en-US" altLang="ko-KR" sz="400" dirty="0">
                 <a:latin typeface="Pretendard Light" panose="02000403000000020004" pitchFamily="50" charset="-127"/>
                 <a:ea typeface="Pretendard Light" panose="02000403000000020004" pitchFamily="50" charset="-127"/>
                 <a:cs typeface="Pretendard Light" panose="02000403000000020004" pitchFamily="50" charset="-127"/>
@@ -17955,7 +19330,7 @@
           </a:p>
           <a:p>
             <a:r>
-              <a:rPr lang="en-US" altLang="ko-KR" sz="800" dirty="0">
+              <a:rPr lang="en-US" altLang="ko-KR" sz="400" dirty="0">
                 <a:latin typeface="Pretendard Light" panose="02000403000000020004" pitchFamily="50" charset="-127"/>
                 <a:ea typeface="Pretendard Light" panose="02000403000000020004" pitchFamily="50" charset="-127"/>
                 <a:cs typeface="Pretendard Light" panose="02000403000000020004" pitchFamily="50" charset="-127"/>
@@ -17965,7 +19340,7 @@
           </a:p>
           <a:p>
             <a:r>
-              <a:rPr lang="en-US" altLang="ko-KR" sz="800" dirty="0">
+              <a:rPr lang="en-US" altLang="ko-KR" sz="400" dirty="0">
                 <a:latin typeface="Pretendard Light" panose="02000403000000020004" pitchFamily="50" charset="-127"/>
                 <a:ea typeface="Pretendard Light" panose="02000403000000020004" pitchFamily="50" charset="-127"/>
                 <a:cs typeface="Pretendard Light" panose="02000403000000020004" pitchFamily="50" charset="-127"/>
@@ -17973,7 +19348,7 @@
               <a:t>lcd /</a:t>
             </a:r>
             <a:r>
-              <a:rPr lang="en-US" altLang="ko-KR" sz="800" dirty="0" err="1">
+              <a:rPr lang="en-US" altLang="ko-KR" sz="400" dirty="0" err="1">
                 <a:latin typeface="Pretendard Light" panose="02000403000000020004" pitchFamily="50" charset="-127"/>
                 <a:ea typeface="Pretendard Light" panose="02000403000000020004" pitchFamily="50" charset="-127"/>
                 <a:cs typeface="Pretendard Light" panose="02000403000000020004" pitchFamily="50" charset="-127"/>
@@ -17981,7 +19356,7 @@
               <a:t>mnt</a:t>
             </a:r>
             <a:r>
-              <a:rPr lang="en-US" altLang="ko-KR" sz="800" dirty="0">
+              <a:rPr lang="en-US" altLang="ko-KR" sz="400" dirty="0">
                 <a:latin typeface="Pretendard Light" panose="02000403000000020004" pitchFamily="50" charset="-127"/>
                 <a:ea typeface="Pretendard Light" panose="02000403000000020004" pitchFamily="50" charset="-127"/>
                 <a:cs typeface="Pretendard Light" panose="02000403000000020004" pitchFamily="50" charset="-127"/>
@@ -17991,7 +19366,7 @@
           </a:p>
           <a:p>
             <a:r>
-              <a:rPr lang="en-US" altLang="ko-KR" sz="800" dirty="0">
+              <a:rPr lang="en-US" altLang="ko-KR" sz="400" dirty="0">
                 <a:latin typeface="Pretendard Light" panose="02000403000000020004" pitchFamily="50" charset="-127"/>
                 <a:ea typeface="Pretendard Light" panose="02000403000000020004" pitchFamily="50" charset="-127"/>
                 <a:cs typeface="Pretendard Light" panose="02000403000000020004" pitchFamily="50" charset="-127"/>
@@ -18000,7 +19375,7 @@
             </a:r>
           </a:p>
           <a:p>
-            <a:endParaRPr lang="en-US" altLang="ko-KR" sz="800" dirty="0">
+            <a:endParaRPr lang="en-US" altLang="ko-KR" sz="400" dirty="0">
               <a:latin typeface="Pretendard Light" panose="02000403000000020004" pitchFamily="50" charset="-127"/>
               <a:ea typeface="Pretendard Light" panose="02000403000000020004" pitchFamily="50" charset="-127"/>
               <a:cs typeface="Pretendard Light" panose="02000403000000020004" pitchFamily="50" charset="-127"/>
@@ -18008,7 +19383,7 @@
           </a:p>
           <a:p>
             <a:r>
-              <a:rPr lang="en-US" altLang="ko-KR" sz="800" dirty="0">
+              <a:rPr lang="en-US" altLang="ko-KR" sz="400" dirty="0">
                 <a:latin typeface="Pretendard Light" panose="02000403000000020004" pitchFamily="50" charset="-127"/>
                 <a:ea typeface="Pretendard Light" panose="02000403000000020004" pitchFamily="50" charset="-127"/>
                 <a:cs typeface="Pretendard Light" panose="02000403000000020004" pitchFamily="50" charset="-127"/>
@@ -18018,7 +19393,7 @@
           </a:p>
           <a:p>
             <a:r>
-              <a:rPr lang="en-US" altLang="ko-KR" sz="800" dirty="0">
+              <a:rPr lang="en-US" altLang="ko-KR" sz="400" dirty="0">
                 <a:latin typeface="Pretendard Light" panose="02000403000000020004" pitchFamily="50" charset="-127"/>
                 <a:ea typeface="Pretendard Light" panose="02000403000000020004" pitchFamily="50" charset="-127"/>
                 <a:cs typeface="Pretendard Light" panose="02000403000000020004" pitchFamily="50" charset="-127"/>
@@ -18028,7 +19403,7 @@
           </a:p>
           <a:p>
             <a:r>
-              <a:rPr lang="en-US" altLang="ko-KR" sz="800" dirty="0">
+              <a:rPr lang="en-US" altLang="ko-KR" sz="400" dirty="0">
                 <a:latin typeface="Pretendard Light" panose="02000403000000020004" pitchFamily="50" charset="-127"/>
                 <a:ea typeface="Pretendard Light" panose="02000403000000020004" pitchFamily="50" charset="-127"/>
                 <a:cs typeface="Pretendard Light" panose="02000403000000020004" pitchFamily="50" charset="-127"/>
@@ -18036,7 +19411,7 @@
               <a:t>lcd /</a:t>
             </a:r>
             <a:r>
-              <a:rPr lang="en-US" altLang="ko-KR" sz="800" dirty="0" err="1">
+              <a:rPr lang="en-US" altLang="ko-KR" sz="400" dirty="0" err="1">
                 <a:latin typeface="Pretendard Light" panose="02000403000000020004" pitchFamily="50" charset="-127"/>
                 <a:ea typeface="Pretendard Light" panose="02000403000000020004" pitchFamily="50" charset="-127"/>
                 <a:cs typeface="Pretendard Light" panose="02000403000000020004" pitchFamily="50" charset="-127"/>
@@ -18044,7 +19419,7 @@
               <a:t>mnt</a:t>
             </a:r>
             <a:r>
-              <a:rPr lang="en-US" altLang="ko-KR" sz="800" dirty="0">
+              <a:rPr lang="en-US" altLang="ko-KR" sz="400" dirty="0">
                 <a:latin typeface="Pretendard Light" panose="02000403000000020004" pitchFamily="50" charset="-127"/>
                 <a:ea typeface="Pretendard Light" panose="02000403000000020004" pitchFamily="50" charset="-127"/>
                 <a:cs typeface="Pretendard Light" panose="02000403000000020004" pitchFamily="50" charset="-127"/>
@@ -18054,7 +19429,7 @@
           </a:p>
           <a:p>
             <a:r>
-              <a:rPr lang="en-US" altLang="ko-KR" sz="800" dirty="0">
+              <a:rPr lang="en-US" altLang="ko-KR" sz="400" dirty="0">
                 <a:latin typeface="Pretendard Light" panose="02000403000000020004" pitchFamily="50" charset="-127"/>
                 <a:ea typeface="Pretendard Light" panose="02000403000000020004" pitchFamily="50" charset="-127"/>
                 <a:cs typeface="Pretendard Light" panose="02000403000000020004" pitchFamily="50" charset="-127"/>
@@ -18063,7 +19438,7 @@
             </a:r>
           </a:p>
           <a:p>
-            <a:endParaRPr lang="en-US" altLang="ko-KR" sz="800" dirty="0">
+            <a:endParaRPr lang="en-US" altLang="ko-KR" sz="400" dirty="0">
               <a:latin typeface="Pretendard Light" panose="02000403000000020004" pitchFamily="50" charset="-127"/>
               <a:ea typeface="Pretendard Light" panose="02000403000000020004" pitchFamily="50" charset="-127"/>
               <a:cs typeface="Pretendard Light" panose="02000403000000020004" pitchFamily="50" charset="-127"/>
@@ -18071,7 +19446,7 @@
           </a:p>
           <a:p>
             <a:r>
-              <a:rPr lang="en-US" altLang="ko-KR" sz="800" dirty="0">
+              <a:rPr lang="en-US" altLang="ko-KR" sz="400" dirty="0">
                 <a:latin typeface="Pretendard Light" panose="02000403000000020004" pitchFamily="50" charset="-127"/>
                 <a:ea typeface="Pretendard Light" panose="02000403000000020004" pitchFamily="50" charset="-127"/>
                 <a:cs typeface="Pretendard Light" panose="02000403000000020004" pitchFamily="50" charset="-127"/>
@@ -18081,7 +19456,7 @@
           </a:p>
           <a:p>
             <a:r>
-              <a:rPr lang="en-US" altLang="ko-KR" sz="800" dirty="0">
+              <a:rPr lang="en-US" altLang="ko-KR" sz="400" dirty="0">
                 <a:latin typeface="Pretendard Light" panose="02000403000000020004" pitchFamily="50" charset="-127"/>
                 <a:ea typeface="Pretendard Light" panose="02000403000000020004" pitchFamily="50" charset="-127"/>
                 <a:cs typeface="Pretendard Light" panose="02000403000000020004" pitchFamily="50" charset="-127"/>
@@ -18091,7 +19466,7 @@
           </a:p>
           <a:p>
             <a:r>
-              <a:rPr lang="en-US" altLang="ko-KR" sz="800" dirty="0">
+              <a:rPr lang="en-US" altLang="ko-KR" sz="400" dirty="0">
                 <a:latin typeface="Pretendard Light" panose="02000403000000020004" pitchFamily="50" charset="-127"/>
                 <a:ea typeface="Pretendard Light" panose="02000403000000020004" pitchFamily="50" charset="-127"/>
                 <a:cs typeface="Pretendard Light" panose="02000403000000020004" pitchFamily="50" charset="-127"/>
@@ -18099,7 +19474,7 @@
               <a:t>lcd /</a:t>
             </a:r>
             <a:r>
-              <a:rPr lang="en-US" altLang="ko-KR" sz="800" dirty="0" err="1">
+              <a:rPr lang="en-US" altLang="ko-KR" sz="400" dirty="0" err="1">
                 <a:latin typeface="Pretendard Light" panose="02000403000000020004" pitchFamily="50" charset="-127"/>
                 <a:ea typeface="Pretendard Light" panose="02000403000000020004" pitchFamily="50" charset="-127"/>
                 <a:cs typeface="Pretendard Light" panose="02000403000000020004" pitchFamily="50" charset="-127"/>
@@ -18107,7 +19482,7 @@
               <a:t>mnt</a:t>
             </a:r>
             <a:r>
-              <a:rPr lang="en-US" altLang="ko-KR" sz="800" dirty="0">
+              <a:rPr lang="en-US" altLang="ko-KR" sz="400" dirty="0">
                 <a:latin typeface="Pretendard Light" panose="02000403000000020004" pitchFamily="50" charset="-127"/>
                 <a:ea typeface="Pretendard Light" panose="02000403000000020004" pitchFamily="50" charset="-127"/>
                 <a:cs typeface="Pretendard Light" panose="02000403000000020004" pitchFamily="50" charset="-127"/>
@@ -18117,7 +19492,7 @@
           </a:p>
           <a:p>
             <a:r>
-              <a:rPr lang="en-US" altLang="ko-KR" sz="800" dirty="0">
+              <a:rPr lang="en-US" altLang="ko-KR" sz="400" dirty="0">
                 <a:latin typeface="Pretendard Light" panose="02000403000000020004" pitchFamily="50" charset="-127"/>
                 <a:ea typeface="Pretendard Light" panose="02000403000000020004" pitchFamily="50" charset="-127"/>
                 <a:cs typeface="Pretendard Light" panose="02000403000000020004" pitchFamily="50" charset="-127"/>
@@ -18126,7 +19501,7 @@
             </a:r>
           </a:p>
           <a:p>
-            <a:endParaRPr lang="en-US" altLang="ko-KR" sz="800" dirty="0">
+            <a:endParaRPr lang="en-US" altLang="ko-KR" sz="400" dirty="0">
               <a:latin typeface="Pretendard Light" panose="02000403000000020004" pitchFamily="50" charset="-127"/>
               <a:ea typeface="Pretendard Light" panose="02000403000000020004" pitchFamily="50" charset="-127"/>
               <a:cs typeface="Pretendard Light" panose="02000403000000020004" pitchFamily="50" charset="-127"/>
@@ -18134,7 +19509,7 @@
           </a:p>
           <a:p>
             <a:r>
-              <a:rPr lang="en-US" altLang="ko-KR" sz="800" dirty="0">
+              <a:rPr lang="en-US" altLang="ko-KR" sz="400" dirty="0">
                 <a:latin typeface="Pretendard Light" panose="02000403000000020004" pitchFamily="50" charset="-127"/>
                 <a:ea typeface="Pretendard Light" panose="02000403000000020004" pitchFamily="50" charset="-127"/>
                 <a:cs typeface="Pretendard Light" panose="02000403000000020004" pitchFamily="50" charset="-127"/>
@@ -18144,7 +19519,7 @@
           </a:p>
           <a:p>
             <a:r>
-              <a:rPr lang="en-US" altLang="ko-KR" sz="800" dirty="0">
+              <a:rPr lang="en-US" altLang="ko-KR" sz="400" dirty="0">
                 <a:latin typeface="Pretendard Light" panose="02000403000000020004" pitchFamily="50" charset="-127"/>
                 <a:ea typeface="Pretendard Light" panose="02000403000000020004" pitchFamily="50" charset="-127"/>
                 <a:cs typeface="Pretendard Light" panose="02000403000000020004" pitchFamily="50" charset="-127"/>
@@ -18154,7 +19529,7 @@
           </a:p>
           <a:p>
             <a:r>
-              <a:rPr lang="en-US" altLang="ko-KR" sz="800" dirty="0">
+              <a:rPr lang="en-US" altLang="ko-KR" sz="400" dirty="0">
                 <a:latin typeface="Pretendard Light" panose="02000403000000020004" pitchFamily="50" charset="-127"/>
                 <a:ea typeface="Pretendard Light" panose="02000403000000020004" pitchFamily="50" charset="-127"/>
                 <a:cs typeface="Pretendard Light" panose="02000403000000020004" pitchFamily="50" charset="-127"/>
@@ -18162,7 +19537,7 @@
               <a:t>lcd /</a:t>
             </a:r>
             <a:r>
-              <a:rPr lang="en-US" altLang="ko-KR" sz="800" dirty="0" err="1">
+              <a:rPr lang="en-US" altLang="ko-KR" sz="400" dirty="0" err="1">
                 <a:latin typeface="Pretendard Light" panose="02000403000000020004" pitchFamily="50" charset="-127"/>
                 <a:ea typeface="Pretendard Light" panose="02000403000000020004" pitchFamily="50" charset="-127"/>
                 <a:cs typeface="Pretendard Light" panose="02000403000000020004" pitchFamily="50" charset="-127"/>
@@ -18170,7 +19545,7 @@
               <a:t>mnt</a:t>
             </a:r>
             <a:r>
-              <a:rPr lang="en-US" altLang="ko-KR" sz="800" dirty="0">
+              <a:rPr lang="en-US" altLang="ko-KR" sz="400" dirty="0">
                 <a:latin typeface="Pretendard Light" panose="02000403000000020004" pitchFamily="50" charset="-127"/>
                 <a:ea typeface="Pretendard Light" panose="02000403000000020004" pitchFamily="50" charset="-127"/>
                 <a:cs typeface="Pretendard Light" panose="02000403000000020004" pitchFamily="50" charset="-127"/>
@@ -18180,7 +19555,7 @@
           </a:p>
           <a:p>
             <a:r>
-              <a:rPr lang="en-US" altLang="ko-KR" sz="800" dirty="0">
+              <a:rPr lang="en-US" altLang="ko-KR" sz="400" dirty="0">
                 <a:latin typeface="Pretendard Light" panose="02000403000000020004" pitchFamily="50" charset="-127"/>
                 <a:ea typeface="Pretendard Light" panose="02000403000000020004" pitchFamily="50" charset="-127"/>
                 <a:cs typeface="Pretendard Light" panose="02000403000000020004" pitchFamily="50" charset="-127"/>
@@ -18189,7 +19564,7 @@
             </a:r>
           </a:p>
           <a:p>
-            <a:endParaRPr lang="en-US" altLang="ko-KR" sz="800" dirty="0">
+            <a:endParaRPr lang="en-US" altLang="ko-KR" sz="400" dirty="0">
               <a:latin typeface="Pretendard Light" panose="02000403000000020004" pitchFamily="50" charset="-127"/>
               <a:ea typeface="Pretendard Light" panose="02000403000000020004" pitchFamily="50" charset="-127"/>
               <a:cs typeface="Pretendard Light" panose="02000403000000020004" pitchFamily="50" charset="-127"/>
@@ -18197,7 +19572,7 @@
           </a:p>
           <a:p>
             <a:r>
-              <a:rPr lang="en-US" altLang="ko-KR" sz="800" dirty="0">
+              <a:rPr lang="en-US" altLang="ko-KR" sz="400" dirty="0">
                 <a:latin typeface="Pretendard Light" panose="02000403000000020004" pitchFamily="50" charset="-127"/>
                 <a:ea typeface="Pretendard Light" panose="02000403000000020004" pitchFamily="50" charset="-127"/>
                 <a:cs typeface="Pretendard Light" panose="02000403000000020004" pitchFamily="50" charset="-127"/>
@@ -18207,7 +19582,7 @@
           </a:p>
           <a:p>
             <a:r>
-              <a:rPr lang="en-US" altLang="ko-KR" sz="800" dirty="0">
+              <a:rPr lang="en-US" altLang="ko-KR" sz="400" dirty="0">
                 <a:latin typeface="Pretendard Light" panose="02000403000000020004" pitchFamily="50" charset="-127"/>
                 <a:ea typeface="Pretendard Light" panose="02000403000000020004" pitchFamily="50" charset="-127"/>
                 <a:cs typeface="Pretendard Light" panose="02000403000000020004" pitchFamily="50" charset="-127"/>
@@ -18217,7 +19592,7 @@
           </a:p>
           <a:p>
             <a:r>
-              <a:rPr lang="en-US" altLang="ko-KR" sz="800" dirty="0">
+              <a:rPr lang="en-US" altLang="ko-KR" sz="400" dirty="0">
                 <a:latin typeface="Pretendard Light" panose="02000403000000020004" pitchFamily="50" charset="-127"/>
                 <a:ea typeface="Pretendard Light" panose="02000403000000020004" pitchFamily="50" charset="-127"/>
                 <a:cs typeface="Pretendard Light" panose="02000403000000020004" pitchFamily="50" charset="-127"/>
@@ -18225,7 +19600,7 @@
               <a:t>lcd /</a:t>
             </a:r>
             <a:r>
-              <a:rPr lang="en-US" altLang="ko-KR" sz="800" dirty="0" err="1">
+              <a:rPr lang="en-US" altLang="ko-KR" sz="400" dirty="0" err="1">
                 <a:latin typeface="Pretendard Light" panose="02000403000000020004" pitchFamily="50" charset="-127"/>
                 <a:ea typeface="Pretendard Light" panose="02000403000000020004" pitchFamily="50" charset="-127"/>
                 <a:cs typeface="Pretendard Light" panose="02000403000000020004" pitchFamily="50" charset="-127"/>
@@ -18233,7 +19608,7 @@
               <a:t>mnt</a:t>
             </a:r>
             <a:r>
-              <a:rPr lang="en-US" altLang="ko-KR" sz="800" dirty="0">
+              <a:rPr lang="en-US" altLang="ko-KR" sz="400" dirty="0">
                 <a:latin typeface="Pretendard Light" panose="02000403000000020004" pitchFamily="50" charset="-127"/>
                 <a:ea typeface="Pretendard Light" panose="02000403000000020004" pitchFamily="50" charset="-127"/>
                 <a:cs typeface="Pretendard Light" panose="02000403000000020004" pitchFamily="50" charset="-127"/>
@@ -18243,7 +19618,7 @@
           </a:p>
           <a:p>
             <a:r>
-              <a:rPr lang="en-US" altLang="ko-KR" sz="800" dirty="0">
+              <a:rPr lang="en-US" altLang="ko-KR" sz="400" dirty="0">
                 <a:latin typeface="Pretendard Light" panose="02000403000000020004" pitchFamily="50" charset="-127"/>
                 <a:ea typeface="Pretendard Light" panose="02000403000000020004" pitchFamily="50" charset="-127"/>
                 <a:cs typeface="Pretendard Light" panose="02000403000000020004" pitchFamily="50" charset="-127"/>
@@ -18252,7 +19627,7 @@
             </a:r>
           </a:p>
           <a:p>
-            <a:endParaRPr lang="en-US" altLang="ko-KR" sz="800" dirty="0">
+            <a:endParaRPr lang="en-US" altLang="ko-KR" sz="400" dirty="0">
               <a:latin typeface="Pretendard Light" panose="02000403000000020004" pitchFamily="50" charset="-127"/>
               <a:ea typeface="Pretendard Light" panose="02000403000000020004" pitchFamily="50" charset="-127"/>
               <a:cs typeface="Pretendard Light" panose="02000403000000020004" pitchFamily="50" charset="-127"/>
@@ -18260,7 +19635,7 @@
           </a:p>
           <a:p>
             <a:r>
-              <a:rPr lang="en-US" altLang="ko-KR" sz="800" dirty="0">
+              <a:rPr lang="en-US" altLang="ko-KR" sz="400" dirty="0">
                 <a:latin typeface="Pretendard Light" panose="02000403000000020004" pitchFamily="50" charset="-127"/>
                 <a:ea typeface="Pretendard Light" panose="02000403000000020004" pitchFamily="50" charset="-127"/>
                 <a:cs typeface="Pretendard Light" panose="02000403000000020004" pitchFamily="50" charset="-127"/>
@@ -18270,7 +19645,7 @@
           </a:p>
           <a:p>
             <a:r>
-              <a:rPr lang="en-US" altLang="ko-KR" sz="800" dirty="0">
+              <a:rPr lang="en-US" altLang="ko-KR" sz="400" dirty="0">
                 <a:latin typeface="Pretendard Light" panose="02000403000000020004" pitchFamily="50" charset="-127"/>
                 <a:ea typeface="Pretendard Light" panose="02000403000000020004" pitchFamily="50" charset="-127"/>
                 <a:cs typeface="Pretendard Light" panose="02000403000000020004" pitchFamily="50" charset="-127"/>
@@ -18280,7 +19655,7 @@
           </a:p>
           <a:p>
             <a:r>
-              <a:rPr lang="en-US" altLang="ko-KR" sz="800" dirty="0">
+              <a:rPr lang="en-US" altLang="ko-KR" sz="400" dirty="0">
                 <a:latin typeface="Pretendard Light" panose="02000403000000020004" pitchFamily="50" charset="-127"/>
                 <a:ea typeface="Pretendard Light" panose="02000403000000020004" pitchFamily="50" charset="-127"/>
                 <a:cs typeface="Pretendard Light" panose="02000403000000020004" pitchFamily="50" charset="-127"/>
@@ -18288,7 +19663,7 @@
               <a:t>lcd /</a:t>
             </a:r>
             <a:r>
-              <a:rPr lang="en-US" altLang="ko-KR" sz="800" dirty="0" err="1">
+              <a:rPr lang="en-US" altLang="ko-KR" sz="400" dirty="0" err="1">
                 <a:latin typeface="Pretendard Light" panose="02000403000000020004" pitchFamily="50" charset="-127"/>
                 <a:ea typeface="Pretendard Light" panose="02000403000000020004" pitchFamily="50" charset="-127"/>
                 <a:cs typeface="Pretendard Light" panose="02000403000000020004" pitchFamily="50" charset="-127"/>
@@ -18296,7 +19671,7 @@
               <a:t>mnt</a:t>
             </a:r>
             <a:r>
-              <a:rPr lang="en-US" altLang="ko-KR" sz="800" dirty="0">
+              <a:rPr lang="en-US" altLang="ko-KR" sz="400" dirty="0">
                 <a:latin typeface="Pretendard Light" panose="02000403000000020004" pitchFamily="50" charset="-127"/>
                 <a:ea typeface="Pretendard Light" panose="02000403000000020004" pitchFamily="50" charset="-127"/>
                 <a:cs typeface="Pretendard Light" panose="02000403000000020004" pitchFamily="50" charset="-127"/>
@@ -18306,7 +19681,7 @@
           </a:p>
           <a:p>
             <a:r>
-              <a:rPr lang="en-US" altLang="ko-KR" sz="800" dirty="0">
+              <a:rPr lang="en-US" altLang="ko-KR" sz="400" dirty="0">
                 <a:latin typeface="Pretendard Light" panose="02000403000000020004" pitchFamily="50" charset="-127"/>
                 <a:ea typeface="Pretendard Light" panose="02000403000000020004" pitchFamily="50" charset="-127"/>
                 <a:cs typeface="Pretendard Light" panose="02000403000000020004" pitchFamily="50" charset="-127"/>
@@ -18315,7 +19690,7 @@
             </a:r>
           </a:p>
           <a:p>
-            <a:endParaRPr lang="en-US" altLang="ko-KR" sz="800" dirty="0">
+            <a:endParaRPr lang="en-US" altLang="ko-KR" sz="400" dirty="0">
               <a:latin typeface="Pretendard Light" panose="02000403000000020004" pitchFamily="50" charset="-127"/>
               <a:ea typeface="Pretendard Light" panose="02000403000000020004" pitchFamily="50" charset="-127"/>
               <a:cs typeface="Pretendard Light" panose="02000403000000020004" pitchFamily="50" charset="-127"/>
@@ -18323,7 +19698,7 @@
           </a:p>
           <a:p>
             <a:r>
-              <a:rPr lang="en-US" altLang="ko-KR" sz="800" dirty="0">
+              <a:rPr lang="en-US" altLang="ko-KR" sz="400" dirty="0">
                 <a:latin typeface="Pretendard Light" panose="02000403000000020004" pitchFamily="50" charset="-127"/>
                 <a:ea typeface="Pretendard Light" panose="02000403000000020004" pitchFamily="50" charset="-127"/>
                 <a:cs typeface="Pretendard Light" panose="02000403000000020004" pitchFamily="50" charset="-127"/>
@@ -18333,7 +19708,7 @@
           </a:p>
           <a:p>
             <a:r>
-              <a:rPr lang="en-US" altLang="ko-KR" sz="800" dirty="0">
+              <a:rPr lang="en-US" altLang="ko-KR" sz="400" dirty="0">
                 <a:latin typeface="Pretendard Light" panose="02000403000000020004" pitchFamily="50" charset="-127"/>
                 <a:ea typeface="Pretendard Light" panose="02000403000000020004" pitchFamily="50" charset="-127"/>
                 <a:cs typeface="Pretendard Light" panose="02000403000000020004" pitchFamily="50" charset="-127"/>
@@ -18343,7 +19718,7 @@
           </a:p>
           <a:p>
             <a:r>
-              <a:rPr lang="en-US" altLang="ko-KR" sz="800" dirty="0">
+              <a:rPr lang="en-US" altLang="ko-KR" sz="400" dirty="0">
                 <a:latin typeface="Pretendard Light" panose="02000403000000020004" pitchFamily="50" charset="-127"/>
                 <a:ea typeface="Pretendard Light" panose="02000403000000020004" pitchFamily="50" charset="-127"/>
                 <a:cs typeface="Pretendard Light" panose="02000403000000020004" pitchFamily="50" charset="-127"/>
@@ -18351,7 +19726,7 @@
               <a:t>lcd /</a:t>
             </a:r>
             <a:r>
-              <a:rPr lang="en-US" altLang="ko-KR" sz="800" dirty="0" err="1">
+              <a:rPr lang="en-US" altLang="ko-KR" sz="400" dirty="0" err="1">
                 <a:latin typeface="Pretendard Light" panose="02000403000000020004" pitchFamily="50" charset="-127"/>
                 <a:ea typeface="Pretendard Light" panose="02000403000000020004" pitchFamily="50" charset="-127"/>
                 <a:cs typeface="Pretendard Light" panose="02000403000000020004" pitchFamily="50" charset="-127"/>
@@ -18359,7 +19734,7 @@
               <a:t>mnt</a:t>
             </a:r>
             <a:r>
-              <a:rPr lang="en-US" altLang="ko-KR" sz="800" dirty="0">
+              <a:rPr lang="en-US" altLang="ko-KR" sz="400" dirty="0">
                 <a:latin typeface="Pretendard Light" panose="02000403000000020004" pitchFamily="50" charset="-127"/>
                 <a:ea typeface="Pretendard Light" panose="02000403000000020004" pitchFamily="50" charset="-127"/>
                 <a:cs typeface="Pretendard Light" panose="02000403000000020004" pitchFamily="50" charset="-127"/>
@@ -18369,7 +19744,7 @@
           </a:p>
           <a:p>
             <a:r>
-              <a:rPr lang="en-US" altLang="ko-KR" sz="800" dirty="0">
+              <a:rPr lang="en-US" altLang="ko-KR" sz="400" dirty="0">
                 <a:latin typeface="Pretendard Light" panose="02000403000000020004" pitchFamily="50" charset="-127"/>
                 <a:ea typeface="Pretendard Light" panose="02000403000000020004" pitchFamily="50" charset="-127"/>
                 <a:cs typeface="Pretendard Light" panose="02000403000000020004" pitchFamily="50" charset="-127"/>
@@ -18378,7 +19753,7 @@
             </a:r>
           </a:p>
           <a:p>
-            <a:endParaRPr lang="en-US" altLang="ko-KR" sz="800" dirty="0">
+            <a:endParaRPr lang="en-US" altLang="ko-KR" sz="400" dirty="0">
               <a:latin typeface="Pretendard Light" panose="02000403000000020004" pitchFamily="50" charset="-127"/>
               <a:ea typeface="Pretendard Light" panose="02000403000000020004" pitchFamily="50" charset="-127"/>
               <a:cs typeface="Pretendard Light" panose="02000403000000020004" pitchFamily="50" charset="-127"/>
@@ -18386,7 +19761,7 @@
           </a:p>
           <a:p>
             <a:r>
-              <a:rPr lang="en-US" altLang="ko-KR" sz="800" dirty="0">
+              <a:rPr lang="en-US" altLang="ko-KR" sz="400" dirty="0">
                 <a:latin typeface="Pretendard Light" panose="02000403000000020004" pitchFamily="50" charset="-127"/>
                 <a:ea typeface="Pretendard Light" panose="02000403000000020004" pitchFamily="50" charset="-127"/>
                 <a:cs typeface="Pretendard Light" panose="02000403000000020004" pitchFamily="50" charset="-127"/>
@@ -18396,7 +19771,7 @@
           </a:p>
           <a:p>
             <a:r>
-              <a:rPr lang="en-US" altLang="ko-KR" sz="800" dirty="0">
+              <a:rPr lang="en-US" altLang="ko-KR" sz="400" dirty="0">
                 <a:latin typeface="Pretendard Light" panose="02000403000000020004" pitchFamily="50" charset="-127"/>
                 <a:ea typeface="Pretendard Light" panose="02000403000000020004" pitchFamily="50" charset="-127"/>
                 <a:cs typeface="Pretendard Light" panose="02000403000000020004" pitchFamily="50" charset="-127"/>
@@ -18406,7 +19781,7 @@
           </a:p>
           <a:p>
             <a:r>
-              <a:rPr lang="en-US" altLang="ko-KR" sz="800" dirty="0">
+              <a:rPr lang="en-US" altLang="ko-KR" sz="400" dirty="0">
                 <a:latin typeface="Pretendard Light" panose="02000403000000020004" pitchFamily="50" charset="-127"/>
                 <a:ea typeface="Pretendard Light" panose="02000403000000020004" pitchFamily="50" charset="-127"/>
                 <a:cs typeface="Pretendard Light" panose="02000403000000020004" pitchFamily="50" charset="-127"/>
@@ -18414,7 +19789,7 @@
               <a:t>lcd /</a:t>
             </a:r>
             <a:r>
-              <a:rPr lang="en-US" altLang="ko-KR" sz="800" dirty="0" err="1">
+              <a:rPr lang="en-US" altLang="ko-KR" sz="400" dirty="0" err="1">
                 <a:latin typeface="Pretendard Light" panose="02000403000000020004" pitchFamily="50" charset="-127"/>
                 <a:ea typeface="Pretendard Light" panose="02000403000000020004" pitchFamily="50" charset="-127"/>
                 <a:cs typeface="Pretendard Light" panose="02000403000000020004" pitchFamily="50" charset="-127"/>
@@ -18422,7 +19797,7 @@
               <a:t>mnt</a:t>
             </a:r>
             <a:r>
-              <a:rPr lang="en-US" altLang="ko-KR" sz="800" dirty="0">
+              <a:rPr lang="en-US" altLang="ko-KR" sz="400" dirty="0">
                 <a:latin typeface="Pretendard Light" panose="02000403000000020004" pitchFamily="50" charset="-127"/>
                 <a:ea typeface="Pretendard Light" panose="02000403000000020004" pitchFamily="50" charset="-127"/>
                 <a:cs typeface="Pretendard Light" panose="02000403000000020004" pitchFamily="50" charset="-127"/>
@@ -18432,7 +19807,7 @@
           </a:p>
           <a:p>
             <a:r>
-              <a:rPr lang="en-US" altLang="ko-KR" sz="800" dirty="0">
+              <a:rPr lang="en-US" altLang="ko-KR" sz="400" dirty="0">
                 <a:latin typeface="Pretendard Light" panose="02000403000000020004" pitchFamily="50" charset="-127"/>
                 <a:ea typeface="Pretendard Light" panose="02000403000000020004" pitchFamily="50" charset="-127"/>
                 <a:cs typeface="Pretendard Light" panose="02000403000000020004" pitchFamily="50" charset="-127"/>
@@ -18441,7 +19816,7 @@
             </a:r>
           </a:p>
           <a:p>
-            <a:endParaRPr lang="en-US" altLang="ko-KR" sz="800" dirty="0">
+            <a:endParaRPr lang="en-US" altLang="ko-KR" sz="400" dirty="0">
               <a:latin typeface="Pretendard Light" panose="02000403000000020004" pitchFamily="50" charset="-127"/>
               <a:ea typeface="Pretendard Light" panose="02000403000000020004" pitchFamily="50" charset="-127"/>
               <a:cs typeface="Pretendard Light" panose="02000403000000020004" pitchFamily="50" charset="-127"/>
@@ -18449,7 +19824,7 @@
           </a:p>
           <a:p>
             <a:r>
-              <a:rPr lang="en-US" altLang="ko-KR" sz="800" dirty="0">
+              <a:rPr lang="en-US" altLang="ko-KR" sz="400" dirty="0">
                 <a:latin typeface="Pretendard Light" panose="02000403000000020004" pitchFamily="50" charset="-127"/>
                 <a:ea typeface="Pretendard Light" panose="02000403000000020004" pitchFamily="50" charset="-127"/>
                 <a:cs typeface="Pretendard Light" panose="02000403000000020004" pitchFamily="50" charset="-127"/>
@@ -18459,7 +19834,7 @@
           </a:p>
           <a:p>
             <a:r>
-              <a:rPr lang="en-US" altLang="ko-KR" sz="800" dirty="0">
+              <a:rPr lang="en-US" altLang="ko-KR" sz="400" dirty="0">
                 <a:latin typeface="Pretendard Light" panose="02000403000000020004" pitchFamily="50" charset="-127"/>
                 <a:ea typeface="Pretendard Light" panose="02000403000000020004" pitchFamily="50" charset="-127"/>
                 <a:cs typeface="Pretendard Light" panose="02000403000000020004" pitchFamily="50" charset="-127"/>
@@ -18469,7 +19844,7 @@
           </a:p>
           <a:p>
             <a:r>
-              <a:rPr lang="en-US" altLang="ko-KR" sz="800" dirty="0">
+              <a:rPr lang="en-US" altLang="ko-KR" sz="400" dirty="0">
                 <a:latin typeface="Pretendard Light" panose="02000403000000020004" pitchFamily="50" charset="-127"/>
                 <a:ea typeface="Pretendard Light" panose="02000403000000020004" pitchFamily="50" charset="-127"/>
                 <a:cs typeface="Pretendard Light" panose="02000403000000020004" pitchFamily="50" charset="-127"/>
@@ -18477,7 +19852,7 @@
               <a:t>lcd /</a:t>
             </a:r>
             <a:r>
-              <a:rPr lang="en-US" altLang="ko-KR" sz="800" dirty="0" err="1">
+              <a:rPr lang="en-US" altLang="ko-KR" sz="400" dirty="0" err="1">
                 <a:latin typeface="Pretendard Light" panose="02000403000000020004" pitchFamily="50" charset="-127"/>
                 <a:ea typeface="Pretendard Light" panose="02000403000000020004" pitchFamily="50" charset="-127"/>
                 <a:cs typeface="Pretendard Light" panose="02000403000000020004" pitchFamily="50" charset="-127"/>
@@ -18485,7 +19860,7 @@
               <a:t>mnt</a:t>
             </a:r>
             <a:r>
-              <a:rPr lang="en-US" altLang="ko-KR" sz="800" dirty="0">
+              <a:rPr lang="en-US" altLang="ko-KR" sz="400" dirty="0">
                 <a:latin typeface="Pretendard Light" panose="02000403000000020004" pitchFamily="50" charset="-127"/>
                 <a:ea typeface="Pretendard Light" panose="02000403000000020004" pitchFamily="50" charset="-127"/>
                 <a:cs typeface="Pretendard Light" panose="02000403000000020004" pitchFamily="50" charset="-127"/>
@@ -18495,7 +19870,7 @@
           </a:p>
           <a:p>
             <a:r>
-              <a:rPr lang="en-US" altLang="ko-KR" sz="800" dirty="0">
+              <a:rPr lang="en-US" altLang="ko-KR" sz="400" dirty="0">
                 <a:latin typeface="Pretendard Light" panose="02000403000000020004" pitchFamily="50" charset="-127"/>
                 <a:ea typeface="Pretendard Light" panose="02000403000000020004" pitchFamily="50" charset="-127"/>
                 <a:cs typeface="Pretendard Light" panose="02000403000000020004" pitchFamily="50" charset="-127"/>
@@ -18504,7 +19879,7 @@
             </a:r>
           </a:p>
           <a:p>
-            <a:endParaRPr lang="en-US" altLang="ko-KR" sz="800" dirty="0">
+            <a:endParaRPr lang="en-US" altLang="ko-KR" sz="400" dirty="0">
               <a:latin typeface="Pretendard Light" panose="02000403000000020004" pitchFamily="50" charset="-127"/>
               <a:ea typeface="Pretendard Light" panose="02000403000000020004" pitchFamily="50" charset="-127"/>
               <a:cs typeface="Pretendard Light" panose="02000403000000020004" pitchFamily="50" charset="-127"/>
@@ -18512,7 +19887,7 @@
           </a:p>
           <a:p>
             <a:r>
-              <a:rPr lang="en-US" altLang="ko-KR" sz="800" dirty="0">
+              <a:rPr lang="en-US" altLang="ko-KR" sz="400" dirty="0">
                 <a:latin typeface="Pretendard Light" panose="02000403000000020004" pitchFamily="50" charset="-127"/>
                 <a:ea typeface="Pretendard Light" panose="02000403000000020004" pitchFamily="50" charset="-127"/>
                 <a:cs typeface="Pretendard Light" panose="02000403000000020004" pitchFamily="50" charset="-127"/>
@@ -18522,7 +19897,7 @@
           </a:p>
           <a:p>
             <a:r>
-              <a:rPr lang="en-US" altLang="ko-KR" sz="800" dirty="0">
+              <a:rPr lang="en-US" altLang="ko-KR" sz="400" dirty="0">
                 <a:latin typeface="Pretendard Light" panose="02000403000000020004" pitchFamily="50" charset="-127"/>
                 <a:ea typeface="Pretendard Light" panose="02000403000000020004" pitchFamily="50" charset="-127"/>
                 <a:cs typeface="Pretendard Light" panose="02000403000000020004" pitchFamily="50" charset="-127"/>
@@ -18532,7 +19907,7 @@
           </a:p>
           <a:p>
             <a:r>
-              <a:rPr lang="en-US" altLang="ko-KR" sz="800" dirty="0">
+              <a:rPr lang="en-US" altLang="ko-KR" sz="400" dirty="0">
                 <a:latin typeface="Pretendard Light" panose="02000403000000020004" pitchFamily="50" charset="-127"/>
                 <a:ea typeface="Pretendard Light" panose="02000403000000020004" pitchFamily="50" charset="-127"/>
                 <a:cs typeface="Pretendard Light" panose="02000403000000020004" pitchFamily="50" charset="-127"/>
@@ -18540,7 +19915,7 @@
               <a:t>lcd /</a:t>
             </a:r>
             <a:r>
-              <a:rPr lang="en-US" altLang="ko-KR" sz="800" dirty="0" err="1">
+              <a:rPr lang="en-US" altLang="ko-KR" sz="400" dirty="0" err="1">
                 <a:latin typeface="Pretendard Light" panose="02000403000000020004" pitchFamily="50" charset="-127"/>
                 <a:ea typeface="Pretendard Light" panose="02000403000000020004" pitchFamily="50" charset="-127"/>
                 <a:cs typeface="Pretendard Light" panose="02000403000000020004" pitchFamily="50" charset="-127"/>
@@ -18548,7 +19923,7 @@
               <a:t>mnt</a:t>
             </a:r>
             <a:r>
-              <a:rPr lang="en-US" altLang="ko-KR" sz="800" dirty="0">
+              <a:rPr lang="en-US" altLang="ko-KR" sz="400" dirty="0">
                 <a:latin typeface="Pretendard Light" panose="02000403000000020004" pitchFamily="50" charset="-127"/>
                 <a:ea typeface="Pretendard Light" panose="02000403000000020004" pitchFamily="50" charset="-127"/>
                 <a:cs typeface="Pretendard Light" panose="02000403000000020004" pitchFamily="50" charset="-127"/>
@@ -18558,7 +19933,7 @@
           </a:p>
           <a:p>
             <a:r>
-              <a:rPr lang="en-US" altLang="ko-KR" sz="800" dirty="0">
+              <a:rPr lang="en-US" altLang="ko-KR" sz="400" dirty="0">
                 <a:latin typeface="Pretendard Light" panose="02000403000000020004" pitchFamily="50" charset="-127"/>
                 <a:ea typeface="Pretendard Light" panose="02000403000000020004" pitchFamily="50" charset="-127"/>
                 <a:cs typeface="Pretendard Light" panose="02000403000000020004" pitchFamily="50" charset="-127"/>
@@ -18567,7 +19942,7 @@
             </a:r>
           </a:p>
           <a:p>
-            <a:endParaRPr lang="en-US" altLang="ko-KR" sz="800" dirty="0">
+            <a:endParaRPr lang="en-US" altLang="ko-KR" sz="400" dirty="0">
               <a:latin typeface="Pretendard Light" panose="02000403000000020004" pitchFamily="50" charset="-127"/>
               <a:ea typeface="Pretendard Light" panose="02000403000000020004" pitchFamily="50" charset="-127"/>
               <a:cs typeface="Pretendard Light" panose="02000403000000020004" pitchFamily="50" charset="-127"/>
@@ -18575,7 +19950,7 @@
           </a:p>
           <a:p>
             <a:r>
-              <a:rPr lang="en-US" altLang="ko-KR" sz="800" dirty="0">
+              <a:rPr lang="en-US" altLang="ko-KR" sz="400" dirty="0">
                 <a:latin typeface="Pretendard Light" panose="02000403000000020004" pitchFamily="50" charset="-127"/>
                 <a:ea typeface="Pretendard Light" panose="02000403000000020004" pitchFamily="50" charset="-127"/>
                 <a:cs typeface="Pretendard Light" panose="02000403000000020004" pitchFamily="50" charset="-127"/>
@@ -18585,7 +19960,7 @@
           </a:p>
           <a:p>
             <a:r>
-              <a:rPr lang="en-US" altLang="ko-KR" sz="800" dirty="0">
+              <a:rPr lang="en-US" altLang="ko-KR" sz="400" dirty="0">
                 <a:latin typeface="Pretendard Light" panose="02000403000000020004" pitchFamily="50" charset="-127"/>
                 <a:ea typeface="Pretendard Light" panose="02000403000000020004" pitchFamily="50" charset="-127"/>
                 <a:cs typeface="Pretendard Light" panose="02000403000000020004" pitchFamily="50" charset="-127"/>
@@ -18595,7 +19970,7 @@
           </a:p>
           <a:p>
             <a:r>
-              <a:rPr lang="en-US" altLang="ko-KR" sz="800" dirty="0">
+              <a:rPr lang="en-US" altLang="ko-KR" sz="400" dirty="0">
                 <a:latin typeface="Pretendard Light" panose="02000403000000020004" pitchFamily="50" charset="-127"/>
                 <a:ea typeface="Pretendard Light" panose="02000403000000020004" pitchFamily="50" charset="-127"/>
                 <a:cs typeface="Pretendard Light" panose="02000403000000020004" pitchFamily="50" charset="-127"/>
@@ -18603,7 +19978,7 @@
               <a:t>lcd /</a:t>
             </a:r>
             <a:r>
-              <a:rPr lang="en-US" altLang="ko-KR" sz="800" dirty="0" err="1">
+              <a:rPr lang="en-US" altLang="ko-KR" sz="400" dirty="0" err="1">
                 <a:latin typeface="Pretendard Light" panose="02000403000000020004" pitchFamily="50" charset="-127"/>
                 <a:ea typeface="Pretendard Light" panose="02000403000000020004" pitchFamily="50" charset="-127"/>
                 <a:cs typeface="Pretendard Light" panose="02000403000000020004" pitchFamily="50" charset="-127"/>
@@ -18611,7 +19986,7 @@
               <a:t>mnt</a:t>
             </a:r>
             <a:r>
-              <a:rPr lang="en-US" altLang="ko-KR" sz="800" dirty="0">
+              <a:rPr lang="en-US" altLang="ko-KR" sz="400" dirty="0">
                 <a:latin typeface="Pretendard Light" panose="02000403000000020004" pitchFamily="50" charset="-127"/>
                 <a:ea typeface="Pretendard Light" panose="02000403000000020004" pitchFamily="50" charset="-127"/>
                 <a:cs typeface="Pretendard Light" panose="02000403000000020004" pitchFamily="50" charset="-127"/>
@@ -18621,7 +19996,7 @@
           </a:p>
           <a:p>
             <a:r>
-              <a:rPr lang="en-US" altLang="ko-KR" sz="800" dirty="0">
+              <a:rPr lang="en-US" altLang="ko-KR" sz="400" dirty="0">
                 <a:latin typeface="Pretendard Light" panose="02000403000000020004" pitchFamily="50" charset="-127"/>
                 <a:ea typeface="Pretendard Light" panose="02000403000000020004" pitchFamily="50" charset="-127"/>
                 <a:cs typeface="Pretendard Light" panose="02000403000000020004" pitchFamily="50" charset="-127"/>
@@ -18630,7 +20005,7 @@
             </a:r>
           </a:p>
           <a:p>
-            <a:endParaRPr lang="en-US" altLang="ko-KR" sz="800" dirty="0">
+            <a:endParaRPr lang="en-US" altLang="ko-KR" sz="400" dirty="0">
               <a:latin typeface="Pretendard Light" panose="02000403000000020004" pitchFamily="50" charset="-127"/>
               <a:ea typeface="Pretendard Light" panose="02000403000000020004" pitchFamily="50" charset="-127"/>
               <a:cs typeface="Pretendard Light" panose="02000403000000020004" pitchFamily="50" charset="-127"/>
@@ -18638,7 +20013,7 @@
           </a:p>
           <a:p>
             <a:r>
-              <a:rPr lang="en-US" altLang="ko-KR" sz="800" dirty="0">
+              <a:rPr lang="en-US" altLang="ko-KR" sz="400" dirty="0">
                 <a:latin typeface="Pretendard Light" panose="02000403000000020004" pitchFamily="50" charset="-127"/>
                 <a:ea typeface="Pretendard Light" panose="02000403000000020004" pitchFamily="50" charset="-127"/>
                 <a:cs typeface="Pretendard Light" panose="02000403000000020004" pitchFamily="50" charset="-127"/>
@@ -18648,7 +20023,7 @@
           </a:p>
           <a:p>
             <a:r>
-              <a:rPr lang="en-US" altLang="ko-KR" sz="800" dirty="0">
+              <a:rPr lang="en-US" altLang="ko-KR" sz="400" dirty="0">
                 <a:latin typeface="Pretendard Light" panose="02000403000000020004" pitchFamily="50" charset="-127"/>
                 <a:ea typeface="Pretendard Light" panose="02000403000000020004" pitchFamily="50" charset="-127"/>
                 <a:cs typeface="Pretendard Light" panose="02000403000000020004" pitchFamily="50" charset="-127"/>
@@ -18658,7 +20033,7 @@
           </a:p>
           <a:p>
             <a:r>
-              <a:rPr lang="en-US" altLang="ko-KR" sz="800" dirty="0">
+              <a:rPr lang="en-US" altLang="ko-KR" sz="400" dirty="0">
                 <a:latin typeface="Pretendard Light" panose="02000403000000020004" pitchFamily="50" charset="-127"/>
                 <a:ea typeface="Pretendard Light" panose="02000403000000020004" pitchFamily="50" charset="-127"/>
                 <a:cs typeface="Pretendard Light" panose="02000403000000020004" pitchFamily="50" charset="-127"/>
@@ -18666,7 +20041,7 @@
               <a:t>lcd /</a:t>
             </a:r>
             <a:r>
-              <a:rPr lang="en-US" altLang="ko-KR" sz="800" dirty="0" err="1">
+              <a:rPr lang="en-US" altLang="ko-KR" sz="400" dirty="0" err="1">
                 <a:latin typeface="Pretendard Light" panose="02000403000000020004" pitchFamily="50" charset="-127"/>
                 <a:ea typeface="Pretendard Light" panose="02000403000000020004" pitchFamily="50" charset="-127"/>
                 <a:cs typeface="Pretendard Light" panose="02000403000000020004" pitchFamily="50" charset="-127"/>
@@ -18674,7 +20049,7 @@
               <a:t>mnt</a:t>
             </a:r>
             <a:r>
-              <a:rPr lang="en-US" altLang="ko-KR" sz="800" dirty="0">
+              <a:rPr lang="en-US" altLang="ko-KR" sz="400" dirty="0">
                 <a:latin typeface="Pretendard Light" panose="02000403000000020004" pitchFamily="50" charset="-127"/>
                 <a:ea typeface="Pretendard Light" panose="02000403000000020004" pitchFamily="50" charset="-127"/>
                 <a:cs typeface="Pretendard Light" panose="02000403000000020004" pitchFamily="50" charset="-127"/>
@@ -18684,7 +20059,7 @@
           </a:p>
           <a:p>
             <a:r>
-              <a:rPr lang="en-US" altLang="ko-KR" sz="800" dirty="0">
+              <a:rPr lang="en-US" altLang="ko-KR" sz="400" dirty="0">
                 <a:latin typeface="Pretendard Light" panose="02000403000000020004" pitchFamily="50" charset="-127"/>
                 <a:ea typeface="Pretendard Light" panose="02000403000000020004" pitchFamily="50" charset="-127"/>
                 <a:cs typeface="Pretendard Light" panose="02000403000000020004" pitchFamily="50" charset="-127"/>
@@ -18693,7 +20068,7 @@
             </a:r>
           </a:p>
           <a:p>
-            <a:endParaRPr lang="en-US" altLang="ko-KR" sz="800" dirty="0">
+            <a:endParaRPr lang="en-US" altLang="ko-KR" sz="400" dirty="0">
               <a:latin typeface="Pretendard Light" panose="02000403000000020004" pitchFamily="50" charset="-127"/>
               <a:ea typeface="Pretendard Light" panose="02000403000000020004" pitchFamily="50" charset="-127"/>
               <a:cs typeface="Pretendard Light" panose="02000403000000020004" pitchFamily="50" charset="-127"/>
@@ -18701,7 +20076,7 @@
           </a:p>
           <a:p>
             <a:r>
-              <a:rPr lang="en-US" altLang="ko-KR" sz="800" dirty="0">
+              <a:rPr lang="en-US" altLang="ko-KR" sz="400" dirty="0">
                 <a:latin typeface="Pretendard Light" panose="02000403000000020004" pitchFamily="50" charset="-127"/>
                 <a:ea typeface="Pretendard Light" panose="02000403000000020004" pitchFamily="50" charset="-127"/>
                 <a:cs typeface="Pretendard Light" panose="02000403000000020004" pitchFamily="50" charset="-127"/>
@@ -18711,7 +20086,7 @@
           </a:p>
           <a:p>
             <a:r>
-              <a:rPr lang="en-US" altLang="ko-KR" sz="800" dirty="0">
+              <a:rPr lang="en-US" altLang="ko-KR" sz="400" dirty="0">
                 <a:latin typeface="Pretendard Light" panose="02000403000000020004" pitchFamily="50" charset="-127"/>
                 <a:ea typeface="Pretendard Light" panose="02000403000000020004" pitchFamily="50" charset="-127"/>
                 <a:cs typeface="Pretendard Light" panose="02000403000000020004" pitchFamily="50" charset="-127"/>
@@ -18721,7 +20096,7 @@
           </a:p>
           <a:p>
             <a:r>
-              <a:rPr lang="en-US" altLang="ko-KR" sz="800" dirty="0">
+              <a:rPr lang="en-US" altLang="ko-KR" sz="400" dirty="0">
                 <a:latin typeface="Pretendard Light" panose="02000403000000020004" pitchFamily="50" charset="-127"/>
                 <a:ea typeface="Pretendard Light" panose="02000403000000020004" pitchFamily="50" charset="-127"/>
                 <a:cs typeface="Pretendard Light" panose="02000403000000020004" pitchFamily="50" charset="-127"/>
@@ -18729,7 +20104,7 @@
               <a:t>lcd /</a:t>
             </a:r>
             <a:r>
-              <a:rPr lang="en-US" altLang="ko-KR" sz="800" dirty="0" err="1">
+              <a:rPr lang="en-US" altLang="ko-KR" sz="400" dirty="0" err="1">
                 <a:latin typeface="Pretendard Light" panose="02000403000000020004" pitchFamily="50" charset="-127"/>
                 <a:ea typeface="Pretendard Light" panose="02000403000000020004" pitchFamily="50" charset="-127"/>
                 <a:cs typeface="Pretendard Light" panose="02000403000000020004" pitchFamily="50" charset="-127"/>
@@ -18737,7 +20112,7 @@
               <a:t>mnt</a:t>
             </a:r>
             <a:r>
-              <a:rPr lang="en-US" altLang="ko-KR" sz="800" dirty="0">
+              <a:rPr lang="en-US" altLang="ko-KR" sz="400" dirty="0">
                 <a:latin typeface="Pretendard Light" panose="02000403000000020004" pitchFamily="50" charset="-127"/>
                 <a:ea typeface="Pretendard Light" panose="02000403000000020004" pitchFamily="50" charset="-127"/>
                 <a:cs typeface="Pretendard Light" panose="02000403000000020004" pitchFamily="50" charset="-127"/>
@@ -18747,7 +20122,7 @@
           </a:p>
           <a:p>
             <a:r>
-              <a:rPr lang="en-US" altLang="ko-KR" sz="800" dirty="0">
+              <a:rPr lang="en-US" altLang="ko-KR" sz="400" dirty="0">
                 <a:latin typeface="Pretendard Light" panose="02000403000000020004" pitchFamily="50" charset="-127"/>
                 <a:ea typeface="Pretendard Light" panose="02000403000000020004" pitchFamily="50" charset="-127"/>
                 <a:cs typeface="Pretendard Light" panose="02000403000000020004" pitchFamily="50" charset="-127"/>
@@ -18756,7 +20131,7 @@
             </a:r>
           </a:p>
           <a:p>
-            <a:endParaRPr lang="en-US" altLang="ko-KR" sz="800" dirty="0">
+            <a:endParaRPr lang="en-US" altLang="ko-KR" sz="400" dirty="0">
               <a:latin typeface="Pretendard Light" panose="02000403000000020004" pitchFamily="50" charset="-127"/>
               <a:ea typeface="Pretendard Light" panose="02000403000000020004" pitchFamily="50" charset="-127"/>
               <a:cs typeface="Pretendard Light" panose="02000403000000020004" pitchFamily="50" charset="-127"/>
@@ -18764,259 +20139,13 @@
           </a:p>
           <a:p>
             <a:r>
-              <a:rPr lang="en-US" altLang="ko-KR" sz="800" dirty="0">
+              <a:rPr lang="en-US" altLang="ko-KR" sz="400" dirty="0">
                 <a:latin typeface="Pretendard Light" panose="02000403000000020004" pitchFamily="50" charset="-127"/>
                 <a:ea typeface="Pretendard Light" panose="02000403000000020004" pitchFamily="50" charset="-127"/>
                 <a:cs typeface="Pretendard Light" panose="02000403000000020004" pitchFamily="50" charset="-127"/>
               </a:rPr>
               <a:t>bye</a:t>
             </a:r>
-          </a:p>
-        </p:txBody>
-      </p:sp>
-    </p:spTree>
-    <p:extLst>
-      <p:ext uri="{BB962C8B-B14F-4D97-AF65-F5344CB8AC3E}">
-        <p14:creationId xmlns:p14="http://schemas.microsoft.com/office/powerpoint/2010/main" val="2648290968"/>
-      </p:ext>
-    </p:extLst>
-  </p:cSld>
-  <p:clrMapOvr>
-    <a:masterClrMapping/>
-  </p:clrMapOvr>
-</p:sld>
-</file>
-
-<file path=ppt/slides/slide7.xml><?xml version="1.0" encoding="utf-8"?>
-<p:sld xmlns:a="http://schemas.openxmlformats.org/drawingml/2006/main" xmlns:r="http://schemas.openxmlformats.org/officeDocument/2006/relationships" xmlns:p="http://schemas.openxmlformats.org/presentationml/2006/main">
-  <p:cSld>
-    <p:spTree>
-      <p:nvGrpSpPr>
-        <p:cNvPr id="1" name="Shape 157">
-          <a:extLst>
-            <a:ext uri="{FF2B5EF4-FFF2-40B4-BE49-F238E27FC236}">
-              <a16:creationId xmlns:a16="http://schemas.microsoft.com/office/drawing/2014/main" id="{0A95CC74-0609-393F-A7EA-9E56010CA0D7}"/>
-            </a:ext>
-          </a:extLst>
-        </p:cNvPr>
-        <p:cNvGrpSpPr/>
-        <p:nvPr/>
-      </p:nvGrpSpPr>
-      <p:grpSpPr>
-        <a:xfrm>
-          <a:off x="0" y="0"/>
-          <a:ext cx="0" cy="0"/>
-          <a:chOff x="0" y="0"/>
-          <a:chExt cx="0" cy="0"/>
-        </a:xfrm>
-      </p:grpSpPr>
-      <p:pic>
-        <p:nvPicPr>
-          <p:cNvPr id="158" name="Google Shape;158;p18" descr="image.png">
-            <a:extLst>
-              <a:ext uri="{FF2B5EF4-FFF2-40B4-BE49-F238E27FC236}">
-                <a16:creationId xmlns:a16="http://schemas.microsoft.com/office/drawing/2014/main" id="{D98783BB-0595-0E0B-6181-6858D47834C4}"/>
-              </a:ext>
-            </a:extLst>
-          </p:cNvPr>
-          <p:cNvPicPr preferRelativeResize="0">
-            <a:picLocks noGrp="1" noRot="1" noMove="1" noResize="1" noEditPoints="1" noAdjustHandles="1" noChangeArrowheads="1" noChangeShapeType="1" noCrop="1"/>
-          </p:cNvPicPr>
-          <p:nvPr/>
-        </p:nvPicPr>
-        <p:blipFill rotWithShape="1">
-          <a:blip r:embed="rId3">
-            <a:alphaModFix/>
-          </a:blip>
-          <a:srcRect/>
-          <a:stretch/>
-        </p:blipFill>
-        <p:spPr>
-          <a:xfrm>
-            <a:off x="0" y="0"/>
-            <a:ext cx="12192000" cy="6858000"/>
-          </a:xfrm>
-          <a:prstGeom prst="rect">
-            <a:avLst/>
-          </a:prstGeom>
-          <a:noFill/>
-          <a:ln>
-            <a:noFill/>
-          </a:ln>
-        </p:spPr>
-      </p:pic>
-      <p:sp>
-        <p:nvSpPr>
-          <p:cNvPr id="160" name="Google Shape;160;p18">
-            <a:extLst>
-              <a:ext uri="{FF2B5EF4-FFF2-40B4-BE49-F238E27FC236}">
-                <a16:creationId xmlns:a16="http://schemas.microsoft.com/office/drawing/2014/main" id="{1B8D933D-8363-3ED5-177A-D5036C923254}"/>
-              </a:ext>
-            </a:extLst>
-          </p:cNvPr>
-          <p:cNvSpPr txBox="1"/>
-          <p:nvPr/>
-        </p:nvSpPr>
-        <p:spPr>
-          <a:xfrm>
-            <a:off x="571500" y="476250"/>
-            <a:ext cx="11049000" cy="484748"/>
-          </a:xfrm>
-          <a:prstGeom prst="rect">
-            <a:avLst/>
-          </a:prstGeom>
-          <a:noFill/>
-          <a:ln>
-            <a:noFill/>
-          </a:ln>
-        </p:spPr>
-        <p:txBody>
-          <a:bodyPr spcFirstLastPara="1" wrap="square" lIns="0" tIns="0" rIns="0" bIns="0" anchor="t" anchorCtr="0">
-            <a:spAutoFit/>
-          </a:bodyPr>
-          <a:lstStyle/>
-          <a:p>
-            <a:pPr marL="0" marR="0" lvl="0" indent="0" algn="l" rtl="0">
-              <a:spcBef>
-                <a:spcPts val="0"/>
-              </a:spcBef>
-              <a:spcAft>
-                <a:spcPts val="0"/>
-              </a:spcAft>
-              <a:buNone/>
-            </a:pPr>
-            <a:r>
-              <a:rPr lang="en-US" altLang="ko-KR" sz="3150" b="1" dirty="0">
-                <a:solidFill>
-                  <a:srgbClr val="001F3F"/>
-                </a:solidFill>
-                <a:latin typeface="Pretendard ExtraBold" panose="02000903000000020004" pitchFamily="50" charset="-127"/>
-                <a:ea typeface="Pretendard ExtraBold" panose="02000903000000020004" pitchFamily="50" charset="-127"/>
-                <a:cs typeface="Pretendard ExtraBold" panose="02000903000000020004" pitchFamily="50" charset="-127"/>
-              </a:rPr>
-              <a:t>[CMIP6] ohc300</a:t>
-            </a:r>
-            <a:r>
-              <a:rPr lang="en-US" altLang="ko-KR" sz="3150" b="1" i="0" u="none" strike="noStrike" cap="none" dirty="0">
-                <a:solidFill>
-                  <a:srgbClr val="001F3F"/>
-                </a:solidFill>
-                <a:latin typeface="Pretendard ExtraBold" panose="02000903000000020004" pitchFamily="50" charset="-127"/>
-                <a:ea typeface="Pretendard ExtraBold" panose="02000903000000020004" pitchFamily="50" charset="-127"/>
-                <a:cs typeface="Pretendard ExtraBold" panose="02000903000000020004" pitchFamily="50" charset="-127"/>
-                <a:sym typeface="Arial"/>
-              </a:rPr>
-              <a:t> </a:t>
-            </a:r>
-            <a:r>
-              <a:rPr lang="ko-KR" altLang="en-US" sz="3150" b="1" i="0" u="none" strike="noStrike" cap="none" dirty="0">
-                <a:solidFill>
-                  <a:srgbClr val="001F3F"/>
-                </a:solidFill>
-                <a:latin typeface="Pretendard ExtraBold" panose="02000903000000020004" pitchFamily="50" charset="-127"/>
-                <a:ea typeface="Pretendard ExtraBold" panose="02000903000000020004" pitchFamily="50" charset="-127"/>
-                <a:cs typeface="Pretendard ExtraBold" panose="02000903000000020004" pitchFamily="50" charset="-127"/>
-                <a:sym typeface="Arial"/>
-              </a:rPr>
-              <a:t>자료 생산</a:t>
-            </a:r>
-            <a:endParaRPr dirty="0">
-              <a:latin typeface="Pretendard ExtraBold" panose="02000903000000020004" pitchFamily="50" charset="-127"/>
-              <a:ea typeface="Pretendard ExtraBold" panose="02000903000000020004" pitchFamily="50" charset="-127"/>
-              <a:cs typeface="Pretendard ExtraBold" panose="02000903000000020004" pitchFamily="50" charset="-127"/>
-            </a:endParaRPr>
-          </a:p>
-        </p:txBody>
-      </p:sp>
-      <p:sp>
-        <p:nvSpPr>
-          <p:cNvPr id="161" name="Google Shape;161;p18">
-            <a:extLst>
-              <a:ext uri="{FF2B5EF4-FFF2-40B4-BE49-F238E27FC236}">
-                <a16:creationId xmlns:a16="http://schemas.microsoft.com/office/drawing/2014/main" id="{5EFCDB68-3F23-7029-E5C4-316B22FA516E}"/>
-              </a:ext>
-            </a:extLst>
-          </p:cNvPr>
-          <p:cNvSpPr/>
-          <p:nvPr/>
-        </p:nvSpPr>
-        <p:spPr>
-          <a:xfrm>
-            <a:off x="571500" y="1076325"/>
-            <a:ext cx="11049000" cy="19050"/>
-          </a:xfrm>
-          <a:prstGeom prst="rect">
-            <a:avLst/>
-          </a:prstGeom>
-          <a:solidFill>
-            <a:srgbClr val="EEEEEE"/>
-          </a:solidFill>
-          <a:ln>
-            <a:noFill/>
-          </a:ln>
-        </p:spPr>
-        <p:txBody>
-          <a:bodyPr spcFirstLastPara="1" wrap="square" lIns="91425" tIns="45700" rIns="91425" bIns="45700" anchor="ctr" anchorCtr="0">
-            <a:noAutofit/>
-          </a:bodyPr>
-          <a:lstStyle/>
-          <a:p>
-            <a:pPr marL="0" marR="0" lvl="0" indent="0" algn="ctr" rtl="0">
-              <a:spcBef>
-                <a:spcPts val="0"/>
-              </a:spcBef>
-              <a:spcAft>
-                <a:spcPts val="0"/>
-              </a:spcAft>
-              <a:buNone/>
-            </a:pPr>
-            <a:endParaRPr sz="1800" b="0" i="0" u="none" strike="noStrike" cap="none">
-              <a:solidFill>
-                <a:schemeClr val="dk1"/>
-              </a:solidFill>
-              <a:latin typeface="Calibri"/>
-              <a:ea typeface="Calibri"/>
-              <a:cs typeface="Calibri"/>
-              <a:sym typeface="Calibri"/>
-            </a:endParaRPr>
-          </a:p>
-        </p:txBody>
-      </p:sp>
-      <p:sp>
-        <p:nvSpPr>
-          <p:cNvPr id="4" name="슬라이드 번호 개체 틀 3">
-            <a:extLst>
-              <a:ext uri="{FF2B5EF4-FFF2-40B4-BE49-F238E27FC236}">
-                <a16:creationId xmlns:a16="http://schemas.microsoft.com/office/drawing/2014/main" id="{24D90EAC-08E8-A137-5F9C-84CA8A9159F0}"/>
-              </a:ext>
-            </a:extLst>
-          </p:cNvPr>
-          <p:cNvSpPr>
-            <a:spLocks noGrp="1"/>
-          </p:cNvSpPr>
-          <p:nvPr>
-            <p:ph type="sldNum" idx="12"/>
-          </p:nvPr>
-        </p:nvSpPr>
-        <p:spPr/>
-        <p:txBody>
-          <a:bodyPr/>
-          <a:lstStyle/>
-          <a:p>
-            <a:pPr marL="0" lvl="0" indent="0" algn="r" rtl="0">
-              <a:spcBef>
-                <a:spcPts val="0"/>
-              </a:spcBef>
-              <a:spcAft>
-                <a:spcPts val="0"/>
-              </a:spcAft>
-              <a:buNone/>
-            </a:pPr>
-            <a:fld id="{00000000-1234-1234-1234-123412341234}" type="slidenum">
-              <a:rPr lang="en-US" smtClean="0"/>
-              <a:t>7</a:t>
-            </a:fld>
-            <a:endParaRPr lang="en-US"/>
           </a:p>
         </p:txBody>
       </p:sp>
@@ -19025,7 +20154,7 @@
           <p:cNvPr id="2" name="TextBox 1">
             <a:extLst>
               <a:ext uri="{FF2B5EF4-FFF2-40B4-BE49-F238E27FC236}">
-                <a16:creationId xmlns:a16="http://schemas.microsoft.com/office/drawing/2014/main" id="{128FF2D0-3A9A-11BC-044C-17FD79F4C735}"/>
+                <a16:creationId xmlns:a16="http://schemas.microsoft.com/office/drawing/2014/main" id="{BAF8F6F1-B265-0FA2-0343-594ADB99EE99}"/>
               </a:ext>
             </a:extLst>
           </p:cNvPr>
@@ -19035,7 +20164,7 @@
         <p:spPr>
           <a:xfrm>
             <a:off x="571500" y="1210702"/>
-            <a:ext cx="11049000" cy="2123658"/>
+            <a:ext cx="2733675" cy="276999"/>
           </a:xfrm>
           <a:prstGeom prst="rect">
             <a:avLst/>
@@ -19048,31 +20177,41 @@
           </a:bodyPr>
           <a:lstStyle/>
           <a:p>
+            <a:pPr marL="171450" indent="-171450">
+              <a:buFont typeface="Arial" panose="020B0604020202020204" pitchFamily="34" charset="0"/>
+              <a:buChar char="•"/>
+            </a:pPr>
             <a:r>
               <a:rPr lang="en-US" altLang="ko-KR" sz="1200" dirty="0">
                 <a:latin typeface="Pretendard Light" panose="02000403000000020004" pitchFamily="50" charset="-127"/>
                 <a:ea typeface="Pretendard Light" panose="02000403000000020004" pitchFamily="50" charset="-127"/>
                 <a:cs typeface="Pretendard Light" panose="02000403000000020004" pitchFamily="50" charset="-127"/>
               </a:rPr>
-              <a:t>python make_ohc300_cmip6.py \</a:t>
-            </a:r>
-          </a:p>
-          <a:p>
+              <a:t>CMIP6 </a:t>
+            </a:r>
+            <a:r>
+              <a:rPr lang="en-US" altLang="ko-KR" sz="1200" dirty="0" err="1">
+                <a:latin typeface="Pretendard Light" panose="02000403000000020004" pitchFamily="50" charset="-127"/>
+                <a:ea typeface="Pretendard Light" panose="02000403000000020004" pitchFamily="50" charset="-127"/>
+                <a:cs typeface="Pretendard Light" panose="02000403000000020004" pitchFamily="50" charset="-127"/>
+              </a:rPr>
+              <a:t>thetao</a:t>
+            </a:r>
             <a:r>
               <a:rPr lang="en-US" altLang="ko-KR" sz="1200" dirty="0">
                 <a:latin typeface="Pretendard Light" panose="02000403000000020004" pitchFamily="50" charset="-127"/>
                 <a:ea typeface="Pretendard Light" panose="02000403000000020004" pitchFamily="50" charset="-127"/>
                 <a:cs typeface="Pretendard Light" panose="02000403000000020004" pitchFamily="50" charset="-127"/>
               </a:rPr>
-              <a:t>  --</a:t>
-            </a:r>
-            <a:r>
-              <a:rPr lang="en-US" altLang="ko-KR" sz="1200" dirty="0" err="1">
-                <a:latin typeface="Pretendard Light" panose="02000403000000020004" pitchFamily="50" charset="-127"/>
-                <a:ea typeface="Pretendard Light" panose="02000403000000020004" pitchFamily="50" charset="-127"/>
-                <a:cs typeface="Pretendard Light" panose="02000403000000020004" pitchFamily="50" charset="-127"/>
-              </a:rPr>
-              <a:t>inroot</a:t>
+              <a:t> </a:t>
+            </a:r>
+            <a:r>
+              <a:rPr lang="ko-KR" altLang="en-US" sz="1200" dirty="0">
+                <a:latin typeface="Pretendard Light" panose="02000403000000020004" pitchFamily="50" charset="-127"/>
+                <a:ea typeface="Pretendard Light" panose="02000403000000020004" pitchFamily="50" charset="-127"/>
+                <a:cs typeface="Pretendard Light" panose="02000403000000020004" pitchFamily="50" charset="-127"/>
+              </a:rPr>
+              <a:t>데이터 서버로 </a:t>
             </a:r>
             <a:r>
               <a:rPr lang="en-US" altLang="ko-KR" sz="1200" dirty="0">
@@ -19080,126 +20219,113 @@
                 <a:ea typeface="Pretendard Light" panose="02000403000000020004" pitchFamily="50" charset="-127"/>
                 <a:cs typeface="Pretendard Light" panose="02000403000000020004" pitchFamily="50" charset="-127"/>
               </a:rPr>
-              <a:t>  /home/sanggyu1008/project/01_ENSO/01_data/01_raw/cmip6/ssp370 \</a:t>
-            </a:r>
-          </a:p>
-          <a:p>
-            <a:r>
-              <a:rPr lang="en-US" altLang="ko-KR" sz="1200" dirty="0">
-                <a:latin typeface="Pretendard Light" panose="02000403000000020004" pitchFamily="50" charset="-127"/>
-                <a:ea typeface="Pretendard Light" panose="02000403000000020004" pitchFamily="50" charset="-127"/>
-                <a:cs typeface="Pretendard Light" panose="02000403000000020004" pitchFamily="50" charset="-127"/>
-              </a:rPr>
-              <a:t>  --outroot /home/sanggyu1008/project/01_ENSO/01_data/01_raw/cmip6/ssp370 \</a:t>
-            </a:r>
-          </a:p>
-          <a:p>
-            <a:r>
-              <a:rPr lang="en-US" altLang="ko-KR" sz="1200" dirty="0">
-                <a:latin typeface="Pretendard Light" panose="02000403000000020004" pitchFamily="50" charset="-127"/>
-                <a:ea typeface="Pretendard Light" panose="02000403000000020004" pitchFamily="50" charset="-127"/>
-                <a:cs typeface="Pretendard Light" panose="02000403000000020004" pitchFamily="50" charset="-127"/>
-              </a:rPr>
-              <a:t>  --</a:t>
-            </a:r>
-            <a:r>
-              <a:rPr lang="en-US" altLang="ko-KR" sz="1200" dirty="0" err="1">
-                <a:latin typeface="Pretendard Light" panose="02000403000000020004" pitchFamily="50" charset="-127"/>
-                <a:ea typeface="Pretendard Light" panose="02000403000000020004" pitchFamily="50" charset="-127"/>
-                <a:cs typeface="Pretendard Light" panose="02000403000000020004" pitchFamily="50" charset="-127"/>
-              </a:rPr>
-              <a:t>zmax</a:t>
-            </a:r>
-            <a:r>
-              <a:rPr lang="en-US" altLang="ko-KR" sz="1200" dirty="0">
-                <a:latin typeface="Pretendard Light" panose="02000403000000020004" pitchFamily="50" charset="-127"/>
-                <a:ea typeface="Pretendard Light" panose="02000403000000020004" pitchFamily="50" charset="-127"/>
-                <a:cs typeface="Pretendard Light" panose="02000403000000020004" pitchFamily="50" charset="-127"/>
-              </a:rPr>
-              <a:t> 300 \</a:t>
-            </a:r>
-          </a:p>
-          <a:p>
-            <a:r>
-              <a:rPr lang="en-US" altLang="ko-KR" sz="1200" dirty="0">
-                <a:latin typeface="Pretendard Light" panose="02000403000000020004" pitchFamily="50" charset="-127"/>
-                <a:ea typeface="Pretendard Light" panose="02000403000000020004" pitchFamily="50" charset="-127"/>
-                <a:cs typeface="Pretendard Light" panose="02000403000000020004" pitchFamily="50" charset="-127"/>
-              </a:rPr>
-              <a:t>  --rho0 1025 --cp0 3992 \</a:t>
-            </a:r>
-          </a:p>
-          <a:p>
-            <a:r>
-              <a:rPr lang="en-US" altLang="ko-KR" sz="1200" dirty="0">
-                <a:latin typeface="Pretendard Light" panose="02000403000000020004" pitchFamily="50" charset="-127"/>
-                <a:ea typeface="Pretendard Light" panose="02000403000000020004" pitchFamily="50" charset="-127"/>
-                <a:cs typeface="Pretendard Light" panose="02000403000000020004" pitchFamily="50" charset="-127"/>
-              </a:rPr>
-              <a:t>  --to-</a:t>
-            </a:r>
-            <a:r>
-              <a:rPr lang="en-US" altLang="ko-KR" sz="1200" dirty="0" err="1">
-                <a:latin typeface="Pretendard Light" panose="02000403000000020004" pitchFamily="50" charset="-127"/>
-                <a:ea typeface="Pretendard Light" panose="02000403000000020004" pitchFamily="50" charset="-127"/>
-                <a:cs typeface="Pretendard Light" panose="02000403000000020004" pitchFamily="50" charset="-127"/>
-              </a:rPr>
-              <a:t>degC</a:t>
-            </a:r>
-            <a:r>
-              <a:rPr lang="en-US" altLang="ko-KR" sz="1200" dirty="0">
-                <a:latin typeface="Pretendard Light" panose="02000403000000020004" pitchFamily="50" charset="-127"/>
-                <a:ea typeface="Pretendard Light" panose="02000403000000020004" pitchFamily="50" charset="-127"/>
-                <a:cs typeface="Pretendard Light" panose="02000403000000020004" pitchFamily="50" charset="-127"/>
-              </a:rPr>
-              <a:t> \</a:t>
-            </a:r>
-          </a:p>
-          <a:p>
-            <a:r>
-              <a:rPr lang="en-US" altLang="ko-KR" sz="1200" dirty="0">
-                <a:latin typeface="Pretendard Light" panose="02000403000000020004" pitchFamily="50" charset="-127"/>
-                <a:ea typeface="Pretendard Light" panose="02000403000000020004" pitchFamily="50" charset="-127"/>
-                <a:cs typeface="Pretendard Light" panose="02000403000000020004" pitchFamily="50" charset="-127"/>
-              </a:rPr>
-              <a:t>  --time-chunk 12 \</a:t>
-            </a:r>
-          </a:p>
-          <a:p>
-            <a:r>
-              <a:rPr lang="en-US" altLang="ko-KR" sz="1200" dirty="0">
-                <a:latin typeface="Pretendard Light" panose="02000403000000020004" pitchFamily="50" charset="-127"/>
-                <a:ea typeface="Pretendard Light" panose="02000403000000020004" pitchFamily="50" charset="-127"/>
-                <a:cs typeface="Pretendard Light" panose="02000403000000020004" pitchFamily="50" charset="-127"/>
-              </a:rPr>
-              <a:t>  --mask-shallow</a:t>
-            </a:r>
-          </a:p>
-          <a:p>
+              <a:t>sftp</a:t>
+            </a:r>
+          </a:p>
+        </p:txBody>
+      </p:sp>
+      <p:sp>
+        <p:nvSpPr>
+          <p:cNvPr id="5" name="TextBox 4">
+            <a:extLst>
+              <a:ext uri="{FF2B5EF4-FFF2-40B4-BE49-F238E27FC236}">
+                <a16:creationId xmlns:a16="http://schemas.microsoft.com/office/drawing/2014/main" id="{4F20079D-0E90-3D07-4DC2-9143E1C3FBB8}"/>
+              </a:ext>
+            </a:extLst>
+          </p:cNvPr>
+          <p:cNvSpPr txBox="1"/>
+          <p:nvPr/>
+        </p:nvSpPr>
+        <p:spPr>
+          <a:xfrm>
+            <a:off x="3305175" y="1210702"/>
+            <a:ext cx="2733675" cy="276999"/>
+          </a:xfrm>
+          <a:prstGeom prst="rect">
+            <a:avLst/>
+          </a:prstGeom>
+          <a:noFill/>
+        </p:spPr>
+        <p:txBody>
+          <a:bodyPr wrap="square" rtlCol="0">
+            <a:spAutoFit/>
+          </a:bodyPr>
+          <a:lstStyle/>
+          <a:p>
+            <a:pPr marL="171450" indent="-171450">
+              <a:buFont typeface="Arial" panose="020B0604020202020204" pitchFamily="34" charset="0"/>
+              <a:buChar char="•"/>
+            </a:pPr>
+            <a:r>
+              <a:rPr lang="ko-KR" altLang="en-US" sz="1200" dirty="0">
+                <a:latin typeface="Pretendard Light" panose="02000403000000020004" pitchFamily="50" charset="-127"/>
+                <a:ea typeface="Pretendard Light" panose="02000403000000020004" pitchFamily="50" charset="-127"/>
+                <a:cs typeface="Pretendard Light" panose="02000403000000020004" pitchFamily="50" charset="-127"/>
+              </a:rPr>
+              <a:t>파일 내부 </a:t>
+            </a:r>
+            <a:r>
+              <a:rPr lang="ko-KR" altLang="en-US" sz="1200" dirty="0" err="1">
+                <a:latin typeface="Pretendard Light" panose="02000403000000020004" pitchFamily="50" charset="-127"/>
+                <a:ea typeface="Pretendard Light" panose="02000403000000020004" pitchFamily="50" charset="-127"/>
+                <a:cs typeface="Pretendard Light" panose="02000403000000020004" pitchFamily="50" charset="-127"/>
+              </a:rPr>
+              <a:t>변수명</a:t>
+            </a:r>
+            <a:r>
+              <a:rPr lang="ko-KR" altLang="en-US" sz="1200" dirty="0">
+                <a:latin typeface="Pretendard Light" panose="02000403000000020004" pitchFamily="50" charset="-127"/>
+                <a:ea typeface="Pretendard Light" panose="02000403000000020004" pitchFamily="50" charset="-127"/>
+                <a:cs typeface="Pretendard Light" panose="02000403000000020004" pitchFamily="50" charset="-127"/>
+              </a:rPr>
+              <a:t> 변경</a:t>
+            </a:r>
             <a:endParaRPr lang="en-US" altLang="ko-KR" sz="1200" dirty="0">
               <a:latin typeface="Pretendard Light" panose="02000403000000020004" pitchFamily="50" charset="-127"/>
               <a:ea typeface="Pretendard Light" panose="02000403000000020004" pitchFamily="50" charset="-127"/>
               <a:cs typeface="Pretendard Light" panose="02000403000000020004" pitchFamily="50" charset="-127"/>
             </a:endParaRPr>
           </a:p>
-          <a:p>
-            <a:endParaRPr lang="en-US" altLang="ko-KR" sz="1200" dirty="0">
-              <a:latin typeface="Pretendard Light" panose="02000403000000020004" pitchFamily="50" charset="-127"/>
-              <a:ea typeface="Pretendard Light" panose="02000403000000020004" pitchFamily="50" charset="-127"/>
-              <a:cs typeface="Pretendard Light" panose="02000403000000020004" pitchFamily="50" charset="-127"/>
-            </a:endParaRPr>
-          </a:p>
-          <a:p>
-            <a:r>
-              <a:rPr lang="en-US" altLang="ko-KR" sz="1200" dirty="0">
-                <a:latin typeface="Pretendard Light" panose="02000403000000020004" pitchFamily="50" charset="-127"/>
-                <a:ea typeface="Pretendard Light" panose="02000403000000020004" pitchFamily="50" charset="-127"/>
-                <a:cs typeface="Pretendard Light" panose="02000403000000020004" pitchFamily="50" charset="-127"/>
-              </a:rPr>
-              <a:t>shallow</a:t>
-            </a:r>
-            <a:r>
-              <a:rPr lang="ko-KR" altLang="en-US" sz="1200" dirty="0">
+        </p:txBody>
+      </p:sp>
+      <p:sp>
+        <p:nvSpPr>
+          <p:cNvPr id="9" name="TextBox 8">
+            <a:extLst>
+              <a:ext uri="{FF2B5EF4-FFF2-40B4-BE49-F238E27FC236}">
+                <a16:creationId xmlns:a16="http://schemas.microsoft.com/office/drawing/2014/main" id="{3F28C037-3ABC-08EB-73E5-AF33142C7A25}"/>
+              </a:ext>
+            </a:extLst>
+          </p:cNvPr>
+          <p:cNvSpPr txBox="1"/>
+          <p:nvPr/>
+        </p:nvSpPr>
+        <p:spPr>
+          <a:xfrm>
+            <a:off x="3305174" y="1471910"/>
+            <a:ext cx="3057526" cy="246221"/>
+          </a:xfrm>
+          <a:prstGeom prst="rect">
+            <a:avLst/>
+          </a:prstGeom>
+          <a:noFill/>
+        </p:spPr>
+        <p:txBody>
+          <a:bodyPr wrap="square" numCol="1" rtlCol="0">
+            <a:spAutoFit/>
+          </a:bodyPr>
+          <a:lstStyle/>
+          <a:p>
+            <a:r>
+              <a:rPr lang="en-US" altLang="ko-KR" sz="1000" dirty="0" err="1">
+                <a:latin typeface="Pretendard Light" panose="02000403000000020004" pitchFamily="50" charset="-127"/>
+                <a:ea typeface="Pretendard Light" panose="02000403000000020004" pitchFamily="50" charset="-127"/>
+                <a:cs typeface="Pretendard Light" panose="02000403000000020004" pitchFamily="50" charset="-127"/>
+              </a:rPr>
+              <a:t>cdo</a:t>
+            </a:r>
+            <a:r>
+              <a:rPr lang="en-US" altLang="ko-KR" sz="1000" dirty="0">
                 <a:latin typeface="Pretendard Light" panose="02000403000000020004" pitchFamily="50" charset="-127"/>
                 <a:ea typeface="Pretendard Light" panose="02000403000000020004" pitchFamily="50" charset="-127"/>
                 <a:cs typeface="Pretendard Light" panose="02000403000000020004" pitchFamily="50" charset="-127"/>
@@ -19207,30 +20333,62 @@
               <a:t> </a:t>
             </a:r>
             <a:r>
-              <a:rPr lang="en-US" altLang="ko-KR" sz="1200" dirty="0">
-                <a:latin typeface="Pretendard Light" panose="02000403000000020004" pitchFamily="50" charset="-127"/>
-                <a:ea typeface="Pretendard Light" panose="02000403000000020004" pitchFamily="50" charset="-127"/>
-                <a:cs typeface="Pretendard Light" panose="02000403000000020004" pitchFamily="50" charset="-127"/>
-              </a:rPr>
-              <a:t>mask </a:t>
-            </a:r>
-            <a:r>
-              <a:rPr lang="ko-KR" altLang="en-US" sz="1200" dirty="0">
-                <a:latin typeface="Pretendard Light" panose="02000403000000020004" pitchFamily="50" charset="-127"/>
-                <a:ea typeface="Pretendard Light" panose="02000403000000020004" pitchFamily="50" charset="-127"/>
-                <a:cs typeface="Pretendard Light" panose="02000403000000020004" pitchFamily="50" charset="-127"/>
-              </a:rPr>
-              <a:t>적용하지 않기</a:t>
-            </a:r>
-            <a:r>
-              <a:rPr lang="en-US" altLang="ko-KR" sz="1200" dirty="0">
-                <a:latin typeface="Pretendard Light" panose="02000403000000020004" pitchFamily="50" charset="-127"/>
-                <a:ea typeface="Pretendard Light" panose="02000403000000020004" pitchFamily="50" charset="-127"/>
-                <a:cs typeface="Pretendard Light" panose="02000403000000020004" pitchFamily="50" charset="-127"/>
-              </a:rPr>
-              <a:t>!!!</a:t>
-            </a:r>
-            <a:endParaRPr lang="ko-KR" altLang="en-US" sz="1200" dirty="0">
+              <a:rPr lang="en-US" altLang="ko-KR" sz="1000" dirty="0" err="1">
+                <a:latin typeface="Pretendard Light" panose="02000403000000020004" pitchFamily="50" charset="-127"/>
+                <a:ea typeface="Pretendard Light" panose="02000403000000020004" pitchFamily="50" charset="-127"/>
+                <a:cs typeface="Pretendard Light" panose="02000403000000020004" pitchFamily="50" charset="-127"/>
+              </a:rPr>
+              <a:t>chname</a:t>
+            </a:r>
+            <a:r>
+              <a:rPr lang="en-US" altLang="ko-KR" sz="1000" dirty="0">
+                <a:latin typeface="Pretendard Light" panose="02000403000000020004" pitchFamily="50" charset="-127"/>
+                <a:ea typeface="Pretendard Light" panose="02000403000000020004" pitchFamily="50" charset="-127"/>
+                <a:cs typeface="Pretendard Light" panose="02000403000000020004" pitchFamily="50" charset="-127"/>
+              </a:rPr>
+              <a:t>,</a:t>
+            </a:r>
+            <a:r>
+              <a:rPr lang="ko-KR" altLang="en-US" sz="1000" i="1" dirty="0">
+                <a:latin typeface="Pretendard Light" panose="02000403000000020004" pitchFamily="50" charset="-127"/>
+                <a:ea typeface="Pretendard Light" panose="02000403000000020004" pitchFamily="50" charset="-127"/>
+                <a:cs typeface="Pretendard Light" panose="02000403000000020004" pitchFamily="50" charset="-127"/>
+              </a:rPr>
+              <a:t>기존변수</a:t>
+            </a:r>
+            <a:r>
+              <a:rPr lang="en-US" altLang="ko-KR" sz="1000" dirty="0">
+                <a:latin typeface="Pretendard Light" panose="02000403000000020004" pitchFamily="50" charset="-127"/>
+                <a:ea typeface="Pretendard Light" panose="02000403000000020004" pitchFamily="50" charset="-127"/>
+                <a:cs typeface="Pretendard Light" panose="02000403000000020004" pitchFamily="50" charset="-127"/>
+              </a:rPr>
+              <a:t>,</a:t>
+            </a:r>
+            <a:r>
+              <a:rPr lang="ko-KR" altLang="en-US" sz="1000" i="1" dirty="0">
+                <a:latin typeface="Pretendard Light" panose="02000403000000020004" pitchFamily="50" charset="-127"/>
+                <a:ea typeface="Pretendard Light" panose="02000403000000020004" pitchFamily="50" charset="-127"/>
+                <a:cs typeface="Pretendard Light" panose="02000403000000020004" pitchFamily="50" charset="-127"/>
+              </a:rPr>
+              <a:t>변경변수 기존파일명</a:t>
+            </a:r>
+            <a:r>
+              <a:rPr lang="en-US" altLang="ko-KR" sz="1000" i="1" dirty="0">
+                <a:latin typeface="Pretendard Light" panose="02000403000000020004" pitchFamily="50" charset="-127"/>
+                <a:ea typeface="Pretendard Light" panose="02000403000000020004" pitchFamily="50" charset="-127"/>
+                <a:cs typeface="Pretendard Light" panose="02000403000000020004" pitchFamily="50" charset="-127"/>
+              </a:rPr>
+              <a:t>,</a:t>
+            </a:r>
+            <a:r>
+              <a:rPr lang="ko-KR" altLang="en-US" sz="1000" i="1" dirty="0">
+                <a:latin typeface="Pretendard Light" panose="02000403000000020004" pitchFamily="50" charset="-127"/>
+                <a:ea typeface="Pretendard Light" panose="02000403000000020004" pitchFamily="50" charset="-127"/>
+                <a:cs typeface="Pretendard Light" panose="02000403000000020004" pitchFamily="50" charset="-127"/>
+              </a:rPr>
+              <a:t>변경파일명</a:t>
+            </a:r>
+            <a:endParaRPr lang="en-US" altLang="ko-KR" sz="1000" i="1" dirty="0">
               <a:latin typeface="Pretendard Light" panose="02000403000000020004" pitchFamily="50" charset="-127"/>
               <a:ea typeface="Pretendard Light" panose="02000403000000020004" pitchFamily="50" charset="-127"/>
               <a:cs typeface="Pretendard Light" panose="02000403000000020004" pitchFamily="50" charset="-127"/>
@@ -19241,7 +20399,7 @@
     </p:spTree>
     <p:extLst>
       <p:ext uri="{BB962C8B-B14F-4D97-AF65-F5344CB8AC3E}">
-        <p14:creationId xmlns:p14="http://schemas.microsoft.com/office/powerpoint/2010/main" val="1371844329"/>
+        <p14:creationId xmlns:p14="http://schemas.microsoft.com/office/powerpoint/2010/main" val="2648290968"/>
       </p:ext>
     </p:extLst>
   </p:cSld>
@@ -19358,7 +20516,7 @@
                 <a:ea typeface="Pretendard ExtraBold" panose="02000903000000020004" pitchFamily="50" charset="-127"/>
                 <a:cs typeface="Pretendard ExtraBold" panose="02000903000000020004" pitchFamily="50" charset="-127"/>
               </a:rPr>
-              <a:t>[CMIP6] anomaly </a:t>
+              <a:t>Anomaly </a:t>
             </a:r>
             <a:r>
               <a:rPr lang="ko-KR" altLang="en-US" sz="3150" b="1" dirty="0">
@@ -19520,7 +20678,7 @@
         <p:spPr>
           <a:xfrm>
             <a:off x="571500" y="1210702"/>
-            <a:ext cx="11049000" cy="738664"/>
+            <a:ext cx="11049000" cy="2893100"/>
           </a:xfrm>
           <a:prstGeom prst="rect">
             <a:avLst/>
@@ -19533,14 +20691,88 @@
           </a:bodyPr>
           <a:lstStyle/>
           <a:p>
+            <a:pPr marL="342900" indent="-342900">
+              <a:buAutoNum type="arabicPeriod"/>
+            </a:pPr>
+            <a:r>
+              <a:rPr lang="ko-KR" altLang="en-US" dirty="0">
+                <a:latin typeface="Pretendard Light" panose="02000403000000020004" pitchFamily="50" charset="-127"/>
+                <a:ea typeface="Pretendard Light" panose="02000403000000020004" pitchFamily="50" charset="-127"/>
+                <a:cs typeface="Pretendard Light" panose="02000403000000020004" pitchFamily="50" charset="-127"/>
+              </a:rPr>
+              <a:t>장기 추세 제거 </a:t>
+            </a:r>
+            <a:endParaRPr lang="en-US" altLang="ko-KR" dirty="0">
+              <a:latin typeface="Pretendard Light" panose="02000403000000020004" pitchFamily="50" charset="-127"/>
+              <a:ea typeface="Pretendard Light" panose="02000403000000020004" pitchFamily="50" charset="-127"/>
+              <a:cs typeface="Pretendard Light" panose="02000403000000020004" pitchFamily="50" charset="-127"/>
+            </a:endParaRPr>
+          </a:p>
+          <a:p>
+            <a:pPr marL="342900" indent="-342900">
+              <a:buAutoNum type="arabicPeriod"/>
+            </a:pPr>
+            <a:r>
+              <a:rPr lang="ko-KR" altLang="en-US" dirty="0">
+                <a:latin typeface="Pretendard Light" panose="02000403000000020004" pitchFamily="50" charset="-127"/>
+                <a:ea typeface="Pretendard Light" panose="02000403000000020004" pitchFamily="50" charset="-127"/>
+                <a:cs typeface="Pretendard Light" panose="02000403000000020004" pitchFamily="50" charset="-127"/>
+              </a:rPr>
+              <a:t>월별 </a:t>
+            </a:r>
             <a:r>
               <a:rPr lang="en-US" altLang="ko-KR" dirty="0">
                 <a:latin typeface="Pretendard Light" panose="02000403000000020004" pitchFamily="50" charset="-127"/>
                 <a:ea typeface="Pretendard Light" panose="02000403000000020004" pitchFamily="50" charset="-127"/>
                 <a:cs typeface="Pretendard Light" panose="02000403000000020004" pitchFamily="50" charset="-127"/>
               </a:rPr>
-              <a:t>bash cmip6_monthly_anom_1x2.sh \</a:t>
-            </a:r>
+              <a:t>Climatology </a:t>
+            </a:r>
+            <a:r>
+              <a:rPr lang="ko-KR" altLang="en-US" dirty="0">
+                <a:latin typeface="Pretendard Light" panose="02000403000000020004" pitchFamily="50" charset="-127"/>
+                <a:ea typeface="Pretendard Light" panose="02000403000000020004" pitchFamily="50" charset="-127"/>
+                <a:cs typeface="Pretendard Light" panose="02000403000000020004" pitchFamily="50" charset="-127"/>
+              </a:rPr>
+              <a:t>제거</a:t>
+            </a:r>
+            <a:endParaRPr lang="en-US" altLang="ko-KR" dirty="0">
+              <a:latin typeface="Pretendard Light" panose="02000403000000020004" pitchFamily="50" charset="-127"/>
+              <a:ea typeface="Pretendard Light" panose="02000403000000020004" pitchFamily="50" charset="-127"/>
+              <a:cs typeface="Pretendard Light" panose="02000403000000020004" pitchFamily="50" charset="-127"/>
+            </a:endParaRPr>
+          </a:p>
+          <a:p>
+            <a:pPr marL="342900" indent="-342900">
+              <a:buAutoNum type="arabicPeriod"/>
+            </a:pPr>
+            <a:r>
+              <a:rPr lang="ko-KR" altLang="en-US" dirty="0">
+                <a:latin typeface="Pretendard Light" panose="02000403000000020004" pitchFamily="50" charset="-127"/>
+                <a:ea typeface="Pretendard Light" panose="02000403000000020004" pitchFamily="50" charset="-127"/>
+                <a:cs typeface="Pretendard Light" panose="02000403000000020004" pitchFamily="50" charset="-127"/>
+              </a:rPr>
+              <a:t>재격자화 </a:t>
+            </a:r>
+            <a:endParaRPr lang="en-US" altLang="ko-KR" dirty="0">
+              <a:latin typeface="Pretendard Light" panose="02000403000000020004" pitchFamily="50" charset="-127"/>
+              <a:ea typeface="Pretendard Light" panose="02000403000000020004" pitchFamily="50" charset="-127"/>
+              <a:cs typeface="Pretendard Light" panose="02000403000000020004" pitchFamily="50" charset="-127"/>
+            </a:endParaRPr>
+          </a:p>
+          <a:p>
+            <a:endParaRPr lang="en-US" altLang="ko-KR" dirty="0">
+              <a:latin typeface="Pretendard Light" panose="02000403000000020004" pitchFamily="50" charset="-127"/>
+              <a:ea typeface="Pretendard Light" panose="02000403000000020004" pitchFamily="50" charset="-127"/>
+              <a:cs typeface="Pretendard Light" panose="02000403000000020004" pitchFamily="50" charset="-127"/>
+            </a:endParaRPr>
+          </a:p>
+          <a:p>
+            <a:endParaRPr lang="en-US" altLang="ko-KR" dirty="0">
+              <a:latin typeface="Pretendard Light" panose="02000403000000020004" pitchFamily="50" charset="-127"/>
+              <a:ea typeface="Pretendard Light" panose="02000403000000020004" pitchFamily="50" charset="-127"/>
+              <a:cs typeface="Pretendard Light" panose="02000403000000020004" pitchFamily="50" charset="-127"/>
+            </a:endParaRPr>
           </a:p>
           <a:p>
             <a:r>
@@ -19549,24 +20781,32 @@
                 <a:ea typeface="Pretendard Light" panose="02000403000000020004" pitchFamily="50" charset="-127"/>
                 <a:cs typeface="Pretendard Light" panose="02000403000000020004" pitchFamily="50" charset="-127"/>
               </a:rPr>
-              <a:t>  /</a:t>
-            </a:r>
-            <a:r>
-              <a:rPr lang="en-US" altLang="ko-KR" dirty="0" err="1">
-                <a:latin typeface="Pretendard Light" panose="02000403000000020004" pitchFamily="50" charset="-127"/>
-                <a:ea typeface="Pretendard Light" panose="02000403000000020004" pitchFamily="50" charset="-127"/>
-                <a:cs typeface="Pretendard Light" panose="02000403000000020004" pitchFamily="50" charset="-127"/>
-              </a:rPr>
-              <a:t>mnt</a:t>
-            </a:r>
+              <a:t>./make_anom_cmip6_monthly.sh</a:t>
+            </a:r>
+          </a:p>
+          <a:p>
+            <a:endParaRPr lang="en-US" altLang="ko-KR" dirty="0">
+              <a:latin typeface="Pretendard Light" panose="02000403000000020004" pitchFamily="50" charset="-127"/>
+              <a:ea typeface="Pretendard Light" panose="02000403000000020004" pitchFamily="50" charset="-127"/>
+              <a:cs typeface="Pretendard Light" panose="02000403000000020004" pitchFamily="50" charset="-127"/>
+            </a:endParaRPr>
+          </a:p>
+          <a:p>
             <a:r>
               <a:rPr lang="en-US" altLang="ko-KR" dirty="0">
                 <a:latin typeface="Pretendard Light" panose="02000403000000020004" pitchFamily="50" charset="-127"/>
                 <a:ea typeface="Pretendard Light" panose="02000403000000020004" pitchFamily="50" charset="-127"/>
                 <a:cs typeface="Pretendard Light" panose="02000403000000020004" pitchFamily="50" charset="-127"/>
               </a:rPr>
-              <a:t>/d/project/01_ENSO/01_data/01_raw/cmip6/ssp370 \</a:t>
-            </a:r>
+              <a:t>./make_anom_era5_monthly.sh</a:t>
+            </a:r>
+          </a:p>
+          <a:p>
+            <a:endParaRPr lang="en-US" altLang="ko-KR" dirty="0">
+              <a:latin typeface="Pretendard Light" panose="02000403000000020004" pitchFamily="50" charset="-127"/>
+              <a:ea typeface="Pretendard Light" panose="02000403000000020004" pitchFamily="50" charset="-127"/>
+              <a:cs typeface="Pretendard Light" panose="02000403000000020004" pitchFamily="50" charset="-127"/>
+            </a:endParaRPr>
           </a:p>
           <a:p>
             <a:r>
@@ -19575,24 +20815,32 @@
                 <a:ea typeface="Pretendard Light" panose="02000403000000020004" pitchFamily="50" charset="-127"/>
                 <a:cs typeface="Pretendard Light" panose="02000403000000020004" pitchFamily="50" charset="-127"/>
               </a:rPr>
-              <a:t>  /</a:t>
-            </a:r>
-            <a:r>
-              <a:rPr lang="en-US" altLang="ko-KR" dirty="0" err="1">
-                <a:latin typeface="Pretendard Light" panose="02000403000000020004" pitchFamily="50" charset="-127"/>
-                <a:ea typeface="Pretendard Light" panose="02000403000000020004" pitchFamily="50" charset="-127"/>
-                <a:cs typeface="Pretendard Light" panose="02000403000000020004" pitchFamily="50" charset="-127"/>
-              </a:rPr>
-              <a:t>mnt</a:t>
-            </a:r>
+              <a:t>python make_anom_godas.py</a:t>
+            </a:r>
+          </a:p>
+          <a:p>
+            <a:endParaRPr lang="en-US" altLang="ko-KR" dirty="0">
+              <a:latin typeface="Pretendard Light" panose="02000403000000020004" pitchFamily="50" charset="-127"/>
+              <a:ea typeface="Pretendard Light" panose="02000403000000020004" pitchFamily="50" charset="-127"/>
+              <a:cs typeface="Pretendard Light" panose="02000403000000020004" pitchFamily="50" charset="-127"/>
+            </a:endParaRPr>
+          </a:p>
+          <a:p>
             <a:r>
               <a:rPr lang="en-US" altLang="ko-KR" dirty="0">
                 <a:latin typeface="Pretendard Light" panose="02000403000000020004" pitchFamily="50" charset="-127"/>
                 <a:ea typeface="Pretendard Light" panose="02000403000000020004" pitchFamily="50" charset="-127"/>
                 <a:cs typeface="Pretendard Light" panose="02000403000000020004" pitchFamily="50" charset="-127"/>
               </a:rPr>
-              <a:t>/d/project/01_ENSO/01_data/02_interim/cmip6/ssp370_anom_1x2</a:t>
-            </a:r>
+              <a:t>./make_anom_oras5.sh</a:t>
+            </a:r>
+            <a:endParaRPr lang="ko-KR" altLang="en-US" dirty="0">
+              <a:latin typeface="Pretendard Light" panose="02000403000000020004" pitchFamily="50" charset="-127"/>
+              <a:ea typeface="Pretendard Light" panose="02000403000000020004" pitchFamily="50" charset="-127"/>
+              <a:cs typeface="Pretendard Light" panose="02000403000000020004" pitchFamily="50" charset="-127"/>
+            </a:endParaRPr>
+          </a:p>
+          <a:p>
             <a:endParaRPr lang="ko-KR" altLang="en-US" dirty="0">
               <a:latin typeface="Pretendard Light" panose="02000403000000020004" pitchFamily="50" charset="-127"/>
               <a:ea typeface="Pretendard Light" panose="02000403000000020004" pitchFamily="50" charset="-127"/>
@@ -19713,6 +20961,17 @@
               <a:buNone/>
             </a:pPr>
             <a:r>
+              <a:rPr lang="en-US" sz="3150" b="1" dirty="0">
+                <a:solidFill>
+                  <a:srgbClr val="001F3F"/>
+                </a:solidFill>
+                <a:latin typeface="Pretendard ExtraBold" panose="02000903000000020004" pitchFamily="50" charset="-127"/>
+                <a:ea typeface="Pretendard ExtraBold" panose="02000903000000020004" pitchFamily="50" charset="-127"/>
+                <a:cs typeface="Pretendard ExtraBold" panose="02000903000000020004" pitchFamily="50" charset="-127"/>
+              </a:rPr>
+              <a:t>QC</a:t>
+            </a:r>
+            <a:r>
               <a:rPr lang="en-US" sz="3150" b="1" i="0" u="none" strike="noStrike" cap="none" dirty="0">
                 <a:solidFill>
                   <a:srgbClr val="001F3F"/>
@@ -19722,7 +20981,7 @@
                 <a:cs typeface="Pretendard ExtraBold" panose="02000903000000020004" pitchFamily="50" charset="-127"/>
                 <a:sym typeface="Arial"/>
               </a:rPr>
-              <a:t>Sample </a:t>
+              <a:t> </a:t>
             </a:r>
             <a:endParaRPr dirty="0">
               <a:latin typeface="Pretendard ExtraBold" panose="02000903000000020004" pitchFamily="50" charset="-127"/>
@@ -19826,10 +21085,10 @@
       </p:sp>
       <p:sp>
         <p:nvSpPr>
-          <p:cNvPr id="3" name="TextBox 2">
+          <p:cNvPr id="2" name="TextBox 1">
             <a:extLst>
               <a:ext uri="{FF2B5EF4-FFF2-40B4-BE49-F238E27FC236}">
-                <a16:creationId xmlns:a16="http://schemas.microsoft.com/office/drawing/2014/main" id="{67E19EDF-809F-CE45-9790-0EDBD9A405EA}"/>
+                <a16:creationId xmlns:a16="http://schemas.microsoft.com/office/drawing/2014/main" id="{8AD2ADA3-8C9A-7979-2ACE-9E854896A2FA}"/>
               </a:ext>
             </a:extLst>
           </p:cNvPr>
@@ -19839,7 +21098,7 @@
         <p:spPr>
           <a:xfrm>
             <a:off x="571500" y="1210702"/>
-            <a:ext cx="11049000" cy="307777"/>
+            <a:ext cx="11049000" cy="1200329"/>
           </a:xfrm>
           <a:prstGeom prst="rect">
             <a:avLst/>
@@ -19852,19 +21111,89 @@
           </a:bodyPr>
           <a:lstStyle/>
           <a:p>
-            <a:pPr marL="285750" indent="-285750">
-              <a:buFont typeface="Arial" panose="020B0604020202020204" pitchFamily="34" charset="0"/>
-              <a:buChar char="•"/>
-            </a:pPr>
-            <a:r>
-              <a:rPr lang="ko-KR" altLang="en-US" dirty="0" err="1">
-                <a:latin typeface="Pretendard Light" panose="02000403000000020004" pitchFamily="50" charset="-127"/>
-                <a:ea typeface="Pretendard Light" panose="02000403000000020004" pitchFamily="50" charset="-127"/>
-                <a:cs typeface="Pretendard Light" panose="02000403000000020004" pitchFamily="50" charset="-127"/>
-              </a:rPr>
-              <a:t>ㅇㅇ</a:t>
-            </a:r>
-            <a:endParaRPr lang="ko-KR" altLang="en-US" dirty="0">
+            <a:r>
+              <a:rPr lang="en-US" altLang="ko-KR" sz="1200" dirty="0"/>
+              <a:t>python qc_cmip6.py /</a:t>
+            </a:r>
+            <a:r>
+              <a:rPr lang="en-US" altLang="ko-KR" sz="1200" dirty="0" err="1"/>
+              <a:t>mnt</a:t>
+            </a:r>
+            <a:r>
+              <a:rPr lang="en-US" altLang="ko-KR" sz="1200" dirty="0"/>
+              <a:t>/d/project/01_ENSO/01_data/01_raw/cmip6/ssp370</a:t>
+            </a:r>
+          </a:p>
+          <a:p>
+            <a:r>
+              <a:rPr lang="ko-KR" altLang="en-US" sz="1200" dirty="0">
+                <a:latin typeface="Pretendard Light" panose="02000403000000020004" pitchFamily="50" charset="-127"/>
+                <a:ea typeface="Pretendard Light" panose="02000403000000020004" pitchFamily="50" charset="-127"/>
+                <a:cs typeface="Pretendard Light" panose="02000403000000020004" pitchFamily="50" charset="-127"/>
+              </a:rPr>
+              <a:t>：</a:t>
+            </a:r>
+            <a:endParaRPr lang="en-US" altLang="ko-KR" sz="1200" dirty="0">
+              <a:latin typeface="Pretendard Light" panose="02000403000000020004" pitchFamily="50" charset="-127"/>
+              <a:ea typeface="Pretendard Light" panose="02000403000000020004" pitchFamily="50" charset="-127"/>
+              <a:cs typeface="Pretendard Light" panose="02000403000000020004" pitchFamily="50" charset="-127"/>
+            </a:endParaRPr>
+          </a:p>
+          <a:p>
+            <a:endParaRPr lang="en-US" altLang="ko-KR" sz="1200" dirty="0">
+              <a:latin typeface="Pretendard Light" panose="02000403000000020004" pitchFamily="50" charset="-127"/>
+              <a:ea typeface="Pretendard Light" panose="02000403000000020004" pitchFamily="50" charset="-127"/>
+              <a:cs typeface="Pretendard Light" panose="02000403000000020004" pitchFamily="50" charset="-127"/>
+            </a:endParaRPr>
+          </a:p>
+          <a:p>
+            <a:r>
+              <a:rPr lang="en-US" altLang="ko-KR" sz="1200" dirty="0">
+                <a:latin typeface="Pretendard Light" panose="02000403000000020004" pitchFamily="50" charset="-127"/>
+                <a:ea typeface="Pretendard Light" panose="02000403000000020004" pitchFamily="50" charset="-127"/>
+                <a:cs typeface="Pretendard Light" panose="02000403000000020004" pitchFamily="50" charset="-127"/>
+              </a:rPr>
+              <a:t>python qc_godas.py /</a:t>
+            </a:r>
+            <a:r>
+              <a:rPr lang="en-US" altLang="ko-KR" sz="1200" dirty="0" err="1">
+                <a:latin typeface="Pretendard Light" panose="02000403000000020004" pitchFamily="50" charset="-127"/>
+                <a:ea typeface="Pretendard Light" panose="02000403000000020004" pitchFamily="50" charset="-127"/>
+                <a:cs typeface="Pretendard Light" panose="02000403000000020004" pitchFamily="50" charset="-127"/>
+              </a:rPr>
+              <a:t>mnt</a:t>
+            </a:r>
+            <a:r>
+              <a:rPr lang="en-US" altLang="ko-KR" sz="1200" dirty="0">
+                <a:latin typeface="Pretendard Light" panose="02000403000000020004" pitchFamily="50" charset="-127"/>
+                <a:ea typeface="Pretendard Light" panose="02000403000000020004" pitchFamily="50" charset="-127"/>
+                <a:cs typeface="Pretendard Light" panose="02000403000000020004" pitchFamily="50" charset="-127"/>
+              </a:rPr>
+              <a:t>/d/project/01_ENSO/01_data/01_raw/</a:t>
+            </a:r>
+            <a:r>
+              <a:rPr lang="en-US" altLang="ko-KR" sz="1200" dirty="0" err="1">
+                <a:latin typeface="Pretendard Light" panose="02000403000000020004" pitchFamily="50" charset="-127"/>
+                <a:ea typeface="Pretendard Light" panose="02000403000000020004" pitchFamily="50" charset="-127"/>
+                <a:cs typeface="Pretendard Light" panose="02000403000000020004" pitchFamily="50" charset="-127"/>
+              </a:rPr>
+              <a:t>godas</a:t>
+            </a:r>
+            <a:endParaRPr lang="en-US" altLang="ko-KR" sz="1200" dirty="0">
+              <a:latin typeface="Pretendard Light" panose="02000403000000020004" pitchFamily="50" charset="-127"/>
+              <a:ea typeface="Pretendard Light" panose="02000403000000020004" pitchFamily="50" charset="-127"/>
+              <a:cs typeface="Pretendard Light" panose="02000403000000020004" pitchFamily="50" charset="-127"/>
+            </a:endParaRPr>
+          </a:p>
+          <a:p>
+            <a:endParaRPr lang="en-US" altLang="ko-KR" sz="1200" dirty="0">
+              <a:latin typeface="Pretendard Light" panose="02000403000000020004" pitchFamily="50" charset="-127"/>
+              <a:ea typeface="Pretendard Light" panose="02000403000000020004" pitchFamily="50" charset="-127"/>
+              <a:cs typeface="Pretendard Light" panose="02000403000000020004" pitchFamily="50" charset="-127"/>
+            </a:endParaRPr>
+          </a:p>
+          <a:p>
+            <a:endParaRPr lang="en-US" altLang="ko-KR" sz="1200" dirty="0">
               <a:latin typeface="Pretendard Light" panose="02000403000000020004" pitchFamily="50" charset="-127"/>
               <a:ea typeface="Pretendard Light" panose="02000403000000020004" pitchFamily="50" charset="-127"/>
               <a:cs typeface="Pretendard Light" panose="02000403000000020004" pitchFamily="50" charset="-127"/>

--- a/ENSO_NEW.pptx
+++ b/ENSO_NEW.pptx
@@ -5,7 +5,7 @@
     <p:sldMasterId id="2147483659" r:id="rId1"/>
   </p:sldMasterIdLst>
   <p:notesMasterIdLst>
-    <p:notesMasterId r:id="rId13"/>
+    <p:notesMasterId r:id="rId12"/>
   </p:notesMasterIdLst>
   <p:sldIdLst>
     <p:sldId id="256" r:id="rId2"/>
@@ -13,12 +13,11 @@
     <p:sldId id="303" r:id="rId4"/>
     <p:sldId id="297" r:id="rId5"/>
     <p:sldId id="301" r:id="rId6"/>
-    <p:sldId id="306" r:id="rId7"/>
-    <p:sldId id="305" r:id="rId8"/>
-    <p:sldId id="307" r:id="rId9"/>
-    <p:sldId id="308" r:id="rId10"/>
-    <p:sldId id="309" r:id="rId11"/>
-    <p:sldId id="310" r:id="rId12"/>
+    <p:sldId id="313" r:id="rId7"/>
+    <p:sldId id="307" r:id="rId8"/>
+    <p:sldId id="309" r:id="rId9"/>
+    <p:sldId id="311" r:id="rId10"/>
+    <p:sldId id="314" r:id="rId11"/>
   </p:sldIdLst>
   <p:sldSz cx="12192000" cy="6858000"/>
   <p:notesSz cx="6858000" cy="9144000"/>
@@ -823,7 +822,7 @@
         <p:cNvPr id="1" name="Shape 154">
           <a:extLst>
             <a:ext uri="{FF2B5EF4-FFF2-40B4-BE49-F238E27FC236}">
-              <a16:creationId xmlns:a16="http://schemas.microsoft.com/office/drawing/2014/main" id="{1B9C6297-19C8-E4CF-69F3-EA7CCCCA47F5}"/>
+              <a16:creationId xmlns:a16="http://schemas.microsoft.com/office/drawing/2014/main" id="{DFE2FDF4-4D8E-D1BD-E521-7ACDD3487DCF}"/>
             </a:ext>
           </a:extLst>
         </p:cNvPr>
@@ -843,7 +842,7 @@
           <p:cNvPr id="155" name="Google Shape;155;p6:notes">
             <a:extLst>
               <a:ext uri="{FF2B5EF4-FFF2-40B4-BE49-F238E27FC236}">
-                <a16:creationId xmlns:a16="http://schemas.microsoft.com/office/drawing/2014/main" id="{F6ECAF2F-E099-D864-EE36-AA24CE05F77F}"/>
+                <a16:creationId xmlns:a16="http://schemas.microsoft.com/office/drawing/2014/main" id="{0F479114-7A79-B4F0-DA5A-23558390D3C3}"/>
               </a:ext>
             </a:extLst>
           </p:cNvPr>
@@ -887,7 +886,7 @@
           <p:cNvPr id="156" name="Google Shape;156;p6:notes">
             <a:extLst>
               <a:ext uri="{FF2B5EF4-FFF2-40B4-BE49-F238E27FC236}">
-                <a16:creationId xmlns:a16="http://schemas.microsoft.com/office/drawing/2014/main" id="{A99FA170-0E66-10F8-37DE-4AE8211BCEA2}"/>
+                <a16:creationId xmlns:a16="http://schemas.microsoft.com/office/drawing/2014/main" id="{A820E122-F2DF-DDE0-A07C-08112CBDFDB3}"/>
               </a:ext>
             </a:extLst>
           </p:cNvPr>
@@ -932,134 +931,7 @@
     </p:spTree>
     <p:extLst>
       <p:ext uri="{BB962C8B-B14F-4D97-AF65-F5344CB8AC3E}">
-        <p14:creationId xmlns:p14="http://schemas.microsoft.com/office/powerpoint/2010/main" val="2399505638"/>
-      </p:ext>
-    </p:extLst>
-  </p:cSld>
-  <p:clrMapOvr>
-    <a:masterClrMapping/>
-  </p:clrMapOvr>
-</p:notes>
-</file>
-
-<file path=ppt/notesSlides/notesSlide11.xml><?xml version="1.0" encoding="utf-8"?>
-<p:notes xmlns:a="http://schemas.openxmlformats.org/drawingml/2006/main" xmlns:r="http://schemas.openxmlformats.org/officeDocument/2006/relationships" xmlns:p="http://schemas.openxmlformats.org/presentationml/2006/main" showMasterSp="0" showMasterPhAnim="0">
-  <p:cSld>
-    <p:spTree>
-      <p:nvGrpSpPr>
-        <p:cNvPr id="1" name="Shape 154">
-          <a:extLst>
-            <a:ext uri="{FF2B5EF4-FFF2-40B4-BE49-F238E27FC236}">
-              <a16:creationId xmlns:a16="http://schemas.microsoft.com/office/drawing/2014/main" id="{A126CCA3-F64E-837E-E927-7F0893333F5E}"/>
-            </a:ext>
-          </a:extLst>
-        </p:cNvPr>
-        <p:cNvGrpSpPr/>
-        <p:nvPr/>
-      </p:nvGrpSpPr>
-      <p:grpSpPr>
-        <a:xfrm>
-          <a:off x="0" y="0"/>
-          <a:ext cx="0" cy="0"/>
-          <a:chOff x="0" y="0"/>
-          <a:chExt cx="0" cy="0"/>
-        </a:xfrm>
-      </p:grpSpPr>
-      <p:sp>
-        <p:nvSpPr>
-          <p:cNvPr id="155" name="Google Shape;155;p6:notes">
-            <a:extLst>
-              <a:ext uri="{FF2B5EF4-FFF2-40B4-BE49-F238E27FC236}">
-                <a16:creationId xmlns:a16="http://schemas.microsoft.com/office/drawing/2014/main" id="{4DC08DEA-8500-49D1-7072-DACEEF002565}"/>
-              </a:ext>
-            </a:extLst>
-          </p:cNvPr>
-          <p:cNvSpPr txBox="1">
-            <a:spLocks noGrp="1"/>
-          </p:cNvSpPr>
-          <p:nvPr>
-            <p:ph type="body" idx="1"/>
-          </p:nvPr>
-        </p:nvSpPr>
-        <p:spPr>
-          <a:xfrm>
-            <a:off x="685800" y="4343400"/>
-            <a:ext cx="5486400" cy="4114800"/>
-          </a:xfrm>
-          <a:prstGeom prst="rect">
-            <a:avLst/>
-          </a:prstGeom>
-        </p:spPr>
-        <p:txBody>
-          <a:bodyPr spcFirstLastPara="1" wrap="square" lIns="91425" tIns="91425" rIns="91425" bIns="91425" anchor="t" anchorCtr="0">
-            <a:noAutofit/>
-          </a:bodyPr>
-          <a:lstStyle/>
-          <a:p>
-            <a:pPr marL="0" lvl="0" indent="0" algn="l" rtl="0">
-              <a:spcBef>
-                <a:spcPts val="0"/>
-              </a:spcBef>
-              <a:spcAft>
-                <a:spcPts val="0"/>
-              </a:spcAft>
-              <a:buNone/>
-            </a:pPr>
-            <a:endParaRPr/>
-          </a:p>
-        </p:txBody>
-      </p:sp>
-      <p:sp>
-        <p:nvSpPr>
-          <p:cNvPr id="156" name="Google Shape;156;p6:notes">
-            <a:extLst>
-              <a:ext uri="{FF2B5EF4-FFF2-40B4-BE49-F238E27FC236}">
-                <a16:creationId xmlns:a16="http://schemas.microsoft.com/office/drawing/2014/main" id="{F249919F-4B93-6DFC-CC6C-902243D7F995}"/>
-              </a:ext>
-            </a:extLst>
-          </p:cNvPr>
-          <p:cNvSpPr>
-            <a:spLocks noGrp="1" noRot="1" noChangeAspect="1"/>
-          </p:cNvSpPr>
-          <p:nvPr>
-            <p:ph type="sldImg" idx="2"/>
-          </p:nvPr>
-        </p:nvSpPr>
-        <p:spPr>
-          <a:xfrm>
-            <a:off x="381000" y="685800"/>
-            <a:ext cx="6096000" cy="3429000"/>
-          </a:xfrm>
-          <a:custGeom>
-            <a:avLst/>
-            <a:gdLst/>
-            <a:ahLst/>
-            <a:cxnLst/>
-            <a:rect l="l" t="t" r="r" b="b"/>
-            <a:pathLst>
-              <a:path w="120000" h="120000" extrusionOk="0">
-                <a:moveTo>
-                  <a:pt x="0" y="0"/>
-                </a:moveTo>
-                <a:lnTo>
-                  <a:pt x="120000" y="0"/>
-                </a:lnTo>
-                <a:lnTo>
-                  <a:pt x="120000" y="120000"/>
-                </a:lnTo>
-                <a:lnTo>
-                  <a:pt x="0" y="120000"/>
-                </a:lnTo>
-                <a:close/>
-              </a:path>
-            </a:pathLst>
-          </a:custGeom>
-        </p:spPr>
-      </p:sp>
-    </p:spTree>
-    <p:extLst>
-      <p:ext uri="{BB962C8B-B14F-4D97-AF65-F5344CB8AC3E}">
-        <p14:creationId xmlns:p14="http://schemas.microsoft.com/office/powerpoint/2010/main" val="876218942"/>
+        <p14:creationId xmlns:p14="http://schemas.microsoft.com/office/powerpoint/2010/main" val="3881210217"/>
       </p:ext>
     </p:extLst>
   </p:cSld>
@@ -1585,7 +1457,7 @@
         <p:cNvPr id="1" name="Shape 154">
           <a:extLst>
             <a:ext uri="{FF2B5EF4-FFF2-40B4-BE49-F238E27FC236}">
-              <a16:creationId xmlns:a16="http://schemas.microsoft.com/office/drawing/2014/main" id="{4DA4E559-543F-EF98-5F20-C20E06BAA8BC}"/>
+              <a16:creationId xmlns:a16="http://schemas.microsoft.com/office/drawing/2014/main" id="{F278F414-4BE6-B1B7-A02F-B281ACEC0B41}"/>
             </a:ext>
           </a:extLst>
         </p:cNvPr>
@@ -1605,7 +1477,7 @@
           <p:cNvPr id="155" name="Google Shape;155;p6:notes">
             <a:extLst>
               <a:ext uri="{FF2B5EF4-FFF2-40B4-BE49-F238E27FC236}">
-                <a16:creationId xmlns:a16="http://schemas.microsoft.com/office/drawing/2014/main" id="{CF5077E7-74A1-AA55-4B65-3F86B9A6331D}"/>
+                <a16:creationId xmlns:a16="http://schemas.microsoft.com/office/drawing/2014/main" id="{5CFF97E1-FAD7-A458-144B-95708665A9F2}"/>
               </a:ext>
             </a:extLst>
           </p:cNvPr>
@@ -1649,7 +1521,7 @@
           <p:cNvPr id="156" name="Google Shape;156;p6:notes">
             <a:extLst>
               <a:ext uri="{FF2B5EF4-FFF2-40B4-BE49-F238E27FC236}">
-                <a16:creationId xmlns:a16="http://schemas.microsoft.com/office/drawing/2014/main" id="{676F414B-0531-DD16-B10F-A1D074147CBE}"/>
+                <a16:creationId xmlns:a16="http://schemas.microsoft.com/office/drawing/2014/main" id="{0A316058-D9CD-29A3-865E-5317E9AE4EF1}"/>
               </a:ext>
             </a:extLst>
           </p:cNvPr>
@@ -1694,7 +1566,7 @@
     </p:spTree>
     <p:extLst>
       <p:ext uri="{BB962C8B-B14F-4D97-AF65-F5344CB8AC3E}">
-        <p14:creationId xmlns:p14="http://schemas.microsoft.com/office/powerpoint/2010/main" val="1608968399"/>
+        <p14:creationId xmlns:p14="http://schemas.microsoft.com/office/powerpoint/2010/main" val="683648901"/>
       </p:ext>
     </p:extLst>
   </p:cSld>
@@ -1705,133 +1577,6 @@
 </file>
 
 <file path=ppt/notesSlides/notesSlide7.xml><?xml version="1.0" encoding="utf-8"?>
-<p:notes xmlns:a="http://schemas.openxmlformats.org/drawingml/2006/main" xmlns:r="http://schemas.openxmlformats.org/officeDocument/2006/relationships" xmlns:p="http://schemas.openxmlformats.org/presentationml/2006/main" showMasterSp="0" showMasterPhAnim="0">
-  <p:cSld>
-    <p:spTree>
-      <p:nvGrpSpPr>
-        <p:cNvPr id="1" name="Shape 154">
-          <a:extLst>
-            <a:ext uri="{FF2B5EF4-FFF2-40B4-BE49-F238E27FC236}">
-              <a16:creationId xmlns:a16="http://schemas.microsoft.com/office/drawing/2014/main" id="{E5208DAE-5D4A-5F1F-4F36-514A7BB66345}"/>
-            </a:ext>
-          </a:extLst>
-        </p:cNvPr>
-        <p:cNvGrpSpPr/>
-        <p:nvPr/>
-      </p:nvGrpSpPr>
-      <p:grpSpPr>
-        <a:xfrm>
-          <a:off x="0" y="0"/>
-          <a:ext cx="0" cy="0"/>
-          <a:chOff x="0" y="0"/>
-          <a:chExt cx="0" cy="0"/>
-        </a:xfrm>
-      </p:grpSpPr>
-      <p:sp>
-        <p:nvSpPr>
-          <p:cNvPr id="155" name="Google Shape;155;p6:notes">
-            <a:extLst>
-              <a:ext uri="{FF2B5EF4-FFF2-40B4-BE49-F238E27FC236}">
-                <a16:creationId xmlns:a16="http://schemas.microsoft.com/office/drawing/2014/main" id="{D4048419-8C33-641A-A95F-2803CF9E3992}"/>
-              </a:ext>
-            </a:extLst>
-          </p:cNvPr>
-          <p:cNvSpPr txBox="1">
-            <a:spLocks noGrp="1"/>
-          </p:cNvSpPr>
-          <p:nvPr>
-            <p:ph type="body" idx="1"/>
-          </p:nvPr>
-        </p:nvSpPr>
-        <p:spPr>
-          <a:xfrm>
-            <a:off x="685800" y="4343400"/>
-            <a:ext cx="5486400" cy="4114800"/>
-          </a:xfrm>
-          <a:prstGeom prst="rect">
-            <a:avLst/>
-          </a:prstGeom>
-        </p:spPr>
-        <p:txBody>
-          <a:bodyPr spcFirstLastPara="1" wrap="square" lIns="91425" tIns="91425" rIns="91425" bIns="91425" anchor="t" anchorCtr="0">
-            <a:noAutofit/>
-          </a:bodyPr>
-          <a:lstStyle/>
-          <a:p>
-            <a:pPr marL="0" lvl="0" indent="0" algn="l" rtl="0">
-              <a:spcBef>
-                <a:spcPts val="0"/>
-              </a:spcBef>
-              <a:spcAft>
-                <a:spcPts val="0"/>
-              </a:spcAft>
-              <a:buNone/>
-            </a:pPr>
-            <a:endParaRPr/>
-          </a:p>
-        </p:txBody>
-      </p:sp>
-      <p:sp>
-        <p:nvSpPr>
-          <p:cNvPr id="156" name="Google Shape;156;p6:notes">
-            <a:extLst>
-              <a:ext uri="{FF2B5EF4-FFF2-40B4-BE49-F238E27FC236}">
-                <a16:creationId xmlns:a16="http://schemas.microsoft.com/office/drawing/2014/main" id="{34B3C8B0-764B-F646-B1DD-8C9DFFCAEC37}"/>
-              </a:ext>
-            </a:extLst>
-          </p:cNvPr>
-          <p:cNvSpPr>
-            <a:spLocks noGrp="1" noRot="1" noChangeAspect="1"/>
-          </p:cNvSpPr>
-          <p:nvPr>
-            <p:ph type="sldImg" idx="2"/>
-          </p:nvPr>
-        </p:nvSpPr>
-        <p:spPr>
-          <a:xfrm>
-            <a:off x="381000" y="685800"/>
-            <a:ext cx="6096000" cy="3429000"/>
-          </a:xfrm>
-          <a:custGeom>
-            <a:avLst/>
-            <a:gdLst/>
-            <a:ahLst/>
-            <a:cxnLst/>
-            <a:rect l="l" t="t" r="r" b="b"/>
-            <a:pathLst>
-              <a:path w="120000" h="120000" extrusionOk="0">
-                <a:moveTo>
-                  <a:pt x="0" y="0"/>
-                </a:moveTo>
-                <a:lnTo>
-                  <a:pt x="120000" y="0"/>
-                </a:lnTo>
-                <a:lnTo>
-                  <a:pt x="120000" y="120000"/>
-                </a:lnTo>
-                <a:lnTo>
-                  <a:pt x="0" y="120000"/>
-                </a:lnTo>
-                <a:close/>
-              </a:path>
-            </a:pathLst>
-          </a:custGeom>
-        </p:spPr>
-      </p:sp>
-    </p:spTree>
-    <p:extLst>
-      <p:ext uri="{BB962C8B-B14F-4D97-AF65-F5344CB8AC3E}">
-        <p14:creationId xmlns:p14="http://schemas.microsoft.com/office/powerpoint/2010/main" val="2867312404"/>
-      </p:ext>
-    </p:extLst>
-  </p:cSld>
-  <p:clrMapOvr>
-    <a:masterClrMapping/>
-  </p:clrMapOvr>
-</p:notes>
-</file>
-
-<file path=ppt/notesSlides/notesSlide8.xml><?xml version="1.0" encoding="utf-8"?>
 <p:notes xmlns:a="http://schemas.openxmlformats.org/drawingml/2006/main" xmlns:r="http://schemas.openxmlformats.org/officeDocument/2006/relationships" xmlns:p="http://schemas.openxmlformats.org/presentationml/2006/main" showMasterSp="0" showMasterPhAnim="0">
   <p:cSld>
     <p:spTree>
@@ -1958,7 +1703,7 @@
 </p:notes>
 </file>
 
-<file path=ppt/notesSlides/notesSlide9.xml><?xml version="1.0" encoding="utf-8"?>
+<file path=ppt/notesSlides/notesSlide8.xml><?xml version="1.0" encoding="utf-8"?>
 <p:notes xmlns:a="http://schemas.openxmlformats.org/drawingml/2006/main" xmlns:r="http://schemas.openxmlformats.org/officeDocument/2006/relationships" xmlns:p="http://schemas.openxmlformats.org/presentationml/2006/main" showMasterSp="0" showMasterPhAnim="0">
   <p:cSld>
     <p:spTree>
@@ -1966,7 +1711,7 @@
         <p:cNvPr id="1" name="Shape 154">
           <a:extLst>
             <a:ext uri="{FF2B5EF4-FFF2-40B4-BE49-F238E27FC236}">
-              <a16:creationId xmlns:a16="http://schemas.microsoft.com/office/drawing/2014/main" id="{C38574F5-5674-F2E1-3C59-1CFB79F5C03D}"/>
+              <a16:creationId xmlns:a16="http://schemas.microsoft.com/office/drawing/2014/main" id="{1B9C6297-19C8-E4CF-69F3-EA7CCCCA47F5}"/>
             </a:ext>
           </a:extLst>
         </p:cNvPr>
@@ -1986,7 +1731,7 @@
           <p:cNvPr id="155" name="Google Shape;155;p6:notes">
             <a:extLst>
               <a:ext uri="{FF2B5EF4-FFF2-40B4-BE49-F238E27FC236}">
-                <a16:creationId xmlns:a16="http://schemas.microsoft.com/office/drawing/2014/main" id="{A4C76B1C-0D7C-B6A4-5CE4-CEDBDCFC09EE}"/>
+                <a16:creationId xmlns:a16="http://schemas.microsoft.com/office/drawing/2014/main" id="{F6ECAF2F-E099-D864-EE36-AA24CE05F77F}"/>
               </a:ext>
             </a:extLst>
           </p:cNvPr>
@@ -2030,7 +1775,7 @@
           <p:cNvPr id="156" name="Google Shape;156;p6:notes">
             <a:extLst>
               <a:ext uri="{FF2B5EF4-FFF2-40B4-BE49-F238E27FC236}">
-                <a16:creationId xmlns:a16="http://schemas.microsoft.com/office/drawing/2014/main" id="{85E0B6D0-1378-DB6C-71BE-2656F562C969}"/>
+                <a16:creationId xmlns:a16="http://schemas.microsoft.com/office/drawing/2014/main" id="{A99FA170-0E66-10F8-37DE-4AE8211BCEA2}"/>
               </a:ext>
             </a:extLst>
           </p:cNvPr>
@@ -2075,7 +1820,134 @@
     </p:spTree>
     <p:extLst>
       <p:ext uri="{BB962C8B-B14F-4D97-AF65-F5344CB8AC3E}">
-        <p14:creationId xmlns:p14="http://schemas.microsoft.com/office/powerpoint/2010/main" val="2901062486"/>
+        <p14:creationId xmlns:p14="http://schemas.microsoft.com/office/powerpoint/2010/main" val="2399505638"/>
+      </p:ext>
+    </p:extLst>
+  </p:cSld>
+  <p:clrMapOvr>
+    <a:masterClrMapping/>
+  </p:clrMapOvr>
+</p:notes>
+</file>
+
+<file path=ppt/notesSlides/notesSlide9.xml><?xml version="1.0" encoding="utf-8"?>
+<p:notes xmlns:a="http://schemas.openxmlformats.org/drawingml/2006/main" xmlns:r="http://schemas.openxmlformats.org/officeDocument/2006/relationships" xmlns:p="http://schemas.openxmlformats.org/presentationml/2006/main" showMasterSp="0" showMasterPhAnim="0">
+  <p:cSld>
+    <p:spTree>
+      <p:nvGrpSpPr>
+        <p:cNvPr id="1" name="Shape 154">
+          <a:extLst>
+            <a:ext uri="{FF2B5EF4-FFF2-40B4-BE49-F238E27FC236}">
+              <a16:creationId xmlns:a16="http://schemas.microsoft.com/office/drawing/2014/main" id="{99375F58-0FE5-38AF-4859-51F083CC1147}"/>
+            </a:ext>
+          </a:extLst>
+        </p:cNvPr>
+        <p:cNvGrpSpPr/>
+        <p:nvPr/>
+      </p:nvGrpSpPr>
+      <p:grpSpPr>
+        <a:xfrm>
+          <a:off x="0" y="0"/>
+          <a:ext cx="0" cy="0"/>
+          <a:chOff x="0" y="0"/>
+          <a:chExt cx="0" cy="0"/>
+        </a:xfrm>
+      </p:grpSpPr>
+      <p:sp>
+        <p:nvSpPr>
+          <p:cNvPr id="155" name="Google Shape;155;p6:notes">
+            <a:extLst>
+              <a:ext uri="{FF2B5EF4-FFF2-40B4-BE49-F238E27FC236}">
+                <a16:creationId xmlns:a16="http://schemas.microsoft.com/office/drawing/2014/main" id="{66E9D71D-4770-C716-E8E5-4ED6952E2C83}"/>
+              </a:ext>
+            </a:extLst>
+          </p:cNvPr>
+          <p:cNvSpPr txBox="1">
+            <a:spLocks noGrp="1"/>
+          </p:cNvSpPr>
+          <p:nvPr>
+            <p:ph type="body" idx="1"/>
+          </p:nvPr>
+        </p:nvSpPr>
+        <p:spPr>
+          <a:xfrm>
+            <a:off x="685800" y="4343400"/>
+            <a:ext cx="5486400" cy="4114800"/>
+          </a:xfrm>
+          <a:prstGeom prst="rect">
+            <a:avLst/>
+          </a:prstGeom>
+        </p:spPr>
+        <p:txBody>
+          <a:bodyPr spcFirstLastPara="1" wrap="square" lIns="91425" tIns="91425" rIns="91425" bIns="91425" anchor="t" anchorCtr="0">
+            <a:noAutofit/>
+          </a:bodyPr>
+          <a:lstStyle/>
+          <a:p>
+            <a:pPr marL="0" lvl="0" indent="0" algn="l" rtl="0">
+              <a:spcBef>
+                <a:spcPts val="0"/>
+              </a:spcBef>
+              <a:spcAft>
+                <a:spcPts val="0"/>
+              </a:spcAft>
+              <a:buNone/>
+            </a:pPr>
+            <a:endParaRPr/>
+          </a:p>
+        </p:txBody>
+      </p:sp>
+      <p:sp>
+        <p:nvSpPr>
+          <p:cNvPr id="156" name="Google Shape;156;p6:notes">
+            <a:extLst>
+              <a:ext uri="{FF2B5EF4-FFF2-40B4-BE49-F238E27FC236}">
+                <a16:creationId xmlns:a16="http://schemas.microsoft.com/office/drawing/2014/main" id="{2E69BAF6-9C41-5677-F891-92A6600FD7DA}"/>
+              </a:ext>
+            </a:extLst>
+          </p:cNvPr>
+          <p:cNvSpPr>
+            <a:spLocks noGrp="1" noRot="1" noChangeAspect="1"/>
+          </p:cNvSpPr>
+          <p:nvPr>
+            <p:ph type="sldImg" idx="2"/>
+          </p:nvPr>
+        </p:nvSpPr>
+        <p:spPr>
+          <a:xfrm>
+            <a:off x="381000" y="685800"/>
+            <a:ext cx="6096000" cy="3429000"/>
+          </a:xfrm>
+          <a:custGeom>
+            <a:avLst/>
+            <a:gdLst/>
+            <a:ahLst/>
+            <a:cxnLst/>
+            <a:rect l="l" t="t" r="r" b="b"/>
+            <a:pathLst>
+              <a:path w="120000" h="120000" extrusionOk="0">
+                <a:moveTo>
+                  <a:pt x="0" y="0"/>
+                </a:moveTo>
+                <a:lnTo>
+                  <a:pt x="120000" y="0"/>
+                </a:lnTo>
+                <a:lnTo>
+                  <a:pt x="120000" y="120000"/>
+                </a:lnTo>
+                <a:lnTo>
+                  <a:pt x="0" y="120000"/>
+                </a:lnTo>
+                <a:close/>
+              </a:path>
+            </a:pathLst>
+          </a:custGeom>
+        </p:spPr>
+      </p:sp>
+    </p:spTree>
+    <p:extLst>
+      <p:ext uri="{BB962C8B-B14F-4D97-AF65-F5344CB8AC3E}">
+        <p14:creationId xmlns:p14="http://schemas.microsoft.com/office/powerpoint/2010/main" val="443716761"/>
       </p:ext>
     </p:extLst>
   </p:cSld>
@@ -5061,7 +4933,7 @@
         <p:cNvPr id="1" name="Shape 157">
           <a:extLst>
             <a:ext uri="{FF2B5EF4-FFF2-40B4-BE49-F238E27FC236}">
-              <a16:creationId xmlns:a16="http://schemas.microsoft.com/office/drawing/2014/main" id="{8A331AF0-9370-1D85-C1D7-FB9790D24E3A}"/>
+              <a16:creationId xmlns:a16="http://schemas.microsoft.com/office/drawing/2014/main" id="{949D7B52-F91B-D0DC-BE46-9529E4970298}"/>
             </a:ext>
           </a:extLst>
         </p:cNvPr>
@@ -5081,7 +4953,7 @@
           <p:cNvPr id="158" name="Google Shape;158;p18" descr="image.png">
             <a:extLst>
               <a:ext uri="{FF2B5EF4-FFF2-40B4-BE49-F238E27FC236}">
-                <a16:creationId xmlns:a16="http://schemas.microsoft.com/office/drawing/2014/main" id="{741C7702-7A60-3E7A-B047-2C624B2BD893}"/>
+                <a16:creationId xmlns:a16="http://schemas.microsoft.com/office/drawing/2014/main" id="{089B15EC-47D4-88B4-3787-1F9CE1F911DE}"/>
               </a:ext>
             </a:extLst>
           </p:cNvPr>
@@ -5116,7 +4988,7 @@
           <p:cNvPr id="160" name="Google Shape;160;p18">
             <a:extLst>
               <a:ext uri="{FF2B5EF4-FFF2-40B4-BE49-F238E27FC236}">
-                <a16:creationId xmlns:a16="http://schemas.microsoft.com/office/drawing/2014/main" id="{2072E083-9083-1369-7585-F50FBD858BA0}"/>
+                <a16:creationId xmlns:a16="http://schemas.microsoft.com/office/drawing/2014/main" id="{5B8A99EA-A6DC-9662-2123-00FD2B55198D}"/>
               </a:ext>
             </a:extLst>
           </p:cNvPr>
@@ -5176,7 +5048,7 @@
           <p:cNvPr id="161" name="Google Shape;161;p18">
             <a:extLst>
               <a:ext uri="{FF2B5EF4-FFF2-40B4-BE49-F238E27FC236}">
-                <a16:creationId xmlns:a16="http://schemas.microsoft.com/office/drawing/2014/main" id="{C9757FD2-DBC7-0D50-7A45-7F8815D33C82}"/>
+                <a16:creationId xmlns:a16="http://schemas.microsoft.com/office/drawing/2014/main" id="{242F695A-E3C5-C5DE-89C4-4BC694DE68E2}"/>
               </a:ext>
             </a:extLst>
           </p:cNvPr>
@@ -5230,7 +5102,7 @@
           <p:cNvPr id="4" name="슬라이드 번호 개체 틀 3">
             <a:extLst>
               <a:ext uri="{FF2B5EF4-FFF2-40B4-BE49-F238E27FC236}">
-                <a16:creationId xmlns:a16="http://schemas.microsoft.com/office/drawing/2014/main" id="{A4AFBA6A-E229-1EC7-E7CF-665278364BDE}"/>
+                <a16:creationId xmlns:a16="http://schemas.microsoft.com/office/drawing/2014/main" id="{15E2D793-40A6-8285-2694-E11E6CE05D57}"/>
               </a:ext>
             </a:extLst>
           </p:cNvPr>
@@ -5268,7 +5140,7 @@
           <p:cNvPr id="3" name="TextBox 2">
             <a:extLst>
               <a:ext uri="{FF2B5EF4-FFF2-40B4-BE49-F238E27FC236}">
-                <a16:creationId xmlns:a16="http://schemas.microsoft.com/office/drawing/2014/main" id="{D17E4728-3518-DA77-FE16-93D7B7552CB0}"/>
+                <a16:creationId xmlns:a16="http://schemas.microsoft.com/office/drawing/2014/main" id="{AEFD0DE0-7FFE-E7B4-BA8D-3C47478C1739}"/>
               </a:ext>
             </a:extLst>
           </p:cNvPr>
@@ -5278,7 +5150,7 @@
         <p:spPr>
           <a:xfrm>
             <a:off x="571500" y="1210702"/>
-            <a:ext cx="11049000" cy="4093428"/>
+            <a:ext cx="11049000" cy="523220"/>
           </a:xfrm>
           <a:prstGeom prst="rect">
             <a:avLst/>
@@ -5291,483 +5163,33 @@
           </a:bodyPr>
           <a:lstStyle/>
           <a:p>
-            <a:r>
-              <a:rPr lang="ko-KR" altLang="en-US" sz="1000" b="1" dirty="0">
-                <a:latin typeface="Pretendard" panose="02000503000000020004" pitchFamily="50" charset="-127"/>
-                <a:ea typeface="Pretendard" panose="02000503000000020004" pitchFamily="50" charset="-127"/>
-                <a:cs typeface="Pretendard" panose="02000503000000020004" pitchFamily="50" charset="-127"/>
-              </a:rPr>
-              <a:t>변수 병합</a:t>
-            </a:r>
-            <a:endParaRPr lang="en-US" altLang="ko-KR" sz="1000" dirty="0">
-              <a:latin typeface="Pretendard" panose="02000503000000020004" pitchFamily="50" charset="-127"/>
-              <a:ea typeface="Pretendard" panose="02000503000000020004" pitchFamily="50" charset="-127"/>
-              <a:cs typeface="Pretendard" panose="02000503000000020004" pitchFamily="50" charset="-127"/>
+            <a:pPr marL="285750" indent="-285750">
+              <a:buFont typeface="Arial" panose="020B0604020202020204" pitchFamily="34" charset="0"/>
+              <a:buChar char="•"/>
+            </a:pPr>
+            <a:r>
+              <a:rPr lang="ko-KR" altLang="en-US" dirty="0" err="1">
+                <a:latin typeface="Pretendard Light" panose="02000403000000020004" pitchFamily="50" charset="-127"/>
+                <a:ea typeface="Pretendard Light" panose="02000403000000020004" pitchFamily="50" charset="-127"/>
+                <a:cs typeface="Pretendard Light" panose="02000403000000020004" pitchFamily="50" charset="-127"/>
+              </a:rPr>
+              <a:t>ㅇㅇ</a:t>
+            </a:r>
+            <a:endParaRPr lang="en-US" altLang="ko-KR" dirty="0">
+              <a:latin typeface="Pretendard Light" panose="02000403000000020004" pitchFamily="50" charset="-127"/>
+              <a:ea typeface="Pretendard Light" panose="02000403000000020004" pitchFamily="50" charset="-127"/>
+              <a:cs typeface="Pretendard Light" panose="02000403000000020004" pitchFamily="50" charset="-127"/>
             </a:endParaRPr>
           </a:p>
           <a:p>
-            <a:r>
-              <a:rPr lang="en-US" altLang="ko-KR" sz="1000" dirty="0"/>
-              <a:t>python merge_vars.py   --</a:t>
-            </a:r>
-            <a:r>
-              <a:rPr lang="en-US" altLang="ko-KR" sz="1000" dirty="0" err="1"/>
-              <a:t>inroot</a:t>
-            </a:r>
-            <a:r>
-              <a:rPr lang="en-US" altLang="ko-KR" sz="1000" dirty="0"/>
-              <a:t>  /</a:t>
-            </a:r>
-            <a:r>
-              <a:rPr lang="en-US" altLang="ko-KR" sz="1000" dirty="0" err="1"/>
-              <a:t>mnt</a:t>
-            </a:r>
-            <a:r>
-              <a:rPr lang="en-US" altLang="ko-KR" sz="1000" dirty="0"/>
-              <a:t>/d/project/01_ENSO/01_data/02_interim   --outroot /</a:t>
-            </a:r>
-            <a:r>
-              <a:rPr lang="en-US" altLang="ko-KR" sz="1000" dirty="0" err="1"/>
-              <a:t>mnt</a:t>
-            </a:r>
-            <a:r>
-              <a:rPr lang="en-US" altLang="ko-KR" sz="1000" dirty="0"/>
-              <a:t>/d/project/01_ENSO/01_data/03_input   --mode all   --</a:t>
-            </a:r>
-            <a:r>
-              <a:rPr lang="en-US" altLang="ko-KR" sz="1000" dirty="0" err="1"/>
-              <a:t>fillna</a:t>
-            </a:r>
-            <a:r>
-              <a:rPr lang="en-US" altLang="ko-KR" sz="1000" dirty="0"/>
-              <a:t> none</a:t>
-            </a:r>
-          </a:p>
-          <a:p>
-            <a:endParaRPr lang="en-US" altLang="ko-KR" sz="1000" dirty="0">
-              <a:latin typeface="Pretendard" panose="02000503000000020004" pitchFamily="50" charset="-127"/>
-              <a:ea typeface="Pretendard" panose="02000503000000020004" pitchFamily="50" charset="-127"/>
-              <a:cs typeface="Pretendard" panose="02000503000000020004" pitchFamily="50" charset="-127"/>
-            </a:endParaRPr>
-          </a:p>
-          <a:p>
-            <a:r>
-              <a:rPr lang="ko-KR" altLang="en-US" sz="1000" b="1" dirty="0">
-                <a:latin typeface="Pretendard" panose="02000503000000020004" pitchFamily="50" charset="-127"/>
-                <a:ea typeface="Pretendard" panose="02000503000000020004" pitchFamily="50" charset="-127"/>
-                <a:cs typeface="Pretendard" panose="02000503000000020004" pitchFamily="50" charset="-127"/>
-              </a:rPr>
-              <a:t>검증</a:t>
-            </a:r>
-            <a:endParaRPr lang="en-US" altLang="ko-KR" sz="1000" b="1" dirty="0">
-              <a:latin typeface="Pretendard" panose="02000503000000020004" pitchFamily="50" charset="-127"/>
-              <a:ea typeface="Pretendard" panose="02000503000000020004" pitchFamily="50" charset="-127"/>
-              <a:cs typeface="Pretendard" panose="02000503000000020004" pitchFamily="50" charset="-127"/>
-            </a:endParaRPr>
-          </a:p>
-          <a:p>
-            <a:r>
-              <a:rPr lang="en-US" altLang="ko-KR" sz="1000" dirty="0" err="1">
-                <a:latin typeface="Pretendard" panose="02000503000000020004" pitchFamily="50" charset="-127"/>
-                <a:ea typeface="Pretendard" panose="02000503000000020004" pitchFamily="50" charset="-127"/>
-                <a:cs typeface="Pretendard" panose="02000503000000020004" pitchFamily="50" charset="-127"/>
-              </a:rPr>
-              <a:t>ncdump</a:t>
-            </a:r>
-            <a:r>
-              <a:rPr lang="en-US" altLang="ko-KR" sz="1000" dirty="0">
-                <a:latin typeface="Pretendard" panose="02000503000000020004" pitchFamily="50" charset="-127"/>
-                <a:ea typeface="Pretendard" panose="02000503000000020004" pitchFamily="50" charset="-127"/>
-                <a:cs typeface="Pretendard" panose="02000503000000020004" pitchFamily="50" charset="-127"/>
-              </a:rPr>
-              <a:t> -h /mnt/d/project/01_ENSO/01_data/03_input/cmip6/ssp370/ACCESS-CM2/r1i1p1f1/monthly/input_ACCESS-CM2_ssp370_r1i1p1f1.anom_1x2.nc | head -n 50</a:t>
-            </a:r>
-          </a:p>
-          <a:p>
-            <a:r>
-              <a:rPr lang="en-US" altLang="ko-KR" sz="1000" dirty="0" err="1">
-                <a:latin typeface="Pretendard" panose="02000503000000020004" pitchFamily="50" charset="-127"/>
-                <a:ea typeface="Pretendard" panose="02000503000000020004" pitchFamily="50" charset="-127"/>
-                <a:cs typeface="Pretendard" panose="02000503000000020004" pitchFamily="50" charset="-127"/>
-              </a:rPr>
-              <a:t>cdo</a:t>
-            </a:r>
-            <a:r>
-              <a:rPr lang="en-US" altLang="ko-KR" sz="1000" dirty="0">
-                <a:latin typeface="Pretendard" panose="02000503000000020004" pitchFamily="50" charset="-127"/>
-                <a:ea typeface="Pretendard" panose="02000503000000020004" pitchFamily="50" charset="-127"/>
-                <a:cs typeface="Pretendard" panose="02000503000000020004" pitchFamily="50" charset="-127"/>
-              </a:rPr>
-              <a:t> </a:t>
-            </a:r>
-            <a:r>
-              <a:rPr lang="en-US" altLang="ko-KR" sz="1000" dirty="0" err="1">
-                <a:latin typeface="Pretendard" panose="02000503000000020004" pitchFamily="50" charset="-127"/>
-                <a:ea typeface="Pretendard" panose="02000503000000020004" pitchFamily="50" charset="-127"/>
-                <a:cs typeface="Pretendard" panose="02000503000000020004" pitchFamily="50" charset="-127"/>
-              </a:rPr>
-              <a:t>showname</a:t>
-            </a:r>
-            <a:r>
-              <a:rPr lang="en-US" altLang="ko-KR" sz="1000" dirty="0">
-                <a:latin typeface="Pretendard" panose="02000503000000020004" pitchFamily="50" charset="-127"/>
-                <a:ea typeface="Pretendard" panose="02000503000000020004" pitchFamily="50" charset="-127"/>
-                <a:cs typeface="Pretendard" panose="02000503000000020004" pitchFamily="50" charset="-127"/>
-              </a:rPr>
-              <a:t> /mnt/d/project/01_ENSO/01_data/03_input/cmip6/ssp370/ACCESS-CM2/r1i1p1f1/monthly/input_ACCESS-CM2_ssp370_r1i1p1f1.anom_1x2.nc</a:t>
-            </a:r>
-          </a:p>
-          <a:p>
-            <a:r>
-              <a:rPr lang="en-US" altLang="ko-KR" sz="1000" dirty="0" err="1">
-                <a:latin typeface="Pretendard" panose="02000503000000020004" pitchFamily="50" charset="-127"/>
-                <a:ea typeface="Pretendard" panose="02000503000000020004" pitchFamily="50" charset="-127"/>
-                <a:cs typeface="Pretendard" panose="02000503000000020004" pitchFamily="50" charset="-127"/>
-              </a:rPr>
-              <a:t>cdo</a:t>
-            </a:r>
-            <a:r>
-              <a:rPr lang="en-US" altLang="ko-KR" sz="1000" dirty="0">
-                <a:latin typeface="Pretendard" panose="02000503000000020004" pitchFamily="50" charset="-127"/>
-                <a:ea typeface="Pretendard" panose="02000503000000020004" pitchFamily="50" charset="-127"/>
-                <a:cs typeface="Pretendard" panose="02000503000000020004" pitchFamily="50" charset="-127"/>
-              </a:rPr>
-              <a:t> </a:t>
-            </a:r>
-            <a:r>
-              <a:rPr lang="en-US" altLang="ko-KR" sz="1000" dirty="0" err="1">
-                <a:latin typeface="Pretendard" panose="02000503000000020004" pitchFamily="50" charset="-127"/>
-                <a:ea typeface="Pretendard" panose="02000503000000020004" pitchFamily="50" charset="-127"/>
-                <a:cs typeface="Pretendard" panose="02000503000000020004" pitchFamily="50" charset="-127"/>
-              </a:rPr>
-              <a:t>showtimestamp</a:t>
-            </a:r>
-            <a:r>
-              <a:rPr lang="en-US" altLang="ko-KR" sz="1000" dirty="0">
-                <a:latin typeface="Pretendard" panose="02000503000000020004" pitchFamily="50" charset="-127"/>
-                <a:ea typeface="Pretendard" panose="02000503000000020004" pitchFamily="50" charset="-127"/>
-                <a:cs typeface="Pretendard" panose="02000503000000020004" pitchFamily="50" charset="-127"/>
-              </a:rPr>
-              <a:t> /mnt/d/project/01_ENSO/01_data/03_input/cmip6/ssp370/ACCESS-CM2/r1i1p1f1/monthly/input_ACCESS-CM2_ssp370_r1i1p1f1.anom_1x2.nc</a:t>
-            </a:r>
-          </a:p>
-          <a:p>
-            <a:endParaRPr lang="en-US" altLang="ko-KR" sz="1000" dirty="0">
-              <a:latin typeface="Pretendard" panose="02000503000000020004" pitchFamily="50" charset="-127"/>
-              <a:ea typeface="Pretendard" panose="02000503000000020004" pitchFamily="50" charset="-127"/>
-              <a:cs typeface="Pretendard" panose="02000503000000020004" pitchFamily="50" charset="-127"/>
-            </a:endParaRPr>
-          </a:p>
-          <a:p>
-            <a:endParaRPr lang="en-US" altLang="ko-KR" sz="1000" dirty="0">
-              <a:latin typeface="Pretendard" panose="02000503000000020004" pitchFamily="50" charset="-127"/>
-              <a:ea typeface="Pretendard" panose="02000503000000020004" pitchFamily="50" charset="-127"/>
-              <a:cs typeface="Pretendard" panose="02000503000000020004" pitchFamily="50" charset="-127"/>
-            </a:endParaRPr>
-          </a:p>
-          <a:p>
-            <a:r>
-              <a:rPr lang="ko-KR" altLang="en-US" sz="1000" b="1" dirty="0">
-                <a:latin typeface="Pretendard" panose="02000503000000020004" pitchFamily="50" charset="-127"/>
-                <a:ea typeface="Pretendard" panose="02000503000000020004" pitchFamily="50" charset="-127"/>
-                <a:cs typeface="Pretendard" panose="02000503000000020004" pitchFamily="50" charset="-127"/>
-              </a:rPr>
-              <a:t>시간 자르기</a:t>
-            </a:r>
-            <a:endParaRPr lang="en-US" altLang="ko-KR" sz="1000" b="1" dirty="0">
-              <a:latin typeface="Pretendard" panose="02000503000000020004" pitchFamily="50" charset="-127"/>
-              <a:ea typeface="Pretendard" panose="02000503000000020004" pitchFamily="50" charset="-127"/>
-              <a:cs typeface="Pretendard" panose="02000503000000020004" pitchFamily="50" charset="-127"/>
-            </a:endParaRPr>
-          </a:p>
-          <a:p>
-            <a:r>
-              <a:rPr lang="en-US" altLang="ko-KR" sz="1000" dirty="0" err="1">
-                <a:latin typeface="Pretendard" panose="02000503000000020004" pitchFamily="50" charset="-127"/>
-                <a:ea typeface="Pretendard" panose="02000503000000020004" pitchFamily="50" charset="-127"/>
-                <a:cs typeface="Pretendard" panose="02000503000000020004" pitchFamily="50" charset="-127"/>
-              </a:rPr>
-              <a:t>mkdir</a:t>
-            </a:r>
-            <a:r>
-              <a:rPr lang="en-US" altLang="ko-KR" sz="1000" dirty="0">
-                <a:latin typeface="Pretendard" panose="02000503000000020004" pitchFamily="50" charset="-127"/>
-                <a:ea typeface="Pretendard" panose="02000503000000020004" pitchFamily="50" charset="-127"/>
-                <a:cs typeface="Pretendard" panose="02000503000000020004" pitchFamily="50" charset="-127"/>
-              </a:rPr>
-              <a:t> -p /</a:t>
-            </a:r>
-            <a:r>
-              <a:rPr lang="en-US" altLang="ko-KR" sz="1000" dirty="0" err="1">
-                <a:latin typeface="Pretendard" panose="02000503000000020004" pitchFamily="50" charset="-127"/>
-                <a:ea typeface="Pretendard" panose="02000503000000020004" pitchFamily="50" charset="-127"/>
-                <a:cs typeface="Pretendard" panose="02000503000000020004" pitchFamily="50" charset="-127"/>
-              </a:rPr>
-              <a:t>mnt</a:t>
-            </a:r>
-            <a:r>
-              <a:rPr lang="en-US" altLang="ko-KR" sz="1000" dirty="0">
-                <a:latin typeface="Pretendard" panose="02000503000000020004" pitchFamily="50" charset="-127"/>
-                <a:ea typeface="Pretendard" panose="02000503000000020004" pitchFamily="50" charset="-127"/>
-                <a:cs typeface="Pretendard" panose="02000503000000020004" pitchFamily="50" charset="-127"/>
-              </a:rPr>
-              <a:t>/d/project/01_ENSO/01_data/03_input/reanalysis</a:t>
-            </a:r>
-            <a:br>
-              <a:rPr lang="en-US" altLang="ko-KR" sz="1000" dirty="0">
-                <a:latin typeface="Pretendard" panose="02000503000000020004" pitchFamily="50" charset="-127"/>
-                <a:ea typeface="Pretendard" panose="02000503000000020004" pitchFamily="50" charset="-127"/>
-                <a:cs typeface="Pretendard" panose="02000503000000020004" pitchFamily="50" charset="-127"/>
-              </a:rPr>
-            </a:br>
-            <a:br>
-              <a:rPr lang="en-US" altLang="ko-KR" sz="1000" dirty="0">
-                <a:latin typeface="Pretendard" panose="02000503000000020004" pitchFamily="50" charset="-127"/>
-                <a:ea typeface="Pretendard" panose="02000503000000020004" pitchFamily="50" charset="-127"/>
-                <a:cs typeface="Pretendard" panose="02000503000000020004" pitchFamily="50" charset="-127"/>
-              </a:rPr>
-            </a:br>
-            <a:r>
-              <a:rPr lang="en-US" altLang="ko-KR" sz="1000" dirty="0" err="1">
-                <a:latin typeface="Pretendard" panose="02000503000000020004" pitchFamily="50" charset="-127"/>
-                <a:ea typeface="Pretendard" panose="02000503000000020004" pitchFamily="50" charset="-127"/>
-                <a:cs typeface="Pretendard" panose="02000503000000020004" pitchFamily="50" charset="-127"/>
-              </a:rPr>
-              <a:t>cdo</a:t>
-            </a:r>
-            <a:r>
-              <a:rPr lang="en-US" altLang="ko-KR" sz="1000" dirty="0">
-                <a:latin typeface="Pretendard" panose="02000503000000020004" pitchFamily="50" charset="-127"/>
-                <a:ea typeface="Pretendard" panose="02000503000000020004" pitchFamily="50" charset="-127"/>
-                <a:cs typeface="Pretendard" panose="02000503000000020004" pitchFamily="50" charset="-127"/>
-              </a:rPr>
-              <a:t> -L -O seldate,1958-01-01,1978-12-31 \</a:t>
-            </a:r>
-            <a:br>
-              <a:rPr lang="en-US" altLang="ko-KR" sz="1000" dirty="0">
-                <a:latin typeface="Pretendard" panose="02000503000000020004" pitchFamily="50" charset="-127"/>
-                <a:ea typeface="Pretendard" panose="02000503000000020004" pitchFamily="50" charset="-127"/>
-                <a:cs typeface="Pretendard" panose="02000503000000020004" pitchFamily="50" charset="-127"/>
-              </a:rPr>
-            </a:br>
-            <a:r>
-              <a:rPr lang="en-US" altLang="ko-KR" sz="1000" dirty="0">
-                <a:latin typeface="Pretendard" panose="02000503000000020004" pitchFamily="50" charset="-127"/>
-                <a:ea typeface="Pretendard" panose="02000503000000020004" pitchFamily="50" charset="-127"/>
-                <a:cs typeface="Pretendard" panose="02000503000000020004" pitchFamily="50" charset="-127"/>
-              </a:rPr>
-              <a:t>/mnt/d/project/01_ENSO/01_data/03_input/reanalysis/oras5_era5_input.anom_1x2.nc \</a:t>
-            </a:r>
-            <a:br>
-              <a:rPr lang="en-US" altLang="ko-KR" sz="1000" dirty="0">
-                <a:latin typeface="Pretendard" panose="02000503000000020004" pitchFamily="50" charset="-127"/>
-                <a:ea typeface="Pretendard" panose="02000503000000020004" pitchFamily="50" charset="-127"/>
-                <a:cs typeface="Pretendard" panose="02000503000000020004" pitchFamily="50" charset="-127"/>
-              </a:rPr>
-            </a:br>
-            <a:r>
-              <a:rPr lang="en-US" altLang="ko-KR" sz="1000" dirty="0">
-                <a:latin typeface="Pretendard" panose="02000503000000020004" pitchFamily="50" charset="-127"/>
-                <a:ea typeface="Pretendard" panose="02000503000000020004" pitchFamily="50" charset="-127"/>
-                <a:cs typeface="Pretendard" panose="02000503000000020004" pitchFamily="50" charset="-127"/>
-              </a:rPr>
-              <a:t>/mnt/d/project/01_ENSO/01_data/03_input/reanalysis/validation_dataset.nc</a:t>
-            </a:r>
-            <a:br>
-              <a:rPr lang="en-US" altLang="ko-KR" sz="1000" dirty="0">
-                <a:latin typeface="Pretendard" panose="02000503000000020004" pitchFamily="50" charset="-127"/>
-                <a:ea typeface="Pretendard" panose="02000503000000020004" pitchFamily="50" charset="-127"/>
-                <a:cs typeface="Pretendard" panose="02000503000000020004" pitchFamily="50" charset="-127"/>
-              </a:rPr>
-            </a:br>
-            <a:br>
-              <a:rPr lang="en-US" altLang="ko-KR" sz="1000" dirty="0">
-                <a:latin typeface="Pretendard" panose="02000503000000020004" pitchFamily="50" charset="-127"/>
-                <a:ea typeface="Pretendard" panose="02000503000000020004" pitchFamily="50" charset="-127"/>
-                <a:cs typeface="Pretendard" panose="02000503000000020004" pitchFamily="50" charset="-127"/>
-              </a:rPr>
-            </a:br>
-            <a:r>
-              <a:rPr lang="en-US" altLang="ko-KR" sz="1000" dirty="0" err="1">
-                <a:latin typeface="Pretendard" panose="02000503000000020004" pitchFamily="50" charset="-127"/>
-                <a:ea typeface="Pretendard" panose="02000503000000020004" pitchFamily="50" charset="-127"/>
-                <a:cs typeface="Pretendard" panose="02000503000000020004" pitchFamily="50" charset="-127"/>
-              </a:rPr>
-              <a:t>cdo</a:t>
-            </a:r>
-            <a:r>
-              <a:rPr lang="en-US" altLang="ko-KR" sz="1000" dirty="0">
-                <a:latin typeface="Pretendard" panose="02000503000000020004" pitchFamily="50" charset="-127"/>
-                <a:ea typeface="Pretendard" panose="02000503000000020004" pitchFamily="50" charset="-127"/>
-                <a:cs typeface="Pretendard" panose="02000503000000020004" pitchFamily="50" charset="-127"/>
-              </a:rPr>
-              <a:t> -L -O seldate,1980-01-01,2025-12-31 \</a:t>
-            </a:r>
-            <a:br>
-              <a:rPr lang="en-US" altLang="ko-KR" sz="1000" dirty="0">
-                <a:latin typeface="Pretendard" panose="02000503000000020004" pitchFamily="50" charset="-127"/>
-                <a:ea typeface="Pretendard" panose="02000503000000020004" pitchFamily="50" charset="-127"/>
-                <a:cs typeface="Pretendard" panose="02000503000000020004" pitchFamily="50" charset="-127"/>
-              </a:rPr>
-            </a:br>
-            <a:r>
-              <a:rPr lang="en-US" altLang="ko-KR" sz="1000" dirty="0">
-                <a:latin typeface="Pretendard" panose="02000503000000020004" pitchFamily="50" charset="-127"/>
-                <a:ea typeface="Pretendard" panose="02000503000000020004" pitchFamily="50" charset="-127"/>
-                <a:cs typeface="Pretendard" panose="02000503000000020004" pitchFamily="50" charset="-127"/>
-              </a:rPr>
-              <a:t>/mnt/d/project/01_ENSO/01_data/03_input/reanalysis/godas_era5_input.anom_1x2.nc \</a:t>
-            </a:r>
-            <a:br>
-              <a:rPr lang="en-US" altLang="ko-KR" sz="1000" dirty="0">
-                <a:latin typeface="Pretendard" panose="02000503000000020004" pitchFamily="50" charset="-127"/>
-                <a:ea typeface="Pretendard" panose="02000503000000020004" pitchFamily="50" charset="-127"/>
-                <a:cs typeface="Pretendard" panose="02000503000000020004" pitchFamily="50" charset="-127"/>
-              </a:rPr>
-            </a:br>
-            <a:r>
-              <a:rPr lang="en-US" altLang="ko-KR" sz="1000" dirty="0">
-                <a:latin typeface="Pretendard" panose="02000503000000020004" pitchFamily="50" charset="-127"/>
-                <a:ea typeface="Pretendard" panose="02000503000000020004" pitchFamily="50" charset="-127"/>
-                <a:cs typeface="Pretendard" panose="02000503000000020004" pitchFamily="50" charset="-127"/>
-              </a:rPr>
-              <a:t>/mnt/d/project/01_ENSO/01_data/03_input/reanalysis/test_dataset.nc</a:t>
-            </a:r>
-          </a:p>
-          <a:p>
-            <a:endParaRPr lang="en-US" altLang="ko-KR" sz="1000" dirty="0">
-              <a:latin typeface="Pretendard" panose="02000503000000020004" pitchFamily="50" charset="-127"/>
-              <a:ea typeface="Pretendard" panose="02000503000000020004" pitchFamily="50" charset="-127"/>
-              <a:cs typeface="Pretendard" panose="02000503000000020004" pitchFamily="50" charset="-127"/>
-            </a:endParaRPr>
-          </a:p>
-          <a:p>
-            <a:endParaRPr lang="en-US" altLang="ko-KR" sz="1000" dirty="0">
-              <a:latin typeface="Pretendard" panose="02000503000000020004" pitchFamily="50" charset="-127"/>
-              <a:ea typeface="Pretendard" panose="02000503000000020004" pitchFamily="50" charset="-127"/>
-              <a:cs typeface="Pretendard" panose="02000503000000020004" pitchFamily="50" charset="-127"/>
-            </a:endParaRPr>
-          </a:p>
-          <a:p>
-            <a:r>
-              <a:rPr lang="ko-KR" altLang="en-US" sz="1000" b="1" dirty="0">
-                <a:latin typeface="Pretendard" panose="02000503000000020004" pitchFamily="50" charset="-127"/>
-                <a:ea typeface="Pretendard" panose="02000503000000020004" pitchFamily="50" charset="-127"/>
-                <a:cs typeface="Pretendard" panose="02000503000000020004" pitchFamily="50" charset="-127"/>
-              </a:rPr>
-              <a:t>검증</a:t>
-            </a:r>
-            <a:endParaRPr lang="en-US" altLang="ko-KR" sz="1000" b="1" dirty="0">
-              <a:latin typeface="Pretendard" panose="02000503000000020004" pitchFamily="50" charset="-127"/>
-              <a:ea typeface="Pretendard" panose="02000503000000020004" pitchFamily="50" charset="-127"/>
-              <a:cs typeface="Pretendard" panose="02000503000000020004" pitchFamily="50" charset="-127"/>
-            </a:endParaRPr>
-          </a:p>
-          <a:p>
-            <a:r>
-              <a:rPr lang="en-US" altLang="ko-KR" sz="1000" dirty="0" err="1">
-                <a:latin typeface="Pretendard" panose="02000503000000020004" pitchFamily="50" charset="-127"/>
-                <a:ea typeface="Pretendard" panose="02000503000000020004" pitchFamily="50" charset="-127"/>
-                <a:cs typeface="Pretendard" panose="02000503000000020004" pitchFamily="50" charset="-127"/>
-              </a:rPr>
-              <a:t>cdo</a:t>
-            </a:r>
-            <a:r>
-              <a:rPr lang="en-US" altLang="ko-KR" sz="1000" dirty="0">
-                <a:latin typeface="Pretendard" panose="02000503000000020004" pitchFamily="50" charset="-127"/>
-                <a:ea typeface="Pretendard" panose="02000503000000020004" pitchFamily="50" charset="-127"/>
-                <a:cs typeface="Pretendard" panose="02000503000000020004" pitchFamily="50" charset="-127"/>
-              </a:rPr>
-              <a:t> </a:t>
-            </a:r>
-            <a:r>
-              <a:rPr lang="en-US" altLang="ko-KR" sz="1000" dirty="0" err="1">
-                <a:latin typeface="Pretendard" panose="02000503000000020004" pitchFamily="50" charset="-127"/>
-                <a:ea typeface="Pretendard" panose="02000503000000020004" pitchFamily="50" charset="-127"/>
-                <a:cs typeface="Pretendard" panose="02000503000000020004" pitchFamily="50" charset="-127"/>
-              </a:rPr>
-              <a:t>ntime</a:t>
-            </a:r>
-            <a:r>
-              <a:rPr lang="en-US" altLang="ko-KR" sz="1000" dirty="0">
-                <a:latin typeface="Pretendard" panose="02000503000000020004" pitchFamily="50" charset="-127"/>
-                <a:ea typeface="Pretendard" panose="02000503000000020004" pitchFamily="50" charset="-127"/>
-                <a:cs typeface="Pretendard" panose="02000503000000020004" pitchFamily="50" charset="-127"/>
-              </a:rPr>
-              <a:t> /mnt/d/project/01_ENSO/01_data/03_input/reanalysis/test_dataset.nc</a:t>
-            </a:r>
-          </a:p>
-          <a:p>
-            <a:r>
-              <a:rPr lang="en-US" altLang="ko-KR" sz="1000" dirty="0" err="1">
-                <a:latin typeface="Pretendard" panose="02000503000000020004" pitchFamily="50" charset="-127"/>
-                <a:ea typeface="Pretendard" panose="02000503000000020004" pitchFamily="50" charset="-127"/>
-                <a:cs typeface="Pretendard" panose="02000503000000020004" pitchFamily="50" charset="-127"/>
-              </a:rPr>
-              <a:t>cdo</a:t>
-            </a:r>
-            <a:r>
-              <a:rPr lang="en-US" altLang="ko-KR" sz="1000" dirty="0">
-                <a:latin typeface="Pretendard" panose="02000503000000020004" pitchFamily="50" charset="-127"/>
-                <a:ea typeface="Pretendard" panose="02000503000000020004" pitchFamily="50" charset="-127"/>
-                <a:cs typeface="Pretendard" panose="02000503000000020004" pitchFamily="50" charset="-127"/>
-              </a:rPr>
-              <a:t> </a:t>
-            </a:r>
-            <a:r>
-              <a:rPr lang="en-US" altLang="ko-KR" sz="1000" dirty="0" err="1">
-                <a:latin typeface="Pretendard" panose="02000503000000020004" pitchFamily="50" charset="-127"/>
-                <a:ea typeface="Pretendard" panose="02000503000000020004" pitchFamily="50" charset="-127"/>
-                <a:cs typeface="Pretendard" panose="02000503000000020004" pitchFamily="50" charset="-127"/>
-              </a:rPr>
-              <a:t>showtimestamp</a:t>
-            </a:r>
-            <a:r>
-              <a:rPr lang="en-US" altLang="ko-KR" sz="1000" dirty="0">
-                <a:latin typeface="Pretendard" panose="02000503000000020004" pitchFamily="50" charset="-127"/>
-                <a:ea typeface="Pretendard" panose="02000503000000020004" pitchFamily="50" charset="-127"/>
-                <a:cs typeface="Pretendard" panose="02000503000000020004" pitchFamily="50" charset="-127"/>
-              </a:rPr>
-              <a:t> /mnt/d/project/01_ENSO/01_data/03_input/reanalysis/test_dataset.nc | head</a:t>
-            </a:r>
-          </a:p>
-          <a:p>
-            <a:r>
-              <a:rPr lang="en-US" altLang="ko-KR" sz="1000" dirty="0" err="1">
-                <a:latin typeface="Pretendard" panose="02000503000000020004" pitchFamily="50" charset="-127"/>
-                <a:ea typeface="Pretendard" panose="02000503000000020004" pitchFamily="50" charset="-127"/>
-                <a:cs typeface="Pretendard" panose="02000503000000020004" pitchFamily="50" charset="-127"/>
-              </a:rPr>
-              <a:t>cdo</a:t>
-            </a:r>
-            <a:r>
-              <a:rPr lang="en-US" altLang="ko-KR" sz="1000" dirty="0">
-                <a:latin typeface="Pretendard" panose="02000503000000020004" pitchFamily="50" charset="-127"/>
-                <a:ea typeface="Pretendard" panose="02000503000000020004" pitchFamily="50" charset="-127"/>
-                <a:cs typeface="Pretendard" panose="02000503000000020004" pitchFamily="50" charset="-127"/>
-              </a:rPr>
-              <a:t> </a:t>
-            </a:r>
-            <a:r>
-              <a:rPr lang="en-US" altLang="ko-KR" sz="1000" dirty="0" err="1">
-                <a:latin typeface="Pretendard" panose="02000503000000020004" pitchFamily="50" charset="-127"/>
-                <a:ea typeface="Pretendard" panose="02000503000000020004" pitchFamily="50" charset="-127"/>
-                <a:cs typeface="Pretendard" panose="02000503000000020004" pitchFamily="50" charset="-127"/>
-              </a:rPr>
-              <a:t>showtimestamp</a:t>
-            </a:r>
-            <a:r>
-              <a:rPr lang="en-US" altLang="ko-KR" sz="1000" dirty="0">
-                <a:latin typeface="Pretendard" panose="02000503000000020004" pitchFamily="50" charset="-127"/>
-                <a:ea typeface="Pretendard" panose="02000503000000020004" pitchFamily="50" charset="-127"/>
-                <a:cs typeface="Pretendard" panose="02000503000000020004" pitchFamily="50" charset="-127"/>
-              </a:rPr>
-              <a:t> /mnt/d/project/01_ENSO/01_data/03_input/reanalysis/test_dataset.nc | tail</a:t>
-            </a:r>
-            <a:endParaRPr lang="ko-KR" altLang="en-US" sz="1000" dirty="0">
-              <a:latin typeface="Pretendard" panose="02000503000000020004" pitchFamily="50" charset="-127"/>
-              <a:ea typeface="Pretendard" panose="02000503000000020004" pitchFamily="50" charset="-127"/>
-              <a:cs typeface="Pretendard" panose="02000503000000020004" pitchFamily="50" charset="-127"/>
+            <a:pPr marL="285750" lvl="1" indent="-285750">
+              <a:buFont typeface="Arial" panose="020B0604020202020204" pitchFamily="34" charset="0"/>
+              <a:buChar char="•"/>
+            </a:pPr>
+            <a:endParaRPr lang="ko-KR" altLang="en-US" dirty="0">
+              <a:latin typeface="Pretendard Light" panose="02000403000000020004" pitchFamily="50" charset="-127"/>
+              <a:ea typeface="Pretendard Light" panose="02000403000000020004" pitchFamily="50" charset="-127"/>
+              <a:cs typeface="Pretendard Light" panose="02000403000000020004" pitchFamily="50" charset="-127"/>
             </a:endParaRPr>
           </a:p>
         </p:txBody>
@@ -5775,278 +5197,7 @@
     </p:spTree>
     <p:extLst>
       <p:ext uri="{BB962C8B-B14F-4D97-AF65-F5344CB8AC3E}">
-        <p14:creationId xmlns:p14="http://schemas.microsoft.com/office/powerpoint/2010/main" val="3157303717"/>
-      </p:ext>
-    </p:extLst>
-  </p:cSld>
-  <p:clrMapOvr>
-    <a:masterClrMapping/>
-  </p:clrMapOvr>
-</p:sld>
-</file>
-
-<file path=ppt/slides/slide11.xml><?xml version="1.0" encoding="utf-8"?>
-<p:sld xmlns:a="http://schemas.openxmlformats.org/drawingml/2006/main" xmlns:r="http://schemas.openxmlformats.org/officeDocument/2006/relationships" xmlns:p="http://schemas.openxmlformats.org/presentationml/2006/main">
-  <p:cSld>
-    <p:spTree>
-      <p:nvGrpSpPr>
-        <p:cNvPr id="1" name="Shape 157">
-          <a:extLst>
-            <a:ext uri="{FF2B5EF4-FFF2-40B4-BE49-F238E27FC236}">
-              <a16:creationId xmlns:a16="http://schemas.microsoft.com/office/drawing/2014/main" id="{AF38A0C1-5D23-CCE3-D3BD-966878B92434}"/>
-            </a:ext>
-          </a:extLst>
-        </p:cNvPr>
-        <p:cNvGrpSpPr/>
-        <p:nvPr/>
-      </p:nvGrpSpPr>
-      <p:grpSpPr>
-        <a:xfrm>
-          <a:off x="0" y="0"/>
-          <a:ext cx="0" cy="0"/>
-          <a:chOff x="0" y="0"/>
-          <a:chExt cx="0" cy="0"/>
-        </a:xfrm>
-      </p:grpSpPr>
-      <p:pic>
-        <p:nvPicPr>
-          <p:cNvPr id="158" name="Google Shape;158;p18" descr="image.png">
-            <a:extLst>
-              <a:ext uri="{FF2B5EF4-FFF2-40B4-BE49-F238E27FC236}">
-                <a16:creationId xmlns:a16="http://schemas.microsoft.com/office/drawing/2014/main" id="{37497912-F838-80F3-9AF5-AA021DF18944}"/>
-              </a:ext>
-            </a:extLst>
-          </p:cNvPr>
-          <p:cNvPicPr preferRelativeResize="0">
-            <a:picLocks noGrp="1" noRot="1" noMove="1" noResize="1" noEditPoints="1" noAdjustHandles="1" noChangeArrowheads="1" noChangeShapeType="1" noCrop="1"/>
-          </p:cNvPicPr>
-          <p:nvPr/>
-        </p:nvPicPr>
-        <p:blipFill rotWithShape="1">
-          <a:blip r:embed="rId3">
-            <a:alphaModFix/>
-          </a:blip>
-          <a:srcRect/>
-          <a:stretch/>
-        </p:blipFill>
-        <p:spPr>
-          <a:xfrm>
-            <a:off x="0" y="0"/>
-            <a:ext cx="12192000" cy="6858000"/>
-          </a:xfrm>
-          <a:prstGeom prst="rect">
-            <a:avLst/>
-          </a:prstGeom>
-          <a:noFill/>
-          <a:ln>
-            <a:noFill/>
-          </a:ln>
-        </p:spPr>
-      </p:pic>
-      <p:sp>
-        <p:nvSpPr>
-          <p:cNvPr id="160" name="Google Shape;160;p18">
-            <a:extLst>
-              <a:ext uri="{FF2B5EF4-FFF2-40B4-BE49-F238E27FC236}">
-                <a16:creationId xmlns:a16="http://schemas.microsoft.com/office/drawing/2014/main" id="{124A25BC-E09A-A61E-123B-B86A899A9BD8}"/>
-              </a:ext>
-            </a:extLst>
-          </p:cNvPr>
-          <p:cNvSpPr txBox="1"/>
-          <p:nvPr/>
-        </p:nvSpPr>
-        <p:spPr>
-          <a:xfrm>
-            <a:off x="571500" y="476250"/>
-            <a:ext cx="11049000" cy="484748"/>
-          </a:xfrm>
-          <a:prstGeom prst="rect">
-            <a:avLst/>
-          </a:prstGeom>
-          <a:noFill/>
-          <a:ln>
-            <a:noFill/>
-          </a:ln>
-        </p:spPr>
-        <p:txBody>
-          <a:bodyPr spcFirstLastPara="1" wrap="square" lIns="0" tIns="0" rIns="0" bIns="0" anchor="t" anchorCtr="0">
-            <a:spAutoFit/>
-          </a:bodyPr>
-          <a:lstStyle/>
-          <a:p>
-            <a:pPr marL="0" marR="0" lvl="0" indent="0" algn="l" rtl="0">
-              <a:spcBef>
-                <a:spcPts val="0"/>
-              </a:spcBef>
-              <a:spcAft>
-                <a:spcPts val="0"/>
-              </a:spcAft>
-              <a:buNone/>
-            </a:pPr>
-            <a:r>
-              <a:rPr lang="en-US" sz="3150" b="1" i="0" u="none" strike="noStrike" cap="none" dirty="0">
-                <a:solidFill>
-                  <a:srgbClr val="001F3F"/>
-                </a:solidFill>
-                <a:latin typeface="Pretendard ExtraBold" panose="02000903000000020004" pitchFamily="50" charset="-127"/>
-                <a:ea typeface="Pretendard ExtraBold" panose="02000903000000020004" pitchFamily="50" charset="-127"/>
-                <a:cs typeface="Pretendard ExtraBold" panose="02000903000000020004" pitchFamily="50" charset="-127"/>
-                <a:sym typeface="Arial"/>
-              </a:rPr>
-              <a:t>Sample </a:t>
-            </a:r>
-            <a:endParaRPr dirty="0">
-              <a:latin typeface="Pretendard ExtraBold" panose="02000903000000020004" pitchFamily="50" charset="-127"/>
-              <a:ea typeface="Pretendard ExtraBold" panose="02000903000000020004" pitchFamily="50" charset="-127"/>
-              <a:cs typeface="Pretendard ExtraBold" panose="02000903000000020004" pitchFamily="50" charset="-127"/>
-            </a:endParaRPr>
-          </a:p>
-        </p:txBody>
-      </p:sp>
-      <p:sp>
-        <p:nvSpPr>
-          <p:cNvPr id="161" name="Google Shape;161;p18">
-            <a:extLst>
-              <a:ext uri="{FF2B5EF4-FFF2-40B4-BE49-F238E27FC236}">
-                <a16:creationId xmlns:a16="http://schemas.microsoft.com/office/drawing/2014/main" id="{8375F078-3F87-BC3F-62DD-FEBE0C8EF289}"/>
-              </a:ext>
-            </a:extLst>
-          </p:cNvPr>
-          <p:cNvSpPr/>
-          <p:nvPr/>
-        </p:nvSpPr>
-        <p:spPr>
-          <a:xfrm>
-            <a:off x="571500" y="1076325"/>
-            <a:ext cx="11049000" cy="19050"/>
-          </a:xfrm>
-          <a:prstGeom prst="rect">
-            <a:avLst/>
-          </a:prstGeom>
-          <a:solidFill>
-            <a:srgbClr val="EEEEEE"/>
-          </a:solidFill>
-          <a:ln>
-            <a:noFill/>
-          </a:ln>
-        </p:spPr>
-        <p:txBody>
-          <a:bodyPr spcFirstLastPara="1" wrap="square" lIns="91425" tIns="45700" rIns="91425" bIns="45700" anchor="ctr" anchorCtr="0">
-            <a:noAutofit/>
-          </a:bodyPr>
-          <a:lstStyle/>
-          <a:p>
-            <a:pPr marL="0" marR="0" lvl="0" indent="0" algn="ctr" rtl="0">
-              <a:spcBef>
-                <a:spcPts val="0"/>
-              </a:spcBef>
-              <a:spcAft>
-                <a:spcPts val="0"/>
-              </a:spcAft>
-              <a:buNone/>
-            </a:pPr>
-            <a:endParaRPr sz="1800" b="0" i="0" u="none" strike="noStrike" cap="none">
-              <a:solidFill>
-                <a:schemeClr val="dk1"/>
-              </a:solidFill>
-              <a:latin typeface="Calibri"/>
-              <a:ea typeface="Calibri"/>
-              <a:cs typeface="Calibri"/>
-              <a:sym typeface="Calibri"/>
-            </a:endParaRPr>
-          </a:p>
-        </p:txBody>
-      </p:sp>
-      <p:sp>
-        <p:nvSpPr>
-          <p:cNvPr id="4" name="슬라이드 번호 개체 틀 3">
-            <a:extLst>
-              <a:ext uri="{FF2B5EF4-FFF2-40B4-BE49-F238E27FC236}">
-                <a16:creationId xmlns:a16="http://schemas.microsoft.com/office/drawing/2014/main" id="{59C9025B-43DE-51DE-3593-A531066CA099}"/>
-              </a:ext>
-            </a:extLst>
-          </p:cNvPr>
-          <p:cNvSpPr>
-            <a:spLocks noGrp="1"/>
-          </p:cNvSpPr>
-          <p:nvPr>
-            <p:ph type="sldNum" idx="12"/>
-          </p:nvPr>
-        </p:nvSpPr>
-        <p:spPr/>
-        <p:txBody>
-          <a:bodyPr/>
-          <a:lstStyle/>
-          <a:p>
-            <a:pPr marL="0" lvl="0" indent="0" algn="r" rtl="0">
-              <a:spcBef>
-                <a:spcPts val="0"/>
-              </a:spcBef>
-              <a:spcAft>
-                <a:spcPts val="0"/>
-              </a:spcAft>
-              <a:buNone/>
-            </a:pPr>
-            <a:fld id="{00000000-1234-1234-1234-123412341234}" type="slidenum">
-              <a:rPr lang="en-US" smtClean="0"/>
-              <a:t>11</a:t>
-            </a:fld>
-            <a:endParaRPr lang="en-US"/>
-          </a:p>
-        </p:txBody>
-      </p:sp>
-      <p:sp>
-        <p:nvSpPr>
-          <p:cNvPr id="3" name="TextBox 2">
-            <a:extLst>
-              <a:ext uri="{FF2B5EF4-FFF2-40B4-BE49-F238E27FC236}">
-                <a16:creationId xmlns:a16="http://schemas.microsoft.com/office/drawing/2014/main" id="{8B036F74-AF38-7A15-2D48-2893FA2AADD3}"/>
-              </a:ext>
-            </a:extLst>
-          </p:cNvPr>
-          <p:cNvSpPr txBox="1"/>
-          <p:nvPr/>
-        </p:nvSpPr>
-        <p:spPr>
-          <a:xfrm>
-            <a:off x="571500" y="1210702"/>
-            <a:ext cx="11049000" cy="307777"/>
-          </a:xfrm>
-          <a:prstGeom prst="rect">
-            <a:avLst/>
-          </a:prstGeom>
-          <a:noFill/>
-        </p:spPr>
-        <p:txBody>
-          <a:bodyPr wrap="square" rtlCol="0">
-            <a:spAutoFit/>
-          </a:bodyPr>
-          <a:lstStyle/>
-          <a:p>
-            <a:pPr marL="285750" indent="-285750">
-              <a:buFont typeface="Arial" panose="020B0604020202020204" pitchFamily="34" charset="0"/>
-              <a:buChar char="•"/>
-            </a:pPr>
-            <a:r>
-              <a:rPr lang="ko-KR" altLang="en-US" dirty="0" err="1">
-                <a:latin typeface="Pretendard Light" panose="02000403000000020004" pitchFamily="50" charset="-127"/>
-                <a:ea typeface="Pretendard Light" panose="02000403000000020004" pitchFamily="50" charset="-127"/>
-                <a:cs typeface="Pretendard Light" panose="02000403000000020004" pitchFamily="50" charset="-127"/>
-              </a:rPr>
-              <a:t>ㅇㅇ</a:t>
-            </a:r>
-            <a:endParaRPr lang="ko-KR" altLang="en-US" dirty="0">
-              <a:latin typeface="Pretendard Light" panose="02000403000000020004" pitchFamily="50" charset="-127"/>
-              <a:ea typeface="Pretendard Light" panose="02000403000000020004" pitchFamily="50" charset="-127"/>
-              <a:cs typeface="Pretendard Light" panose="02000403000000020004" pitchFamily="50" charset="-127"/>
-            </a:endParaRPr>
-          </a:p>
-        </p:txBody>
-      </p:sp>
-    </p:spTree>
-    <p:extLst>
-      <p:ext uri="{BB962C8B-B14F-4D97-AF65-F5344CB8AC3E}">
-        <p14:creationId xmlns:p14="http://schemas.microsoft.com/office/powerpoint/2010/main" val="2838224310"/>
+        <p14:creationId xmlns:p14="http://schemas.microsoft.com/office/powerpoint/2010/main" val="2953320802"/>
       </p:ext>
     </p:extLst>
   </p:cSld>
@@ -16533,7 +15684,7 @@
         <p:spPr>
           <a:xfrm>
             <a:off x="571500" y="2247022"/>
-            <a:ext cx="11049000" cy="2492990"/>
+            <a:ext cx="11049000" cy="3046988"/>
           </a:xfrm>
           <a:prstGeom prst="rect">
             <a:avLst/>
@@ -16707,6 +15858,51 @@
               </a:rPr>
               <a:t>: SST, HC, MLD, SSS, SLP, UO, VO, U10, V10 + U10(daily)</a:t>
             </a:r>
+          </a:p>
+          <a:p>
+            <a:endParaRPr lang="en-US" altLang="ko-KR" sz="1200" dirty="0">
+              <a:latin typeface="Pretendard Light" panose="02000403000000020004" pitchFamily="50" charset="-127"/>
+              <a:ea typeface="Pretendard Light" panose="02000403000000020004" pitchFamily="50" charset="-127"/>
+              <a:cs typeface="Pretendard Light" panose="02000403000000020004" pitchFamily="50" charset="-127"/>
+            </a:endParaRPr>
+          </a:p>
+          <a:p>
+            <a:endParaRPr lang="en-US" altLang="ko-KR" sz="1200" dirty="0">
+              <a:latin typeface="Pretendard Light" panose="02000403000000020004" pitchFamily="50" charset="-127"/>
+              <a:ea typeface="Pretendard Light" panose="02000403000000020004" pitchFamily="50" charset="-127"/>
+              <a:cs typeface="Pretendard Light" panose="02000403000000020004" pitchFamily="50" charset="-127"/>
+            </a:endParaRPr>
+          </a:p>
+          <a:p>
+            <a:r>
+              <a:rPr lang="en-US" altLang="ko-KR" sz="1200" dirty="0"/>
+              <a:t>CMIP6 SSP370(2015–2100) </a:t>
+            </a:r>
+            <a:r>
+              <a:rPr lang="ko-KR" altLang="en-US" sz="1200" dirty="0"/>
+              <a:t>학습</a:t>
+            </a:r>
+            <a:r>
+              <a:rPr lang="en-US" altLang="ko-KR" sz="1200" dirty="0"/>
+              <a:t>, ORAS5+ERA5(1958–1978) </a:t>
+            </a:r>
+            <a:r>
+              <a:rPr lang="ko-KR" altLang="en-US" sz="1200" dirty="0"/>
+              <a:t>검증</a:t>
+            </a:r>
+            <a:r>
+              <a:rPr lang="en-US" altLang="ko-KR" sz="1200" dirty="0"/>
+              <a:t>, GODAS+ERA5(1980–2021) </a:t>
+            </a:r>
+            <a:r>
+              <a:rPr lang="ko-KR" altLang="en-US" sz="1200" dirty="0"/>
+              <a:t>테스트</a:t>
+            </a:r>
+            <a:endParaRPr lang="en-US" altLang="ko-KR" sz="1200" dirty="0">
+              <a:latin typeface="Pretendard Light" panose="02000403000000020004" pitchFamily="50" charset="-127"/>
+              <a:ea typeface="Pretendard Light" panose="02000403000000020004" pitchFamily="50" charset="-127"/>
+              <a:cs typeface="Pretendard Light" panose="02000403000000020004" pitchFamily="50" charset="-127"/>
+            </a:endParaRPr>
           </a:p>
         </p:txBody>
       </p:sp>
@@ -17761,12 +16957,12 @@
           <a:lstStyle/>
           <a:p>
             <a:r>
-              <a:rPr lang="en-US" altLang="ko-KR" sz="1200" b="1" dirty="0">
-                <a:latin typeface="Pretendard Light" panose="02000403000000020004" pitchFamily="50" charset="-127"/>
-                <a:ea typeface="Pretendard Light" panose="02000403000000020004" pitchFamily="50" charset="-127"/>
-                <a:cs typeface="Pretendard Light" panose="02000403000000020004" pitchFamily="50" charset="-127"/>
-              </a:rPr>
-              <a:t>make_surface_fields_cmip6.sh </a:t>
+              <a:rPr lang="en-US" altLang="ko-KR" sz="1200" dirty="0">
+                <a:latin typeface="Pretendard Light" panose="02000403000000020004" pitchFamily="50" charset="-127"/>
+                <a:ea typeface="Pretendard Light" panose="02000403000000020004" pitchFamily="50" charset="-127"/>
+                <a:cs typeface="Pretendard Light" panose="02000403000000020004" pitchFamily="50" charset="-127"/>
+              </a:rPr>
+              <a:t>CMIP6</a:t>
             </a:r>
             <a:br>
               <a:rPr lang="en-US" altLang="ko-KR" sz="1200" dirty="0">
@@ -17925,7 +17121,7 @@
                 <a:ea typeface="Pretendard Light" panose="02000403000000020004" pitchFamily="50" charset="-127"/>
                 <a:cs typeface="Pretendard Light" panose="02000403000000020004" pitchFamily="50" charset="-127"/>
               </a:rPr>
-              <a:t>make_surface_fields_godas.py</a:t>
+              <a:t>GODAS</a:t>
             </a:r>
           </a:p>
           <a:p>
@@ -18150,7 +17346,7 @@
                 <a:ea typeface="Pretendard Light" panose="02000403000000020004" pitchFamily="50" charset="-127"/>
                 <a:cs typeface="Pretendard Light" panose="02000403000000020004" pitchFamily="50" charset="-127"/>
               </a:rPr>
-              <a:t>make_surface_fields_oras5.sh</a:t>
+              <a:t>ORAS5</a:t>
             </a:r>
           </a:p>
           <a:p>
@@ -18322,6 +17518,238 @@
               </a:rPr>
               <a:t>)</a:t>
             </a:r>
+          </a:p>
+        </p:txBody>
+      </p:sp>
+      <p:sp>
+        <p:nvSpPr>
+          <p:cNvPr id="2" name="TextBox 1">
+            <a:extLst>
+              <a:ext uri="{FF2B5EF4-FFF2-40B4-BE49-F238E27FC236}">
+                <a16:creationId xmlns:a16="http://schemas.microsoft.com/office/drawing/2014/main" id="{475EF6F1-3254-C9A6-EE95-248BCDF191CF}"/>
+              </a:ext>
+            </a:extLst>
+          </p:cNvPr>
+          <p:cNvSpPr txBox="1"/>
+          <p:nvPr/>
+        </p:nvSpPr>
+        <p:spPr>
+          <a:xfrm>
+            <a:off x="5369501" y="1210702"/>
+            <a:ext cx="4222173" cy="2554545"/>
+          </a:xfrm>
+          <a:prstGeom prst="rect">
+            <a:avLst/>
+          </a:prstGeom>
+          <a:noFill/>
+        </p:spPr>
+        <p:txBody>
+          <a:bodyPr wrap="square" rtlCol="0">
+            <a:spAutoFit/>
+          </a:bodyPr>
+          <a:lstStyle/>
+          <a:p>
+            <a:r>
+              <a:rPr lang="en-US" altLang="ko-KR" sz="1000" b="1" dirty="0">
+                <a:latin typeface="Pretendard Light" panose="02000403000000020004" pitchFamily="50" charset="-127"/>
+                <a:ea typeface="Pretendard Light" panose="02000403000000020004" pitchFamily="50" charset="-127"/>
+                <a:cs typeface="Pretendard Light" panose="02000403000000020004" pitchFamily="50" charset="-127"/>
+              </a:rPr>
+              <a:t>make_surface_fields.py</a:t>
+            </a:r>
+          </a:p>
+          <a:p>
+            <a:endParaRPr lang="en-US" altLang="ko-KR" sz="1000" dirty="0">
+              <a:latin typeface="Pretendard Light" panose="02000403000000020004" pitchFamily="50" charset="-127"/>
+              <a:ea typeface="Pretendard Light" panose="02000403000000020004" pitchFamily="50" charset="-127"/>
+              <a:cs typeface="Pretendard Light" panose="02000403000000020004" pitchFamily="50" charset="-127"/>
+            </a:endParaRPr>
+          </a:p>
+          <a:p>
+            <a:r>
+              <a:rPr lang="en-US" altLang="ko-KR" sz="1000" dirty="0">
+                <a:latin typeface="Pretendard Light" panose="02000403000000020004" pitchFamily="50" charset="-127"/>
+                <a:ea typeface="Pretendard Light" panose="02000403000000020004" pitchFamily="50" charset="-127"/>
+                <a:cs typeface="Pretendard Light" panose="02000403000000020004" pitchFamily="50" charset="-127"/>
+              </a:rPr>
+              <a:t># </a:t>
+            </a:r>
+            <a:r>
+              <a:rPr lang="ko-KR" altLang="en-US" sz="1000" dirty="0">
+                <a:latin typeface="Pretendard Light" panose="02000403000000020004" pitchFamily="50" charset="-127"/>
+                <a:ea typeface="Pretendard Light" panose="02000403000000020004" pitchFamily="50" charset="-127"/>
+                <a:cs typeface="Pretendard Light" panose="02000403000000020004" pitchFamily="50" charset="-127"/>
+              </a:rPr>
+              <a:t>전체 실행</a:t>
+            </a:r>
+          </a:p>
+          <a:p>
+            <a:r>
+              <a:rPr lang="en-US" altLang="ko-KR" sz="1000" dirty="0">
+                <a:latin typeface="Pretendard Light" panose="02000403000000020004" pitchFamily="50" charset="-127"/>
+                <a:ea typeface="Pretendard Light" panose="02000403000000020004" pitchFamily="50" charset="-127"/>
+                <a:cs typeface="Pretendard Light" panose="02000403000000020004" pitchFamily="50" charset="-127"/>
+              </a:rPr>
+              <a:t>python make_surface_fields.py --source all</a:t>
+            </a:r>
+          </a:p>
+          <a:p>
+            <a:endParaRPr lang="en-US" altLang="ko-KR" sz="1000" dirty="0">
+              <a:latin typeface="Pretendard Light" panose="02000403000000020004" pitchFamily="50" charset="-127"/>
+              <a:ea typeface="Pretendard Light" panose="02000403000000020004" pitchFamily="50" charset="-127"/>
+              <a:cs typeface="Pretendard Light" panose="02000403000000020004" pitchFamily="50" charset="-127"/>
+            </a:endParaRPr>
+          </a:p>
+          <a:p>
+            <a:r>
+              <a:rPr lang="en-US" altLang="ko-KR" sz="1000" dirty="0">
+                <a:latin typeface="Pretendard Light" panose="02000403000000020004" pitchFamily="50" charset="-127"/>
+                <a:ea typeface="Pretendard Light" panose="02000403000000020004" pitchFamily="50" charset="-127"/>
+                <a:cs typeface="Pretendard Light" panose="02000403000000020004" pitchFamily="50" charset="-127"/>
+              </a:rPr>
+              <a:t># CMIP6</a:t>
+            </a:r>
+            <a:r>
+              <a:rPr lang="ko-KR" altLang="en-US" sz="1000" dirty="0">
+                <a:latin typeface="Pretendard Light" panose="02000403000000020004" pitchFamily="50" charset="-127"/>
+                <a:ea typeface="Pretendard Light" panose="02000403000000020004" pitchFamily="50" charset="-127"/>
+                <a:cs typeface="Pretendard Light" panose="02000403000000020004" pitchFamily="50" charset="-127"/>
+              </a:rPr>
+              <a:t>만</a:t>
+            </a:r>
+          </a:p>
+          <a:p>
+            <a:r>
+              <a:rPr lang="en-US" altLang="ko-KR" sz="1000" dirty="0">
+                <a:latin typeface="Pretendard Light" panose="02000403000000020004" pitchFamily="50" charset="-127"/>
+                <a:ea typeface="Pretendard Light" panose="02000403000000020004" pitchFamily="50" charset="-127"/>
+                <a:cs typeface="Pretendard Light" panose="02000403000000020004" pitchFamily="50" charset="-127"/>
+              </a:rPr>
+              <a:t>python make_surface_fields.py --source cmip6</a:t>
+            </a:r>
+          </a:p>
+          <a:p>
+            <a:endParaRPr lang="en-US" altLang="ko-KR" sz="1000" dirty="0">
+              <a:latin typeface="Pretendard Light" panose="02000403000000020004" pitchFamily="50" charset="-127"/>
+              <a:ea typeface="Pretendard Light" panose="02000403000000020004" pitchFamily="50" charset="-127"/>
+              <a:cs typeface="Pretendard Light" panose="02000403000000020004" pitchFamily="50" charset="-127"/>
+            </a:endParaRPr>
+          </a:p>
+          <a:p>
+            <a:r>
+              <a:rPr lang="en-US" altLang="ko-KR" sz="1000" dirty="0">
+                <a:latin typeface="Pretendard Light" panose="02000403000000020004" pitchFamily="50" charset="-127"/>
+                <a:ea typeface="Pretendard Light" panose="02000403000000020004" pitchFamily="50" charset="-127"/>
+                <a:cs typeface="Pretendard Light" panose="02000403000000020004" pitchFamily="50" charset="-127"/>
+              </a:rPr>
+              <a:t># GODAS</a:t>
+            </a:r>
+            <a:r>
+              <a:rPr lang="ko-KR" altLang="en-US" sz="1000" dirty="0">
+                <a:latin typeface="Pretendard Light" panose="02000403000000020004" pitchFamily="50" charset="-127"/>
+                <a:ea typeface="Pretendard Light" panose="02000403000000020004" pitchFamily="50" charset="-127"/>
+                <a:cs typeface="Pretendard Light" panose="02000403000000020004" pitchFamily="50" charset="-127"/>
+              </a:rPr>
+              <a:t>만</a:t>
+            </a:r>
+          </a:p>
+          <a:p>
+            <a:r>
+              <a:rPr lang="en-US" altLang="ko-KR" sz="1000" dirty="0">
+                <a:latin typeface="Pretendard Light" panose="02000403000000020004" pitchFamily="50" charset="-127"/>
+                <a:ea typeface="Pretendard Light" panose="02000403000000020004" pitchFamily="50" charset="-127"/>
+                <a:cs typeface="Pretendard Light" panose="02000403000000020004" pitchFamily="50" charset="-127"/>
+              </a:rPr>
+              <a:t>python make_surface_fields.py --source </a:t>
+            </a:r>
+            <a:r>
+              <a:rPr lang="en-US" altLang="ko-KR" sz="1000" dirty="0" err="1">
+                <a:latin typeface="Pretendard Light" panose="02000403000000020004" pitchFamily="50" charset="-127"/>
+                <a:ea typeface="Pretendard Light" panose="02000403000000020004" pitchFamily="50" charset="-127"/>
+                <a:cs typeface="Pretendard Light" panose="02000403000000020004" pitchFamily="50" charset="-127"/>
+              </a:rPr>
+              <a:t>godas</a:t>
+            </a:r>
+            <a:endParaRPr lang="en-US" altLang="ko-KR" sz="1000" dirty="0">
+              <a:latin typeface="Pretendard Light" panose="02000403000000020004" pitchFamily="50" charset="-127"/>
+              <a:ea typeface="Pretendard Light" panose="02000403000000020004" pitchFamily="50" charset="-127"/>
+              <a:cs typeface="Pretendard Light" panose="02000403000000020004" pitchFamily="50" charset="-127"/>
+            </a:endParaRPr>
+          </a:p>
+          <a:p>
+            <a:endParaRPr lang="en-US" altLang="ko-KR" sz="1000" dirty="0">
+              <a:latin typeface="Pretendard Light" panose="02000403000000020004" pitchFamily="50" charset="-127"/>
+              <a:ea typeface="Pretendard Light" panose="02000403000000020004" pitchFamily="50" charset="-127"/>
+              <a:cs typeface="Pretendard Light" panose="02000403000000020004" pitchFamily="50" charset="-127"/>
+            </a:endParaRPr>
+          </a:p>
+          <a:p>
+            <a:r>
+              <a:rPr lang="en-US" altLang="ko-KR" sz="1000" dirty="0">
+                <a:latin typeface="Pretendard Light" panose="02000403000000020004" pitchFamily="50" charset="-127"/>
+                <a:ea typeface="Pretendard Light" panose="02000403000000020004" pitchFamily="50" charset="-127"/>
+                <a:cs typeface="Pretendard Light" panose="02000403000000020004" pitchFamily="50" charset="-127"/>
+              </a:rPr>
+              <a:t># ORAS5</a:t>
+            </a:r>
+            <a:r>
+              <a:rPr lang="ko-KR" altLang="en-US" sz="1000" dirty="0">
+                <a:latin typeface="Pretendard Light" panose="02000403000000020004" pitchFamily="50" charset="-127"/>
+                <a:ea typeface="Pretendard Light" panose="02000403000000020004" pitchFamily="50" charset="-127"/>
+                <a:cs typeface="Pretendard Light" panose="02000403000000020004" pitchFamily="50" charset="-127"/>
+              </a:rPr>
+              <a:t>만</a:t>
+            </a:r>
+          </a:p>
+          <a:p>
+            <a:r>
+              <a:rPr lang="en-US" altLang="ko-KR" sz="1000" dirty="0">
+                <a:latin typeface="Pretendard Light" panose="02000403000000020004" pitchFamily="50" charset="-127"/>
+                <a:ea typeface="Pretendard Light" panose="02000403000000020004" pitchFamily="50" charset="-127"/>
+                <a:cs typeface="Pretendard Light" panose="02000403000000020004" pitchFamily="50" charset="-127"/>
+              </a:rPr>
+              <a:t>python make_surface_fields.py --source oras5</a:t>
+            </a:r>
+          </a:p>
+          <a:p>
+            <a:endParaRPr lang="en-US" altLang="ko-KR" sz="1000" dirty="0">
+              <a:latin typeface="Pretendard Light" panose="02000403000000020004" pitchFamily="50" charset="-127"/>
+              <a:ea typeface="Pretendard Light" panose="02000403000000020004" pitchFamily="50" charset="-127"/>
+              <a:cs typeface="Pretendard Light" panose="02000403000000020004" pitchFamily="50" charset="-127"/>
+            </a:endParaRPr>
+          </a:p>
+          <a:p>
+            <a:r>
+              <a:rPr lang="en-US" altLang="ko-KR" sz="1000" dirty="0">
+                <a:latin typeface="Pretendard Light" panose="02000403000000020004" pitchFamily="50" charset="-127"/>
+                <a:ea typeface="Pretendard Light" panose="02000403000000020004" pitchFamily="50" charset="-127"/>
+                <a:cs typeface="Pretendard Light" panose="02000403000000020004" pitchFamily="50" charset="-127"/>
+              </a:rPr>
+              <a:t># </a:t>
+            </a:r>
+            <a:r>
+              <a:rPr lang="ko-KR" altLang="en-US" sz="1000" dirty="0">
+                <a:latin typeface="Pretendard Light" panose="02000403000000020004" pitchFamily="50" charset="-127"/>
+                <a:ea typeface="Pretendard Light" panose="02000403000000020004" pitchFamily="50" charset="-127"/>
+                <a:cs typeface="Pretendard Light" panose="02000403000000020004" pitchFamily="50" charset="-127"/>
+              </a:rPr>
+              <a:t>덮어쓰기</a:t>
+            </a:r>
+          </a:p>
+          <a:p>
+            <a:r>
+              <a:rPr lang="en-US" altLang="ko-KR" sz="1000" dirty="0">
+                <a:latin typeface="Pretendard Light" panose="02000403000000020004" pitchFamily="50" charset="-127"/>
+                <a:ea typeface="Pretendard Light" panose="02000403000000020004" pitchFamily="50" charset="-127"/>
+                <a:cs typeface="Pretendard Light" panose="02000403000000020004" pitchFamily="50" charset="-127"/>
+              </a:rPr>
+              <a:t>python make_surface_fields.py --source all --overwrite</a:t>
+            </a:r>
+            <a:endParaRPr lang="ko-KR" altLang="en-US" sz="1000" dirty="0">
+              <a:latin typeface="Pretendard Light" panose="02000403000000020004" pitchFamily="50" charset="-127"/>
+              <a:ea typeface="Pretendard Light" panose="02000403000000020004" pitchFamily="50" charset="-127"/>
+              <a:cs typeface="Pretendard Light" panose="02000403000000020004" pitchFamily="50" charset="-127"/>
+            </a:endParaRPr>
           </a:p>
         </p:txBody>
       </p:sp>
@@ -18346,7 +17774,7 @@
         <p:cNvPr id="1" name="Shape 157">
           <a:extLst>
             <a:ext uri="{FF2B5EF4-FFF2-40B4-BE49-F238E27FC236}">
-              <a16:creationId xmlns:a16="http://schemas.microsoft.com/office/drawing/2014/main" id="{0A95CC74-0609-393F-A7EA-9E56010CA0D7}"/>
+              <a16:creationId xmlns:a16="http://schemas.microsoft.com/office/drawing/2014/main" id="{16C82595-E7A4-5A7A-0E1D-59BDC8A1AE40}"/>
             </a:ext>
           </a:extLst>
         </p:cNvPr>
@@ -18366,7 +17794,7 @@
           <p:cNvPr id="158" name="Google Shape;158;p18" descr="image.png">
             <a:extLst>
               <a:ext uri="{FF2B5EF4-FFF2-40B4-BE49-F238E27FC236}">
-                <a16:creationId xmlns:a16="http://schemas.microsoft.com/office/drawing/2014/main" id="{D98783BB-0595-0E0B-6181-6858D47834C4}"/>
+                <a16:creationId xmlns:a16="http://schemas.microsoft.com/office/drawing/2014/main" id="{278C9F8D-8113-3FF8-F133-01FD6CF13064}"/>
               </a:ext>
             </a:extLst>
           </p:cNvPr>
@@ -18398,147 +17826,10 @@
       </p:pic>
       <p:sp>
         <p:nvSpPr>
-          <p:cNvPr id="160" name="Google Shape;160;p18">
-            <a:extLst>
-              <a:ext uri="{FF2B5EF4-FFF2-40B4-BE49-F238E27FC236}">
-                <a16:creationId xmlns:a16="http://schemas.microsoft.com/office/drawing/2014/main" id="{1B8D933D-8363-3ED5-177A-D5036C923254}"/>
-              </a:ext>
-            </a:extLst>
-          </p:cNvPr>
-          <p:cNvSpPr txBox="1"/>
-          <p:nvPr/>
-        </p:nvSpPr>
-        <p:spPr>
-          <a:xfrm>
-            <a:off x="571500" y="476250"/>
-            <a:ext cx="11049000" cy="484748"/>
-          </a:xfrm>
-          <a:prstGeom prst="rect">
-            <a:avLst/>
-          </a:prstGeom>
-          <a:noFill/>
-          <a:ln>
-            <a:noFill/>
-          </a:ln>
-        </p:spPr>
-        <p:txBody>
-          <a:bodyPr spcFirstLastPara="1" wrap="square" lIns="0" tIns="0" rIns="0" bIns="0" anchor="t" anchorCtr="0">
-            <a:spAutoFit/>
-          </a:bodyPr>
-          <a:lstStyle/>
-          <a:p>
-            <a:pPr marL="0" marR="0" lvl="0" indent="0" algn="l" rtl="0">
-              <a:spcBef>
-                <a:spcPts val="0"/>
-              </a:spcBef>
-              <a:spcAft>
-                <a:spcPts val="0"/>
-              </a:spcAft>
-              <a:buNone/>
-            </a:pPr>
-            <a:r>
-              <a:rPr lang="en-US" altLang="ko-KR" sz="3150" b="1" dirty="0">
-                <a:solidFill>
-                  <a:srgbClr val="001F3F"/>
-                </a:solidFill>
-                <a:latin typeface="Pretendard ExtraBold" panose="02000903000000020004" pitchFamily="50" charset="-127"/>
-                <a:ea typeface="Pretendard ExtraBold" panose="02000903000000020004" pitchFamily="50" charset="-127"/>
-                <a:cs typeface="Pretendard ExtraBold" panose="02000903000000020004" pitchFamily="50" charset="-127"/>
-              </a:rPr>
-              <a:t>ohc300</a:t>
-            </a:r>
-            <a:r>
-              <a:rPr lang="en-US" altLang="ko-KR" sz="3150" b="1" i="0" u="none" strike="noStrike" cap="none" dirty="0">
-                <a:solidFill>
-                  <a:srgbClr val="001F3F"/>
-                </a:solidFill>
-                <a:latin typeface="Pretendard ExtraBold" panose="02000903000000020004" pitchFamily="50" charset="-127"/>
-                <a:ea typeface="Pretendard ExtraBold" panose="02000903000000020004" pitchFamily="50" charset="-127"/>
-                <a:cs typeface="Pretendard ExtraBold" panose="02000903000000020004" pitchFamily="50" charset="-127"/>
-                <a:sym typeface="Arial"/>
-              </a:rPr>
-              <a:t> </a:t>
-            </a:r>
-            <a:r>
-              <a:rPr lang="ko-KR" altLang="en-US" sz="3150" b="1" i="0" u="none" strike="noStrike" cap="none" dirty="0">
-                <a:solidFill>
-                  <a:srgbClr val="001F3F"/>
-                </a:solidFill>
-                <a:latin typeface="Pretendard ExtraBold" panose="02000903000000020004" pitchFamily="50" charset="-127"/>
-                <a:ea typeface="Pretendard ExtraBold" panose="02000903000000020004" pitchFamily="50" charset="-127"/>
-                <a:cs typeface="Pretendard ExtraBold" panose="02000903000000020004" pitchFamily="50" charset="-127"/>
-                <a:sym typeface="Arial"/>
-              </a:rPr>
-              <a:t>자료 생산</a:t>
-            </a:r>
-            <a:endParaRPr dirty="0">
-              <a:latin typeface="Pretendard ExtraBold" panose="02000903000000020004" pitchFamily="50" charset="-127"/>
-              <a:ea typeface="Pretendard ExtraBold" panose="02000903000000020004" pitchFamily="50" charset="-127"/>
-              <a:cs typeface="Pretendard ExtraBold" panose="02000903000000020004" pitchFamily="50" charset="-127"/>
-            </a:endParaRPr>
-          </a:p>
-        </p:txBody>
-      </p:sp>
-      <p:sp>
-        <p:nvSpPr>
-          <p:cNvPr id="161" name="Google Shape;161;p18">
-            <a:extLst>
-              <a:ext uri="{FF2B5EF4-FFF2-40B4-BE49-F238E27FC236}">
-                <a16:creationId xmlns:a16="http://schemas.microsoft.com/office/drawing/2014/main" id="{5EFCDB68-3F23-7029-E5C4-316B22FA516E}"/>
-              </a:ext>
-            </a:extLst>
-          </p:cNvPr>
-          <p:cNvSpPr/>
-          <p:nvPr/>
-        </p:nvSpPr>
-        <p:spPr>
-          <a:xfrm>
-            <a:off x="571500" y="1076325"/>
-            <a:ext cx="11049000" cy="19050"/>
-          </a:xfrm>
-          <a:prstGeom prst="rect">
-            <a:avLst/>
-          </a:prstGeom>
-          <a:solidFill>
-            <a:srgbClr val="EEEEEE"/>
-          </a:solidFill>
-          <a:ln>
-            <a:noFill/>
-          </a:ln>
-        </p:spPr>
-        <p:txBody>
-          <a:bodyPr spcFirstLastPara="1" wrap="square" lIns="91425" tIns="45700" rIns="91425" bIns="45700" anchor="ctr" anchorCtr="0">
-            <a:noAutofit/>
-          </a:bodyPr>
-          <a:lstStyle/>
-          <a:p>
-            <a:pPr marL="0" marR="0" lvl="0" indent="0" algn="ctr" rtl="0">
-              <a:spcBef>
-                <a:spcPts val="0"/>
-              </a:spcBef>
-              <a:spcAft>
-                <a:spcPts val="0"/>
-              </a:spcAft>
-              <a:buNone/>
-            </a:pPr>
-            <a:endParaRPr sz="1800" b="0" i="0" u="none" strike="noStrike" cap="none">
-              <a:solidFill>
-                <a:schemeClr val="dk1"/>
-              </a:solidFill>
-              <a:latin typeface="Calibri"/>
-              <a:ea typeface="Calibri"/>
-              <a:cs typeface="Calibri"/>
-              <a:sym typeface="Calibri"/>
-            </a:endParaRPr>
-          </a:p>
-        </p:txBody>
-      </p:sp>
-      <p:sp>
-        <p:nvSpPr>
           <p:cNvPr id="4" name="슬라이드 번호 개체 틀 3">
             <a:extLst>
               <a:ext uri="{FF2B5EF4-FFF2-40B4-BE49-F238E27FC236}">
-                <a16:creationId xmlns:a16="http://schemas.microsoft.com/office/drawing/2014/main" id="{24D90EAC-08E8-A137-5F9C-84CA8A9159F0}"/>
+                <a16:creationId xmlns:a16="http://schemas.microsoft.com/office/drawing/2014/main" id="{2AE8B6D6-643B-E19B-954E-2F0B04CB61EA}"/>
               </a:ext>
             </a:extLst>
           </p:cNvPr>
@@ -18573,10 +17864,10 @@
       </p:sp>
       <p:sp>
         <p:nvSpPr>
-          <p:cNvPr id="2" name="TextBox 1">
+          <p:cNvPr id="3" name="TextBox 2">
             <a:extLst>
               <a:ext uri="{FF2B5EF4-FFF2-40B4-BE49-F238E27FC236}">
-                <a16:creationId xmlns:a16="http://schemas.microsoft.com/office/drawing/2014/main" id="{128FF2D0-3A9A-11BC-044C-17FD79F4C735}"/>
+                <a16:creationId xmlns:a16="http://schemas.microsoft.com/office/drawing/2014/main" id="{3691568B-4B9A-16CA-6875-8A57CA9F07DC}"/>
               </a:ext>
             </a:extLst>
           </p:cNvPr>
@@ -18585,8 +17876,8 @@
         </p:nvSpPr>
         <p:spPr>
           <a:xfrm>
-            <a:off x="571500" y="1210702"/>
-            <a:ext cx="11049000" cy="2123658"/>
+            <a:off x="275721" y="61014"/>
+            <a:ext cx="4169070" cy="3323987"/>
           </a:xfrm>
           <a:prstGeom prst="rect">
             <a:avLst/>
@@ -18600,179 +17891,67 @@
           <a:lstStyle/>
           <a:p>
             <a:r>
-              <a:rPr lang="en-US" altLang="ko-KR" sz="1200" dirty="0">
-                <a:latin typeface="Pretendard Light" panose="02000403000000020004" pitchFamily="50" charset="-127"/>
-                <a:ea typeface="Pretendard Light" panose="02000403000000020004" pitchFamily="50" charset="-127"/>
-                <a:cs typeface="Pretendard Light" panose="02000403000000020004" pitchFamily="50" charset="-127"/>
-              </a:rPr>
-              <a:t>python make_ohc300_cmip6.py \</a:t>
-            </a:r>
-          </a:p>
-          <a:p>
-            <a:r>
-              <a:rPr lang="en-US" altLang="ko-KR" sz="1200" dirty="0">
-                <a:latin typeface="Pretendard Light" panose="02000403000000020004" pitchFamily="50" charset="-127"/>
-                <a:ea typeface="Pretendard Light" panose="02000403000000020004" pitchFamily="50" charset="-127"/>
-                <a:cs typeface="Pretendard Light" panose="02000403000000020004" pitchFamily="50" charset="-127"/>
-              </a:rPr>
-              <a:t>  --</a:t>
-            </a:r>
-            <a:r>
-              <a:rPr lang="en-US" altLang="ko-KR" sz="1200" dirty="0" err="1">
-                <a:latin typeface="Pretendard Light" panose="02000403000000020004" pitchFamily="50" charset="-127"/>
-                <a:ea typeface="Pretendard Light" panose="02000403000000020004" pitchFamily="50" charset="-127"/>
-                <a:cs typeface="Pretendard Light" panose="02000403000000020004" pitchFamily="50" charset="-127"/>
-              </a:rPr>
-              <a:t>inroot</a:t>
-            </a:r>
-            <a:r>
-              <a:rPr lang="en-US" altLang="ko-KR" sz="1200" dirty="0">
-                <a:latin typeface="Pretendard Light" panose="02000403000000020004" pitchFamily="50" charset="-127"/>
-                <a:ea typeface="Pretendard Light" panose="02000403000000020004" pitchFamily="50" charset="-127"/>
-                <a:cs typeface="Pretendard Light" panose="02000403000000020004" pitchFamily="50" charset="-127"/>
-              </a:rPr>
-              <a:t>  /</a:t>
-            </a:r>
-            <a:r>
-              <a:rPr lang="en-US" altLang="ko-KR" sz="1200" dirty="0" err="1">
-                <a:latin typeface="Pretendard Light" panose="02000403000000020004" pitchFamily="50" charset="-127"/>
-                <a:ea typeface="Pretendard Light" panose="02000403000000020004" pitchFamily="50" charset="-127"/>
-                <a:cs typeface="Pretendard Light" panose="02000403000000020004" pitchFamily="50" charset="-127"/>
-              </a:rPr>
-              <a:t>mnt</a:t>
-            </a:r>
-            <a:r>
-              <a:rPr lang="en-US" altLang="ko-KR" sz="1200" dirty="0">
-                <a:latin typeface="Pretendard Light" panose="02000403000000020004" pitchFamily="50" charset="-127"/>
-                <a:ea typeface="Pretendard Light" panose="02000403000000020004" pitchFamily="50" charset="-127"/>
-                <a:cs typeface="Pretendard Light" panose="02000403000000020004" pitchFamily="50" charset="-127"/>
-              </a:rPr>
-              <a:t>/d/project/01_ENSO/01_data/01_raw/cmip6/ssp370 \</a:t>
-            </a:r>
-          </a:p>
-          <a:p>
-            <a:r>
-              <a:rPr lang="en-US" altLang="ko-KR" sz="1200" dirty="0">
-                <a:latin typeface="Pretendard Light" panose="02000403000000020004" pitchFamily="50" charset="-127"/>
-                <a:ea typeface="Pretendard Light" panose="02000403000000020004" pitchFamily="50" charset="-127"/>
-                <a:cs typeface="Pretendard Light" panose="02000403000000020004" pitchFamily="50" charset="-127"/>
-              </a:rPr>
-              <a:t>  --outroot /</a:t>
-            </a:r>
-            <a:r>
-              <a:rPr lang="en-US" altLang="ko-KR" sz="1200" dirty="0" err="1">
-                <a:latin typeface="Pretendard Light" panose="02000403000000020004" pitchFamily="50" charset="-127"/>
-                <a:ea typeface="Pretendard Light" panose="02000403000000020004" pitchFamily="50" charset="-127"/>
-                <a:cs typeface="Pretendard Light" panose="02000403000000020004" pitchFamily="50" charset="-127"/>
-              </a:rPr>
-              <a:t>mnt</a:t>
-            </a:r>
-            <a:r>
-              <a:rPr lang="en-US" altLang="ko-KR" sz="1200" dirty="0">
-                <a:latin typeface="Pretendard Light" panose="02000403000000020004" pitchFamily="50" charset="-127"/>
-                <a:ea typeface="Pretendard Light" panose="02000403000000020004" pitchFamily="50" charset="-127"/>
-                <a:cs typeface="Pretendard Light" panose="02000403000000020004" pitchFamily="50" charset="-127"/>
-              </a:rPr>
-              <a:t>/d/project/01_ENSO/01_data/01_raw/cmip6/ssp370 \</a:t>
-            </a:r>
-          </a:p>
-          <a:p>
-            <a:r>
-              <a:rPr lang="en-US" altLang="ko-KR" sz="1200" dirty="0">
-                <a:latin typeface="Pretendard Light" panose="02000403000000020004" pitchFamily="50" charset="-127"/>
-                <a:ea typeface="Pretendard Light" panose="02000403000000020004" pitchFamily="50" charset="-127"/>
-                <a:cs typeface="Pretendard Light" panose="02000403000000020004" pitchFamily="50" charset="-127"/>
-              </a:rPr>
-              <a:t>  --</a:t>
-            </a:r>
-            <a:r>
-              <a:rPr lang="en-US" altLang="ko-KR" sz="1200" dirty="0" err="1">
-                <a:latin typeface="Pretendard Light" panose="02000403000000020004" pitchFamily="50" charset="-127"/>
-                <a:ea typeface="Pretendard Light" panose="02000403000000020004" pitchFamily="50" charset="-127"/>
-                <a:cs typeface="Pretendard Light" panose="02000403000000020004" pitchFamily="50" charset="-127"/>
-              </a:rPr>
-              <a:t>zmax</a:t>
-            </a:r>
-            <a:r>
-              <a:rPr lang="en-US" altLang="ko-KR" sz="1200" dirty="0">
-                <a:latin typeface="Pretendard Light" panose="02000403000000020004" pitchFamily="50" charset="-127"/>
-                <a:ea typeface="Pretendard Light" panose="02000403000000020004" pitchFamily="50" charset="-127"/>
-                <a:cs typeface="Pretendard Light" panose="02000403000000020004" pitchFamily="50" charset="-127"/>
-              </a:rPr>
-              <a:t> 300 \</a:t>
-            </a:r>
-          </a:p>
-          <a:p>
-            <a:r>
-              <a:rPr lang="en-US" altLang="ko-KR" sz="1200" dirty="0">
-                <a:latin typeface="Pretendard Light" panose="02000403000000020004" pitchFamily="50" charset="-127"/>
-                <a:ea typeface="Pretendard Light" panose="02000403000000020004" pitchFamily="50" charset="-127"/>
-                <a:cs typeface="Pretendard Light" panose="02000403000000020004" pitchFamily="50" charset="-127"/>
-              </a:rPr>
-              <a:t>  --rho0 1025 --cp0 3992 \</a:t>
-            </a:r>
-          </a:p>
-          <a:p>
-            <a:r>
-              <a:rPr lang="en-US" altLang="ko-KR" sz="1200" dirty="0">
-                <a:latin typeface="Pretendard Light" panose="02000403000000020004" pitchFamily="50" charset="-127"/>
-                <a:ea typeface="Pretendard Light" panose="02000403000000020004" pitchFamily="50" charset="-127"/>
-                <a:cs typeface="Pretendard Light" panose="02000403000000020004" pitchFamily="50" charset="-127"/>
-              </a:rPr>
-              <a:t>  --to-</a:t>
-            </a:r>
-            <a:r>
-              <a:rPr lang="en-US" altLang="ko-KR" sz="1200" dirty="0" err="1">
-                <a:latin typeface="Pretendard Light" panose="02000403000000020004" pitchFamily="50" charset="-127"/>
-                <a:ea typeface="Pretendard Light" panose="02000403000000020004" pitchFamily="50" charset="-127"/>
-                <a:cs typeface="Pretendard Light" panose="02000403000000020004" pitchFamily="50" charset="-127"/>
-              </a:rPr>
-              <a:t>degC</a:t>
-            </a:r>
-            <a:r>
-              <a:rPr lang="en-US" altLang="ko-KR" sz="1200" dirty="0">
-                <a:latin typeface="Pretendard Light" panose="02000403000000020004" pitchFamily="50" charset="-127"/>
-                <a:ea typeface="Pretendard Light" panose="02000403000000020004" pitchFamily="50" charset="-127"/>
-                <a:cs typeface="Pretendard Light" panose="02000403000000020004" pitchFamily="50" charset="-127"/>
-              </a:rPr>
-              <a:t> \</a:t>
-            </a:r>
-          </a:p>
-          <a:p>
-            <a:r>
-              <a:rPr lang="en-US" altLang="ko-KR" sz="1200" dirty="0">
-                <a:latin typeface="Pretendard Light" panose="02000403000000020004" pitchFamily="50" charset="-127"/>
-                <a:ea typeface="Pretendard Light" panose="02000403000000020004" pitchFamily="50" charset="-127"/>
-                <a:cs typeface="Pretendard Light" panose="02000403000000020004" pitchFamily="50" charset="-127"/>
-              </a:rPr>
-              <a:t>  --time-chunk 12 \</a:t>
-            </a:r>
-          </a:p>
-          <a:p>
-            <a:r>
-              <a:rPr lang="en-US" altLang="ko-KR" sz="1200" dirty="0">
-                <a:latin typeface="Pretendard Light" panose="02000403000000020004" pitchFamily="50" charset="-127"/>
-                <a:ea typeface="Pretendard Light" panose="02000403000000020004" pitchFamily="50" charset="-127"/>
-                <a:cs typeface="Pretendard Light" panose="02000403000000020004" pitchFamily="50" charset="-127"/>
-              </a:rPr>
-              <a:t>: </a:t>
-            </a:r>
-            <a:r>
-              <a:rPr lang="ko-KR" altLang="en-US" sz="1200" dirty="0">
-                <a:latin typeface="Pretendard Light" panose="02000403000000020004" pitchFamily="50" charset="-127"/>
-                <a:ea typeface="Pretendard Light" panose="02000403000000020004" pitchFamily="50" charset="-127"/>
-                <a:cs typeface="Pretendard Light" panose="02000403000000020004" pitchFamily="50" charset="-127"/>
-              </a:rPr>
-              <a:t>섭씨로 변환해서 적분</a:t>
-            </a:r>
-            <a:endParaRPr lang="en-US" altLang="ko-KR" sz="1200" dirty="0">
+              <a:rPr lang="en-US" altLang="ko-KR" sz="1000" b="1" dirty="0">
+                <a:latin typeface="Pretendard Light" panose="02000403000000020004" pitchFamily="50" charset="-127"/>
+                <a:ea typeface="Pretendard Light" panose="02000403000000020004" pitchFamily="50" charset="-127"/>
+                <a:cs typeface="Pretendard Light" panose="02000403000000020004" pitchFamily="50" charset="-127"/>
+              </a:rPr>
+              <a:t>download_era5.py</a:t>
+            </a:r>
+          </a:p>
+          <a:p>
+            <a:endParaRPr lang="en-US" altLang="ko-KR" sz="1000" dirty="0">
               <a:latin typeface="Pretendard Light" panose="02000403000000020004" pitchFamily="50" charset="-127"/>
               <a:ea typeface="Pretendard Light" panose="02000403000000020004" pitchFamily="50" charset="-127"/>
               <a:cs typeface="Pretendard Light" panose="02000403000000020004" pitchFamily="50" charset="-127"/>
             </a:endParaRPr>
           </a:p>
           <a:p>
-            <a:endParaRPr lang="en-US" altLang="ko-KR" sz="1200" dirty="0">
+            <a:r>
+              <a:rPr lang="en-US" altLang="ko-KR" sz="1000" dirty="0">
+                <a:latin typeface="Pretendard Light" panose="02000403000000020004" pitchFamily="50" charset="-127"/>
+                <a:ea typeface="Pretendard Light" panose="02000403000000020004" pitchFamily="50" charset="-127"/>
+                <a:cs typeface="Pretendard Light" panose="02000403000000020004" pitchFamily="50" charset="-127"/>
+              </a:rPr>
+              <a:t># monthly</a:t>
+            </a:r>
+            <a:r>
+              <a:rPr lang="ko-KR" altLang="en-US" sz="1000" dirty="0">
+                <a:latin typeface="Pretendard Light" panose="02000403000000020004" pitchFamily="50" charset="-127"/>
+                <a:ea typeface="Pretendard Light" panose="02000403000000020004" pitchFamily="50" charset="-127"/>
+                <a:cs typeface="Pretendard Light" panose="02000403000000020004" pitchFamily="50" charset="-127"/>
+              </a:rPr>
+              <a:t>만</a:t>
+            </a:r>
+          </a:p>
+          <a:p>
+            <a:r>
+              <a:rPr lang="en-US" altLang="ko-KR" sz="1000" dirty="0">
+                <a:latin typeface="Pretendard Light" panose="02000403000000020004" pitchFamily="50" charset="-127"/>
+                <a:ea typeface="Pretendard Light" panose="02000403000000020004" pitchFamily="50" charset="-127"/>
+                <a:cs typeface="Pretendard Light" panose="02000403000000020004" pitchFamily="50" charset="-127"/>
+              </a:rPr>
+              <a:t>python download_era5.py --</a:t>
+            </a:r>
+            <a:r>
+              <a:rPr lang="en-US" altLang="ko-KR" sz="1000" dirty="0" err="1">
+                <a:latin typeface="Pretendard Light" panose="02000403000000020004" pitchFamily="50" charset="-127"/>
+                <a:ea typeface="Pretendard Light" panose="02000403000000020004" pitchFamily="50" charset="-127"/>
+                <a:cs typeface="Pretendard Light" panose="02000403000000020004" pitchFamily="50" charset="-127"/>
+              </a:rPr>
+              <a:t>freq</a:t>
+            </a:r>
+            <a:r>
+              <a:rPr lang="en-US" altLang="ko-KR" sz="1000" dirty="0">
+                <a:latin typeface="Pretendard Light" panose="02000403000000020004" pitchFamily="50" charset="-127"/>
+                <a:ea typeface="Pretendard Light" panose="02000403000000020004" pitchFamily="50" charset="-127"/>
+                <a:cs typeface="Pretendard Light" panose="02000403000000020004" pitchFamily="50" charset="-127"/>
+              </a:rPr>
+              <a:t> monthly</a:t>
+            </a:r>
+          </a:p>
+          <a:p>
+            <a:endParaRPr lang="en-US" altLang="ko-KR" sz="1000" dirty="0">
               <a:latin typeface="Pretendard Light" panose="02000403000000020004" pitchFamily="50" charset="-127"/>
               <a:ea typeface="Pretendard Light" panose="02000403000000020004" pitchFamily="50" charset="-127"/>
               <a:cs typeface="Pretendard Light" panose="02000403000000020004" pitchFamily="50" charset="-127"/>
@@ -18780,120 +17959,280 @@
           </a:p>
           <a:p>
             <a:r>
-              <a:rPr lang="en-US" altLang="ko-KR" sz="1200" dirty="0"/>
-              <a:t>python make_ohc300_godas.py --to-</a:t>
-            </a:r>
-            <a:r>
-              <a:rPr lang="en-US" altLang="ko-KR" sz="1200" dirty="0" err="1"/>
-              <a:t>degC</a:t>
-            </a:r>
-            <a:r>
-              <a:rPr lang="en-US" altLang="ko-KR" sz="1200" dirty="0"/>
-              <a:t> --overwrite</a:t>
-            </a:r>
-          </a:p>
-          <a:p>
-            <a:r>
-              <a:rPr lang="en-US" altLang="ko-KR" sz="1200" dirty="0">
-                <a:latin typeface="Pretendard Light" panose="02000403000000020004" pitchFamily="50" charset="-127"/>
-                <a:ea typeface="Pretendard Light" panose="02000403000000020004" pitchFamily="50" charset="-127"/>
-                <a:cs typeface="Pretendard Light" panose="02000403000000020004" pitchFamily="50" charset="-127"/>
-              </a:rPr>
-              <a:t>: </a:t>
-            </a:r>
-            <a:r>
-              <a:rPr lang="ko-KR" altLang="en-US" sz="1200" dirty="0">
-                <a:latin typeface="Pretendard Light" panose="02000403000000020004" pitchFamily="50" charset="-127"/>
-                <a:ea typeface="Pretendard Light" panose="02000403000000020004" pitchFamily="50" charset="-127"/>
-                <a:cs typeface="Pretendard Light" panose="02000403000000020004" pitchFamily="50" charset="-127"/>
-              </a:rPr>
-              <a:t>섭씨로 변환해서 적분</a:t>
-            </a:r>
-            <a:endParaRPr lang="en-US" altLang="ko-KR" sz="1200" dirty="0">
+              <a:rPr lang="en-US" altLang="ko-KR" sz="1000" dirty="0">
+                <a:latin typeface="Pretendard Light" panose="02000403000000020004" pitchFamily="50" charset="-127"/>
+                <a:ea typeface="Pretendard Light" panose="02000403000000020004" pitchFamily="50" charset="-127"/>
+                <a:cs typeface="Pretendard Light" panose="02000403000000020004" pitchFamily="50" charset="-127"/>
+              </a:rPr>
+              <a:t># daily</a:t>
+            </a:r>
+            <a:r>
+              <a:rPr lang="ko-KR" altLang="en-US" sz="1000" dirty="0">
+                <a:latin typeface="Pretendard Light" panose="02000403000000020004" pitchFamily="50" charset="-127"/>
+                <a:ea typeface="Pretendard Light" panose="02000403000000020004" pitchFamily="50" charset="-127"/>
+                <a:cs typeface="Pretendard Light" panose="02000403000000020004" pitchFamily="50" charset="-127"/>
+              </a:rPr>
+              <a:t>만</a:t>
+            </a:r>
+          </a:p>
+          <a:p>
+            <a:r>
+              <a:rPr lang="en-US" altLang="ko-KR" sz="1000" dirty="0">
+                <a:latin typeface="Pretendard Light" panose="02000403000000020004" pitchFamily="50" charset="-127"/>
+                <a:ea typeface="Pretendard Light" panose="02000403000000020004" pitchFamily="50" charset="-127"/>
+                <a:cs typeface="Pretendard Light" panose="02000403000000020004" pitchFamily="50" charset="-127"/>
+              </a:rPr>
+              <a:t>python download_era5.py --</a:t>
+            </a:r>
+            <a:r>
+              <a:rPr lang="en-US" altLang="ko-KR" sz="1000" dirty="0" err="1">
+                <a:latin typeface="Pretendard Light" panose="02000403000000020004" pitchFamily="50" charset="-127"/>
+                <a:ea typeface="Pretendard Light" panose="02000403000000020004" pitchFamily="50" charset="-127"/>
+                <a:cs typeface="Pretendard Light" panose="02000403000000020004" pitchFamily="50" charset="-127"/>
+              </a:rPr>
+              <a:t>freq</a:t>
+            </a:r>
+            <a:r>
+              <a:rPr lang="en-US" altLang="ko-KR" sz="1000" dirty="0">
+                <a:latin typeface="Pretendard Light" panose="02000403000000020004" pitchFamily="50" charset="-127"/>
+                <a:ea typeface="Pretendard Light" panose="02000403000000020004" pitchFamily="50" charset="-127"/>
+                <a:cs typeface="Pretendard Light" panose="02000403000000020004" pitchFamily="50" charset="-127"/>
+              </a:rPr>
+              <a:t> daily</a:t>
+            </a:r>
+          </a:p>
+          <a:p>
+            <a:endParaRPr lang="en-US" altLang="ko-KR" sz="1000" dirty="0">
               <a:latin typeface="Pretendard Light" panose="02000403000000020004" pitchFamily="50" charset="-127"/>
               <a:ea typeface="Pretendard Light" panose="02000403000000020004" pitchFamily="50" charset="-127"/>
               <a:cs typeface="Pretendard Light" panose="02000403000000020004" pitchFamily="50" charset="-127"/>
             </a:endParaRPr>
           </a:p>
+          <a:p>
+            <a:r>
+              <a:rPr lang="en-US" altLang="ko-KR" sz="1000" dirty="0">
+                <a:latin typeface="Pretendard Light" panose="02000403000000020004" pitchFamily="50" charset="-127"/>
+                <a:ea typeface="Pretendard Light" panose="02000403000000020004" pitchFamily="50" charset="-127"/>
+                <a:cs typeface="Pretendard Light" panose="02000403000000020004" pitchFamily="50" charset="-127"/>
+              </a:rPr>
+              <a:t># </a:t>
+            </a:r>
+            <a:r>
+              <a:rPr lang="ko-KR" altLang="en-US" sz="1000" dirty="0">
+                <a:latin typeface="Pretendard Light" panose="02000403000000020004" pitchFamily="50" charset="-127"/>
+                <a:ea typeface="Pretendard Light" panose="02000403000000020004" pitchFamily="50" charset="-127"/>
+                <a:cs typeface="Pretendard Light" panose="02000403000000020004" pitchFamily="50" charset="-127"/>
+              </a:rPr>
+              <a:t>둘 다</a:t>
+            </a:r>
+          </a:p>
+          <a:p>
+            <a:r>
+              <a:rPr lang="en-US" altLang="ko-KR" sz="1000" dirty="0">
+                <a:latin typeface="Pretendard Light" panose="02000403000000020004" pitchFamily="50" charset="-127"/>
+                <a:ea typeface="Pretendard Light" panose="02000403000000020004" pitchFamily="50" charset="-127"/>
+                <a:cs typeface="Pretendard Light" panose="02000403000000020004" pitchFamily="50" charset="-127"/>
+              </a:rPr>
+              <a:t>python download_era5.py --</a:t>
+            </a:r>
+            <a:r>
+              <a:rPr lang="en-US" altLang="ko-KR" sz="1000" dirty="0" err="1">
+                <a:latin typeface="Pretendard Light" panose="02000403000000020004" pitchFamily="50" charset="-127"/>
+                <a:ea typeface="Pretendard Light" panose="02000403000000020004" pitchFamily="50" charset="-127"/>
+                <a:cs typeface="Pretendard Light" panose="02000403000000020004" pitchFamily="50" charset="-127"/>
+              </a:rPr>
+              <a:t>freq</a:t>
+            </a:r>
+            <a:r>
+              <a:rPr lang="en-US" altLang="ko-KR" sz="1000" dirty="0">
+                <a:latin typeface="Pretendard Light" panose="02000403000000020004" pitchFamily="50" charset="-127"/>
+                <a:ea typeface="Pretendard Light" panose="02000403000000020004" pitchFamily="50" charset="-127"/>
+                <a:cs typeface="Pretendard Light" panose="02000403000000020004" pitchFamily="50" charset="-127"/>
+              </a:rPr>
+              <a:t> all</a:t>
+            </a:r>
+          </a:p>
+          <a:p>
+            <a:endParaRPr lang="en-US" altLang="ko-KR" sz="1000" dirty="0">
+              <a:latin typeface="Pretendard Light" panose="02000403000000020004" pitchFamily="50" charset="-127"/>
+              <a:ea typeface="Pretendard Light" panose="02000403000000020004" pitchFamily="50" charset="-127"/>
+              <a:cs typeface="Pretendard Light" panose="02000403000000020004" pitchFamily="50" charset="-127"/>
+            </a:endParaRPr>
+          </a:p>
+          <a:p>
+            <a:r>
+              <a:rPr lang="en-US" altLang="ko-KR" sz="1000" dirty="0">
+                <a:latin typeface="Pretendard Light" panose="02000403000000020004" pitchFamily="50" charset="-127"/>
+                <a:ea typeface="Pretendard Light" panose="02000403000000020004" pitchFamily="50" charset="-127"/>
+                <a:cs typeface="Pretendard Light" panose="02000403000000020004" pitchFamily="50" charset="-127"/>
+              </a:rPr>
+              <a:t># </a:t>
+            </a:r>
+            <a:r>
+              <a:rPr lang="ko-KR" altLang="en-US" sz="1000" dirty="0">
+                <a:latin typeface="Pretendard Light" panose="02000403000000020004" pitchFamily="50" charset="-127"/>
+                <a:ea typeface="Pretendard Light" panose="02000403000000020004" pitchFamily="50" charset="-127"/>
+                <a:cs typeface="Pretendard Light" panose="02000403000000020004" pitchFamily="50" charset="-127"/>
+              </a:rPr>
+              <a:t>기간 지정</a:t>
+            </a:r>
+          </a:p>
+          <a:p>
+            <a:r>
+              <a:rPr lang="en-US" altLang="ko-KR" sz="1000" dirty="0">
+                <a:latin typeface="Pretendard Light" panose="02000403000000020004" pitchFamily="50" charset="-127"/>
+                <a:ea typeface="Pretendard Light" panose="02000403000000020004" pitchFamily="50" charset="-127"/>
+                <a:cs typeface="Pretendard Light" panose="02000403000000020004" pitchFamily="50" charset="-127"/>
+              </a:rPr>
+              <a:t>python download_era5.py --</a:t>
+            </a:r>
+            <a:r>
+              <a:rPr lang="en-US" altLang="ko-KR" sz="1000" dirty="0" err="1">
+                <a:latin typeface="Pretendard Light" panose="02000403000000020004" pitchFamily="50" charset="-127"/>
+                <a:ea typeface="Pretendard Light" panose="02000403000000020004" pitchFamily="50" charset="-127"/>
+                <a:cs typeface="Pretendard Light" panose="02000403000000020004" pitchFamily="50" charset="-127"/>
+              </a:rPr>
+              <a:t>freq</a:t>
+            </a:r>
+            <a:r>
+              <a:rPr lang="en-US" altLang="ko-KR" sz="1000" dirty="0">
+                <a:latin typeface="Pretendard Light" panose="02000403000000020004" pitchFamily="50" charset="-127"/>
+                <a:ea typeface="Pretendard Light" panose="02000403000000020004" pitchFamily="50" charset="-127"/>
+                <a:cs typeface="Pretendard Light" panose="02000403000000020004" pitchFamily="50" charset="-127"/>
+              </a:rPr>
+              <a:t> all --start-year 1958 --end-year 2025</a:t>
+            </a:r>
+          </a:p>
+          <a:p>
+            <a:endParaRPr lang="en-US" altLang="ko-KR" sz="1000" dirty="0">
+              <a:latin typeface="Pretendard Light" panose="02000403000000020004" pitchFamily="50" charset="-127"/>
+              <a:ea typeface="Pretendard Light" panose="02000403000000020004" pitchFamily="50" charset="-127"/>
+              <a:cs typeface="Pretendard Light" panose="02000403000000020004" pitchFamily="50" charset="-127"/>
+            </a:endParaRPr>
+          </a:p>
+          <a:p>
+            <a:r>
+              <a:rPr lang="en-US" altLang="ko-KR" sz="1000" dirty="0">
+                <a:latin typeface="Pretendard Light" panose="02000403000000020004" pitchFamily="50" charset="-127"/>
+                <a:ea typeface="Pretendard Light" panose="02000403000000020004" pitchFamily="50" charset="-127"/>
+                <a:cs typeface="Pretendard Light" panose="02000403000000020004" pitchFamily="50" charset="-127"/>
+              </a:rPr>
+              <a:t># </a:t>
+            </a:r>
+            <a:r>
+              <a:rPr lang="ko-KR" altLang="en-US" sz="1000" dirty="0">
+                <a:latin typeface="Pretendard Light" panose="02000403000000020004" pitchFamily="50" charset="-127"/>
+                <a:ea typeface="Pretendard Light" panose="02000403000000020004" pitchFamily="50" charset="-127"/>
+                <a:cs typeface="Pretendard Light" panose="02000403000000020004" pitchFamily="50" charset="-127"/>
+              </a:rPr>
+              <a:t>특정 월만</a:t>
+            </a:r>
+          </a:p>
+          <a:p>
+            <a:r>
+              <a:rPr lang="en-US" altLang="ko-KR" sz="1000" dirty="0">
+                <a:latin typeface="Pretendard Light" panose="02000403000000020004" pitchFamily="50" charset="-127"/>
+                <a:ea typeface="Pretendard Light" panose="02000403000000020004" pitchFamily="50" charset="-127"/>
+                <a:cs typeface="Pretendard Light" panose="02000403000000020004" pitchFamily="50" charset="-127"/>
+              </a:rPr>
+              <a:t>python download_era5.py --</a:t>
+            </a:r>
+            <a:r>
+              <a:rPr lang="en-US" altLang="ko-KR" sz="1000" dirty="0" err="1">
+                <a:latin typeface="Pretendard Light" panose="02000403000000020004" pitchFamily="50" charset="-127"/>
+                <a:ea typeface="Pretendard Light" panose="02000403000000020004" pitchFamily="50" charset="-127"/>
+                <a:cs typeface="Pretendard Light" panose="02000403000000020004" pitchFamily="50" charset="-127"/>
+              </a:rPr>
+              <a:t>freq</a:t>
+            </a:r>
+            <a:r>
+              <a:rPr lang="en-US" altLang="ko-KR" sz="1000" dirty="0">
+                <a:latin typeface="Pretendard Light" panose="02000403000000020004" pitchFamily="50" charset="-127"/>
+                <a:ea typeface="Pretendard Light" panose="02000403000000020004" pitchFamily="50" charset="-127"/>
+                <a:cs typeface="Pretendard Light" panose="02000403000000020004" pitchFamily="50" charset="-127"/>
+              </a:rPr>
+              <a:t> daily --months 1 2 3</a:t>
+            </a:r>
+          </a:p>
+          <a:p>
+            <a:endParaRPr lang="en-US" altLang="ko-KR" sz="1000" dirty="0">
+              <a:latin typeface="Pretendard Light" panose="02000403000000020004" pitchFamily="50" charset="-127"/>
+              <a:ea typeface="Pretendard Light" panose="02000403000000020004" pitchFamily="50" charset="-127"/>
+              <a:cs typeface="Pretendard Light" panose="02000403000000020004" pitchFamily="50" charset="-127"/>
+            </a:endParaRPr>
+          </a:p>
+          <a:p>
+            <a:r>
+              <a:rPr lang="en-US" altLang="ko-KR" sz="1000" dirty="0">
+                <a:latin typeface="Pretendard Light" panose="02000403000000020004" pitchFamily="50" charset="-127"/>
+                <a:ea typeface="Pretendard Light" panose="02000403000000020004" pitchFamily="50" charset="-127"/>
+                <a:cs typeface="Pretendard Light" panose="02000403000000020004" pitchFamily="50" charset="-127"/>
+              </a:rPr>
+              <a:t># daily </a:t>
+            </a:r>
+            <a:r>
+              <a:rPr lang="ko-KR" altLang="en-US" sz="1000" dirty="0">
+                <a:latin typeface="Pretendard Light" panose="02000403000000020004" pitchFamily="50" charset="-127"/>
+                <a:ea typeface="Pretendard Light" panose="02000403000000020004" pitchFamily="50" charset="-127"/>
+                <a:cs typeface="Pretendard Light" panose="02000403000000020004" pitchFamily="50" charset="-127"/>
+              </a:rPr>
+              <a:t>변수 여러 개</a:t>
+            </a:r>
+          </a:p>
+          <a:p>
+            <a:r>
+              <a:rPr lang="en-US" altLang="ko-KR" sz="1000" dirty="0">
+                <a:latin typeface="Pretendard Light" panose="02000403000000020004" pitchFamily="50" charset="-127"/>
+                <a:ea typeface="Pretendard Light" panose="02000403000000020004" pitchFamily="50" charset="-127"/>
+                <a:cs typeface="Pretendard Light" panose="02000403000000020004" pitchFamily="50" charset="-127"/>
+              </a:rPr>
+              <a:t>python download_era5.py \</a:t>
+            </a:r>
+          </a:p>
+          <a:p>
+            <a:r>
+              <a:rPr lang="en-US" altLang="ko-KR" sz="1000" dirty="0">
+                <a:latin typeface="Pretendard Light" panose="02000403000000020004" pitchFamily="50" charset="-127"/>
+                <a:ea typeface="Pretendard Light" panose="02000403000000020004" pitchFamily="50" charset="-127"/>
+                <a:cs typeface="Pretendard Light" panose="02000403000000020004" pitchFamily="50" charset="-127"/>
+              </a:rPr>
+              <a:t>  --</a:t>
+            </a:r>
+            <a:r>
+              <a:rPr lang="en-US" altLang="ko-KR" sz="1000" dirty="0" err="1">
+                <a:latin typeface="Pretendard Light" panose="02000403000000020004" pitchFamily="50" charset="-127"/>
+                <a:ea typeface="Pretendard Light" panose="02000403000000020004" pitchFamily="50" charset="-127"/>
+                <a:cs typeface="Pretendard Light" panose="02000403000000020004" pitchFamily="50" charset="-127"/>
+              </a:rPr>
+              <a:t>freq</a:t>
+            </a:r>
+            <a:r>
+              <a:rPr lang="en-US" altLang="ko-KR" sz="1000" dirty="0">
+                <a:latin typeface="Pretendard Light" panose="02000403000000020004" pitchFamily="50" charset="-127"/>
+                <a:ea typeface="Pretendard Light" panose="02000403000000020004" pitchFamily="50" charset="-127"/>
+                <a:cs typeface="Pretendard Light" panose="02000403000000020004" pitchFamily="50" charset="-127"/>
+              </a:rPr>
+              <a:t> daily \</a:t>
+            </a:r>
+          </a:p>
+          <a:p>
+            <a:r>
+              <a:rPr lang="en-US" altLang="ko-KR" sz="1000" dirty="0">
+                <a:latin typeface="Pretendard Light" panose="02000403000000020004" pitchFamily="50" charset="-127"/>
+                <a:ea typeface="Pretendard Light" panose="02000403000000020004" pitchFamily="50" charset="-127"/>
+                <a:cs typeface="Pretendard Light" panose="02000403000000020004" pitchFamily="50" charset="-127"/>
+              </a:rPr>
+              <a:t>  --daily-vars 10m_u_component_of_wind 10m_v_component_of_wind</a:t>
+            </a:r>
+          </a:p>
         </p:txBody>
       </p:sp>
-    </p:spTree>
-    <p:extLst>
-      <p:ext uri="{BB962C8B-B14F-4D97-AF65-F5344CB8AC3E}">
-        <p14:creationId xmlns:p14="http://schemas.microsoft.com/office/powerpoint/2010/main" val="1371844329"/>
-      </p:ext>
-    </p:extLst>
-  </p:cSld>
-  <p:clrMapOvr>
-    <a:masterClrMapping/>
-  </p:clrMapOvr>
-</p:sld>
-</file>
-
-<file path=ppt/slides/slide7.xml><?xml version="1.0" encoding="utf-8"?>
-<p:sld xmlns:a="http://schemas.openxmlformats.org/drawingml/2006/main" xmlns:r="http://schemas.openxmlformats.org/officeDocument/2006/relationships" xmlns:p="http://schemas.openxmlformats.org/presentationml/2006/main">
-  <p:cSld>
-    <p:spTree>
-      <p:nvGrpSpPr>
-        <p:cNvPr id="1" name="Shape 157">
-          <a:extLst>
-            <a:ext uri="{FF2B5EF4-FFF2-40B4-BE49-F238E27FC236}">
-              <a16:creationId xmlns:a16="http://schemas.microsoft.com/office/drawing/2014/main" id="{39D1D5A0-4C3C-3D32-5BFE-2E9FFF529FAC}"/>
-            </a:ext>
-          </a:extLst>
-        </p:cNvPr>
-        <p:cNvGrpSpPr/>
-        <p:nvPr/>
-      </p:nvGrpSpPr>
-      <p:grpSpPr>
-        <a:xfrm>
-          <a:off x="0" y="0"/>
-          <a:ext cx="0" cy="0"/>
-          <a:chOff x="0" y="0"/>
-          <a:chExt cx="0" cy="0"/>
-        </a:xfrm>
-      </p:grpSpPr>
-      <p:pic>
-        <p:nvPicPr>
-          <p:cNvPr id="158" name="Google Shape;158;p18" descr="image.png">
+      <p:sp>
+        <p:nvSpPr>
+          <p:cNvPr id="2" name="TextBox 1">
             <a:extLst>
               <a:ext uri="{FF2B5EF4-FFF2-40B4-BE49-F238E27FC236}">
-                <a16:creationId xmlns:a16="http://schemas.microsoft.com/office/drawing/2014/main" id="{0393D36E-7766-1D1E-25FA-A85A698D2BE1}"/>
-              </a:ext>
-            </a:extLst>
-          </p:cNvPr>
-          <p:cNvPicPr preferRelativeResize="0">
-            <a:picLocks noGrp="1" noRot="1" noMove="1" noResize="1" noEditPoints="1" noAdjustHandles="1" noChangeArrowheads="1" noChangeShapeType="1" noCrop="1"/>
-          </p:cNvPicPr>
-          <p:nvPr/>
-        </p:nvPicPr>
-        <p:blipFill rotWithShape="1">
-          <a:blip r:embed="rId3">
-            <a:alphaModFix/>
-          </a:blip>
-          <a:srcRect/>
-          <a:stretch/>
-        </p:blipFill>
-        <p:spPr>
-          <a:xfrm>
-            <a:off x="0" y="0"/>
-            <a:ext cx="12192000" cy="6858000"/>
-          </a:xfrm>
-          <a:prstGeom prst="rect">
-            <a:avLst/>
-          </a:prstGeom>
-          <a:noFill/>
-          <a:ln>
-            <a:noFill/>
-          </a:ln>
-        </p:spPr>
-      </p:pic>
-      <p:sp>
-        <p:nvSpPr>
-          <p:cNvPr id="160" name="Google Shape;160;p18">
-            <a:extLst>
-              <a:ext uri="{FF2B5EF4-FFF2-40B4-BE49-F238E27FC236}">
-                <a16:creationId xmlns:a16="http://schemas.microsoft.com/office/drawing/2014/main" id="{95C041BB-8AF8-B70A-FA0A-C8A8EAB93D94}"/>
+                <a16:creationId xmlns:a16="http://schemas.microsoft.com/office/drawing/2014/main" id="{92F5097E-4531-8A5A-E5F9-ABE912F979C4}"/>
               </a:ext>
             </a:extLst>
           </p:cNvPr>
@@ -18902,1269 +18241,8 @@
         </p:nvSpPr>
         <p:spPr>
           <a:xfrm>
-            <a:off x="571500" y="476250"/>
-            <a:ext cx="11049000" cy="484748"/>
-          </a:xfrm>
-          <a:prstGeom prst="rect">
-            <a:avLst/>
-          </a:prstGeom>
-          <a:noFill/>
-          <a:ln>
-            <a:noFill/>
-          </a:ln>
-        </p:spPr>
-        <p:txBody>
-          <a:bodyPr spcFirstLastPara="1" wrap="square" lIns="0" tIns="0" rIns="0" bIns="0" anchor="t" anchorCtr="0">
-            <a:spAutoFit/>
-          </a:bodyPr>
-          <a:lstStyle/>
-          <a:p>
-            <a:pPr marL="0" marR="0" lvl="0" indent="0" algn="l" rtl="0">
-              <a:spcBef>
-                <a:spcPts val="0"/>
-              </a:spcBef>
-              <a:spcAft>
-                <a:spcPts val="0"/>
-              </a:spcAft>
-              <a:buNone/>
-            </a:pPr>
-            <a:r>
-              <a:rPr lang="en-US" altLang="ko-KR" sz="3150" b="1" dirty="0">
-                <a:solidFill>
-                  <a:srgbClr val="001F3F"/>
-                </a:solidFill>
-                <a:latin typeface="Pretendard ExtraBold" panose="02000903000000020004" pitchFamily="50" charset="-127"/>
-                <a:ea typeface="Pretendard ExtraBold" panose="02000903000000020004" pitchFamily="50" charset="-127"/>
-                <a:cs typeface="Pretendard ExtraBold" panose="02000903000000020004" pitchFamily="50" charset="-127"/>
-              </a:rPr>
-              <a:t>[ETC]</a:t>
-            </a:r>
-            <a:endParaRPr dirty="0">
-              <a:latin typeface="Pretendard ExtraBold" panose="02000903000000020004" pitchFamily="50" charset="-127"/>
-              <a:ea typeface="Pretendard ExtraBold" panose="02000903000000020004" pitchFamily="50" charset="-127"/>
-              <a:cs typeface="Pretendard ExtraBold" panose="02000903000000020004" pitchFamily="50" charset="-127"/>
-            </a:endParaRPr>
-          </a:p>
-        </p:txBody>
-      </p:sp>
-      <p:sp>
-        <p:nvSpPr>
-          <p:cNvPr id="161" name="Google Shape;161;p18">
-            <a:extLst>
-              <a:ext uri="{FF2B5EF4-FFF2-40B4-BE49-F238E27FC236}">
-                <a16:creationId xmlns:a16="http://schemas.microsoft.com/office/drawing/2014/main" id="{91516BAB-C2F9-89F6-6D06-F265FF1263BB}"/>
-              </a:ext>
-            </a:extLst>
-          </p:cNvPr>
-          <p:cNvSpPr/>
-          <p:nvPr/>
-        </p:nvSpPr>
-        <p:spPr>
-          <a:xfrm>
-            <a:off x="571500" y="1076325"/>
-            <a:ext cx="11049000" cy="19050"/>
-          </a:xfrm>
-          <a:prstGeom prst="rect">
-            <a:avLst/>
-          </a:prstGeom>
-          <a:solidFill>
-            <a:srgbClr val="EEEEEE"/>
-          </a:solidFill>
-          <a:ln>
-            <a:noFill/>
-          </a:ln>
-        </p:spPr>
-        <p:txBody>
-          <a:bodyPr spcFirstLastPara="1" wrap="square" lIns="91425" tIns="45700" rIns="91425" bIns="45700" anchor="ctr" anchorCtr="0">
-            <a:noAutofit/>
-          </a:bodyPr>
-          <a:lstStyle/>
-          <a:p>
-            <a:pPr marL="0" marR="0" lvl="0" indent="0" algn="ctr" rtl="0">
-              <a:spcBef>
-                <a:spcPts val="0"/>
-              </a:spcBef>
-              <a:spcAft>
-                <a:spcPts val="0"/>
-              </a:spcAft>
-              <a:buNone/>
-            </a:pPr>
-            <a:endParaRPr sz="1800" b="0" i="0" u="none" strike="noStrike" cap="none">
-              <a:solidFill>
-                <a:schemeClr val="dk1"/>
-              </a:solidFill>
-              <a:latin typeface="Calibri"/>
-              <a:ea typeface="Calibri"/>
-              <a:cs typeface="Calibri"/>
-              <a:sym typeface="Calibri"/>
-            </a:endParaRPr>
-          </a:p>
-        </p:txBody>
-      </p:sp>
-      <p:sp>
-        <p:nvSpPr>
-          <p:cNvPr id="4" name="슬라이드 번호 개체 틀 3">
-            <a:extLst>
-              <a:ext uri="{FF2B5EF4-FFF2-40B4-BE49-F238E27FC236}">
-                <a16:creationId xmlns:a16="http://schemas.microsoft.com/office/drawing/2014/main" id="{923EC2C0-06CB-A1DD-54C9-5E6E23EE6E65}"/>
-              </a:ext>
-            </a:extLst>
-          </p:cNvPr>
-          <p:cNvSpPr>
-            <a:spLocks noGrp="1"/>
-          </p:cNvSpPr>
-          <p:nvPr>
-            <p:ph type="sldNum" idx="12"/>
-          </p:nvPr>
-        </p:nvSpPr>
-        <p:spPr/>
-        <p:txBody>
-          <a:bodyPr/>
-          <a:lstStyle/>
-          <a:p>
-            <a:pPr marL="0" lvl="0" indent="0" algn="r" rtl="0">
-              <a:spcBef>
-                <a:spcPts val="0"/>
-              </a:spcBef>
-              <a:spcAft>
-                <a:spcPts val="0"/>
-              </a:spcAft>
-              <a:buNone/>
-            </a:pPr>
-            <a:fld id="{00000000-1234-1234-1234-123412341234}" type="slidenum">
-              <a:rPr lang="en-US" smtClean="0"/>
-              <a:t>7</a:t>
-            </a:fld>
-            <a:endParaRPr lang="en-US"/>
-          </a:p>
-        </p:txBody>
-      </p:sp>
-      <p:sp>
-        <p:nvSpPr>
-          <p:cNvPr id="3" name="TextBox 2">
-            <a:extLst>
-              <a:ext uri="{FF2B5EF4-FFF2-40B4-BE49-F238E27FC236}">
-                <a16:creationId xmlns:a16="http://schemas.microsoft.com/office/drawing/2014/main" id="{F2DFA9B8-C900-B856-EA58-F1AD32E04B87}"/>
-              </a:ext>
-            </a:extLst>
-          </p:cNvPr>
-          <p:cNvSpPr txBox="1"/>
-          <p:nvPr/>
-        </p:nvSpPr>
-        <p:spPr>
-          <a:xfrm>
-            <a:off x="571500" y="1471910"/>
-            <a:ext cx="2733675" cy="5386090"/>
-          </a:xfrm>
-          <a:prstGeom prst="rect">
-            <a:avLst/>
-          </a:prstGeom>
-          <a:noFill/>
-        </p:spPr>
-        <p:txBody>
-          <a:bodyPr wrap="square" numCol="1" rtlCol="0">
-            <a:spAutoFit/>
-          </a:bodyPr>
-          <a:lstStyle/>
-          <a:p>
-            <a:r>
-              <a:rPr lang="en-US" altLang="ko-KR" sz="400" dirty="0">
-                <a:latin typeface="Pretendard Light" panose="02000403000000020004" pitchFamily="50" charset="-127"/>
-                <a:ea typeface="Pretendard Light" panose="02000403000000020004" pitchFamily="50" charset="-127"/>
-                <a:cs typeface="Pretendard Light" panose="02000403000000020004" pitchFamily="50" charset="-127"/>
-              </a:rPr>
-              <a:t># 1) ACCESS-CM2 r1</a:t>
-            </a:r>
-          </a:p>
-          <a:p>
-            <a:r>
-              <a:rPr lang="en-US" altLang="ko-KR" sz="400" dirty="0">
-                <a:latin typeface="Pretendard Light" panose="02000403000000020004" pitchFamily="50" charset="-127"/>
-                <a:ea typeface="Pretendard Light" panose="02000403000000020004" pitchFamily="50" charset="-127"/>
-                <a:cs typeface="Pretendard Light" panose="02000403000000020004" pitchFamily="50" charset="-127"/>
-              </a:rPr>
-              <a:t>cd /home/sanggyu1008/project/01_ENSO/01_data/01_raw/cmip6/ssp370/ACCESS-CM2/r1i1p1f1/monthly</a:t>
-            </a:r>
-          </a:p>
-          <a:p>
-            <a:r>
-              <a:rPr lang="en-US" altLang="ko-KR" sz="400" dirty="0">
-                <a:latin typeface="Pretendard Light" panose="02000403000000020004" pitchFamily="50" charset="-127"/>
-                <a:ea typeface="Pretendard Light" panose="02000403000000020004" pitchFamily="50" charset="-127"/>
-                <a:cs typeface="Pretendard Light" panose="02000403000000020004" pitchFamily="50" charset="-127"/>
-              </a:rPr>
-              <a:t>lcd /</a:t>
-            </a:r>
-            <a:r>
-              <a:rPr lang="en-US" altLang="ko-KR" sz="400" dirty="0" err="1">
-                <a:latin typeface="Pretendard Light" panose="02000403000000020004" pitchFamily="50" charset="-127"/>
-                <a:ea typeface="Pretendard Light" panose="02000403000000020004" pitchFamily="50" charset="-127"/>
-                <a:cs typeface="Pretendard Light" panose="02000403000000020004" pitchFamily="50" charset="-127"/>
-              </a:rPr>
-              <a:t>mnt</a:t>
-            </a:r>
-            <a:r>
-              <a:rPr lang="en-US" altLang="ko-KR" sz="400" dirty="0">
-                <a:latin typeface="Pretendard Light" panose="02000403000000020004" pitchFamily="50" charset="-127"/>
-                <a:ea typeface="Pretendard Light" panose="02000403000000020004" pitchFamily="50" charset="-127"/>
-                <a:cs typeface="Pretendard Light" panose="02000403000000020004" pitchFamily="50" charset="-127"/>
-              </a:rPr>
-              <a:t>/d/project/01_ENSO/01_data/01_raw/cmip6/ssp370/ACCESS-CM2/r1i1p1f1/monthly</a:t>
-            </a:r>
-          </a:p>
-          <a:p>
-            <a:r>
-              <a:rPr lang="en-US" altLang="ko-KR" sz="400" dirty="0">
-                <a:latin typeface="Pretendard Light" panose="02000403000000020004" pitchFamily="50" charset="-127"/>
-                <a:ea typeface="Pretendard Light" panose="02000403000000020004" pitchFamily="50" charset="-127"/>
-                <a:cs typeface="Pretendard Light" panose="02000403000000020004" pitchFamily="50" charset="-127"/>
-              </a:rPr>
-              <a:t>put -p thetao_*.nc</a:t>
-            </a:r>
-          </a:p>
-          <a:p>
-            <a:endParaRPr lang="en-US" altLang="ko-KR" sz="400" dirty="0">
-              <a:latin typeface="Pretendard Light" panose="02000403000000020004" pitchFamily="50" charset="-127"/>
-              <a:ea typeface="Pretendard Light" panose="02000403000000020004" pitchFamily="50" charset="-127"/>
-              <a:cs typeface="Pretendard Light" panose="02000403000000020004" pitchFamily="50" charset="-127"/>
-            </a:endParaRPr>
-          </a:p>
-          <a:p>
-            <a:r>
-              <a:rPr lang="en-US" altLang="ko-KR" sz="400" dirty="0">
-                <a:latin typeface="Pretendard Light" panose="02000403000000020004" pitchFamily="50" charset="-127"/>
-                <a:ea typeface="Pretendard Light" panose="02000403000000020004" pitchFamily="50" charset="-127"/>
-                <a:cs typeface="Pretendard Light" panose="02000403000000020004" pitchFamily="50" charset="-127"/>
-              </a:rPr>
-              <a:t># 2) ACCESS-ESM1-5 r1</a:t>
-            </a:r>
-          </a:p>
-          <a:p>
-            <a:r>
-              <a:rPr lang="en-US" altLang="ko-KR" sz="400" dirty="0">
-                <a:latin typeface="Pretendard Light" panose="02000403000000020004" pitchFamily="50" charset="-127"/>
-                <a:ea typeface="Pretendard Light" panose="02000403000000020004" pitchFamily="50" charset="-127"/>
-                <a:cs typeface="Pretendard Light" panose="02000403000000020004" pitchFamily="50" charset="-127"/>
-              </a:rPr>
-              <a:t>cd /home/sanggyu1008/project/01_ENSO/01_data/01_raw/cmip6/ssp370/ACCESS-ESM1-5/r1i1p1f1/monthly</a:t>
-            </a:r>
-          </a:p>
-          <a:p>
-            <a:r>
-              <a:rPr lang="en-US" altLang="ko-KR" sz="400" dirty="0">
-                <a:latin typeface="Pretendard Light" panose="02000403000000020004" pitchFamily="50" charset="-127"/>
-                <a:ea typeface="Pretendard Light" panose="02000403000000020004" pitchFamily="50" charset="-127"/>
-                <a:cs typeface="Pretendard Light" panose="02000403000000020004" pitchFamily="50" charset="-127"/>
-              </a:rPr>
-              <a:t>lcd /</a:t>
-            </a:r>
-            <a:r>
-              <a:rPr lang="en-US" altLang="ko-KR" sz="400" dirty="0" err="1">
-                <a:latin typeface="Pretendard Light" panose="02000403000000020004" pitchFamily="50" charset="-127"/>
-                <a:ea typeface="Pretendard Light" panose="02000403000000020004" pitchFamily="50" charset="-127"/>
-                <a:cs typeface="Pretendard Light" panose="02000403000000020004" pitchFamily="50" charset="-127"/>
-              </a:rPr>
-              <a:t>mnt</a:t>
-            </a:r>
-            <a:r>
-              <a:rPr lang="en-US" altLang="ko-KR" sz="400" dirty="0">
-                <a:latin typeface="Pretendard Light" panose="02000403000000020004" pitchFamily="50" charset="-127"/>
-                <a:ea typeface="Pretendard Light" panose="02000403000000020004" pitchFamily="50" charset="-127"/>
-                <a:cs typeface="Pretendard Light" panose="02000403000000020004" pitchFamily="50" charset="-127"/>
-              </a:rPr>
-              <a:t>/d/project/01_ENSO/01_data/01_raw/cmip6/ssp370/ACCESS-ESM1-5/r1i1p1f1/monthly</a:t>
-            </a:r>
-          </a:p>
-          <a:p>
-            <a:r>
-              <a:rPr lang="en-US" altLang="ko-KR" sz="400" dirty="0">
-                <a:latin typeface="Pretendard Light" panose="02000403000000020004" pitchFamily="50" charset="-127"/>
-                <a:ea typeface="Pretendard Light" panose="02000403000000020004" pitchFamily="50" charset="-127"/>
-                <a:cs typeface="Pretendard Light" panose="02000403000000020004" pitchFamily="50" charset="-127"/>
-              </a:rPr>
-              <a:t>put -p thetao_*.nc</a:t>
-            </a:r>
-          </a:p>
-          <a:p>
-            <a:endParaRPr lang="en-US" altLang="ko-KR" sz="400" dirty="0">
-              <a:latin typeface="Pretendard Light" panose="02000403000000020004" pitchFamily="50" charset="-127"/>
-              <a:ea typeface="Pretendard Light" panose="02000403000000020004" pitchFamily="50" charset="-127"/>
-              <a:cs typeface="Pretendard Light" panose="02000403000000020004" pitchFamily="50" charset="-127"/>
-            </a:endParaRPr>
-          </a:p>
-          <a:p>
-            <a:r>
-              <a:rPr lang="en-US" altLang="ko-KR" sz="400" dirty="0">
-                <a:latin typeface="Pretendard Light" panose="02000403000000020004" pitchFamily="50" charset="-127"/>
-                <a:ea typeface="Pretendard Light" panose="02000403000000020004" pitchFamily="50" charset="-127"/>
-                <a:cs typeface="Pretendard Light" panose="02000403000000020004" pitchFamily="50" charset="-127"/>
-              </a:rPr>
-              <a:t># 3) ACCESS-ESM1-5 r2</a:t>
-            </a:r>
-          </a:p>
-          <a:p>
-            <a:r>
-              <a:rPr lang="en-US" altLang="ko-KR" sz="400" dirty="0">
-                <a:latin typeface="Pretendard Light" panose="02000403000000020004" pitchFamily="50" charset="-127"/>
-                <a:ea typeface="Pretendard Light" panose="02000403000000020004" pitchFamily="50" charset="-127"/>
-                <a:cs typeface="Pretendard Light" panose="02000403000000020004" pitchFamily="50" charset="-127"/>
-              </a:rPr>
-              <a:t>cd /home/sanggyu1008/project/01_ENSO/01_data/01_raw/cmip6/ssp370/ACCESS-ESM1-5/r2i1p1f1/monthly</a:t>
-            </a:r>
-          </a:p>
-          <a:p>
-            <a:r>
-              <a:rPr lang="en-US" altLang="ko-KR" sz="400" dirty="0">
-                <a:latin typeface="Pretendard Light" panose="02000403000000020004" pitchFamily="50" charset="-127"/>
-                <a:ea typeface="Pretendard Light" panose="02000403000000020004" pitchFamily="50" charset="-127"/>
-                <a:cs typeface="Pretendard Light" panose="02000403000000020004" pitchFamily="50" charset="-127"/>
-              </a:rPr>
-              <a:t>lcd /</a:t>
-            </a:r>
-            <a:r>
-              <a:rPr lang="en-US" altLang="ko-KR" sz="400" dirty="0" err="1">
-                <a:latin typeface="Pretendard Light" panose="02000403000000020004" pitchFamily="50" charset="-127"/>
-                <a:ea typeface="Pretendard Light" panose="02000403000000020004" pitchFamily="50" charset="-127"/>
-                <a:cs typeface="Pretendard Light" panose="02000403000000020004" pitchFamily="50" charset="-127"/>
-              </a:rPr>
-              <a:t>mnt</a:t>
-            </a:r>
-            <a:r>
-              <a:rPr lang="en-US" altLang="ko-KR" sz="400" dirty="0">
-                <a:latin typeface="Pretendard Light" panose="02000403000000020004" pitchFamily="50" charset="-127"/>
-                <a:ea typeface="Pretendard Light" panose="02000403000000020004" pitchFamily="50" charset="-127"/>
-                <a:cs typeface="Pretendard Light" panose="02000403000000020004" pitchFamily="50" charset="-127"/>
-              </a:rPr>
-              <a:t>/d/project/01_ENSO/01_data/01_raw/cmip6/ssp370/ACCESS-ESM1-5/r2i1p1f1/monthly</a:t>
-            </a:r>
-          </a:p>
-          <a:p>
-            <a:r>
-              <a:rPr lang="en-US" altLang="ko-KR" sz="400" dirty="0">
-                <a:latin typeface="Pretendard Light" panose="02000403000000020004" pitchFamily="50" charset="-127"/>
-                <a:ea typeface="Pretendard Light" panose="02000403000000020004" pitchFamily="50" charset="-127"/>
-                <a:cs typeface="Pretendard Light" panose="02000403000000020004" pitchFamily="50" charset="-127"/>
-              </a:rPr>
-              <a:t>put -p thetao_*.nc</a:t>
-            </a:r>
-          </a:p>
-          <a:p>
-            <a:endParaRPr lang="en-US" altLang="ko-KR" sz="400" dirty="0">
-              <a:latin typeface="Pretendard Light" panose="02000403000000020004" pitchFamily="50" charset="-127"/>
-              <a:ea typeface="Pretendard Light" panose="02000403000000020004" pitchFamily="50" charset="-127"/>
-              <a:cs typeface="Pretendard Light" panose="02000403000000020004" pitchFamily="50" charset="-127"/>
-            </a:endParaRPr>
-          </a:p>
-          <a:p>
-            <a:r>
-              <a:rPr lang="en-US" altLang="ko-KR" sz="400" dirty="0">
-                <a:latin typeface="Pretendard Light" panose="02000403000000020004" pitchFamily="50" charset="-127"/>
-                <a:ea typeface="Pretendard Light" panose="02000403000000020004" pitchFamily="50" charset="-127"/>
-                <a:cs typeface="Pretendard Light" panose="02000403000000020004" pitchFamily="50" charset="-127"/>
-              </a:rPr>
-              <a:t># 4) ACCESS-ESM1-5 r3</a:t>
-            </a:r>
-          </a:p>
-          <a:p>
-            <a:r>
-              <a:rPr lang="en-US" altLang="ko-KR" sz="400" dirty="0">
-                <a:latin typeface="Pretendard Light" panose="02000403000000020004" pitchFamily="50" charset="-127"/>
-                <a:ea typeface="Pretendard Light" panose="02000403000000020004" pitchFamily="50" charset="-127"/>
-                <a:cs typeface="Pretendard Light" panose="02000403000000020004" pitchFamily="50" charset="-127"/>
-              </a:rPr>
-              <a:t>cd /home/sanggyu1008/project/01_ENSO/01_data/01_raw/cmip6/ssp370/ACCESS-ESM1-5/r3i1p1f1/monthly</a:t>
-            </a:r>
-          </a:p>
-          <a:p>
-            <a:r>
-              <a:rPr lang="en-US" altLang="ko-KR" sz="400" dirty="0">
-                <a:latin typeface="Pretendard Light" panose="02000403000000020004" pitchFamily="50" charset="-127"/>
-                <a:ea typeface="Pretendard Light" panose="02000403000000020004" pitchFamily="50" charset="-127"/>
-                <a:cs typeface="Pretendard Light" panose="02000403000000020004" pitchFamily="50" charset="-127"/>
-              </a:rPr>
-              <a:t>lcd /</a:t>
-            </a:r>
-            <a:r>
-              <a:rPr lang="en-US" altLang="ko-KR" sz="400" dirty="0" err="1">
-                <a:latin typeface="Pretendard Light" panose="02000403000000020004" pitchFamily="50" charset="-127"/>
-                <a:ea typeface="Pretendard Light" panose="02000403000000020004" pitchFamily="50" charset="-127"/>
-                <a:cs typeface="Pretendard Light" panose="02000403000000020004" pitchFamily="50" charset="-127"/>
-              </a:rPr>
-              <a:t>mnt</a:t>
-            </a:r>
-            <a:r>
-              <a:rPr lang="en-US" altLang="ko-KR" sz="400" dirty="0">
-                <a:latin typeface="Pretendard Light" panose="02000403000000020004" pitchFamily="50" charset="-127"/>
-                <a:ea typeface="Pretendard Light" panose="02000403000000020004" pitchFamily="50" charset="-127"/>
-                <a:cs typeface="Pretendard Light" panose="02000403000000020004" pitchFamily="50" charset="-127"/>
-              </a:rPr>
-              <a:t>/d/project/01_ENSO/01_data/01_raw/cmip6/ssp370/ACCESS-ESM1-5/r3i1p1f1/monthly</a:t>
-            </a:r>
-          </a:p>
-          <a:p>
-            <a:r>
-              <a:rPr lang="en-US" altLang="ko-KR" sz="400" dirty="0">
-                <a:latin typeface="Pretendard Light" panose="02000403000000020004" pitchFamily="50" charset="-127"/>
-                <a:ea typeface="Pretendard Light" panose="02000403000000020004" pitchFamily="50" charset="-127"/>
-                <a:cs typeface="Pretendard Light" panose="02000403000000020004" pitchFamily="50" charset="-127"/>
-              </a:rPr>
-              <a:t>put -p thetao_*.nc</a:t>
-            </a:r>
-          </a:p>
-          <a:p>
-            <a:endParaRPr lang="en-US" altLang="ko-KR" sz="400" dirty="0">
-              <a:latin typeface="Pretendard Light" panose="02000403000000020004" pitchFamily="50" charset="-127"/>
-              <a:ea typeface="Pretendard Light" panose="02000403000000020004" pitchFamily="50" charset="-127"/>
-              <a:cs typeface="Pretendard Light" panose="02000403000000020004" pitchFamily="50" charset="-127"/>
-            </a:endParaRPr>
-          </a:p>
-          <a:p>
-            <a:r>
-              <a:rPr lang="en-US" altLang="ko-KR" sz="400" dirty="0">
-                <a:latin typeface="Pretendard Light" panose="02000403000000020004" pitchFamily="50" charset="-127"/>
-                <a:ea typeface="Pretendard Light" panose="02000403000000020004" pitchFamily="50" charset="-127"/>
-                <a:cs typeface="Pretendard Light" panose="02000403000000020004" pitchFamily="50" charset="-127"/>
-              </a:rPr>
-              <a:t># 5) CMCC-ESM2 r1</a:t>
-            </a:r>
-          </a:p>
-          <a:p>
-            <a:r>
-              <a:rPr lang="en-US" altLang="ko-KR" sz="400" dirty="0">
-                <a:latin typeface="Pretendard Light" panose="02000403000000020004" pitchFamily="50" charset="-127"/>
-                <a:ea typeface="Pretendard Light" panose="02000403000000020004" pitchFamily="50" charset="-127"/>
-                <a:cs typeface="Pretendard Light" panose="02000403000000020004" pitchFamily="50" charset="-127"/>
-              </a:rPr>
-              <a:t>cd /home/sanggyu1008/project/01_ENSO/01_data/01_raw/cmip6/ssp370/CMCC-ESM2/r1i1p1f1/monthly</a:t>
-            </a:r>
-          </a:p>
-          <a:p>
-            <a:r>
-              <a:rPr lang="en-US" altLang="ko-KR" sz="400" dirty="0">
-                <a:latin typeface="Pretendard Light" panose="02000403000000020004" pitchFamily="50" charset="-127"/>
-                <a:ea typeface="Pretendard Light" panose="02000403000000020004" pitchFamily="50" charset="-127"/>
-                <a:cs typeface="Pretendard Light" panose="02000403000000020004" pitchFamily="50" charset="-127"/>
-              </a:rPr>
-              <a:t>lcd /</a:t>
-            </a:r>
-            <a:r>
-              <a:rPr lang="en-US" altLang="ko-KR" sz="400" dirty="0" err="1">
-                <a:latin typeface="Pretendard Light" panose="02000403000000020004" pitchFamily="50" charset="-127"/>
-                <a:ea typeface="Pretendard Light" panose="02000403000000020004" pitchFamily="50" charset="-127"/>
-                <a:cs typeface="Pretendard Light" panose="02000403000000020004" pitchFamily="50" charset="-127"/>
-              </a:rPr>
-              <a:t>mnt</a:t>
-            </a:r>
-            <a:r>
-              <a:rPr lang="en-US" altLang="ko-KR" sz="400" dirty="0">
-                <a:latin typeface="Pretendard Light" panose="02000403000000020004" pitchFamily="50" charset="-127"/>
-                <a:ea typeface="Pretendard Light" panose="02000403000000020004" pitchFamily="50" charset="-127"/>
-                <a:cs typeface="Pretendard Light" panose="02000403000000020004" pitchFamily="50" charset="-127"/>
-              </a:rPr>
-              <a:t>/d/project/01_ENSO/01_data/01_raw/cmip6/ssp370/CMCC-ESM2/r1i1p1f1/monthly</a:t>
-            </a:r>
-          </a:p>
-          <a:p>
-            <a:r>
-              <a:rPr lang="en-US" altLang="ko-KR" sz="400" dirty="0">
-                <a:latin typeface="Pretendard Light" panose="02000403000000020004" pitchFamily="50" charset="-127"/>
-                <a:ea typeface="Pretendard Light" panose="02000403000000020004" pitchFamily="50" charset="-127"/>
-                <a:cs typeface="Pretendard Light" panose="02000403000000020004" pitchFamily="50" charset="-127"/>
-              </a:rPr>
-              <a:t>put -p thetao_*.nc</a:t>
-            </a:r>
-          </a:p>
-          <a:p>
-            <a:endParaRPr lang="en-US" altLang="ko-KR" sz="400" dirty="0">
-              <a:latin typeface="Pretendard Light" panose="02000403000000020004" pitchFamily="50" charset="-127"/>
-              <a:ea typeface="Pretendard Light" panose="02000403000000020004" pitchFamily="50" charset="-127"/>
-              <a:cs typeface="Pretendard Light" panose="02000403000000020004" pitchFamily="50" charset="-127"/>
-            </a:endParaRPr>
-          </a:p>
-          <a:p>
-            <a:r>
-              <a:rPr lang="en-US" altLang="ko-KR" sz="400" dirty="0">
-                <a:latin typeface="Pretendard Light" panose="02000403000000020004" pitchFamily="50" charset="-127"/>
-                <a:ea typeface="Pretendard Light" panose="02000403000000020004" pitchFamily="50" charset="-127"/>
-                <a:cs typeface="Pretendard Light" panose="02000403000000020004" pitchFamily="50" charset="-127"/>
-              </a:rPr>
-              <a:t># 6) CanESM5 r1</a:t>
-            </a:r>
-          </a:p>
-          <a:p>
-            <a:r>
-              <a:rPr lang="en-US" altLang="ko-KR" sz="400" dirty="0">
-                <a:latin typeface="Pretendard Light" panose="02000403000000020004" pitchFamily="50" charset="-127"/>
-                <a:ea typeface="Pretendard Light" panose="02000403000000020004" pitchFamily="50" charset="-127"/>
-                <a:cs typeface="Pretendard Light" panose="02000403000000020004" pitchFamily="50" charset="-127"/>
-              </a:rPr>
-              <a:t>cd /home/sanggyu1008/project/01_ENSO/01_data/01_raw/cmip6/ssp370/CanESM5/r1i1p1f1/monthly</a:t>
-            </a:r>
-          </a:p>
-          <a:p>
-            <a:r>
-              <a:rPr lang="en-US" altLang="ko-KR" sz="400" dirty="0">
-                <a:latin typeface="Pretendard Light" panose="02000403000000020004" pitchFamily="50" charset="-127"/>
-                <a:ea typeface="Pretendard Light" panose="02000403000000020004" pitchFamily="50" charset="-127"/>
-                <a:cs typeface="Pretendard Light" panose="02000403000000020004" pitchFamily="50" charset="-127"/>
-              </a:rPr>
-              <a:t>lcd /</a:t>
-            </a:r>
-            <a:r>
-              <a:rPr lang="en-US" altLang="ko-KR" sz="400" dirty="0" err="1">
-                <a:latin typeface="Pretendard Light" panose="02000403000000020004" pitchFamily="50" charset="-127"/>
-                <a:ea typeface="Pretendard Light" panose="02000403000000020004" pitchFamily="50" charset="-127"/>
-                <a:cs typeface="Pretendard Light" panose="02000403000000020004" pitchFamily="50" charset="-127"/>
-              </a:rPr>
-              <a:t>mnt</a:t>
-            </a:r>
-            <a:r>
-              <a:rPr lang="en-US" altLang="ko-KR" sz="400" dirty="0">
-                <a:latin typeface="Pretendard Light" panose="02000403000000020004" pitchFamily="50" charset="-127"/>
-                <a:ea typeface="Pretendard Light" panose="02000403000000020004" pitchFamily="50" charset="-127"/>
-                <a:cs typeface="Pretendard Light" panose="02000403000000020004" pitchFamily="50" charset="-127"/>
-              </a:rPr>
-              <a:t>/d/project/01_ENSO/01_data/01_raw/cmip6/ssp370/CanESM5/r1i1p1f1/monthly</a:t>
-            </a:r>
-          </a:p>
-          <a:p>
-            <a:r>
-              <a:rPr lang="en-US" altLang="ko-KR" sz="400" dirty="0">
-                <a:latin typeface="Pretendard Light" panose="02000403000000020004" pitchFamily="50" charset="-127"/>
-                <a:ea typeface="Pretendard Light" panose="02000403000000020004" pitchFamily="50" charset="-127"/>
-                <a:cs typeface="Pretendard Light" panose="02000403000000020004" pitchFamily="50" charset="-127"/>
-              </a:rPr>
-              <a:t>put -p thetao_*.nc</a:t>
-            </a:r>
-          </a:p>
-          <a:p>
-            <a:endParaRPr lang="en-US" altLang="ko-KR" sz="400" dirty="0">
-              <a:latin typeface="Pretendard Light" panose="02000403000000020004" pitchFamily="50" charset="-127"/>
-              <a:ea typeface="Pretendard Light" panose="02000403000000020004" pitchFamily="50" charset="-127"/>
-              <a:cs typeface="Pretendard Light" panose="02000403000000020004" pitchFamily="50" charset="-127"/>
-            </a:endParaRPr>
-          </a:p>
-          <a:p>
-            <a:r>
-              <a:rPr lang="en-US" altLang="ko-KR" sz="400" dirty="0">
-                <a:latin typeface="Pretendard Light" panose="02000403000000020004" pitchFamily="50" charset="-127"/>
-                <a:ea typeface="Pretendard Light" panose="02000403000000020004" pitchFamily="50" charset="-127"/>
-                <a:cs typeface="Pretendard Light" panose="02000403000000020004" pitchFamily="50" charset="-127"/>
-              </a:rPr>
-              <a:t># 7) CanESM5 r2</a:t>
-            </a:r>
-          </a:p>
-          <a:p>
-            <a:r>
-              <a:rPr lang="en-US" altLang="ko-KR" sz="400" dirty="0">
-                <a:latin typeface="Pretendard Light" panose="02000403000000020004" pitchFamily="50" charset="-127"/>
-                <a:ea typeface="Pretendard Light" panose="02000403000000020004" pitchFamily="50" charset="-127"/>
-                <a:cs typeface="Pretendard Light" panose="02000403000000020004" pitchFamily="50" charset="-127"/>
-              </a:rPr>
-              <a:t>cd /home/sanggyu1008/project/01_ENSO/01_data/01_raw/cmip6/ssp370/CanESM5/r2i1p1f1/monthly</a:t>
-            </a:r>
-          </a:p>
-          <a:p>
-            <a:r>
-              <a:rPr lang="en-US" altLang="ko-KR" sz="400" dirty="0">
-                <a:latin typeface="Pretendard Light" panose="02000403000000020004" pitchFamily="50" charset="-127"/>
-                <a:ea typeface="Pretendard Light" panose="02000403000000020004" pitchFamily="50" charset="-127"/>
-                <a:cs typeface="Pretendard Light" panose="02000403000000020004" pitchFamily="50" charset="-127"/>
-              </a:rPr>
-              <a:t>lcd /</a:t>
-            </a:r>
-            <a:r>
-              <a:rPr lang="en-US" altLang="ko-KR" sz="400" dirty="0" err="1">
-                <a:latin typeface="Pretendard Light" panose="02000403000000020004" pitchFamily="50" charset="-127"/>
-                <a:ea typeface="Pretendard Light" panose="02000403000000020004" pitchFamily="50" charset="-127"/>
-                <a:cs typeface="Pretendard Light" panose="02000403000000020004" pitchFamily="50" charset="-127"/>
-              </a:rPr>
-              <a:t>mnt</a:t>
-            </a:r>
-            <a:r>
-              <a:rPr lang="en-US" altLang="ko-KR" sz="400" dirty="0">
-                <a:latin typeface="Pretendard Light" panose="02000403000000020004" pitchFamily="50" charset="-127"/>
-                <a:ea typeface="Pretendard Light" panose="02000403000000020004" pitchFamily="50" charset="-127"/>
-                <a:cs typeface="Pretendard Light" panose="02000403000000020004" pitchFamily="50" charset="-127"/>
-              </a:rPr>
-              <a:t>/d/project/01_ENSO/01_data/01_raw/cmip6/ssp370/CanESM5/r2i1p1f1/monthly</a:t>
-            </a:r>
-          </a:p>
-          <a:p>
-            <a:r>
-              <a:rPr lang="en-US" altLang="ko-KR" sz="400" dirty="0">
-                <a:latin typeface="Pretendard Light" panose="02000403000000020004" pitchFamily="50" charset="-127"/>
-                <a:ea typeface="Pretendard Light" panose="02000403000000020004" pitchFamily="50" charset="-127"/>
-                <a:cs typeface="Pretendard Light" panose="02000403000000020004" pitchFamily="50" charset="-127"/>
-              </a:rPr>
-              <a:t>put -p thetao_*.nc</a:t>
-            </a:r>
-          </a:p>
-          <a:p>
-            <a:endParaRPr lang="en-US" altLang="ko-KR" sz="400" dirty="0">
-              <a:latin typeface="Pretendard Light" panose="02000403000000020004" pitchFamily="50" charset="-127"/>
-              <a:ea typeface="Pretendard Light" panose="02000403000000020004" pitchFamily="50" charset="-127"/>
-              <a:cs typeface="Pretendard Light" panose="02000403000000020004" pitchFamily="50" charset="-127"/>
-            </a:endParaRPr>
-          </a:p>
-          <a:p>
-            <a:r>
-              <a:rPr lang="en-US" altLang="ko-KR" sz="400" dirty="0">
-                <a:latin typeface="Pretendard Light" panose="02000403000000020004" pitchFamily="50" charset="-127"/>
-                <a:ea typeface="Pretendard Light" panose="02000403000000020004" pitchFamily="50" charset="-127"/>
-                <a:cs typeface="Pretendard Light" panose="02000403000000020004" pitchFamily="50" charset="-127"/>
-              </a:rPr>
-              <a:t># 8) CanESM5 r3</a:t>
-            </a:r>
-          </a:p>
-          <a:p>
-            <a:r>
-              <a:rPr lang="en-US" altLang="ko-KR" sz="400" dirty="0">
-                <a:latin typeface="Pretendard Light" panose="02000403000000020004" pitchFamily="50" charset="-127"/>
-                <a:ea typeface="Pretendard Light" panose="02000403000000020004" pitchFamily="50" charset="-127"/>
-                <a:cs typeface="Pretendard Light" panose="02000403000000020004" pitchFamily="50" charset="-127"/>
-              </a:rPr>
-              <a:t>cd /home/sanggyu1008/project/01_ENSO/01_data/01_raw/cmip6/ssp370/CanESM5/r3i1p1f1/monthly</a:t>
-            </a:r>
-          </a:p>
-          <a:p>
-            <a:r>
-              <a:rPr lang="en-US" altLang="ko-KR" sz="400" dirty="0">
-                <a:latin typeface="Pretendard Light" panose="02000403000000020004" pitchFamily="50" charset="-127"/>
-                <a:ea typeface="Pretendard Light" panose="02000403000000020004" pitchFamily="50" charset="-127"/>
-                <a:cs typeface="Pretendard Light" panose="02000403000000020004" pitchFamily="50" charset="-127"/>
-              </a:rPr>
-              <a:t>lcd /</a:t>
-            </a:r>
-            <a:r>
-              <a:rPr lang="en-US" altLang="ko-KR" sz="400" dirty="0" err="1">
-                <a:latin typeface="Pretendard Light" panose="02000403000000020004" pitchFamily="50" charset="-127"/>
-                <a:ea typeface="Pretendard Light" panose="02000403000000020004" pitchFamily="50" charset="-127"/>
-                <a:cs typeface="Pretendard Light" panose="02000403000000020004" pitchFamily="50" charset="-127"/>
-              </a:rPr>
-              <a:t>mnt</a:t>
-            </a:r>
-            <a:r>
-              <a:rPr lang="en-US" altLang="ko-KR" sz="400" dirty="0">
-                <a:latin typeface="Pretendard Light" panose="02000403000000020004" pitchFamily="50" charset="-127"/>
-                <a:ea typeface="Pretendard Light" panose="02000403000000020004" pitchFamily="50" charset="-127"/>
-                <a:cs typeface="Pretendard Light" panose="02000403000000020004" pitchFamily="50" charset="-127"/>
-              </a:rPr>
-              <a:t>/d/project/01_ENSO/01_data/01_raw/cmip6/ssp370/CanESM5/r3i1p1f1/monthly</a:t>
-            </a:r>
-          </a:p>
-          <a:p>
-            <a:r>
-              <a:rPr lang="en-US" altLang="ko-KR" sz="400" dirty="0">
-                <a:latin typeface="Pretendard Light" panose="02000403000000020004" pitchFamily="50" charset="-127"/>
-                <a:ea typeface="Pretendard Light" panose="02000403000000020004" pitchFamily="50" charset="-127"/>
-                <a:cs typeface="Pretendard Light" panose="02000403000000020004" pitchFamily="50" charset="-127"/>
-              </a:rPr>
-              <a:t>put -p thetao_*.nc</a:t>
-            </a:r>
-          </a:p>
-          <a:p>
-            <a:endParaRPr lang="en-US" altLang="ko-KR" sz="400" dirty="0">
-              <a:latin typeface="Pretendard Light" panose="02000403000000020004" pitchFamily="50" charset="-127"/>
-              <a:ea typeface="Pretendard Light" panose="02000403000000020004" pitchFamily="50" charset="-127"/>
-              <a:cs typeface="Pretendard Light" panose="02000403000000020004" pitchFamily="50" charset="-127"/>
-            </a:endParaRPr>
-          </a:p>
-          <a:p>
-            <a:r>
-              <a:rPr lang="en-US" altLang="ko-KR" sz="400" dirty="0">
-                <a:latin typeface="Pretendard Light" panose="02000403000000020004" pitchFamily="50" charset="-127"/>
-                <a:ea typeface="Pretendard Light" panose="02000403000000020004" pitchFamily="50" charset="-127"/>
-                <a:cs typeface="Pretendard Light" panose="02000403000000020004" pitchFamily="50" charset="-127"/>
-              </a:rPr>
-              <a:t># 9) EC-Earth3 r1</a:t>
-            </a:r>
-          </a:p>
-          <a:p>
-            <a:r>
-              <a:rPr lang="en-US" altLang="ko-KR" sz="400" dirty="0">
-                <a:latin typeface="Pretendard Light" panose="02000403000000020004" pitchFamily="50" charset="-127"/>
-                <a:ea typeface="Pretendard Light" panose="02000403000000020004" pitchFamily="50" charset="-127"/>
-                <a:cs typeface="Pretendard Light" panose="02000403000000020004" pitchFamily="50" charset="-127"/>
-              </a:rPr>
-              <a:t>cd /home/sanggyu1008/project/01_ENSO/01_data/01_raw/cmip6/ssp370/EC-Earth3/r1i1p1f1/monthly</a:t>
-            </a:r>
-          </a:p>
-          <a:p>
-            <a:r>
-              <a:rPr lang="en-US" altLang="ko-KR" sz="400" dirty="0">
-                <a:latin typeface="Pretendard Light" panose="02000403000000020004" pitchFamily="50" charset="-127"/>
-                <a:ea typeface="Pretendard Light" panose="02000403000000020004" pitchFamily="50" charset="-127"/>
-                <a:cs typeface="Pretendard Light" panose="02000403000000020004" pitchFamily="50" charset="-127"/>
-              </a:rPr>
-              <a:t>lcd /</a:t>
-            </a:r>
-            <a:r>
-              <a:rPr lang="en-US" altLang="ko-KR" sz="400" dirty="0" err="1">
-                <a:latin typeface="Pretendard Light" panose="02000403000000020004" pitchFamily="50" charset="-127"/>
-                <a:ea typeface="Pretendard Light" panose="02000403000000020004" pitchFamily="50" charset="-127"/>
-                <a:cs typeface="Pretendard Light" panose="02000403000000020004" pitchFamily="50" charset="-127"/>
-              </a:rPr>
-              <a:t>mnt</a:t>
-            </a:r>
-            <a:r>
-              <a:rPr lang="en-US" altLang="ko-KR" sz="400" dirty="0">
-                <a:latin typeface="Pretendard Light" panose="02000403000000020004" pitchFamily="50" charset="-127"/>
-                <a:ea typeface="Pretendard Light" panose="02000403000000020004" pitchFamily="50" charset="-127"/>
-                <a:cs typeface="Pretendard Light" panose="02000403000000020004" pitchFamily="50" charset="-127"/>
-              </a:rPr>
-              <a:t>/d/project/01_ENSO/01_data/01_raw/cmip6/ssp370/EC-Earth3/r1i1p1f1/monthly</a:t>
-            </a:r>
-          </a:p>
-          <a:p>
-            <a:r>
-              <a:rPr lang="en-US" altLang="ko-KR" sz="400" dirty="0">
-                <a:latin typeface="Pretendard Light" panose="02000403000000020004" pitchFamily="50" charset="-127"/>
-                <a:ea typeface="Pretendard Light" panose="02000403000000020004" pitchFamily="50" charset="-127"/>
-                <a:cs typeface="Pretendard Light" panose="02000403000000020004" pitchFamily="50" charset="-127"/>
-              </a:rPr>
-              <a:t>put -p thetao_*.nc</a:t>
-            </a:r>
-          </a:p>
-          <a:p>
-            <a:endParaRPr lang="en-US" altLang="ko-KR" sz="400" dirty="0">
-              <a:latin typeface="Pretendard Light" panose="02000403000000020004" pitchFamily="50" charset="-127"/>
-              <a:ea typeface="Pretendard Light" panose="02000403000000020004" pitchFamily="50" charset="-127"/>
-              <a:cs typeface="Pretendard Light" panose="02000403000000020004" pitchFamily="50" charset="-127"/>
-            </a:endParaRPr>
-          </a:p>
-          <a:p>
-            <a:r>
-              <a:rPr lang="en-US" altLang="ko-KR" sz="400" dirty="0">
-                <a:latin typeface="Pretendard Light" panose="02000403000000020004" pitchFamily="50" charset="-127"/>
-                <a:ea typeface="Pretendard Light" panose="02000403000000020004" pitchFamily="50" charset="-127"/>
-                <a:cs typeface="Pretendard Light" panose="02000403000000020004" pitchFamily="50" charset="-127"/>
-              </a:rPr>
-              <a:t># 10) IPSL-CM5A2-INCA r1</a:t>
-            </a:r>
-          </a:p>
-          <a:p>
-            <a:r>
-              <a:rPr lang="en-US" altLang="ko-KR" sz="400" dirty="0">
-                <a:latin typeface="Pretendard Light" panose="02000403000000020004" pitchFamily="50" charset="-127"/>
-                <a:ea typeface="Pretendard Light" panose="02000403000000020004" pitchFamily="50" charset="-127"/>
-                <a:cs typeface="Pretendard Light" panose="02000403000000020004" pitchFamily="50" charset="-127"/>
-              </a:rPr>
-              <a:t>cd /home/sanggyu1008/project/01_ENSO/01_data/01_raw/cmip6/ssp370/IPSL-CM5A2-INCA/r1i1p1f1/monthly</a:t>
-            </a:r>
-          </a:p>
-          <a:p>
-            <a:r>
-              <a:rPr lang="en-US" altLang="ko-KR" sz="400" dirty="0">
-                <a:latin typeface="Pretendard Light" panose="02000403000000020004" pitchFamily="50" charset="-127"/>
-                <a:ea typeface="Pretendard Light" panose="02000403000000020004" pitchFamily="50" charset="-127"/>
-                <a:cs typeface="Pretendard Light" panose="02000403000000020004" pitchFamily="50" charset="-127"/>
-              </a:rPr>
-              <a:t>lcd /</a:t>
-            </a:r>
-            <a:r>
-              <a:rPr lang="en-US" altLang="ko-KR" sz="400" dirty="0" err="1">
-                <a:latin typeface="Pretendard Light" panose="02000403000000020004" pitchFamily="50" charset="-127"/>
-                <a:ea typeface="Pretendard Light" panose="02000403000000020004" pitchFamily="50" charset="-127"/>
-                <a:cs typeface="Pretendard Light" panose="02000403000000020004" pitchFamily="50" charset="-127"/>
-              </a:rPr>
-              <a:t>mnt</a:t>
-            </a:r>
-            <a:r>
-              <a:rPr lang="en-US" altLang="ko-KR" sz="400" dirty="0">
-                <a:latin typeface="Pretendard Light" panose="02000403000000020004" pitchFamily="50" charset="-127"/>
-                <a:ea typeface="Pretendard Light" panose="02000403000000020004" pitchFamily="50" charset="-127"/>
-                <a:cs typeface="Pretendard Light" panose="02000403000000020004" pitchFamily="50" charset="-127"/>
-              </a:rPr>
-              <a:t>/d/project/01_ENSO/01_data/01_raw/cmip6/ssp370/IPSL-CM5A2-INCA/r1i1p1f1/monthly</a:t>
-            </a:r>
-          </a:p>
-          <a:p>
-            <a:r>
-              <a:rPr lang="en-US" altLang="ko-KR" sz="400" dirty="0">
-                <a:latin typeface="Pretendard Light" panose="02000403000000020004" pitchFamily="50" charset="-127"/>
-                <a:ea typeface="Pretendard Light" panose="02000403000000020004" pitchFamily="50" charset="-127"/>
-                <a:cs typeface="Pretendard Light" panose="02000403000000020004" pitchFamily="50" charset="-127"/>
-              </a:rPr>
-              <a:t>put -p thetao_*.nc</a:t>
-            </a:r>
-          </a:p>
-          <a:p>
-            <a:endParaRPr lang="en-US" altLang="ko-KR" sz="400" dirty="0">
-              <a:latin typeface="Pretendard Light" panose="02000403000000020004" pitchFamily="50" charset="-127"/>
-              <a:ea typeface="Pretendard Light" panose="02000403000000020004" pitchFamily="50" charset="-127"/>
-              <a:cs typeface="Pretendard Light" panose="02000403000000020004" pitchFamily="50" charset="-127"/>
-            </a:endParaRPr>
-          </a:p>
-          <a:p>
-            <a:r>
-              <a:rPr lang="en-US" altLang="ko-KR" sz="400" dirty="0">
-                <a:latin typeface="Pretendard Light" panose="02000403000000020004" pitchFamily="50" charset="-127"/>
-                <a:ea typeface="Pretendard Light" panose="02000403000000020004" pitchFamily="50" charset="-127"/>
-                <a:cs typeface="Pretendard Light" panose="02000403000000020004" pitchFamily="50" charset="-127"/>
-              </a:rPr>
-              <a:t># 11) IPSL-CM6A-LR r1</a:t>
-            </a:r>
-          </a:p>
-          <a:p>
-            <a:r>
-              <a:rPr lang="en-US" altLang="ko-KR" sz="400" dirty="0">
-                <a:latin typeface="Pretendard Light" panose="02000403000000020004" pitchFamily="50" charset="-127"/>
-                <a:ea typeface="Pretendard Light" panose="02000403000000020004" pitchFamily="50" charset="-127"/>
-                <a:cs typeface="Pretendard Light" panose="02000403000000020004" pitchFamily="50" charset="-127"/>
-              </a:rPr>
-              <a:t>cd /home/sanggyu1008/project/01_ENSO/01_data/01_raw/cmip6/ssp370/IPSL-CM6A-LR/r1i1p1f1/monthly</a:t>
-            </a:r>
-          </a:p>
-          <a:p>
-            <a:r>
-              <a:rPr lang="en-US" altLang="ko-KR" sz="400" dirty="0">
-                <a:latin typeface="Pretendard Light" panose="02000403000000020004" pitchFamily="50" charset="-127"/>
-                <a:ea typeface="Pretendard Light" panose="02000403000000020004" pitchFamily="50" charset="-127"/>
-                <a:cs typeface="Pretendard Light" panose="02000403000000020004" pitchFamily="50" charset="-127"/>
-              </a:rPr>
-              <a:t>lcd /</a:t>
-            </a:r>
-            <a:r>
-              <a:rPr lang="en-US" altLang="ko-KR" sz="400" dirty="0" err="1">
-                <a:latin typeface="Pretendard Light" panose="02000403000000020004" pitchFamily="50" charset="-127"/>
-                <a:ea typeface="Pretendard Light" panose="02000403000000020004" pitchFamily="50" charset="-127"/>
-                <a:cs typeface="Pretendard Light" panose="02000403000000020004" pitchFamily="50" charset="-127"/>
-              </a:rPr>
-              <a:t>mnt</a:t>
-            </a:r>
-            <a:r>
-              <a:rPr lang="en-US" altLang="ko-KR" sz="400" dirty="0">
-                <a:latin typeface="Pretendard Light" panose="02000403000000020004" pitchFamily="50" charset="-127"/>
-                <a:ea typeface="Pretendard Light" panose="02000403000000020004" pitchFamily="50" charset="-127"/>
-                <a:cs typeface="Pretendard Light" panose="02000403000000020004" pitchFamily="50" charset="-127"/>
-              </a:rPr>
-              <a:t>/d/project/01_ENSO/01_data/01_raw/cmip6/ssp370/IPSL-CM6A-LR/r1i1p1f1/monthly</a:t>
-            </a:r>
-          </a:p>
-          <a:p>
-            <a:r>
-              <a:rPr lang="en-US" altLang="ko-KR" sz="400" dirty="0">
-                <a:latin typeface="Pretendard Light" panose="02000403000000020004" pitchFamily="50" charset="-127"/>
-                <a:ea typeface="Pretendard Light" panose="02000403000000020004" pitchFamily="50" charset="-127"/>
-                <a:cs typeface="Pretendard Light" panose="02000403000000020004" pitchFamily="50" charset="-127"/>
-              </a:rPr>
-              <a:t>put -p thetao_*.nc</a:t>
-            </a:r>
-          </a:p>
-          <a:p>
-            <a:endParaRPr lang="en-US" altLang="ko-KR" sz="400" dirty="0">
-              <a:latin typeface="Pretendard Light" panose="02000403000000020004" pitchFamily="50" charset="-127"/>
-              <a:ea typeface="Pretendard Light" panose="02000403000000020004" pitchFamily="50" charset="-127"/>
-              <a:cs typeface="Pretendard Light" panose="02000403000000020004" pitchFamily="50" charset="-127"/>
-            </a:endParaRPr>
-          </a:p>
-          <a:p>
-            <a:r>
-              <a:rPr lang="en-US" altLang="ko-KR" sz="400" dirty="0">
-                <a:latin typeface="Pretendard Light" panose="02000403000000020004" pitchFamily="50" charset="-127"/>
-                <a:ea typeface="Pretendard Light" panose="02000403000000020004" pitchFamily="50" charset="-127"/>
-                <a:cs typeface="Pretendard Light" panose="02000403000000020004" pitchFamily="50" charset="-127"/>
-              </a:rPr>
-              <a:t># 12) IPSL-CM6A-LR r2</a:t>
-            </a:r>
-          </a:p>
-          <a:p>
-            <a:r>
-              <a:rPr lang="en-US" altLang="ko-KR" sz="400" dirty="0">
-                <a:latin typeface="Pretendard Light" panose="02000403000000020004" pitchFamily="50" charset="-127"/>
-                <a:ea typeface="Pretendard Light" panose="02000403000000020004" pitchFamily="50" charset="-127"/>
-                <a:cs typeface="Pretendard Light" panose="02000403000000020004" pitchFamily="50" charset="-127"/>
-              </a:rPr>
-              <a:t>cd /home/sanggyu1008/project/01_ENSO/01_data/01_raw/cmip6/ssp370/IPSL-CM6A-LR/r2i1p1f1/monthly</a:t>
-            </a:r>
-          </a:p>
-          <a:p>
-            <a:r>
-              <a:rPr lang="en-US" altLang="ko-KR" sz="400" dirty="0">
-                <a:latin typeface="Pretendard Light" panose="02000403000000020004" pitchFamily="50" charset="-127"/>
-                <a:ea typeface="Pretendard Light" panose="02000403000000020004" pitchFamily="50" charset="-127"/>
-                <a:cs typeface="Pretendard Light" panose="02000403000000020004" pitchFamily="50" charset="-127"/>
-              </a:rPr>
-              <a:t>lcd /</a:t>
-            </a:r>
-            <a:r>
-              <a:rPr lang="en-US" altLang="ko-KR" sz="400" dirty="0" err="1">
-                <a:latin typeface="Pretendard Light" panose="02000403000000020004" pitchFamily="50" charset="-127"/>
-                <a:ea typeface="Pretendard Light" panose="02000403000000020004" pitchFamily="50" charset="-127"/>
-                <a:cs typeface="Pretendard Light" panose="02000403000000020004" pitchFamily="50" charset="-127"/>
-              </a:rPr>
-              <a:t>mnt</a:t>
-            </a:r>
-            <a:r>
-              <a:rPr lang="en-US" altLang="ko-KR" sz="400" dirty="0">
-                <a:latin typeface="Pretendard Light" panose="02000403000000020004" pitchFamily="50" charset="-127"/>
-                <a:ea typeface="Pretendard Light" panose="02000403000000020004" pitchFamily="50" charset="-127"/>
-                <a:cs typeface="Pretendard Light" panose="02000403000000020004" pitchFamily="50" charset="-127"/>
-              </a:rPr>
-              <a:t>/d/project/01_ENSO/01_data/01_raw/cmip6/ssp370/IPSL-CM6A-LR/r2i1p1f1/monthly</a:t>
-            </a:r>
-          </a:p>
-          <a:p>
-            <a:r>
-              <a:rPr lang="en-US" altLang="ko-KR" sz="400" dirty="0">
-                <a:latin typeface="Pretendard Light" panose="02000403000000020004" pitchFamily="50" charset="-127"/>
-                <a:ea typeface="Pretendard Light" panose="02000403000000020004" pitchFamily="50" charset="-127"/>
-                <a:cs typeface="Pretendard Light" panose="02000403000000020004" pitchFamily="50" charset="-127"/>
-              </a:rPr>
-              <a:t>put -p thetao_*.nc</a:t>
-            </a:r>
-          </a:p>
-          <a:p>
-            <a:endParaRPr lang="en-US" altLang="ko-KR" sz="400" dirty="0">
-              <a:latin typeface="Pretendard Light" panose="02000403000000020004" pitchFamily="50" charset="-127"/>
-              <a:ea typeface="Pretendard Light" panose="02000403000000020004" pitchFamily="50" charset="-127"/>
-              <a:cs typeface="Pretendard Light" panose="02000403000000020004" pitchFamily="50" charset="-127"/>
-            </a:endParaRPr>
-          </a:p>
-          <a:p>
-            <a:r>
-              <a:rPr lang="en-US" altLang="ko-KR" sz="400" dirty="0">
-                <a:latin typeface="Pretendard Light" panose="02000403000000020004" pitchFamily="50" charset="-127"/>
-                <a:ea typeface="Pretendard Light" panose="02000403000000020004" pitchFamily="50" charset="-127"/>
-                <a:cs typeface="Pretendard Light" panose="02000403000000020004" pitchFamily="50" charset="-127"/>
-              </a:rPr>
-              <a:t># 13) IPSL-CM6A-LR r3</a:t>
-            </a:r>
-          </a:p>
-          <a:p>
-            <a:r>
-              <a:rPr lang="en-US" altLang="ko-KR" sz="400" dirty="0">
-                <a:latin typeface="Pretendard Light" panose="02000403000000020004" pitchFamily="50" charset="-127"/>
-                <a:ea typeface="Pretendard Light" panose="02000403000000020004" pitchFamily="50" charset="-127"/>
-                <a:cs typeface="Pretendard Light" panose="02000403000000020004" pitchFamily="50" charset="-127"/>
-              </a:rPr>
-              <a:t>cd /home/sanggyu1008/project/01_ENSO/01_data/01_raw/cmip6/ssp370/IPSL-CM6A-LR/r3i1p1f1/monthly</a:t>
-            </a:r>
-          </a:p>
-          <a:p>
-            <a:r>
-              <a:rPr lang="en-US" altLang="ko-KR" sz="400" dirty="0">
-                <a:latin typeface="Pretendard Light" panose="02000403000000020004" pitchFamily="50" charset="-127"/>
-                <a:ea typeface="Pretendard Light" panose="02000403000000020004" pitchFamily="50" charset="-127"/>
-                <a:cs typeface="Pretendard Light" panose="02000403000000020004" pitchFamily="50" charset="-127"/>
-              </a:rPr>
-              <a:t>lcd /</a:t>
-            </a:r>
-            <a:r>
-              <a:rPr lang="en-US" altLang="ko-KR" sz="400" dirty="0" err="1">
-                <a:latin typeface="Pretendard Light" panose="02000403000000020004" pitchFamily="50" charset="-127"/>
-                <a:ea typeface="Pretendard Light" panose="02000403000000020004" pitchFamily="50" charset="-127"/>
-                <a:cs typeface="Pretendard Light" panose="02000403000000020004" pitchFamily="50" charset="-127"/>
-              </a:rPr>
-              <a:t>mnt</a:t>
-            </a:r>
-            <a:r>
-              <a:rPr lang="en-US" altLang="ko-KR" sz="400" dirty="0">
-                <a:latin typeface="Pretendard Light" panose="02000403000000020004" pitchFamily="50" charset="-127"/>
-                <a:ea typeface="Pretendard Light" panose="02000403000000020004" pitchFamily="50" charset="-127"/>
-                <a:cs typeface="Pretendard Light" panose="02000403000000020004" pitchFamily="50" charset="-127"/>
-              </a:rPr>
-              <a:t>/d/project/01_ENSO/01_data/01_raw/cmip6/ssp370/IPSL-CM6A-LR/r3i1p1f1/monthly</a:t>
-            </a:r>
-          </a:p>
-          <a:p>
-            <a:r>
-              <a:rPr lang="en-US" altLang="ko-KR" sz="400" dirty="0">
-                <a:latin typeface="Pretendard Light" panose="02000403000000020004" pitchFamily="50" charset="-127"/>
-                <a:ea typeface="Pretendard Light" panose="02000403000000020004" pitchFamily="50" charset="-127"/>
-                <a:cs typeface="Pretendard Light" panose="02000403000000020004" pitchFamily="50" charset="-127"/>
-              </a:rPr>
-              <a:t>put -p thetao_*.nc</a:t>
-            </a:r>
-          </a:p>
-          <a:p>
-            <a:endParaRPr lang="en-US" altLang="ko-KR" sz="400" dirty="0">
-              <a:latin typeface="Pretendard Light" panose="02000403000000020004" pitchFamily="50" charset="-127"/>
-              <a:ea typeface="Pretendard Light" panose="02000403000000020004" pitchFamily="50" charset="-127"/>
-              <a:cs typeface="Pretendard Light" panose="02000403000000020004" pitchFamily="50" charset="-127"/>
-            </a:endParaRPr>
-          </a:p>
-          <a:p>
-            <a:r>
-              <a:rPr lang="en-US" altLang="ko-KR" sz="400" dirty="0">
-                <a:latin typeface="Pretendard Light" panose="02000403000000020004" pitchFamily="50" charset="-127"/>
-                <a:ea typeface="Pretendard Light" panose="02000403000000020004" pitchFamily="50" charset="-127"/>
-                <a:cs typeface="Pretendard Light" panose="02000403000000020004" pitchFamily="50" charset="-127"/>
-              </a:rPr>
-              <a:t># 14) MIROC6 r1</a:t>
-            </a:r>
-          </a:p>
-          <a:p>
-            <a:r>
-              <a:rPr lang="en-US" altLang="ko-KR" sz="400" dirty="0">
-                <a:latin typeface="Pretendard Light" panose="02000403000000020004" pitchFamily="50" charset="-127"/>
-                <a:ea typeface="Pretendard Light" panose="02000403000000020004" pitchFamily="50" charset="-127"/>
-                <a:cs typeface="Pretendard Light" panose="02000403000000020004" pitchFamily="50" charset="-127"/>
-              </a:rPr>
-              <a:t>cd /home/sanggyu1008/project/01_ENSO/01_data/01_raw/cmip6/ssp370/MIROC6/r1i1p1f1/monthly</a:t>
-            </a:r>
-          </a:p>
-          <a:p>
-            <a:r>
-              <a:rPr lang="en-US" altLang="ko-KR" sz="400" dirty="0">
-                <a:latin typeface="Pretendard Light" panose="02000403000000020004" pitchFamily="50" charset="-127"/>
-                <a:ea typeface="Pretendard Light" panose="02000403000000020004" pitchFamily="50" charset="-127"/>
-                <a:cs typeface="Pretendard Light" panose="02000403000000020004" pitchFamily="50" charset="-127"/>
-              </a:rPr>
-              <a:t>lcd /</a:t>
-            </a:r>
-            <a:r>
-              <a:rPr lang="en-US" altLang="ko-KR" sz="400" dirty="0" err="1">
-                <a:latin typeface="Pretendard Light" panose="02000403000000020004" pitchFamily="50" charset="-127"/>
-                <a:ea typeface="Pretendard Light" panose="02000403000000020004" pitchFamily="50" charset="-127"/>
-                <a:cs typeface="Pretendard Light" panose="02000403000000020004" pitchFamily="50" charset="-127"/>
-              </a:rPr>
-              <a:t>mnt</a:t>
-            </a:r>
-            <a:r>
-              <a:rPr lang="en-US" altLang="ko-KR" sz="400" dirty="0">
-                <a:latin typeface="Pretendard Light" panose="02000403000000020004" pitchFamily="50" charset="-127"/>
-                <a:ea typeface="Pretendard Light" panose="02000403000000020004" pitchFamily="50" charset="-127"/>
-                <a:cs typeface="Pretendard Light" panose="02000403000000020004" pitchFamily="50" charset="-127"/>
-              </a:rPr>
-              <a:t>/d/project/01_ENSO/01_data/01_raw/cmip6/ssp370/MIROC6/r1i1p1f1/monthly</a:t>
-            </a:r>
-          </a:p>
-          <a:p>
-            <a:r>
-              <a:rPr lang="en-US" altLang="ko-KR" sz="400" dirty="0">
-                <a:latin typeface="Pretendard Light" panose="02000403000000020004" pitchFamily="50" charset="-127"/>
-                <a:ea typeface="Pretendard Light" panose="02000403000000020004" pitchFamily="50" charset="-127"/>
-                <a:cs typeface="Pretendard Light" panose="02000403000000020004" pitchFamily="50" charset="-127"/>
-              </a:rPr>
-              <a:t>put -p thetao_*.nc</a:t>
-            </a:r>
-          </a:p>
-          <a:p>
-            <a:endParaRPr lang="en-US" altLang="ko-KR" sz="400" dirty="0">
-              <a:latin typeface="Pretendard Light" panose="02000403000000020004" pitchFamily="50" charset="-127"/>
-              <a:ea typeface="Pretendard Light" panose="02000403000000020004" pitchFamily="50" charset="-127"/>
-              <a:cs typeface="Pretendard Light" panose="02000403000000020004" pitchFamily="50" charset="-127"/>
-            </a:endParaRPr>
-          </a:p>
-          <a:p>
-            <a:r>
-              <a:rPr lang="en-US" altLang="ko-KR" sz="400" dirty="0">
-                <a:latin typeface="Pretendard Light" panose="02000403000000020004" pitchFamily="50" charset="-127"/>
-                <a:ea typeface="Pretendard Light" panose="02000403000000020004" pitchFamily="50" charset="-127"/>
-                <a:cs typeface="Pretendard Light" panose="02000403000000020004" pitchFamily="50" charset="-127"/>
-              </a:rPr>
-              <a:t># 15) MRI-ESM2-0 r1</a:t>
-            </a:r>
-          </a:p>
-          <a:p>
-            <a:r>
-              <a:rPr lang="en-US" altLang="ko-KR" sz="400" dirty="0">
-                <a:latin typeface="Pretendard Light" panose="02000403000000020004" pitchFamily="50" charset="-127"/>
-                <a:ea typeface="Pretendard Light" panose="02000403000000020004" pitchFamily="50" charset="-127"/>
-                <a:cs typeface="Pretendard Light" panose="02000403000000020004" pitchFamily="50" charset="-127"/>
-              </a:rPr>
-              <a:t>cd /home/sanggyu1008/project/01_ENSO/01_data/01_raw/cmip6/ssp370/MRI-ESM2-0/r1i1p1f1/monthly</a:t>
-            </a:r>
-          </a:p>
-          <a:p>
-            <a:r>
-              <a:rPr lang="en-US" altLang="ko-KR" sz="400" dirty="0">
-                <a:latin typeface="Pretendard Light" panose="02000403000000020004" pitchFamily="50" charset="-127"/>
-                <a:ea typeface="Pretendard Light" panose="02000403000000020004" pitchFamily="50" charset="-127"/>
-                <a:cs typeface="Pretendard Light" panose="02000403000000020004" pitchFamily="50" charset="-127"/>
-              </a:rPr>
-              <a:t>lcd /</a:t>
-            </a:r>
-            <a:r>
-              <a:rPr lang="en-US" altLang="ko-KR" sz="400" dirty="0" err="1">
-                <a:latin typeface="Pretendard Light" panose="02000403000000020004" pitchFamily="50" charset="-127"/>
-                <a:ea typeface="Pretendard Light" panose="02000403000000020004" pitchFamily="50" charset="-127"/>
-                <a:cs typeface="Pretendard Light" panose="02000403000000020004" pitchFamily="50" charset="-127"/>
-              </a:rPr>
-              <a:t>mnt</a:t>
-            </a:r>
-            <a:r>
-              <a:rPr lang="en-US" altLang="ko-KR" sz="400" dirty="0">
-                <a:latin typeface="Pretendard Light" panose="02000403000000020004" pitchFamily="50" charset="-127"/>
-                <a:ea typeface="Pretendard Light" panose="02000403000000020004" pitchFamily="50" charset="-127"/>
-                <a:cs typeface="Pretendard Light" panose="02000403000000020004" pitchFamily="50" charset="-127"/>
-              </a:rPr>
-              <a:t>/d/project/01_ENSO/01_data/01_raw/cmip6/ssp370/MRI-ESM2-0/r1i1p1f1/monthly</a:t>
-            </a:r>
-          </a:p>
-          <a:p>
-            <a:r>
-              <a:rPr lang="en-US" altLang="ko-KR" sz="400" dirty="0">
-                <a:latin typeface="Pretendard Light" panose="02000403000000020004" pitchFamily="50" charset="-127"/>
-                <a:ea typeface="Pretendard Light" panose="02000403000000020004" pitchFamily="50" charset="-127"/>
-                <a:cs typeface="Pretendard Light" panose="02000403000000020004" pitchFamily="50" charset="-127"/>
-              </a:rPr>
-              <a:t>put -p thetao_*.nc</a:t>
-            </a:r>
-          </a:p>
-          <a:p>
-            <a:endParaRPr lang="en-US" altLang="ko-KR" sz="400" dirty="0">
-              <a:latin typeface="Pretendard Light" panose="02000403000000020004" pitchFamily="50" charset="-127"/>
-              <a:ea typeface="Pretendard Light" panose="02000403000000020004" pitchFamily="50" charset="-127"/>
-              <a:cs typeface="Pretendard Light" panose="02000403000000020004" pitchFamily="50" charset="-127"/>
-            </a:endParaRPr>
-          </a:p>
-          <a:p>
-            <a:r>
-              <a:rPr lang="en-US" altLang="ko-KR" sz="400" dirty="0">
-                <a:latin typeface="Pretendard Light" panose="02000403000000020004" pitchFamily="50" charset="-127"/>
-                <a:ea typeface="Pretendard Light" panose="02000403000000020004" pitchFamily="50" charset="-127"/>
-                <a:cs typeface="Pretendard Light" panose="02000403000000020004" pitchFamily="50" charset="-127"/>
-              </a:rPr>
-              <a:t># 16) MRI-ESM2-0 r2</a:t>
-            </a:r>
-          </a:p>
-          <a:p>
-            <a:r>
-              <a:rPr lang="en-US" altLang="ko-KR" sz="400" dirty="0">
-                <a:latin typeface="Pretendard Light" panose="02000403000000020004" pitchFamily="50" charset="-127"/>
-                <a:ea typeface="Pretendard Light" panose="02000403000000020004" pitchFamily="50" charset="-127"/>
-                <a:cs typeface="Pretendard Light" panose="02000403000000020004" pitchFamily="50" charset="-127"/>
-              </a:rPr>
-              <a:t>cd /home/sanggyu1008/project/01_ENSO/01_data/01_raw/cmip6/ssp370/MRI-ESM2-0/r2i1p1f1/monthly</a:t>
-            </a:r>
-          </a:p>
-          <a:p>
-            <a:r>
-              <a:rPr lang="en-US" altLang="ko-KR" sz="400" dirty="0">
-                <a:latin typeface="Pretendard Light" panose="02000403000000020004" pitchFamily="50" charset="-127"/>
-                <a:ea typeface="Pretendard Light" panose="02000403000000020004" pitchFamily="50" charset="-127"/>
-                <a:cs typeface="Pretendard Light" panose="02000403000000020004" pitchFamily="50" charset="-127"/>
-              </a:rPr>
-              <a:t>lcd /</a:t>
-            </a:r>
-            <a:r>
-              <a:rPr lang="en-US" altLang="ko-KR" sz="400" dirty="0" err="1">
-                <a:latin typeface="Pretendard Light" panose="02000403000000020004" pitchFamily="50" charset="-127"/>
-                <a:ea typeface="Pretendard Light" panose="02000403000000020004" pitchFamily="50" charset="-127"/>
-                <a:cs typeface="Pretendard Light" panose="02000403000000020004" pitchFamily="50" charset="-127"/>
-              </a:rPr>
-              <a:t>mnt</a:t>
-            </a:r>
-            <a:r>
-              <a:rPr lang="en-US" altLang="ko-KR" sz="400" dirty="0">
-                <a:latin typeface="Pretendard Light" panose="02000403000000020004" pitchFamily="50" charset="-127"/>
-                <a:ea typeface="Pretendard Light" panose="02000403000000020004" pitchFamily="50" charset="-127"/>
-                <a:cs typeface="Pretendard Light" panose="02000403000000020004" pitchFamily="50" charset="-127"/>
-              </a:rPr>
-              <a:t>/d/project/01_ENSO/01_data/01_raw/cmip6/ssp370/MRI-ESM2-0/r2i1p1f1/monthly</a:t>
-            </a:r>
-          </a:p>
-          <a:p>
-            <a:r>
-              <a:rPr lang="en-US" altLang="ko-KR" sz="400" dirty="0">
-                <a:latin typeface="Pretendard Light" panose="02000403000000020004" pitchFamily="50" charset="-127"/>
-                <a:ea typeface="Pretendard Light" panose="02000403000000020004" pitchFamily="50" charset="-127"/>
-                <a:cs typeface="Pretendard Light" panose="02000403000000020004" pitchFamily="50" charset="-127"/>
-              </a:rPr>
-              <a:t>put -p thetao_*.nc</a:t>
-            </a:r>
-          </a:p>
-          <a:p>
-            <a:endParaRPr lang="en-US" altLang="ko-KR" sz="400" dirty="0">
-              <a:latin typeface="Pretendard Light" panose="02000403000000020004" pitchFamily="50" charset="-127"/>
-              <a:ea typeface="Pretendard Light" panose="02000403000000020004" pitchFamily="50" charset="-127"/>
-              <a:cs typeface="Pretendard Light" panose="02000403000000020004" pitchFamily="50" charset="-127"/>
-            </a:endParaRPr>
-          </a:p>
-          <a:p>
-            <a:r>
-              <a:rPr lang="en-US" altLang="ko-KR" sz="400" dirty="0">
-                <a:latin typeface="Pretendard Light" panose="02000403000000020004" pitchFamily="50" charset="-127"/>
-                <a:ea typeface="Pretendard Light" panose="02000403000000020004" pitchFamily="50" charset="-127"/>
-                <a:cs typeface="Pretendard Light" panose="02000403000000020004" pitchFamily="50" charset="-127"/>
-              </a:rPr>
-              <a:t># 17) MRI-ESM2-0 r3</a:t>
-            </a:r>
-          </a:p>
-          <a:p>
-            <a:r>
-              <a:rPr lang="en-US" altLang="ko-KR" sz="400" dirty="0">
-                <a:latin typeface="Pretendard Light" panose="02000403000000020004" pitchFamily="50" charset="-127"/>
-                <a:ea typeface="Pretendard Light" panose="02000403000000020004" pitchFamily="50" charset="-127"/>
-                <a:cs typeface="Pretendard Light" panose="02000403000000020004" pitchFamily="50" charset="-127"/>
-              </a:rPr>
-              <a:t>cd /home/sanggyu1008/project/01_ENSO/01_data/01_raw/cmip6/ssp370/MRI-ESM2-0/r3i1p1f1/monthly</a:t>
-            </a:r>
-          </a:p>
-          <a:p>
-            <a:r>
-              <a:rPr lang="en-US" altLang="ko-KR" sz="400" dirty="0">
-                <a:latin typeface="Pretendard Light" panose="02000403000000020004" pitchFamily="50" charset="-127"/>
-                <a:ea typeface="Pretendard Light" panose="02000403000000020004" pitchFamily="50" charset="-127"/>
-                <a:cs typeface="Pretendard Light" panose="02000403000000020004" pitchFamily="50" charset="-127"/>
-              </a:rPr>
-              <a:t>lcd /</a:t>
-            </a:r>
-            <a:r>
-              <a:rPr lang="en-US" altLang="ko-KR" sz="400" dirty="0" err="1">
-                <a:latin typeface="Pretendard Light" panose="02000403000000020004" pitchFamily="50" charset="-127"/>
-                <a:ea typeface="Pretendard Light" panose="02000403000000020004" pitchFamily="50" charset="-127"/>
-                <a:cs typeface="Pretendard Light" panose="02000403000000020004" pitchFamily="50" charset="-127"/>
-              </a:rPr>
-              <a:t>mnt</a:t>
-            </a:r>
-            <a:r>
-              <a:rPr lang="en-US" altLang="ko-KR" sz="400" dirty="0">
-                <a:latin typeface="Pretendard Light" panose="02000403000000020004" pitchFamily="50" charset="-127"/>
-                <a:ea typeface="Pretendard Light" panose="02000403000000020004" pitchFamily="50" charset="-127"/>
-                <a:cs typeface="Pretendard Light" panose="02000403000000020004" pitchFamily="50" charset="-127"/>
-              </a:rPr>
-              <a:t>/d/project/01_ENSO/01_data/01_raw/cmip6/ssp370/MRI-ESM2-0/r3i1p1f1/monthly</a:t>
-            </a:r>
-          </a:p>
-          <a:p>
-            <a:r>
-              <a:rPr lang="en-US" altLang="ko-KR" sz="400" dirty="0">
-                <a:latin typeface="Pretendard Light" panose="02000403000000020004" pitchFamily="50" charset="-127"/>
-                <a:ea typeface="Pretendard Light" panose="02000403000000020004" pitchFamily="50" charset="-127"/>
-                <a:cs typeface="Pretendard Light" panose="02000403000000020004" pitchFamily="50" charset="-127"/>
-              </a:rPr>
-              <a:t>put -p thetao_*.nc</a:t>
-            </a:r>
-          </a:p>
-          <a:p>
-            <a:endParaRPr lang="en-US" altLang="ko-KR" sz="400" dirty="0">
-              <a:latin typeface="Pretendard Light" panose="02000403000000020004" pitchFamily="50" charset="-127"/>
-              <a:ea typeface="Pretendard Light" panose="02000403000000020004" pitchFamily="50" charset="-127"/>
-              <a:cs typeface="Pretendard Light" panose="02000403000000020004" pitchFamily="50" charset="-127"/>
-            </a:endParaRPr>
-          </a:p>
-          <a:p>
-            <a:r>
-              <a:rPr lang="en-US" altLang="ko-KR" sz="400" dirty="0">
-                <a:latin typeface="Pretendard Light" panose="02000403000000020004" pitchFamily="50" charset="-127"/>
-                <a:ea typeface="Pretendard Light" panose="02000403000000020004" pitchFamily="50" charset="-127"/>
-                <a:cs typeface="Pretendard Light" panose="02000403000000020004" pitchFamily="50" charset="-127"/>
-              </a:rPr>
-              <a:t>bye</a:t>
-            </a:r>
-          </a:p>
-        </p:txBody>
-      </p:sp>
-      <p:sp>
-        <p:nvSpPr>
-          <p:cNvPr id="2" name="TextBox 1">
-            <a:extLst>
-              <a:ext uri="{FF2B5EF4-FFF2-40B4-BE49-F238E27FC236}">
-                <a16:creationId xmlns:a16="http://schemas.microsoft.com/office/drawing/2014/main" id="{BAF8F6F1-B265-0FA2-0343-594ADB99EE99}"/>
-              </a:ext>
-            </a:extLst>
-          </p:cNvPr>
-          <p:cNvSpPr txBox="1"/>
-          <p:nvPr/>
-        </p:nvSpPr>
-        <p:spPr>
-          <a:xfrm>
-            <a:off x="571500" y="1210702"/>
-            <a:ext cx="2733675" cy="276999"/>
+            <a:off x="4444791" y="61014"/>
+            <a:ext cx="4222173" cy="2708434"/>
           </a:xfrm>
           <a:prstGeom prst="rect">
             <a:avLst/>
@@ -20177,28 +18255,164 @@
           </a:bodyPr>
           <a:lstStyle/>
           <a:p>
-            <a:pPr marL="171450" indent="-171450">
-              <a:buFont typeface="Arial" panose="020B0604020202020204" pitchFamily="34" charset="0"/>
-              <a:buChar char="•"/>
-            </a:pPr>
-            <a:r>
-              <a:rPr lang="en-US" altLang="ko-KR" sz="1200" dirty="0">
-                <a:latin typeface="Pretendard Light" panose="02000403000000020004" pitchFamily="50" charset="-127"/>
-                <a:ea typeface="Pretendard Light" panose="02000403000000020004" pitchFamily="50" charset="-127"/>
-                <a:cs typeface="Pretendard Light" panose="02000403000000020004" pitchFamily="50" charset="-127"/>
-              </a:rPr>
-              <a:t>CMIP6 </a:t>
-            </a:r>
-            <a:r>
-              <a:rPr lang="en-US" altLang="ko-KR" sz="1200" dirty="0" err="1">
-                <a:latin typeface="Pretendard Light" panose="02000403000000020004" pitchFamily="50" charset="-127"/>
-                <a:ea typeface="Pretendard Light" panose="02000403000000020004" pitchFamily="50" charset="-127"/>
-                <a:cs typeface="Pretendard Light" panose="02000403000000020004" pitchFamily="50" charset="-127"/>
-              </a:rPr>
-              <a:t>thetao</a:t>
-            </a:r>
-            <a:r>
-              <a:rPr lang="en-US" altLang="ko-KR" sz="1200" dirty="0">
+            <a:r>
+              <a:rPr lang="en-US" altLang="ko-KR" sz="1000" b="1" dirty="0">
+                <a:latin typeface="Pretendard Light" panose="02000403000000020004" pitchFamily="50" charset="-127"/>
+                <a:ea typeface="Pretendard Light" panose="02000403000000020004" pitchFamily="50" charset="-127"/>
+                <a:cs typeface="Pretendard Light" panose="02000403000000020004" pitchFamily="50" charset="-127"/>
+              </a:rPr>
+              <a:t>download_oras5.py</a:t>
+            </a:r>
+          </a:p>
+          <a:p>
+            <a:endParaRPr lang="en-US" altLang="ko-KR" sz="1000" dirty="0">
+              <a:latin typeface="Pretendard Light" panose="02000403000000020004" pitchFamily="50" charset="-127"/>
+              <a:ea typeface="Pretendard Light" panose="02000403000000020004" pitchFamily="50" charset="-127"/>
+              <a:cs typeface="Pretendard Light" panose="02000403000000020004" pitchFamily="50" charset="-127"/>
+            </a:endParaRPr>
+          </a:p>
+          <a:p>
+            <a:r>
+              <a:rPr lang="en-US" altLang="ko-KR" sz="1000" dirty="0">
+                <a:latin typeface="Pretendard Light" panose="02000403000000020004" pitchFamily="50" charset="-127"/>
+                <a:ea typeface="Pretendard Light" panose="02000403000000020004" pitchFamily="50" charset="-127"/>
+                <a:cs typeface="Pretendard Light" panose="02000403000000020004" pitchFamily="50" charset="-127"/>
+              </a:rPr>
+              <a:t># 2D + 3D </a:t>
+            </a:r>
+            <a:r>
+              <a:rPr lang="ko-KR" altLang="en-US" sz="1000" dirty="0">
+                <a:latin typeface="Pretendard Light" panose="02000403000000020004" pitchFamily="50" charset="-127"/>
+                <a:ea typeface="Pretendard Light" panose="02000403000000020004" pitchFamily="50" charset="-127"/>
+                <a:cs typeface="Pretendard Light" panose="02000403000000020004" pitchFamily="50" charset="-127"/>
+              </a:rPr>
+              <a:t>모두 다운로드</a:t>
+            </a:r>
+          </a:p>
+          <a:p>
+            <a:r>
+              <a:rPr lang="en-US" altLang="ko-KR" sz="1000" dirty="0">
+                <a:latin typeface="Pretendard Light" panose="02000403000000020004" pitchFamily="50" charset="-127"/>
+                <a:ea typeface="Pretendard Light" panose="02000403000000020004" pitchFamily="50" charset="-127"/>
+                <a:cs typeface="Pretendard Light" panose="02000403000000020004" pitchFamily="50" charset="-127"/>
+              </a:rPr>
+              <a:t>python download_oras5.py</a:t>
+            </a:r>
+          </a:p>
+          <a:p>
+            <a:endParaRPr lang="en-US" altLang="ko-KR" sz="1000" dirty="0">
+              <a:latin typeface="Pretendard Light" panose="02000403000000020004" pitchFamily="50" charset="-127"/>
+              <a:ea typeface="Pretendard Light" panose="02000403000000020004" pitchFamily="50" charset="-127"/>
+              <a:cs typeface="Pretendard Light" panose="02000403000000020004" pitchFamily="50" charset="-127"/>
+            </a:endParaRPr>
+          </a:p>
+          <a:p>
+            <a:r>
+              <a:rPr lang="en-US" altLang="ko-KR" sz="1000" dirty="0">
+                <a:latin typeface="Pretendard Light" panose="02000403000000020004" pitchFamily="50" charset="-127"/>
+                <a:ea typeface="Pretendard Light" panose="02000403000000020004" pitchFamily="50" charset="-127"/>
+                <a:cs typeface="Pretendard Light" panose="02000403000000020004" pitchFamily="50" charset="-127"/>
+              </a:rPr>
+              <a:t># 2D</a:t>
+            </a:r>
+            <a:r>
+              <a:rPr lang="ko-KR" altLang="en-US" sz="1000" dirty="0">
+                <a:latin typeface="Pretendard Light" panose="02000403000000020004" pitchFamily="50" charset="-127"/>
+                <a:ea typeface="Pretendard Light" panose="02000403000000020004" pitchFamily="50" charset="-127"/>
+                <a:cs typeface="Pretendard Light" panose="02000403000000020004" pitchFamily="50" charset="-127"/>
+              </a:rPr>
+              <a:t>만 다운로드</a:t>
+            </a:r>
+          </a:p>
+          <a:p>
+            <a:r>
+              <a:rPr lang="en-US" altLang="ko-KR" sz="1000" dirty="0">
+                <a:latin typeface="Pretendard Light" panose="02000403000000020004" pitchFamily="50" charset="-127"/>
+                <a:ea typeface="Pretendard Light" panose="02000403000000020004" pitchFamily="50" charset="-127"/>
+                <a:cs typeface="Pretendard Light" panose="02000403000000020004" pitchFamily="50" charset="-127"/>
+              </a:rPr>
+              <a:t>python download_oras5.py --kind 2d</a:t>
+            </a:r>
+          </a:p>
+          <a:p>
+            <a:endParaRPr lang="en-US" altLang="ko-KR" sz="1000" dirty="0">
+              <a:latin typeface="Pretendard Light" panose="02000403000000020004" pitchFamily="50" charset="-127"/>
+              <a:ea typeface="Pretendard Light" panose="02000403000000020004" pitchFamily="50" charset="-127"/>
+              <a:cs typeface="Pretendard Light" panose="02000403000000020004" pitchFamily="50" charset="-127"/>
+            </a:endParaRPr>
+          </a:p>
+          <a:p>
+            <a:r>
+              <a:rPr lang="en-US" altLang="ko-KR" sz="1000" dirty="0">
+                <a:latin typeface="Pretendard Light" panose="02000403000000020004" pitchFamily="50" charset="-127"/>
+                <a:ea typeface="Pretendard Light" panose="02000403000000020004" pitchFamily="50" charset="-127"/>
+                <a:cs typeface="Pretendard Light" panose="02000403000000020004" pitchFamily="50" charset="-127"/>
+              </a:rPr>
+              <a:t># 3D</a:t>
+            </a:r>
+            <a:r>
+              <a:rPr lang="ko-KR" altLang="en-US" sz="1000" dirty="0">
+                <a:latin typeface="Pretendard Light" panose="02000403000000020004" pitchFamily="50" charset="-127"/>
+                <a:ea typeface="Pretendard Light" panose="02000403000000020004" pitchFamily="50" charset="-127"/>
+                <a:cs typeface="Pretendard Light" panose="02000403000000020004" pitchFamily="50" charset="-127"/>
+              </a:rPr>
+              <a:t>만 다운로드</a:t>
+            </a:r>
+          </a:p>
+          <a:p>
+            <a:r>
+              <a:rPr lang="en-US" altLang="ko-KR" sz="1000" dirty="0">
+                <a:latin typeface="Pretendard Light" panose="02000403000000020004" pitchFamily="50" charset="-127"/>
+                <a:ea typeface="Pretendard Light" panose="02000403000000020004" pitchFamily="50" charset="-127"/>
+                <a:cs typeface="Pretendard Light" panose="02000403000000020004" pitchFamily="50" charset="-127"/>
+              </a:rPr>
+              <a:t>python download_oras5.py --kind 3d</a:t>
+            </a:r>
+          </a:p>
+          <a:p>
+            <a:endParaRPr lang="en-US" altLang="ko-KR" sz="1000" dirty="0">
+              <a:latin typeface="Pretendard Light" panose="02000403000000020004" pitchFamily="50" charset="-127"/>
+              <a:ea typeface="Pretendard Light" panose="02000403000000020004" pitchFamily="50" charset="-127"/>
+              <a:cs typeface="Pretendard Light" panose="02000403000000020004" pitchFamily="50" charset="-127"/>
+            </a:endParaRPr>
+          </a:p>
+          <a:p>
+            <a:r>
+              <a:rPr lang="en-US" altLang="ko-KR" sz="1000" dirty="0">
+                <a:latin typeface="Pretendard Light" panose="02000403000000020004" pitchFamily="50" charset="-127"/>
+                <a:ea typeface="Pretendard Light" panose="02000403000000020004" pitchFamily="50" charset="-127"/>
+                <a:cs typeface="Pretendard Light" panose="02000403000000020004" pitchFamily="50" charset="-127"/>
+              </a:rPr>
+              <a:t># </a:t>
+            </a:r>
+            <a:r>
+              <a:rPr lang="ko-KR" altLang="en-US" sz="1000" dirty="0">
+                <a:latin typeface="Pretendard Light" panose="02000403000000020004" pitchFamily="50" charset="-127"/>
+                <a:ea typeface="Pretendard Light" panose="02000403000000020004" pitchFamily="50" charset="-127"/>
+                <a:cs typeface="Pretendard Light" panose="02000403000000020004" pitchFamily="50" charset="-127"/>
+              </a:rPr>
+              <a:t>특정 변수만 다운로드</a:t>
+            </a:r>
+          </a:p>
+          <a:p>
+            <a:r>
+              <a:rPr lang="en-US" altLang="ko-KR" sz="1000" dirty="0">
+                <a:latin typeface="Pretendard Light" panose="02000403000000020004" pitchFamily="50" charset="-127"/>
+                <a:ea typeface="Pretendard Light" panose="02000403000000020004" pitchFamily="50" charset="-127"/>
+                <a:cs typeface="Pretendard Light" panose="02000403000000020004" pitchFamily="50" charset="-127"/>
+              </a:rPr>
+              <a:t>python download_oras5.py --variables </a:t>
+            </a:r>
+            <a:r>
+              <a:rPr lang="en-US" altLang="ko-KR" sz="1000" dirty="0" err="1">
+                <a:latin typeface="Pretendard Light" panose="02000403000000020004" pitchFamily="50" charset="-127"/>
+                <a:ea typeface="Pretendard Light" panose="02000403000000020004" pitchFamily="50" charset="-127"/>
+                <a:cs typeface="Pretendard Light" panose="02000403000000020004" pitchFamily="50" charset="-127"/>
+              </a:rPr>
+              <a:t>sea_surface_temperature</a:t>
+            </a:r>
+            <a:r>
+              <a:rPr lang="en-US" altLang="ko-KR" sz="1000" dirty="0">
                 <a:latin typeface="Pretendard Light" panose="02000403000000020004" pitchFamily="50" charset="-127"/>
                 <a:ea typeface="Pretendard Light" panose="02000403000000020004" pitchFamily="50" charset="-127"/>
                 <a:cs typeface="Pretendard Light" panose="02000403000000020004" pitchFamily="50" charset="-127"/>
@@ -20206,30 +18420,67 @@
               <a:t> </a:t>
             </a:r>
             <a:r>
-              <a:rPr lang="ko-KR" altLang="en-US" sz="1200" dirty="0">
-                <a:latin typeface="Pretendard Light" panose="02000403000000020004" pitchFamily="50" charset="-127"/>
-                <a:ea typeface="Pretendard Light" panose="02000403000000020004" pitchFamily="50" charset="-127"/>
-                <a:cs typeface="Pretendard Light" panose="02000403000000020004" pitchFamily="50" charset="-127"/>
-              </a:rPr>
-              <a:t>데이터 서버로 </a:t>
-            </a:r>
-            <a:r>
-              <a:rPr lang="en-US" altLang="ko-KR" sz="1200" dirty="0">
-                <a:latin typeface="Pretendard Light" panose="02000403000000020004" pitchFamily="50" charset="-127"/>
-                <a:ea typeface="Pretendard Light" panose="02000403000000020004" pitchFamily="50" charset="-127"/>
-                <a:cs typeface="Pretendard Light" panose="02000403000000020004" pitchFamily="50" charset="-127"/>
-              </a:rPr>
-              <a:t>sftp</a:t>
-            </a:r>
+              <a:rPr lang="en-US" altLang="ko-KR" sz="1000" dirty="0" err="1">
+                <a:latin typeface="Pretendard Light" panose="02000403000000020004" pitchFamily="50" charset="-127"/>
+                <a:ea typeface="Pretendard Light" panose="02000403000000020004" pitchFamily="50" charset="-127"/>
+                <a:cs typeface="Pretendard Light" panose="02000403000000020004" pitchFamily="50" charset="-127"/>
+              </a:rPr>
+              <a:t>zonal_velocity</a:t>
+            </a:r>
+            <a:endParaRPr lang="en-US" altLang="ko-KR" sz="1000" dirty="0">
+              <a:latin typeface="Pretendard Light" panose="02000403000000020004" pitchFamily="50" charset="-127"/>
+              <a:ea typeface="Pretendard Light" panose="02000403000000020004" pitchFamily="50" charset="-127"/>
+              <a:cs typeface="Pretendard Light" panose="02000403000000020004" pitchFamily="50" charset="-127"/>
+            </a:endParaRPr>
+          </a:p>
+          <a:p>
+            <a:endParaRPr lang="en-US" altLang="ko-KR" sz="1000" dirty="0">
+              <a:latin typeface="Pretendard Light" panose="02000403000000020004" pitchFamily="50" charset="-127"/>
+              <a:ea typeface="Pretendard Light" panose="02000403000000020004" pitchFamily="50" charset="-127"/>
+              <a:cs typeface="Pretendard Light" panose="02000403000000020004" pitchFamily="50" charset="-127"/>
+            </a:endParaRPr>
+          </a:p>
+          <a:p>
+            <a:r>
+              <a:rPr lang="en-US" altLang="ko-KR" sz="1000" dirty="0">
+                <a:latin typeface="Pretendard Light" panose="02000403000000020004" pitchFamily="50" charset="-127"/>
+                <a:ea typeface="Pretendard Light" panose="02000403000000020004" pitchFamily="50" charset="-127"/>
+                <a:cs typeface="Pretendard Light" panose="02000403000000020004" pitchFamily="50" charset="-127"/>
+              </a:rPr>
+              <a:t># </a:t>
+            </a:r>
+            <a:r>
+              <a:rPr lang="ko-KR" altLang="en-US" sz="1000" dirty="0">
+                <a:latin typeface="Pretendard Light" panose="02000403000000020004" pitchFamily="50" charset="-127"/>
+                <a:ea typeface="Pretendard Light" panose="02000403000000020004" pitchFamily="50" charset="-127"/>
+                <a:cs typeface="Pretendard Light" panose="02000403000000020004" pitchFamily="50" charset="-127"/>
+              </a:rPr>
+              <a:t>연도 범위 지정</a:t>
+            </a:r>
+          </a:p>
+          <a:p>
+            <a:r>
+              <a:rPr lang="en-US" altLang="ko-KR" sz="1000" dirty="0">
+                <a:latin typeface="Pretendard Light" panose="02000403000000020004" pitchFamily="50" charset="-127"/>
+                <a:ea typeface="Pretendard Light" panose="02000403000000020004" pitchFamily="50" charset="-127"/>
+                <a:cs typeface="Pretendard Light" panose="02000403000000020004" pitchFamily="50" charset="-127"/>
+              </a:rPr>
+              <a:t>python download_oras5.py --kind all --start-year 1958 --end-year 1978</a:t>
+            </a:r>
+            <a:endParaRPr lang="ko-KR" altLang="en-US" sz="1000" dirty="0">
+              <a:latin typeface="Pretendard Light" panose="02000403000000020004" pitchFamily="50" charset="-127"/>
+              <a:ea typeface="Pretendard Light" panose="02000403000000020004" pitchFamily="50" charset="-127"/>
+              <a:cs typeface="Pretendard Light" panose="02000403000000020004" pitchFamily="50" charset="-127"/>
+            </a:endParaRPr>
           </a:p>
         </p:txBody>
       </p:sp>
       <p:sp>
         <p:nvSpPr>
-          <p:cNvPr id="5" name="TextBox 4">
+          <p:cNvPr id="6" name="TextBox 5">
             <a:extLst>
               <a:ext uri="{FF2B5EF4-FFF2-40B4-BE49-F238E27FC236}">
-                <a16:creationId xmlns:a16="http://schemas.microsoft.com/office/drawing/2014/main" id="{4F20079D-0E90-3D07-4DC2-9143E1C3FBB8}"/>
+                <a16:creationId xmlns:a16="http://schemas.microsoft.com/office/drawing/2014/main" id="{379A52B5-0ADD-5FC6-A887-BA090F9C6184}"/>
               </a:ext>
             </a:extLst>
           </p:cNvPr>
@@ -20238,8 +18489,8 @@
         </p:nvSpPr>
         <p:spPr>
           <a:xfrm>
-            <a:off x="3305175" y="1210702"/>
-            <a:ext cx="2733675" cy="276999"/>
+            <a:off x="4444790" y="3011334"/>
+            <a:ext cx="4222173" cy="3785652"/>
           </a:xfrm>
           <a:prstGeom prst="rect">
             <a:avLst/>
@@ -20252,48 +18503,350 @@
           </a:bodyPr>
           <a:lstStyle/>
           <a:p>
-            <a:pPr marL="171450" indent="-171450">
-              <a:buFont typeface="Arial" panose="020B0604020202020204" pitchFamily="34" charset="0"/>
-              <a:buChar char="•"/>
-            </a:pPr>
-            <a:r>
-              <a:rPr lang="ko-KR" altLang="en-US" sz="1200" dirty="0">
-                <a:latin typeface="Pretendard Light" panose="02000403000000020004" pitchFamily="50" charset="-127"/>
-                <a:ea typeface="Pretendard Light" panose="02000403000000020004" pitchFamily="50" charset="-127"/>
-                <a:cs typeface="Pretendard Light" panose="02000403000000020004" pitchFamily="50" charset="-127"/>
-              </a:rPr>
-              <a:t>파일 내부 </a:t>
-            </a:r>
-            <a:r>
-              <a:rPr lang="ko-KR" altLang="en-US" sz="1200" dirty="0" err="1">
-                <a:latin typeface="Pretendard Light" panose="02000403000000020004" pitchFamily="50" charset="-127"/>
-                <a:ea typeface="Pretendard Light" panose="02000403000000020004" pitchFamily="50" charset="-127"/>
-                <a:cs typeface="Pretendard Light" panose="02000403000000020004" pitchFamily="50" charset="-127"/>
-              </a:rPr>
-              <a:t>변수명</a:t>
-            </a:r>
-            <a:r>
-              <a:rPr lang="ko-KR" altLang="en-US" sz="1200" dirty="0">
-                <a:latin typeface="Pretendard Light" panose="02000403000000020004" pitchFamily="50" charset="-127"/>
-                <a:ea typeface="Pretendard Light" panose="02000403000000020004" pitchFamily="50" charset="-127"/>
-                <a:cs typeface="Pretendard Light" panose="02000403000000020004" pitchFamily="50" charset="-127"/>
-              </a:rPr>
-              <a:t> 변경</a:t>
-            </a:r>
-            <a:endParaRPr lang="en-US" altLang="ko-KR" sz="1200" dirty="0">
+            <a:r>
+              <a:rPr lang="en-US" altLang="ko-KR" sz="1000" b="1" dirty="0">
+                <a:latin typeface="Pretendard Light" panose="02000403000000020004" pitchFamily="50" charset="-127"/>
+                <a:ea typeface="Pretendard Light" panose="02000403000000020004" pitchFamily="50" charset="-127"/>
+                <a:cs typeface="Pretendard Light" panose="02000403000000020004" pitchFamily="50" charset="-127"/>
+              </a:rPr>
+              <a:t>make_ohc300.py</a:t>
+            </a:r>
+          </a:p>
+          <a:p>
+            <a:endParaRPr lang="en-US" altLang="ko-KR" sz="1000" dirty="0">
               <a:latin typeface="Pretendard Light" panose="02000403000000020004" pitchFamily="50" charset="-127"/>
               <a:ea typeface="Pretendard Light" panose="02000403000000020004" pitchFamily="50" charset="-127"/>
               <a:cs typeface="Pretendard Light" panose="02000403000000020004" pitchFamily="50" charset="-127"/>
             </a:endParaRPr>
           </a:p>
+          <a:p>
+            <a:r>
+              <a:rPr lang="en-US" altLang="ko-KR" sz="1000" dirty="0">
+                <a:latin typeface="Pretendard Light" panose="02000403000000020004" pitchFamily="50" charset="-127"/>
+                <a:ea typeface="Pretendard Light" panose="02000403000000020004" pitchFamily="50" charset="-127"/>
+                <a:cs typeface="Pretendard Light" panose="02000403000000020004" pitchFamily="50" charset="-127"/>
+              </a:rPr>
+              <a:t># CMIP6 batch</a:t>
+            </a:r>
+          </a:p>
+          <a:p>
+            <a:r>
+              <a:rPr lang="en-US" altLang="ko-KR" sz="1000" dirty="0">
+                <a:latin typeface="Pretendard Light" panose="02000403000000020004" pitchFamily="50" charset="-127"/>
+                <a:ea typeface="Pretendard Light" panose="02000403000000020004" pitchFamily="50" charset="-127"/>
+                <a:cs typeface="Pretendard Light" panose="02000403000000020004" pitchFamily="50" charset="-127"/>
+              </a:rPr>
+              <a:t>python make_ohc300_merged.py cmip6 \</a:t>
+            </a:r>
+          </a:p>
+          <a:p>
+            <a:r>
+              <a:rPr lang="en-US" altLang="ko-KR" sz="1000" dirty="0">
+                <a:latin typeface="Pretendard Light" panose="02000403000000020004" pitchFamily="50" charset="-127"/>
+                <a:ea typeface="Pretendard Light" panose="02000403000000020004" pitchFamily="50" charset="-127"/>
+                <a:cs typeface="Pretendard Light" panose="02000403000000020004" pitchFamily="50" charset="-127"/>
+              </a:rPr>
+              <a:t>  --</a:t>
+            </a:r>
+            <a:r>
+              <a:rPr lang="en-US" altLang="ko-KR" sz="1000" dirty="0" err="1">
+                <a:latin typeface="Pretendard Light" panose="02000403000000020004" pitchFamily="50" charset="-127"/>
+                <a:ea typeface="Pretendard Light" panose="02000403000000020004" pitchFamily="50" charset="-127"/>
+                <a:cs typeface="Pretendard Light" panose="02000403000000020004" pitchFamily="50" charset="-127"/>
+              </a:rPr>
+              <a:t>inroot</a:t>
+            </a:r>
+            <a:r>
+              <a:rPr lang="en-US" altLang="ko-KR" sz="1000" dirty="0">
+                <a:latin typeface="Pretendard Light" panose="02000403000000020004" pitchFamily="50" charset="-127"/>
+                <a:ea typeface="Pretendard Light" panose="02000403000000020004" pitchFamily="50" charset="-127"/>
+                <a:cs typeface="Pretendard Light" panose="02000403000000020004" pitchFamily="50" charset="-127"/>
+              </a:rPr>
+              <a:t>  /home/sanggyu1008/project/01_ENSO/01_data/01_raw/cmip6/ssp370 \</a:t>
+            </a:r>
+          </a:p>
+          <a:p>
+            <a:r>
+              <a:rPr lang="en-US" altLang="ko-KR" sz="1000" dirty="0">
+                <a:latin typeface="Pretendard Light" panose="02000403000000020004" pitchFamily="50" charset="-127"/>
+                <a:ea typeface="Pretendard Light" panose="02000403000000020004" pitchFamily="50" charset="-127"/>
+                <a:cs typeface="Pretendard Light" panose="02000403000000020004" pitchFamily="50" charset="-127"/>
+              </a:rPr>
+              <a:t>  --outroot /home/sanggyu1008/project/01_ENSO/01_data/02_interim/cmip6/ssp370 \</a:t>
+            </a:r>
+          </a:p>
+          <a:p>
+            <a:r>
+              <a:rPr lang="en-US" altLang="ko-KR" sz="1000" dirty="0">
+                <a:latin typeface="Pretendard Light" panose="02000403000000020004" pitchFamily="50" charset="-127"/>
+                <a:ea typeface="Pretendard Light" panose="02000403000000020004" pitchFamily="50" charset="-127"/>
+                <a:cs typeface="Pretendard Light" panose="02000403000000020004" pitchFamily="50" charset="-127"/>
+              </a:rPr>
+              <a:t>  --</a:t>
+            </a:r>
+            <a:r>
+              <a:rPr lang="en-US" altLang="ko-KR" sz="1000" dirty="0" err="1">
+                <a:latin typeface="Pretendard Light" panose="02000403000000020004" pitchFamily="50" charset="-127"/>
+                <a:ea typeface="Pretendard Light" panose="02000403000000020004" pitchFamily="50" charset="-127"/>
+                <a:cs typeface="Pretendard Light" panose="02000403000000020004" pitchFamily="50" charset="-127"/>
+              </a:rPr>
+              <a:t>zmax</a:t>
+            </a:r>
+            <a:r>
+              <a:rPr lang="en-US" altLang="ko-KR" sz="1000" dirty="0">
+                <a:latin typeface="Pretendard Light" panose="02000403000000020004" pitchFamily="50" charset="-127"/>
+                <a:ea typeface="Pretendard Light" panose="02000403000000020004" pitchFamily="50" charset="-127"/>
+                <a:cs typeface="Pretendard Light" panose="02000403000000020004" pitchFamily="50" charset="-127"/>
+              </a:rPr>
+              <a:t> 300 \</a:t>
+            </a:r>
+          </a:p>
+          <a:p>
+            <a:r>
+              <a:rPr lang="en-US" altLang="ko-KR" sz="1000" dirty="0">
+                <a:latin typeface="Pretendard Light" panose="02000403000000020004" pitchFamily="50" charset="-127"/>
+                <a:ea typeface="Pretendard Light" panose="02000403000000020004" pitchFamily="50" charset="-127"/>
+                <a:cs typeface="Pretendard Light" panose="02000403000000020004" pitchFamily="50" charset="-127"/>
+              </a:rPr>
+              <a:t>  --rho0 1025 \</a:t>
+            </a:r>
+          </a:p>
+          <a:p>
+            <a:r>
+              <a:rPr lang="en-US" altLang="ko-KR" sz="1000" dirty="0">
+                <a:latin typeface="Pretendard Light" panose="02000403000000020004" pitchFamily="50" charset="-127"/>
+                <a:ea typeface="Pretendard Light" panose="02000403000000020004" pitchFamily="50" charset="-127"/>
+                <a:cs typeface="Pretendard Light" panose="02000403000000020004" pitchFamily="50" charset="-127"/>
+              </a:rPr>
+              <a:t>  --cp0 3992 \</a:t>
+            </a:r>
+          </a:p>
+          <a:p>
+            <a:r>
+              <a:rPr lang="en-US" altLang="ko-KR" sz="1000" dirty="0">
+                <a:latin typeface="Pretendard Light" panose="02000403000000020004" pitchFamily="50" charset="-127"/>
+                <a:ea typeface="Pretendard Light" panose="02000403000000020004" pitchFamily="50" charset="-127"/>
+                <a:cs typeface="Pretendard Light" panose="02000403000000020004" pitchFamily="50" charset="-127"/>
+              </a:rPr>
+              <a:t>  --to-</a:t>
+            </a:r>
+            <a:r>
+              <a:rPr lang="en-US" altLang="ko-KR" sz="1000" dirty="0" err="1">
+                <a:latin typeface="Pretendard Light" panose="02000403000000020004" pitchFamily="50" charset="-127"/>
+                <a:ea typeface="Pretendard Light" panose="02000403000000020004" pitchFamily="50" charset="-127"/>
+                <a:cs typeface="Pretendard Light" panose="02000403000000020004" pitchFamily="50" charset="-127"/>
+              </a:rPr>
+              <a:t>degC</a:t>
+            </a:r>
+            <a:r>
+              <a:rPr lang="en-US" altLang="ko-KR" sz="1000" dirty="0">
+                <a:latin typeface="Pretendard Light" panose="02000403000000020004" pitchFamily="50" charset="-127"/>
+                <a:ea typeface="Pretendard Light" panose="02000403000000020004" pitchFamily="50" charset="-127"/>
+                <a:cs typeface="Pretendard Light" panose="02000403000000020004" pitchFamily="50" charset="-127"/>
+              </a:rPr>
+              <a:t> \</a:t>
+            </a:r>
+          </a:p>
+          <a:p>
+            <a:r>
+              <a:rPr lang="en-US" altLang="ko-KR" sz="1000" dirty="0">
+                <a:latin typeface="Pretendard Light" panose="02000403000000020004" pitchFamily="50" charset="-127"/>
+                <a:ea typeface="Pretendard Light" panose="02000403000000020004" pitchFamily="50" charset="-127"/>
+                <a:cs typeface="Pretendard Light" panose="02000403000000020004" pitchFamily="50" charset="-127"/>
+              </a:rPr>
+              <a:t>  --time-chunk 12 \</a:t>
+            </a:r>
+          </a:p>
+          <a:p>
+            <a:r>
+              <a:rPr lang="en-US" altLang="ko-KR" sz="1000" dirty="0">
+                <a:latin typeface="Pretendard Light" panose="02000403000000020004" pitchFamily="50" charset="-127"/>
+                <a:ea typeface="Pretendard Light" panose="02000403000000020004" pitchFamily="50" charset="-127"/>
+                <a:cs typeface="Pretendard Light" panose="02000403000000020004" pitchFamily="50" charset="-127"/>
+              </a:rPr>
+              <a:t>  --mask-shallow</a:t>
+            </a:r>
+          </a:p>
+          <a:p>
+            <a:endParaRPr lang="en-US" altLang="ko-KR" sz="1000" dirty="0">
+              <a:latin typeface="Pretendard Light" panose="02000403000000020004" pitchFamily="50" charset="-127"/>
+              <a:ea typeface="Pretendard Light" panose="02000403000000020004" pitchFamily="50" charset="-127"/>
+              <a:cs typeface="Pretendard Light" panose="02000403000000020004" pitchFamily="50" charset="-127"/>
+            </a:endParaRPr>
+          </a:p>
+          <a:p>
+            <a:r>
+              <a:rPr lang="en-US" altLang="ko-KR" sz="1000" dirty="0">
+                <a:latin typeface="Pretendard Light" panose="02000403000000020004" pitchFamily="50" charset="-127"/>
+                <a:ea typeface="Pretendard Light" panose="02000403000000020004" pitchFamily="50" charset="-127"/>
+                <a:cs typeface="Pretendard Light" panose="02000403000000020004" pitchFamily="50" charset="-127"/>
+              </a:rPr>
+              <a:t># GODAS single file</a:t>
+            </a:r>
+          </a:p>
+          <a:p>
+            <a:r>
+              <a:rPr lang="en-US" altLang="ko-KR" sz="1000" dirty="0">
+                <a:latin typeface="Pretendard Light" panose="02000403000000020004" pitchFamily="50" charset="-127"/>
+                <a:ea typeface="Pretendard Light" panose="02000403000000020004" pitchFamily="50" charset="-127"/>
+                <a:cs typeface="Pretendard Light" panose="02000403000000020004" pitchFamily="50" charset="-127"/>
+              </a:rPr>
+              <a:t>python make_ohc300_merged.py </a:t>
+            </a:r>
+            <a:r>
+              <a:rPr lang="en-US" altLang="ko-KR" sz="1000" dirty="0" err="1">
+                <a:latin typeface="Pretendard Light" panose="02000403000000020004" pitchFamily="50" charset="-127"/>
+                <a:ea typeface="Pretendard Light" panose="02000403000000020004" pitchFamily="50" charset="-127"/>
+                <a:cs typeface="Pretendard Light" panose="02000403000000020004" pitchFamily="50" charset="-127"/>
+              </a:rPr>
+              <a:t>godas</a:t>
+            </a:r>
+            <a:r>
+              <a:rPr lang="en-US" altLang="ko-KR" sz="1000" dirty="0">
+                <a:latin typeface="Pretendard Light" panose="02000403000000020004" pitchFamily="50" charset="-127"/>
+                <a:ea typeface="Pretendard Light" panose="02000403000000020004" pitchFamily="50" charset="-127"/>
+                <a:cs typeface="Pretendard Light" panose="02000403000000020004" pitchFamily="50" charset="-127"/>
+              </a:rPr>
+              <a:t> \</a:t>
+            </a:r>
+          </a:p>
+          <a:p>
+            <a:r>
+              <a:rPr lang="en-US" altLang="ko-KR" sz="1000" dirty="0">
+                <a:latin typeface="Pretendard Light" panose="02000403000000020004" pitchFamily="50" charset="-127"/>
+                <a:ea typeface="Pretendard Light" panose="02000403000000020004" pitchFamily="50" charset="-127"/>
+                <a:cs typeface="Pretendard Light" panose="02000403000000020004" pitchFamily="50" charset="-127"/>
+              </a:rPr>
+              <a:t>  --base-</a:t>
+            </a:r>
+            <a:r>
+              <a:rPr lang="en-US" altLang="ko-KR" sz="1000" dirty="0" err="1">
+                <a:latin typeface="Pretendard Light" panose="02000403000000020004" pitchFamily="50" charset="-127"/>
+                <a:ea typeface="Pretendard Light" panose="02000403000000020004" pitchFamily="50" charset="-127"/>
+                <a:cs typeface="Pretendard Light" panose="02000403000000020004" pitchFamily="50" charset="-127"/>
+              </a:rPr>
+              <a:t>dir</a:t>
+            </a:r>
+            <a:r>
+              <a:rPr lang="en-US" altLang="ko-KR" sz="1000" dirty="0">
+                <a:latin typeface="Pretendard Light" panose="02000403000000020004" pitchFamily="50" charset="-127"/>
+                <a:ea typeface="Pretendard Light" panose="02000403000000020004" pitchFamily="50" charset="-127"/>
+                <a:cs typeface="Pretendard Light" panose="02000403000000020004" pitchFamily="50" charset="-127"/>
+              </a:rPr>
+              <a:t> /</a:t>
+            </a:r>
+            <a:r>
+              <a:rPr lang="en-US" altLang="ko-KR" sz="1000" dirty="0" err="1">
+                <a:latin typeface="Pretendard Light" panose="02000403000000020004" pitchFamily="50" charset="-127"/>
+                <a:ea typeface="Pretendard Light" panose="02000403000000020004" pitchFamily="50" charset="-127"/>
+                <a:cs typeface="Pretendard Light" panose="02000403000000020004" pitchFamily="50" charset="-127"/>
+              </a:rPr>
+              <a:t>mnt</a:t>
+            </a:r>
+            <a:r>
+              <a:rPr lang="en-US" altLang="ko-KR" sz="1000" dirty="0">
+                <a:latin typeface="Pretendard Light" panose="02000403000000020004" pitchFamily="50" charset="-127"/>
+                <a:ea typeface="Pretendard Light" panose="02000403000000020004" pitchFamily="50" charset="-127"/>
+                <a:cs typeface="Pretendard Light" panose="02000403000000020004" pitchFamily="50" charset="-127"/>
+              </a:rPr>
+              <a:t>/d/project/01_ENSO/01_data/01_raw/</a:t>
+            </a:r>
+            <a:r>
+              <a:rPr lang="en-US" altLang="ko-KR" sz="1000" dirty="0" err="1">
+                <a:latin typeface="Pretendard Light" panose="02000403000000020004" pitchFamily="50" charset="-127"/>
+                <a:ea typeface="Pretendard Light" panose="02000403000000020004" pitchFamily="50" charset="-127"/>
+                <a:cs typeface="Pretendard Light" panose="02000403000000020004" pitchFamily="50" charset="-127"/>
+              </a:rPr>
+              <a:t>godas</a:t>
+            </a:r>
+            <a:r>
+              <a:rPr lang="en-US" altLang="ko-KR" sz="1000" dirty="0">
+                <a:latin typeface="Pretendard Light" panose="02000403000000020004" pitchFamily="50" charset="-127"/>
+                <a:ea typeface="Pretendard Light" panose="02000403000000020004" pitchFamily="50" charset="-127"/>
+                <a:cs typeface="Pretendard Light" panose="02000403000000020004" pitchFamily="50" charset="-127"/>
+              </a:rPr>
+              <a:t> \</a:t>
+            </a:r>
+          </a:p>
+          <a:p>
+            <a:r>
+              <a:rPr lang="en-US" altLang="ko-KR" sz="1000" dirty="0">
+                <a:latin typeface="Pretendard Light" panose="02000403000000020004" pitchFamily="50" charset="-127"/>
+                <a:ea typeface="Pretendard Light" panose="02000403000000020004" pitchFamily="50" charset="-127"/>
+                <a:cs typeface="Pretendard Light" panose="02000403000000020004" pitchFamily="50" charset="-127"/>
+              </a:rPr>
+              <a:t>  --</a:t>
+            </a:r>
+            <a:r>
+              <a:rPr lang="en-US" altLang="ko-KR" sz="1000" dirty="0" err="1">
+                <a:latin typeface="Pretendard Light" panose="02000403000000020004" pitchFamily="50" charset="-127"/>
+                <a:ea typeface="Pretendard Light" panose="02000403000000020004" pitchFamily="50" charset="-127"/>
+                <a:cs typeface="Pretendard Light" panose="02000403000000020004" pitchFamily="50" charset="-127"/>
+              </a:rPr>
+              <a:t>zmax</a:t>
+            </a:r>
+            <a:r>
+              <a:rPr lang="en-US" altLang="ko-KR" sz="1000" dirty="0">
+                <a:latin typeface="Pretendard Light" panose="02000403000000020004" pitchFamily="50" charset="-127"/>
+                <a:ea typeface="Pretendard Light" panose="02000403000000020004" pitchFamily="50" charset="-127"/>
+                <a:cs typeface="Pretendard Light" panose="02000403000000020004" pitchFamily="50" charset="-127"/>
+              </a:rPr>
+              <a:t> 300 \</a:t>
+            </a:r>
+          </a:p>
+          <a:p>
+            <a:r>
+              <a:rPr lang="en-US" altLang="ko-KR" sz="1000" dirty="0">
+                <a:latin typeface="Pretendard Light" panose="02000403000000020004" pitchFamily="50" charset="-127"/>
+                <a:ea typeface="Pretendard Light" panose="02000403000000020004" pitchFamily="50" charset="-127"/>
+                <a:cs typeface="Pretendard Light" panose="02000403000000020004" pitchFamily="50" charset="-127"/>
+              </a:rPr>
+              <a:t>  --rho0 1025 \</a:t>
+            </a:r>
+          </a:p>
+          <a:p>
+            <a:r>
+              <a:rPr lang="en-US" altLang="ko-KR" sz="1000" dirty="0">
+                <a:latin typeface="Pretendard Light" panose="02000403000000020004" pitchFamily="50" charset="-127"/>
+                <a:ea typeface="Pretendard Light" panose="02000403000000020004" pitchFamily="50" charset="-127"/>
+                <a:cs typeface="Pretendard Light" panose="02000403000000020004" pitchFamily="50" charset="-127"/>
+              </a:rPr>
+              <a:t>  --cp0 3992 \</a:t>
+            </a:r>
+          </a:p>
+          <a:p>
+            <a:r>
+              <a:rPr lang="en-US" altLang="ko-KR" sz="1000" dirty="0">
+                <a:latin typeface="Pretendard Light" panose="02000403000000020004" pitchFamily="50" charset="-127"/>
+                <a:ea typeface="Pretendard Light" panose="02000403000000020004" pitchFamily="50" charset="-127"/>
+                <a:cs typeface="Pretendard Light" panose="02000403000000020004" pitchFamily="50" charset="-127"/>
+              </a:rPr>
+              <a:t>  --time-chunk 12 \</a:t>
+            </a:r>
+          </a:p>
+          <a:p>
+            <a:r>
+              <a:rPr lang="en-US" altLang="ko-KR" sz="1000" dirty="0">
+                <a:latin typeface="Pretendard Light" panose="02000403000000020004" pitchFamily="50" charset="-127"/>
+                <a:ea typeface="Pretendard Light" panose="02000403000000020004" pitchFamily="50" charset="-127"/>
+                <a:cs typeface="Pretendard Light" panose="02000403000000020004" pitchFamily="50" charset="-127"/>
+              </a:rPr>
+              <a:t>  --overwrite</a:t>
+            </a:r>
+            <a:endParaRPr lang="ko-KR" altLang="en-US" sz="1000" dirty="0">
+              <a:latin typeface="Pretendard Light" panose="02000403000000020004" pitchFamily="50" charset="-127"/>
+              <a:ea typeface="Pretendard Light" panose="02000403000000020004" pitchFamily="50" charset="-127"/>
+              <a:cs typeface="Pretendard Light" panose="02000403000000020004" pitchFamily="50" charset="-127"/>
+            </a:endParaRPr>
+          </a:p>
         </p:txBody>
       </p:sp>
       <p:sp>
         <p:nvSpPr>
-          <p:cNvPr id="9" name="TextBox 8">
+          <p:cNvPr id="7" name="TextBox 6">
             <a:extLst>
               <a:ext uri="{FF2B5EF4-FFF2-40B4-BE49-F238E27FC236}">
-                <a16:creationId xmlns:a16="http://schemas.microsoft.com/office/drawing/2014/main" id="{3F28C037-3ABC-08EB-73E5-AF33142C7A25}"/>
+                <a16:creationId xmlns:a16="http://schemas.microsoft.com/office/drawing/2014/main" id="{8C18DFE8-812C-0484-18F0-013E39B5F910}"/>
               </a:ext>
             </a:extLst>
           </p:cNvPr>
@@ -20302,8 +18855,8 @@
         </p:nvSpPr>
         <p:spPr>
           <a:xfrm>
-            <a:off x="3305174" y="1471910"/>
-            <a:ext cx="3057526" cy="246221"/>
+            <a:off x="8666964" y="61014"/>
+            <a:ext cx="2900366" cy="2246769"/>
           </a:xfrm>
           <a:prstGeom prst="rect">
             <a:avLst/>
@@ -20311,95 +18864,174 @@
           <a:noFill/>
         </p:spPr>
         <p:txBody>
-          <a:bodyPr wrap="square" numCol="1" rtlCol="0">
+          <a:bodyPr wrap="square" rtlCol="0">
             <a:spAutoFit/>
           </a:bodyPr>
           <a:lstStyle/>
           <a:p>
             <a:r>
-              <a:rPr lang="en-US" altLang="ko-KR" sz="1000" dirty="0" err="1">
-                <a:latin typeface="Pretendard Light" panose="02000403000000020004" pitchFamily="50" charset="-127"/>
-                <a:ea typeface="Pretendard Light" panose="02000403000000020004" pitchFamily="50" charset="-127"/>
-                <a:cs typeface="Pretendard Light" panose="02000403000000020004" pitchFamily="50" charset="-127"/>
-              </a:rPr>
-              <a:t>cdo</a:t>
-            </a:r>
-            <a:r>
-              <a:rPr lang="en-US" altLang="ko-KR" sz="1000" dirty="0">
-                <a:latin typeface="Pretendard Light" panose="02000403000000020004" pitchFamily="50" charset="-127"/>
-                <a:ea typeface="Pretendard Light" panose="02000403000000020004" pitchFamily="50" charset="-127"/>
-                <a:cs typeface="Pretendard Light" panose="02000403000000020004" pitchFamily="50" charset="-127"/>
-              </a:rPr>
-              <a:t> </a:t>
-            </a:r>
-            <a:r>
-              <a:rPr lang="en-US" altLang="ko-KR" sz="1000" dirty="0" err="1">
-                <a:latin typeface="Pretendard Light" panose="02000403000000020004" pitchFamily="50" charset="-127"/>
-                <a:ea typeface="Pretendard Light" panose="02000403000000020004" pitchFamily="50" charset="-127"/>
-                <a:cs typeface="Pretendard Light" panose="02000403000000020004" pitchFamily="50" charset="-127"/>
-              </a:rPr>
-              <a:t>chname</a:t>
-            </a:r>
-            <a:r>
-              <a:rPr lang="en-US" altLang="ko-KR" sz="1000" dirty="0">
-                <a:latin typeface="Pretendard Light" panose="02000403000000020004" pitchFamily="50" charset="-127"/>
-                <a:ea typeface="Pretendard Light" panose="02000403000000020004" pitchFamily="50" charset="-127"/>
-                <a:cs typeface="Pretendard Light" panose="02000403000000020004" pitchFamily="50" charset="-127"/>
-              </a:rPr>
-              <a:t>,</a:t>
-            </a:r>
-            <a:r>
-              <a:rPr lang="ko-KR" altLang="en-US" sz="1000" i="1" dirty="0">
-                <a:latin typeface="Pretendard Light" panose="02000403000000020004" pitchFamily="50" charset="-127"/>
-                <a:ea typeface="Pretendard Light" panose="02000403000000020004" pitchFamily="50" charset="-127"/>
-                <a:cs typeface="Pretendard Light" panose="02000403000000020004" pitchFamily="50" charset="-127"/>
-              </a:rPr>
-              <a:t>기존변수</a:t>
-            </a:r>
-            <a:r>
-              <a:rPr lang="en-US" altLang="ko-KR" sz="1000" dirty="0">
-                <a:latin typeface="Pretendard Light" panose="02000403000000020004" pitchFamily="50" charset="-127"/>
-                <a:ea typeface="Pretendard Light" panose="02000403000000020004" pitchFamily="50" charset="-127"/>
-                <a:cs typeface="Pretendard Light" panose="02000403000000020004" pitchFamily="50" charset="-127"/>
-              </a:rPr>
-              <a:t>,</a:t>
-            </a:r>
-            <a:r>
-              <a:rPr lang="ko-KR" altLang="en-US" sz="1000" i="1" dirty="0">
-                <a:latin typeface="Pretendard Light" panose="02000403000000020004" pitchFamily="50" charset="-127"/>
-                <a:ea typeface="Pretendard Light" panose="02000403000000020004" pitchFamily="50" charset="-127"/>
-                <a:cs typeface="Pretendard Light" panose="02000403000000020004" pitchFamily="50" charset="-127"/>
-              </a:rPr>
-              <a:t>변경변수 기존파일명</a:t>
-            </a:r>
-            <a:r>
-              <a:rPr lang="en-US" altLang="ko-KR" sz="1000" i="1" dirty="0">
-                <a:latin typeface="Pretendard Light" panose="02000403000000020004" pitchFamily="50" charset="-127"/>
-                <a:ea typeface="Pretendard Light" panose="02000403000000020004" pitchFamily="50" charset="-127"/>
-                <a:cs typeface="Pretendard Light" panose="02000403000000020004" pitchFamily="50" charset="-127"/>
-              </a:rPr>
-              <a:t>,</a:t>
-            </a:r>
-            <a:r>
-              <a:rPr lang="ko-KR" altLang="en-US" sz="1000" i="1" dirty="0">
-                <a:latin typeface="Pretendard Light" panose="02000403000000020004" pitchFamily="50" charset="-127"/>
-                <a:ea typeface="Pretendard Light" panose="02000403000000020004" pitchFamily="50" charset="-127"/>
-                <a:cs typeface="Pretendard Light" panose="02000403000000020004" pitchFamily="50" charset="-127"/>
-              </a:rPr>
-              <a:t>변경파일명</a:t>
-            </a:r>
-            <a:endParaRPr lang="en-US" altLang="ko-KR" sz="1000" i="1" dirty="0">
+              <a:rPr lang="en-US" altLang="ko-KR" sz="1000" b="1" dirty="0">
+                <a:latin typeface="Pretendard Light" panose="02000403000000020004" pitchFamily="50" charset="-127"/>
+                <a:ea typeface="Pretendard Light" panose="02000403000000020004" pitchFamily="50" charset="-127"/>
+                <a:cs typeface="Pretendard Light" panose="02000403000000020004" pitchFamily="50" charset="-127"/>
+              </a:rPr>
+              <a:t>qc.py</a:t>
+            </a:r>
+          </a:p>
+          <a:p>
+            <a:endParaRPr lang="en-US" altLang="ko-KR" sz="1000" dirty="0">
               <a:latin typeface="Pretendard Light" panose="02000403000000020004" pitchFamily="50" charset="-127"/>
               <a:ea typeface="Pretendard Light" panose="02000403000000020004" pitchFamily="50" charset="-127"/>
               <a:cs typeface="Pretendard Light" panose="02000403000000020004" pitchFamily="50" charset="-127"/>
             </a:endParaRPr>
+          </a:p>
+          <a:p>
+            <a:r>
+              <a:rPr lang="en-US" altLang="ko-KR" sz="1000" dirty="0">
+                <a:latin typeface="Pretendard Light" panose="02000403000000020004" pitchFamily="50" charset="-127"/>
+                <a:ea typeface="Pretendard Light" panose="02000403000000020004" pitchFamily="50" charset="-127"/>
+                <a:cs typeface="Pretendard Light" panose="02000403000000020004" pitchFamily="50" charset="-127"/>
+              </a:rPr>
+              <a:t># ERA5 basic QC</a:t>
+            </a:r>
+          </a:p>
+          <a:p>
+            <a:r>
+              <a:rPr lang="en-US" altLang="ko-KR" sz="1000" dirty="0">
+                <a:latin typeface="Pretendard Light" panose="02000403000000020004" pitchFamily="50" charset="-127"/>
+                <a:ea typeface="Pretendard Light" panose="02000403000000020004" pitchFamily="50" charset="-127"/>
+                <a:cs typeface="Pretendard Light" panose="02000403000000020004" pitchFamily="50" charset="-127"/>
+              </a:rPr>
+              <a:t>python qc.py --source era5 --check basic</a:t>
+            </a:r>
+          </a:p>
+          <a:p>
+            <a:endParaRPr lang="en-US" altLang="ko-KR" sz="1000" dirty="0">
+              <a:latin typeface="Pretendard Light" panose="02000403000000020004" pitchFamily="50" charset="-127"/>
+              <a:ea typeface="Pretendard Light" panose="02000403000000020004" pitchFamily="50" charset="-127"/>
+              <a:cs typeface="Pretendard Light" panose="02000403000000020004" pitchFamily="50" charset="-127"/>
+            </a:endParaRPr>
+          </a:p>
+          <a:p>
+            <a:r>
+              <a:rPr lang="en-US" altLang="ko-KR" sz="1000" dirty="0">
+                <a:latin typeface="Pretendard Light" panose="02000403000000020004" pitchFamily="50" charset="-127"/>
+                <a:ea typeface="Pretendard Light" panose="02000403000000020004" pitchFamily="50" charset="-127"/>
+                <a:cs typeface="Pretendard Light" panose="02000403000000020004" pitchFamily="50" charset="-127"/>
+              </a:rPr>
+              <a:t># GODAS basic + mask QC</a:t>
+            </a:r>
+          </a:p>
+          <a:p>
+            <a:r>
+              <a:rPr lang="en-US" altLang="ko-KR" sz="1000" dirty="0">
+                <a:latin typeface="Pretendard Light" panose="02000403000000020004" pitchFamily="50" charset="-127"/>
+                <a:ea typeface="Pretendard Light" panose="02000403000000020004" pitchFamily="50" charset="-127"/>
+                <a:cs typeface="Pretendard Light" panose="02000403000000020004" pitchFamily="50" charset="-127"/>
+              </a:rPr>
+              <a:t>python qc.py --source </a:t>
+            </a:r>
+            <a:r>
+              <a:rPr lang="en-US" altLang="ko-KR" sz="1000" dirty="0" err="1">
+                <a:latin typeface="Pretendard Light" panose="02000403000000020004" pitchFamily="50" charset="-127"/>
+                <a:ea typeface="Pretendard Light" panose="02000403000000020004" pitchFamily="50" charset="-127"/>
+                <a:cs typeface="Pretendard Light" panose="02000403000000020004" pitchFamily="50" charset="-127"/>
+              </a:rPr>
+              <a:t>godas</a:t>
+            </a:r>
+            <a:r>
+              <a:rPr lang="en-US" altLang="ko-KR" sz="1000" dirty="0">
+                <a:latin typeface="Pretendard Light" panose="02000403000000020004" pitchFamily="50" charset="-127"/>
+                <a:ea typeface="Pretendard Light" panose="02000403000000020004" pitchFamily="50" charset="-127"/>
+                <a:cs typeface="Pretendard Light" panose="02000403000000020004" pitchFamily="50" charset="-127"/>
+              </a:rPr>
+              <a:t> --check all</a:t>
+            </a:r>
+          </a:p>
+          <a:p>
+            <a:endParaRPr lang="en-US" altLang="ko-KR" sz="1000" dirty="0">
+              <a:latin typeface="Pretendard Light" panose="02000403000000020004" pitchFamily="50" charset="-127"/>
+              <a:ea typeface="Pretendard Light" panose="02000403000000020004" pitchFamily="50" charset="-127"/>
+              <a:cs typeface="Pretendard Light" panose="02000403000000020004" pitchFamily="50" charset="-127"/>
+            </a:endParaRPr>
+          </a:p>
+          <a:p>
+            <a:r>
+              <a:rPr lang="en-US" altLang="ko-KR" sz="1000" dirty="0">
+                <a:latin typeface="Pretendard Light" panose="02000403000000020004" pitchFamily="50" charset="-127"/>
+                <a:ea typeface="Pretendard Light" panose="02000403000000020004" pitchFamily="50" charset="-127"/>
+                <a:cs typeface="Pretendard Light" panose="02000403000000020004" pitchFamily="50" charset="-127"/>
+              </a:rPr>
+              <a:t># ORAS5 mask QC</a:t>
+            </a:r>
+            <a:r>
+              <a:rPr lang="ko-KR" altLang="en-US" sz="1000" dirty="0">
+                <a:latin typeface="Pretendard Light" panose="02000403000000020004" pitchFamily="50" charset="-127"/>
+                <a:ea typeface="Pretendard Light" panose="02000403000000020004" pitchFamily="50" charset="-127"/>
+                <a:cs typeface="Pretendard Light" panose="02000403000000020004" pitchFamily="50" charset="-127"/>
+              </a:rPr>
+              <a:t>만 실행</a:t>
+            </a:r>
+          </a:p>
+          <a:p>
+            <a:r>
+              <a:rPr lang="en-US" altLang="ko-KR" sz="1000" dirty="0">
+                <a:latin typeface="Pretendard Light" panose="02000403000000020004" pitchFamily="50" charset="-127"/>
+                <a:ea typeface="Pretendard Light" panose="02000403000000020004" pitchFamily="50" charset="-127"/>
+                <a:cs typeface="Pretendard Light" panose="02000403000000020004" pitchFamily="50" charset="-127"/>
+              </a:rPr>
+              <a:t>python qc.py --source oras5 --check mask</a:t>
+            </a:r>
+          </a:p>
+          <a:p>
+            <a:endParaRPr lang="en-US" altLang="ko-KR" sz="1000" dirty="0">
+              <a:latin typeface="Pretendard Light" panose="02000403000000020004" pitchFamily="50" charset="-127"/>
+              <a:ea typeface="Pretendard Light" panose="02000403000000020004" pitchFamily="50" charset="-127"/>
+              <a:cs typeface="Pretendard Light" panose="02000403000000020004" pitchFamily="50" charset="-127"/>
+            </a:endParaRPr>
+          </a:p>
+          <a:p>
+            <a:r>
+              <a:rPr lang="en-US" altLang="ko-KR" sz="1000" dirty="0">
+                <a:latin typeface="Pretendard Light" panose="02000403000000020004" pitchFamily="50" charset="-127"/>
+                <a:ea typeface="Pretendard Light" panose="02000403000000020004" pitchFamily="50" charset="-127"/>
+                <a:cs typeface="Pretendard Light" panose="02000403000000020004" pitchFamily="50" charset="-127"/>
+              </a:rPr>
+              <a:t># CMIP6 basic QC</a:t>
+            </a:r>
+          </a:p>
+          <a:p>
+            <a:r>
+              <a:rPr lang="en-US" altLang="ko-KR" sz="1000" dirty="0">
+                <a:latin typeface="Pretendard Light" panose="02000403000000020004" pitchFamily="50" charset="-127"/>
+                <a:ea typeface="Pretendard Light" panose="02000403000000020004" pitchFamily="50" charset="-127"/>
+                <a:cs typeface="Pretendard Light" panose="02000403000000020004" pitchFamily="50" charset="-127"/>
+              </a:rPr>
+              <a:t>python qc.py --source cmip6 --check basic /</a:t>
+            </a:r>
+            <a:r>
+              <a:rPr lang="en-US" altLang="ko-KR" sz="1000" dirty="0" err="1">
+                <a:latin typeface="Pretendard Light" panose="02000403000000020004" pitchFamily="50" charset="-127"/>
+                <a:ea typeface="Pretendard Light" panose="02000403000000020004" pitchFamily="50" charset="-127"/>
+                <a:cs typeface="Pretendard Light" panose="02000403000000020004" pitchFamily="50" charset="-127"/>
+              </a:rPr>
+              <a:t>mnt</a:t>
+            </a:r>
+            <a:r>
+              <a:rPr lang="en-US" altLang="ko-KR" sz="1000" dirty="0">
+                <a:latin typeface="Pretendard Light" panose="02000403000000020004" pitchFamily="50" charset="-127"/>
+                <a:ea typeface="Pretendard Light" panose="02000403000000020004" pitchFamily="50" charset="-127"/>
+                <a:cs typeface="Pretendard Light" panose="02000403000000020004" pitchFamily="50" charset="-127"/>
+              </a:rPr>
+              <a:t>/d/project/01_ENSO/01_data/01_raw/cmip6</a:t>
+            </a:r>
           </a:p>
         </p:txBody>
       </p:sp>
     </p:spTree>
     <p:extLst>
       <p:ext uri="{BB962C8B-B14F-4D97-AF65-F5344CB8AC3E}">
-        <p14:creationId xmlns:p14="http://schemas.microsoft.com/office/powerpoint/2010/main" val="2648290968"/>
+        <p14:creationId xmlns:p14="http://schemas.microsoft.com/office/powerpoint/2010/main" val="2301555528"/>
       </p:ext>
     </p:extLst>
   </p:cSld>
@@ -20409,7 +19041,7 @@
 </p:sld>
 </file>
 
-<file path=ppt/slides/slide8.xml><?xml version="1.0" encoding="utf-8"?>
+<file path=ppt/slides/slide7.xml><?xml version="1.0" encoding="utf-8"?>
 <p:sld xmlns:a="http://schemas.openxmlformats.org/drawingml/2006/main" xmlns:r="http://schemas.openxmlformats.org/officeDocument/2006/relationships" xmlns:p="http://schemas.openxmlformats.org/presentationml/2006/main">
   <p:cSld>
     <p:spTree>
@@ -20657,7 +19289,7 @@
             </a:pPr>
             <a:fld id="{00000000-1234-1234-1234-123412341234}" type="slidenum">
               <a:rPr lang="en-US" smtClean="0"/>
-              <a:t>8</a:t>
+              <a:t>7</a:t>
             </a:fld>
             <a:endParaRPr lang="en-US"/>
           </a:p>
@@ -20677,8 +19309,8 @@
         </p:nvSpPr>
         <p:spPr>
           <a:xfrm>
-            <a:off x="571500" y="1210702"/>
-            <a:ext cx="11049000" cy="2893100"/>
+            <a:off x="571498" y="1210702"/>
+            <a:ext cx="5773882" cy="2677656"/>
           </a:xfrm>
           <a:prstGeom prst="rect">
             <a:avLst/>
@@ -20691,18 +19323,32 @@
           </a:bodyPr>
           <a:lstStyle/>
           <a:p>
+            <a:pPr marL="285750" indent="-285750">
+              <a:buFont typeface="Arial" panose="020B0604020202020204" pitchFamily="34" charset="0"/>
+              <a:buChar char="•"/>
+            </a:pPr>
+            <a:r>
+              <a:rPr lang="en-US" altLang="ko-KR" sz="1200" dirty="0">
+                <a:latin typeface="Pretendard Light" panose="02000403000000020004" pitchFamily="50" charset="-127"/>
+                <a:ea typeface="Pretendard Light" panose="02000403000000020004" pitchFamily="50" charset="-127"/>
+                <a:cs typeface="Pretendard Light" panose="02000403000000020004" pitchFamily="50" charset="-127"/>
+              </a:rPr>
+              <a:t>Monthly</a:t>
+            </a:r>
+          </a:p>
+          <a:p>
             <a:pPr marL="342900" indent="-342900">
               <a:buAutoNum type="arabicPeriod"/>
             </a:pPr>
             <a:r>
-              <a:rPr lang="ko-KR" altLang="en-US" dirty="0">
+              <a:rPr lang="ko-KR" altLang="en-US" sz="1200" dirty="0">
                 <a:latin typeface="Pretendard Light" panose="02000403000000020004" pitchFamily="50" charset="-127"/>
                 <a:ea typeface="Pretendard Light" panose="02000403000000020004" pitchFamily="50" charset="-127"/>
                 <a:cs typeface="Pretendard Light" panose="02000403000000020004" pitchFamily="50" charset="-127"/>
               </a:rPr>
               <a:t>장기 추세 제거 </a:t>
             </a:r>
-            <a:endParaRPr lang="en-US" altLang="ko-KR" dirty="0">
+            <a:endParaRPr lang="en-US" altLang="ko-KR" sz="1200" dirty="0">
               <a:latin typeface="Pretendard Light" panose="02000403000000020004" pitchFamily="50" charset="-127"/>
               <a:ea typeface="Pretendard Light" panose="02000403000000020004" pitchFamily="50" charset="-127"/>
               <a:cs typeface="Pretendard Light" panose="02000403000000020004" pitchFamily="50" charset="-127"/>
@@ -20713,7 +19359,7 @@
               <a:buAutoNum type="arabicPeriod"/>
             </a:pPr>
             <a:r>
-              <a:rPr lang="ko-KR" altLang="en-US" dirty="0">
+              <a:rPr lang="ko-KR" altLang="en-US" sz="1200" dirty="0">
                 <a:latin typeface="Pretendard Light" panose="02000403000000020004" pitchFamily="50" charset="-127"/>
                 <a:ea typeface="Pretendard Light" panose="02000403000000020004" pitchFamily="50" charset="-127"/>
                 <a:cs typeface="Pretendard Light" panose="02000403000000020004" pitchFamily="50" charset="-127"/>
@@ -20721,7 +19367,7 @@
               <a:t>월별 </a:t>
             </a:r>
             <a:r>
-              <a:rPr lang="en-US" altLang="ko-KR" dirty="0">
+              <a:rPr lang="en-US" altLang="ko-KR" sz="1200" dirty="0">
                 <a:latin typeface="Pretendard Light" panose="02000403000000020004" pitchFamily="50" charset="-127"/>
                 <a:ea typeface="Pretendard Light" panose="02000403000000020004" pitchFamily="50" charset="-127"/>
                 <a:cs typeface="Pretendard Light" panose="02000403000000020004" pitchFamily="50" charset="-127"/>
@@ -20729,14 +19375,14 @@
               <a:t>Climatology </a:t>
             </a:r>
             <a:r>
-              <a:rPr lang="ko-KR" altLang="en-US" dirty="0">
+              <a:rPr lang="ko-KR" altLang="en-US" sz="1200" dirty="0">
                 <a:latin typeface="Pretendard Light" panose="02000403000000020004" pitchFamily="50" charset="-127"/>
                 <a:ea typeface="Pretendard Light" panose="02000403000000020004" pitchFamily="50" charset="-127"/>
                 <a:cs typeface="Pretendard Light" panose="02000403000000020004" pitchFamily="50" charset="-127"/>
               </a:rPr>
               <a:t>제거</a:t>
             </a:r>
-            <a:endParaRPr lang="en-US" altLang="ko-KR" dirty="0">
+            <a:endParaRPr lang="en-US" altLang="ko-KR" sz="1200" dirty="0">
               <a:latin typeface="Pretendard Light" panose="02000403000000020004" pitchFamily="50" charset="-127"/>
               <a:ea typeface="Pretendard Light" panose="02000403000000020004" pitchFamily="50" charset="-127"/>
               <a:cs typeface="Pretendard Light" panose="02000403000000020004" pitchFamily="50" charset="-127"/>
@@ -20747,28 +19393,28 @@
               <a:buAutoNum type="arabicPeriod"/>
             </a:pPr>
             <a:r>
-              <a:rPr lang="ko-KR" altLang="en-US" dirty="0">
+              <a:rPr lang="ko-KR" altLang="en-US" sz="1200" dirty="0">
                 <a:latin typeface="Pretendard Light" panose="02000403000000020004" pitchFamily="50" charset="-127"/>
                 <a:ea typeface="Pretendard Light" panose="02000403000000020004" pitchFamily="50" charset="-127"/>
                 <a:cs typeface="Pretendard Light" panose="02000403000000020004" pitchFamily="50" charset="-127"/>
               </a:rPr>
               <a:t>재격자화 </a:t>
             </a:r>
-            <a:endParaRPr lang="en-US" altLang="ko-KR" dirty="0">
+            <a:endParaRPr lang="en-US" altLang="ko-KR" sz="1200" dirty="0">
               <a:latin typeface="Pretendard Light" panose="02000403000000020004" pitchFamily="50" charset="-127"/>
               <a:ea typeface="Pretendard Light" panose="02000403000000020004" pitchFamily="50" charset="-127"/>
               <a:cs typeface="Pretendard Light" panose="02000403000000020004" pitchFamily="50" charset="-127"/>
             </a:endParaRPr>
           </a:p>
           <a:p>
-            <a:endParaRPr lang="en-US" altLang="ko-KR" dirty="0">
+            <a:endParaRPr lang="en-US" altLang="ko-KR" sz="1200" dirty="0">
               <a:latin typeface="Pretendard Light" panose="02000403000000020004" pitchFamily="50" charset="-127"/>
               <a:ea typeface="Pretendard Light" panose="02000403000000020004" pitchFamily="50" charset="-127"/>
               <a:cs typeface="Pretendard Light" panose="02000403000000020004" pitchFamily="50" charset="-127"/>
             </a:endParaRPr>
           </a:p>
           <a:p>
-            <a:endParaRPr lang="en-US" altLang="ko-KR" dirty="0">
+            <a:endParaRPr lang="en-US" altLang="ko-KR" sz="1200" dirty="0">
               <a:latin typeface="Pretendard Light" panose="02000403000000020004" pitchFamily="50" charset="-127"/>
               <a:ea typeface="Pretendard Light" panose="02000403000000020004" pitchFamily="50" charset="-127"/>
               <a:cs typeface="Pretendard Light" panose="02000403000000020004" pitchFamily="50" charset="-127"/>
@@ -20776,33 +19422,59 @@
           </a:p>
           <a:p>
             <a:r>
-              <a:rPr lang="en-US" altLang="ko-KR" dirty="0">
-                <a:latin typeface="Pretendard Light" panose="02000403000000020004" pitchFamily="50" charset="-127"/>
-                <a:ea typeface="Pretendard Light" panose="02000403000000020004" pitchFamily="50" charset="-127"/>
-                <a:cs typeface="Pretendard Light" panose="02000403000000020004" pitchFamily="50" charset="-127"/>
-              </a:rPr>
-              <a:t>./make_anom_cmip6_monthly.sh</a:t>
-            </a:r>
-          </a:p>
-          <a:p>
-            <a:endParaRPr lang="en-US" altLang="ko-KR" dirty="0">
+              <a:rPr lang="en-US" altLang="ko-KR" sz="1200" dirty="0">
+                <a:latin typeface="Pretendard Light" panose="02000403000000020004" pitchFamily="50" charset="-127"/>
+                <a:ea typeface="Pretendard Light" panose="02000403000000020004" pitchFamily="50" charset="-127"/>
+                <a:cs typeface="Pretendard Light" panose="02000403000000020004" pitchFamily="50" charset="-127"/>
+              </a:rPr>
+              <a:t>python make_anom_unified.py --source cmip6</a:t>
+            </a:r>
+          </a:p>
+          <a:p>
+            <a:r>
+              <a:rPr lang="en-US" altLang="ko-KR" sz="1200" dirty="0">
+                <a:latin typeface="Pretendard Light" panose="02000403000000020004" pitchFamily="50" charset="-127"/>
+                <a:ea typeface="Pretendard Light" panose="02000403000000020004" pitchFamily="50" charset="-127"/>
+                <a:cs typeface="Pretendard Light" panose="02000403000000020004" pitchFamily="50" charset="-127"/>
+              </a:rPr>
+              <a:t>python make_anom_unified.py --source era5</a:t>
+            </a:r>
+          </a:p>
+          <a:p>
+            <a:r>
+              <a:rPr lang="en-US" altLang="ko-KR" sz="1200" dirty="0">
+                <a:latin typeface="Pretendard Light" panose="02000403000000020004" pitchFamily="50" charset="-127"/>
+                <a:ea typeface="Pretendard Light" panose="02000403000000020004" pitchFamily="50" charset="-127"/>
+                <a:cs typeface="Pretendard Light" panose="02000403000000020004" pitchFamily="50" charset="-127"/>
+              </a:rPr>
+              <a:t>python make_anom_unified.py --source oras5</a:t>
+            </a:r>
+          </a:p>
+          <a:p>
+            <a:r>
+              <a:rPr lang="en-US" altLang="ko-KR" sz="1200" dirty="0">
+                <a:latin typeface="Pretendard Light" panose="02000403000000020004" pitchFamily="50" charset="-127"/>
+                <a:ea typeface="Pretendard Light" panose="02000403000000020004" pitchFamily="50" charset="-127"/>
+                <a:cs typeface="Pretendard Light" panose="02000403000000020004" pitchFamily="50" charset="-127"/>
+              </a:rPr>
+              <a:t>python make_anom_unified.py --source </a:t>
+            </a:r>
+            <a:r>
+              <a:rPr lang="en-US" altLang="ko-KR" sz="1200" dirty="0" err="1">
+                <a:latin typeface="Pretendard Light" panose="02000403000000020004" pitchFamily="50" charset="-127"/>
+                <a:ea typeface="Pretendard Light" panose="02000403000000020004" pitchFamily="50" charset="-127"/>
+                <a:cs typeface="Pretendard Light" panose="02000403000000020004" pitchFamily="50" charset="-127"/>
+              </a:rPr>
+              <a:t>godas</a:t>
+            </a:r>
+            <a:endParaRPr lang="en-US" altLang="ko-KR" sz="1200" dirty="0">
               <a:latin typeface="Pretendard Light" panose="02000403000000020004" pitchFamily="50" charset="-127"/>
               <a:ea typeface="Pretendard Light" panose="02000403000000020004" pitchFamily="50" charset="-127"/>
               <a:cs typeface="Pretendard Light" panose="02000403000000020004" pitchFamily="50" charset="-127"/>
             </a:endParaRPr>
           </a:p>
           <a:p>
-            <a:r>
-              <a:rPr lang="en-US" altLang="ko-KR" dirty="0">
-                <a:latin typeface="Pretendard Light" panose="02000403000000020004" pitchFamily="50" charset="-127"/>
-                <a:ea typeface="Pretendard Light" panose="02000403000000020004" pitchFamily="50" charset="-127"/>
-                <a:cs typeface="Pretendard Light" panose="02000403000000020004" pitchFamily="50" charset="-127"/>
-              </a:rPr>
-              <a:t>./make_anom_era5_monthly.sh</a:t>
-            </a:r>
-          </a:p>
-          <a:p>
-            <a:endParaRPr lang="en-US" altLang="ko-KR" dirty="0">
+            <a:endParaRPr lang="en-US" altLang="ko-KR" sz="1200" dirty="0">
               <a:latin typeface="Pretendard Light" panose="02000403000000020004" pitchFamily="50" charset="-127"/>
               <a:ea typeface="Pretendard Light" panose="02000403000000020004" pitchFamily="50" charset="-127"/>
               <a:cs typeface="Pretendard Light" panose="02000403000000020004" pitchFamily="50" charset="-127"/>
@@ -20810,16 +19482,22 @@
           </a:p>
           <a:p>
             <a:r>
-              <a:rPr lang="en-US" altLang="ko-KR" dirty="0">
-                <a:latin typeface="Pretendard Light" panose="02000403000000020004" pitchFamily="50" charset="-127"/>
-                <a:ea typeface="Pretendard Light" panose="02000403000000020004" pitchFamily="50" charset="-127"/>
-                <a:cs typeface="Pretendard Light" panose="02000403000000020004" pitchFamily="50" charset="-127"/>
-              </a:rPr>
-              <a:t>python make_anom_godas.py</a:t>
-            </a:r>
-          </a:p>
-          <a:p>
-            <a:endParaRPr lang="en-US" altLang="ko-KR" dirty="0">
+              <a:rPr lang="en-US" altLang="ko-KR" sz="1200" dirty="0">
+                <a:latin typeface="Pretendard Light" panose="02000403000000020004" pitchFamily="50" charset="-127"/>
+                <a:ea typeface="Pretendard Light" panose="02000403000000020004" pitchFamily="50" charset="-127"/>
+                <a:cs typeface="Pretendard Light" panose="02000403000000020004" pitchFamily="50" charset="-127"/>
+              </a:rPr>
+              <a:t># </a:t>
+            </a:r>
+            <a:r>
+              <a:rPr lang="ko-KR" altLang="en-US" sz="1200" dirty="0">
+                <a:latin typeface="Pretendard Light" panose="02000403000000020004" pitchFamily="50" charset="-127"/>
+                <a:ea typeface="Pretendard Light" panose="02000403000000020004" pitchFamily="50" charset="-127"/>
+                <a:cs typeface="Pretendard Light" panose="02000403000000020004" pitchFamily="50" charset="-127"/>
+              </a:rPr>
+              <a:t>특정 변수만 돌릴 때</a:t>
+            </a:r>
+            <a:endParaRPr lang="en-US" altLang="ko-KR" sz="1200" dirty="0">
               <a:latin typeface="Pretendard Light" panose="02000403000000020004" pitchFamily="50" charset="-127"/>
               <a:ea typeface="Pretendard Light" panose="02000403000000020004" pitchFamily="50" charset="-127"/>
               <a:cs typeface="Pretendard Light" panose="02000403000000020004" pitchFamily="50" charset="-127"/>
@@ -20827,21 +19505,494 @@
           </a:p>
           <a:p>
             <a:r>
-              <a:rPr lang="en-US" altLang="ko-KR" dirty="0">
-                <a:latin typeface="Pretendard Light" panose="02000403000000020004" pitchFamily="50" charset="-127"/>
-                <a:ea typeface="Pretendard Light" panose="02000403000000020004" pitchFamily="50" charset="-127"/>
-                <a:cs typeface="Pretendard Light" panose="02000403000000020004" pitchFamily="50" charset="-127"/>
-              </a:rPr>
-              <a:t>./make_anom_oras5.sh</a:t>
-            </a:r>
-            <a:endParaRPr lang="ko-KR" altLang="en-US" dirty="0">
+              <a:rPr lang="en-US" altLang="ko-KR" sz="1200" dirty="0">
+                <a:latin typeface="Pretendard Light" panose="02000403000000020004" pitchFamily="50" charset="-127"/>
+                <a:ea typeface="Pretendard Light" panose="02000403000000020004" pitchFamily="50" charset="-127"/>
+                <a:cs typeface="Pretendard Light" panose="02000403000000020004" pitchFamily="50" charset="-127"/>
+              </a:rPr>
+              <a:t>python make_anom_unified.py --source cmip6 --vars </a:t>
+            </a:r>
+            <a:r>
+              <a:rPr lang="en-US" altLang="ko-KR" sz="1200" dirty="0" err="1">
+                <a:latin typeface="Pretendard Light" panose="02000403000000020004" pitchFamily="50" charset="-127"/>
+                <a:ea typeface="Pretendard Light" panose="02000403000000020004" pitchFamily="50" charset="-127"/>
+                <a:cs typeface="Pretendard Light" panose="02000403000000020004" pitchFamily="50" charset="-127"/>
+              </a:rPr>
+              <a:t>tos</a:t>
+            </a:r>
+            <a:r>
+              <a:rPr lang="en-US" altLang="ko-KR" sz="1200" dirty="0">
+                <a:latin typeface="Pretendard Light" panose="02000403000000020004" pitchFamily="50" charset="-127"/>
+                <a:ea typeface="Pretendard Light" panose="02000403000000020004" pitchFamily="50" charset="-127"/>
+                <a:cs typeface="Pretendard Light" panose="02000403000000020004" pitchFamily="50" charset="-127"/>
+              </a:rPr>
+              <a:t> </a:t>
+            </a:r>
+            <a:r>
+              <a:rPr lang="en-US" altLang="ko-KR" sz="1200" dirty="0" err="1">
+                <a:latin typeface="Pretendard Light" panose="02000403000000020004" pitchFamily="50" charset="-127"/>
+                <a:ea typeface="Pretendard Light" panose="02000403000000020004" pitchFamily="50" charset="-127"/>
+                <a:cs typeface="Pretendard Light" panose="02000403000000020004" pitchFamily="50" charset="-127"/>
+              </a:rPr>
+              <a:t>uos</a:t>
+            </a:r>
+            <a:r>
+              <a:rPr lang="en-US" altLang="ko-KR" sz="1200" dirty="0">
+                <a:latin typeface="Pretendard Light" panose="02000403000000020004" pitchFamily="50" charset="-127"/>
+                <a:ea typeface="Pretendard Light" panose="02000403000000020004" pitchFamily="50" charset="-127"/>
+                <a:cs typeface="Pretendard Light" panose="02000403000000020004" pitchFamily="50" charset="-127"/>
+              </a:rPr>
+              <a:t> </a:t>
+            </a:r>
+            <a:r>
+              <a:rPr lang="en-US" altLang="ko-KR" sz="1200" dirty="0" err="1">
+                <a:latin typeface="Pretendard Light" panose="02000403000000020004" pitchFamily="50" charset="-127"/>
+                <a:ea typeface="Pretendard Light" panose="02000403000000020004" pitchFamily="50" charset="-127"/>
+                <a:cs typeface="Pretendard Light" panose="02000403000000020004" pitchFamily="50" charset="-127"/>
+              </a:rPr>
+              <a:t>vos</a:t>
+            </a:r>
+            <a:endParaRPr lang="en-US" altLang="ko-KR" sz="1200" dirty="0">
               <a:latin typeface="Pretendard Light" panose="02000403000000020004" pitchFamily="50" charset="-127"/>
               <a:ea typeface="Pretendard Light" panose="02000403000000020004" pitchFamily="50" charset="-127"/>
               <a:cs typeface="Pretendard Light" panose="02000403000000020004" pitchFamily="50" charset="-127"/>
             </a:endParaRPr>
           </a:p>
           <a:p>
-            <a:endParaRPr lang="ko-KR" altLang="en-US" dirty="0">
+            <a:r>
+              <a:rPr lang="en-US" altLang="ko-KR" sz="1200" dirty="0">
+                <a:latin typeface="Pretendard Light" panose="02000403000000020004" pitchFamily="50" charset="-127"/>
+                <a:ea typeface="Pretendard Light" panose="02000403000000020004" pitchFamily="50" charset="-127"/>
+                <a:cs typeface="Pretendard Light" panose="02000403000000020004" pitchFamily="50" charset="-127"/>
+              </a:rPr>
+              <a:t>python make_anom_unified.py --source </a:t>
+            </a:r>
+            <a:r>
+              <a:rPr lang="en-US" altLang="ko-KR" sz="1200" dirty="0" err="1">
+                <a:latin typeface="Pretendard Light" panose="02000403000000020004" pitchFamily="50" charset="-127"/>
+                <a:ea typeface="Pretendard Light" panose="02000403000000020004" pitchFamily="50" charset="-127"/>
+                <a:cs typeface="Pretendard Light" panose="02000403000000020004" pitchFamily="50" charset="-127"/>
+              </a:rPr>
+              <a:t>godas</a:t>
+            </a:r>
+            <a:r>
+              <a:rPr lang="en-US" altLang="ko-KR" sz="1200" dirty="0">
+                <a:latin typeface="Pretendard Light" panose="02000403000000020004" pitchFamily="50" charset="-127"/>
+                <a:ea typeface="Pretendard Light" panose="02000403000000020004" pitchFamily="50" charset="-127"/>
+                <a:cs typeface="Pretendard Light" panose="02000403000000020004" pitchFamily="50" charset="-127"/>
+              </a:rPr>
+              <a:t> --vars </a:t>
+            </a:r>
+            <a:r>
+              <a:rPr lang="en-US" altLang="ko-KR" sz="1200" dirty="0" err="1">
+                <a:latin typeface="Pretendard Light" panose="02000403000000020004" pitchFamily="50" charset="-127"/>
+                <a:ea typeface="Pretendard Light" panose="02000403000000020004" pitchFamily="50" charset="-127"/>
+                <a:cs typeface="Pretendard Light" panose="02000403000000020004" pitchFamily="50" charset="-127"/>
+              </a:rPr>
+              <a:t>mlotst</a:t>
+            </a:r>
+            <a:r>
+              <a:rPr lang="en-US" altLang="ko-KR" sz="1200" dirty="0">
+                <a:latin typeface="Pretendard Light" panose="02000403000000020004" pitchFamily="50" charset="-127"/>
+                <a:ea typeface="Pretendard Light" panose="02000403000000020004" pitchFamily="50" charset="-127"/>
+                <a:cs typeface="Pretendard Light" panose="02000403000000020004" pitchFamily="50" charset="-127"/>
+              </a:rPr>
+              <a:t> ohc300 --overwrite</a:t>
+            </a:r>
+          </a:p>
+        </p:txBody>
+      </p:sp>
+      <p:sp>
+        <p:nvSpPr>
+          <p:cNvPr id="2" name="TextBox 1">
+            <a:extLst>
+              <a:ext uri="{FF2B5EF4-FFF2-40B4-BE49-F238E27FC236}">
+                <a16:creationId xmlns:a16="http://schemas.microsoft.com/office/drawing/2014/main" id="{8024D78E-F4DA-CE33-DEA3-B326D1F35898}"/>
+              </a:ext>
+            </a:extLst>
+          </p:cNvPr>
+          <p:cNvSpPr txBox="1"/>
+          <p:nvPr/>
+        </p:nvSpPr>
+        <p:spPr>
+          <a:xfrm>
+            <a:off x="6622475" y="1210702"/>
+            <a:ext cx="4998027" cy="5078313"/>
+          </a:xfrm>
+          <a:prstGeom prst="rect">
+            <a:avLst/>
+          </a:prstGeom>
+          <a:noFill/>
+        </p:spPr>
+        <p:txBody>
+          <a:bodyPr wrap="square" rtlCol="0">
+            <a:spAutoFit/>
+          </a:bodyPr>
+          <a:lstStyle/>
+          <a:p>
+            <a:pPr marL="285750" indent="-285750">
+              <a:buFont typeface="Arial" panose="020B0604020202020204" pitchFamily="34" charset="0"/>
+              <a:buChar char="•"/>
+            </a:pPr>
+            <a:r>
+              <a:rPr lang="en-US" altLang="ko-KR" sz="1200" dirty="0">
+                <a:latin typeface="Pretendard Light" panose="02000403000000020004" pitchFamily="50" charset="-127"/>
+                <a:ea typeface="Pretendard Light" panose="02000403000000020004" pitchFamily="50" charset="-127"/>
+                <a:cs typeface="Pretendard Light" panose="02000403000000020004" pitchFamily="50" charset="-127"/>
+              </a:rPr>
+              <a:t>Daily U10</a:t>
+            </a:r>
+          </a:p>
+          <a:p>
+            <a:r>
+              <a:rPr lang="en-US" altLang="ko-KR" sz="1200" dirty="0">
+                <a:latin typeface="Pretendard Light" panose="02000403000000020004" pitchFamily="50" charset="-127"/>
+                <a:ea typeface="Pretendard Light" panose="02000403000000020004" pitchFamily="50" charset="-127"/>
+                <a:cs typeface="Pretendard Light" panose="02000403000000020004" pitchFamily="50" charset="-127"/>
+              </a:rPr>
+              <a:t>-&gt; monthly max (</a:t>
+            </a:r>
+            <a:r>
+              <a:rPr lang="en-US" altLang="ko-KR" sz="1200" dirty="0" err="1">
+                <a:latin typeface="Pretendard Light" panose="02000403000000020004" pitchFamily="50" charset="-127"/>
+                <a:ea typeface="Pretendard Light" panose="02000403000000020004" pitchFamily="50" charset="-127"/>
+                <a:cs typeface="Pretendard Light" panose="02000403000000020004" pitchFamily="50" charset="-127"/>
+              </a:rPr>
+              <a:t>monmax</a:t>
+            </a:r>
+            <a:r>
+              <a:rPr lang="en-US" altLang="ko-KR" sz="1200" dirty="0">
+                <a:latin typeface="Pretendard Light" panose="02000403000000020004" pitchFamily="50" charset="-127"/>
+                <a:ea typeface="Pretendard Light" panose="02000403000000020004" pitchFamily="50" charset="-127"/>
+                <a:cs typeface="Pretendard Light" panose="02000403000000020004" pitchFamily="50" charset="-127"/>
+              </a:rPr>
+              <a:t>)</a:t>
+            </a:r>
+            <a:br>
+              <a:rPr lang="en-US" altLang="ko-KR" sz="1200" dirty="0">
+                <a:latin typeface="Pretendard Light" panose="02000403000000020004" pitchFamily="50" charset="-127"/>
+                <a:ea typeface="Pretendard Light" panose="02000403000000020004" pitchFamily="50" charset="-127"/>
+                <a:cs typeface="Pretendard Light" panose="02000403000000020004" pitchFamily="50" charset="-127"/>
+              </a:rPr>
+            </a:br>
+            <a:r>
+              <a:rPr lang="en-US" altLang="ko-KR" sz="1200" dirty="0">
+                <a:latin typeface="Pretendard Light" panose="02000403000000020004" pitchFamily="50" charset="-127"/>
+                <a:ea typeface="Pretendard Light" panose="02000403000000020004" pitchFamily="50" charset="-127"/>
+                <a:cs typeface="Pretendard Light" panose="02000403000000020004" pitchFamily="50" charset="-127"/>
+              </a:rPr>
+              <a:t>-&gt; linear detrend</a:t>
+            </a:r>
+            <a:br>
+              <a:rPr lang="en-US" altLang="ko-KR" sz="1200" dirty="0">
+                <a:latin typeface="Pretendard Light" panose="02000403000000020004" pitchFamily="50" charset="-127"/>
+                <a:ea typeface="Pretendard Light" panose="02000403000000020004" pitchFamily="50" charset="-127"/>
+                <a:cs typeface="Pretendard Light" panose="02000403000000020004" pitchFamily="50" charset="-127"/>
+              </a:rPr>
+            </a:br>
+            <a:r>
+              <a:rPr lang="en-US" altLang="ko-KR" sz="1200" dirty="0">
+                <a:latin typeface="Pretendard Light" panose="02000403000000020004" pitchFamily="50" charset="-127"/>
+                <a:ea typeface="Pretendard Light" panose="02000403000000020004" pitchFamily="50" charset="-127"/>
+                <a:cs typeface="Pretendard Light" panose="02000403000000020004" pitchFamily="50" charset="-127"/>
+              </a:rPr>
+              <a:t>-&gt; monthly climatology of monthly-max series</a:t>
+            </a:r>
+            <a:br>
+              <a:rPr lang="en-US" altLang="ko-KR" sz="1200" dirty="0">
+                <a:latin typeface="Pretendard Light" panose="02000403000000020004" pitchFamily="50" charset="-127"/>
+                <a:ea typeface="Pretendard Light" panose="02000403000000020004" pitchFamily="50" charset="-127"/>
+                <a:cs typeface="Pretendard Light" panose="02000403000000020004" pitchFamily="50" charset="-127"/>
+              </a:rPr>
+            </a:br>
+            <a:r>
+              <a:rPr lang="en-US" altLang="ko-KR" sz="1200" dirty="0">
+                <a:latin typeface="Pretendard Light" panose="02000403000000020004" pitchFamily="50" charset="-127"/>
+                <a:ea typeface="Pretendard Light" panose="02000403000000020004" pitchFamily="50" charset="-127"/>
+                <a:cs typeface="Pretendard Light" panose="02000403000000020004" pitchFamily="50" charset="-127"/>
+              </a:rPr>
+              <a:t>-&gt; anomaly (</a:t>
+            </a:r>
+            <a:r>
+              <a:rPr lang="en-US" altLang="ko-KR" sz="1200" dirty="0" err="1">
+                <a:latin typeface="Pretendard Light" panose="02000403000000020004" pitchFamily="50" charset="-127"/>
+                <a:ea typeface="Pretendard Light" panose="02000403000000020004" pitchFamily="50" charset="-127"/>
+                <a:cs typeface="Pretendard Light" panose="02000403000000020004" pitchFamily="50" charset="-127"/>
+              </a:rPr>
+              <a:t>ymonsub</a:t>
+            </a:r>
+            <a:r>
+              <a:rPr lang="en-US" altLang="ko-KR" sz="1200" dirty="0">
+                <a:latin typeface="Pretendard Light" panose="02000403000000020004" pitchFamily="50" charset="-127"/>
+                <a:ea typeface="Pretendard Light" panose="02000403000000020004" pitchFamily="50" charset="-127"/>
+                <a:cs typeface="Pretendard Light" panose="02000403000000020004" pitchFamily="50" charset="-127"/>
+              </a:rPr>
+              <a:t>)</a:t>
+            </a:r>
+            <a:br>
+              <a:rPr lang="en-US" altLang="ko-KR" sz="1200" dirty="0">
+                <a:latin typeface="Pretendard Light" panose="02000403000000020004" pitchFamily="50" charset="-127"/>
+                <a:ea typeface="Pretendard Light" panose="02000403000000020004" pitchFamily="50" charset="-127"/>
+                <a:cs typeface="Pretendard Light" panose="02000403000000020004" pitchFamily="50" charset="-127"/>
+              </a:rPr>
+            </a:br>
+            <a:r>
+              <a:rPr lang="en-US" altLang="ko-KR" sz="1200" dirty="0">
+                <a:latin typeface="Pretendard Light" panose="02000403000000020004" pitchFamily="50" charset="-127"/>
+                <a:ea typeface="Pretendard Light" panose="02000403000000020004" pitchFamily="50" charset="-127"/>
+                <a:cs typeface="Pretendard Light" panose="02000403000000020004" pitchFamily="50" charset="-127"/>
+              </a:rPr>
+              <a:t>-&gt; remap to 1x2</a:t>
+            </a:r>
+            <a:br>
+              <a:rPr lang="en-US" altLang="ko-KR" sz="1200" dirty="0">
+                <a:latin typeface="Pretendard Light" panose="02000403000000020004" pitchFamily="50" charset="-127"/>
+                <a:ea typeface="Pretendard Light" panose="02000403000000020004" pitchFamily="50" charset="-127"/>
+                <a:cs typeface="Pretendard Light" panose="02000403000000020004" pitchFamily="50" charset="-127"/>
+              </a:rPr>
+            </a:br>
+            <a:r>
+              <a:rPr lang="en-US" altLang="ko-KR" sz="1200" dirty="0">
+                <a:latin typeface="Pretendard Light" panose="02000403000000020004" pitchFamily="50" charset="-127"/>
+                <a:ea typeface="Pretendard Light" panose="02000403000000020004" pitchFamily="50" charset="-127"/>
+                <a:cs typeface="Pretendard Light" panose="02000403000000020004" pitchFamily="50" charset="-127"/>
+              </a:rPr>
+              <a:t>-&gt; explicit finite _</a:t>
+            </a:r>
+            <a:r>
+              <a:rPr lang="en-US" altLang="ko-KR" sz="1200" dirty="0" err="1">
+                <a:latin typeface="Pretendard Light" panose="02000403000000020004" pitchFamily="50" charset="-127"/>
+                <a:ea typeface="Pretendard Light" panose="02000403000000020004" pitchFamily="50" charset="-127"/>
+                <a:cs typeface="Pretendard Light" panose="02000403000000020004" pitchFamily="50" charset="-127"/>
+              </a:rPr>
+              <a:t>FillValue</a:t>
+            </a:r>
+            <a:endParaRPr lang="en-US" altLang="ko-KR" sz="1200" dirty="0">
+              <a:latin typeface="Pretendard Light" panose="02000403000000020004" pitchFamily="50" charset="-127"/>
+              <a:ea typeface="Pretendard Light" panose="02000403000000020004" pitchFamily="50" charset="-127"/>
+              <a:cs typeface="Pretendard Light" panose="02000403000000020004" pitchFamily="50" charset="-127"/>
+            </a:endParaRPr>
+          </a:p>
+          <a:p>
+            <a:endParaRPr lang="en-US" altLang="ko-KR" sz="1200" dirty="0">
+              <a:latin typeface="Pretendard Light" panose="02000403000000020004" pitchFamily="50" charset="-127"/>
+              <a:ea typeface="Pretendard Light" panose="02000403000000020004" pitchFamily="50" charset="-127"/>
+              <a:cs typeface="Pretendard Light" panose="02000403000000020004" pitchFamily="50" charset="-127"/>
+            </a:endParaRPr>
+          </a:p>
+          <a:p>
+            <a:endParaRPr lang="en-US" altLang="ko-KR" sz="1200" dirty="0">
+              <a:latin typeface="Pretendard Light" panose="02000403000000020004" pitchFamily="50" charset="-127"/>
+              <a:ea typeface="Pretendard Light" panose="02000403000000020004" pitchFamily="50" charset="-127"/>
+              <a:cs typeface="Pretendard Light" panose="02000403000000020004" pitchFamily="50" charset="-127"/>
+            </a:endParaRPr>
+          </a:p>
+          <a:p>
+            <a:r>
+              <a:rPr lang="en-US" altLang="ko-KR" sz="1200" dirty="0">
+                <a:latin typeface="Pretendard Light" panose="02000403000000020004" pitchFamily="50" charset="-127"/>
+                <a:ea typeface="Pretendard Light" panose="02000403000000020004" pitchFamily="50" charset="-127"/>
+                <a:cs typeface="Pretendard Light" panose="02000403000000020004" pitchFamily="50" charset="-127"/>
+              </a:rPr>
+              <a:t># ERA5</a:t>
+            </a:r>
+          </a:p>
+          <a:p>
+            <a:r>
+              <a:rPr lang="en-US" altLang="ko-KR" sz="1200" dirty="0">
+                <a:latin typeface="Pretendard Light" panose="02000403000000020004" pitchFamily="50" charset="-127"/>
+                <a:ea typeface="Pretendard Light" panose="02000403000000020004" pitchFamily="50" charset="-127"/>
+                <a:cs typeface="Pretendard Light" panose="02000403000000020004" pitchFamily="50" charset="-127"/>
+              </a:rPr>
+              <a:t>python make_uasmax_anom.py era5</a:t>
+            </a:r>
+          </a:p>
+          <a:p>
+            <a:endParaRPr lang="en-US" altLang="ko-KR" sz="1200" dirty="0">
+              <a:latin typeface="Pretendard Light" panose="02000403000000020004" pitchFamily="50" charset="-127"/>
+              <a:ea typeface="Pretendard Light" panose="02000403000000020004" pitchFamily="50" charset="-127"/>
+              <a:cs typeface="Pretendard Light" panose="02000403000000020004" pitchFamily="50" charset="-127"/>
+            </a:endParaRPr>
+          </a:p>
+          <a:p>
+            <a:r>
+              <a:rPr lang="en-US" altLang="ko-KR" sz="1200" dirty="0">
+                <a:latin typeface="Pretendard Light" panose="02000403000000020004" pitchFamily="50" charset="-127"/>
+                <a:ea typeface="Pretendard Light" panose="02000403000000020004" pitchFamily="50" charset="-127"/>
+                <a:cs typeface="Pretendard Light" panose="02000403000000020004" pitchFamily="50" charset="-127"/>
+              </a:rPr>
+              <a:t># ERA5 </a:t>
+            </a:r>
+            <a:r>
+              <a:rPr lang="ko-KR" altLang="en-US" sz="1200" dirty="0">
+                <a:latin typeface="Pretendard Light" panose="02000403000000020004" pitchFamily="50" charset="-127"/>
+                <a:ea typeface="Pretendard Light" panose="02000403000000020004" pitchFamily="50" charset="-127"/>
+                <a:cs typeface="Pretendard Light" panose="02000403000000020004" pitchFamily="50" charset="-127"/>
+              </a:rPr>
+              <a:t>덮어쓰기</a:t>
+            </a:r>
+          </a:p>
+          <a:p>
+            <a:r>
+              <a:rPr lang="en-US" altLang="ko-KR" sz="1200" dirty="0">
+                <a:latin typeface="Pretendard Light" panose="02000403000000020004" pitchFamily="50" charset="-127"/>
+                <a:ea typeface="Pretendard Light" panose="02000403000000020004" pitchFamily="50" charset="-127"/>
+                <a:cs typeface="Pretendard Light" panose="02000403000000020004" pitchFamily="50" charset="-127"/>
+              </a:rPr>
+              <a:t>python make_uasmax_anom.py era5 --overwrite</a:t>
+            </a:r>
+          </a:p>
+          <a:p>
+            <a:endParaRPr lang="en-US" altLang="ko-KR" sz="1200" dirty="0">
+              <a:latin typeface="Pretendard Light" panose="02000403000000020004" pitchFamily="50" charset="-127"/>
+              <a:ea typeface="Pretendard Light" panose="02000403000000020004" pitchFamily="50" charset="-127"/>
+              <a:cs typeface="Pretendard Light" panose="02000403000000020004" pitchFamily="50" charset="-127"/>
+            </a:endParaRPr>
+          </a:p>
+          <a:p>
+            <a:r>
+              <a:rPr lang="en-US" altLang="ko-KR" sz="1200" dirty="0">
+                <a:latin typeface="Pretendard Light" panose="02000403000000020004" pitchFamily="50" charset="-127"/>
+                <a:ea typeface="Pretendard Light" panose="02000403000000020004" pitchFamily="50" charset="-127"/>
+                <a:cs typeface="Pretendard Light" panose="02000403000000020004" pitchFamily="50" charset="-127"/>
+              </a:rPr>
+              <a:t># ERA5 </a:t>
+            </a:r>
+            <a:r>
+              <a:rPr lang="ko-KR" altLang="en-US" sz="1200" dirty="0">
+                <a:latin typeface="Pretendard Light" panose="02000403000000020004" pitchFamily="50" charset="-127"/>
+                <a:ea typeface="Pretendard Light" panose="02000403000000020004" pitchFamily="50" charset="-127"/>
+                <a:cs typeface="Pretendard Light" panose="02000403000000020004" pitchFamily="50" charset="-127"/>
+              </a:rPr>
+              <a:t>중간 파일도 보관</a:t>
+            </a:r>
+          </a:p>
+          <a:p>
+            <a:r>
+              <a:rPr lang="en-US" altLang="ko-KR" sz="1200" dirty="0">
+                <a:latin typeface="Pretendard Light" panose="02000403000000020004" pitchFamily="50" charset="-127"/>
+                <a:ea typeface="Pretendard Light" panose="02000403000000020004" pitchFamily="50" charset="-127"/>
+                <a:cs typeface="Pretendard Light" panose="02000403000000020004" pitchFamily="50" charset="-127"/>
+              </a:rPr>
+              <a:t>python make_uasmax_anom.py era5 --keep-intermediate</a:t>
+            </a:r>
+          </a:p>
+          <a:p>
+            <a:endParaRPr lang="en-US" altLang="ko-KR" sz="1200" dirty="0">
+              <a:latin typeface="Pretendard Light" panose="02000403000000020004" pitchFamily="50" charset="-127"/>
+              <a:ea typeface="Pretendard Light" panose="02000403000000020004" pitchFamily="50" charset="-127"/>
+              <a:cs typeface="Pretendard Light" panose="02000403000000020004" pitchFamily="50" charset="-127"/>
+            </a:endParaRPr>
+          </a:p>
+          <a:p>
+            <a:r>
+              <a:rPr lang="en-US" altLang="ko-KR" sz="1200" dirty="0">
+                <a:latin typeface="Pretendard Light" panose="02000403000000020004" pitchFamily="50" charset="-127"/>
+                <a:ea typeface="Pretendard Light" panose="02000403000000020004" pitchFamily="50" charset="-127"/>
+                <a:cs typeface="Pretendard Light" panose="02000403000000020004" pitchFamily="50" charset="-127"/>
+              </a:rPr>
+              <a:t># CMIP6 </a:t>
+            </a:r>
+            <a:r>
+              <a:rPr lang="ko-KR" altLang="en-US" sz="1200" dirty="0">
+                <a:latin typeface="Pretendard Light" panose="02000403000000020004" pitchFamily="50" charset="-127"/>
+                <a:ea typeface="Pretendard Light" panose="02000403000000020004" pitchFamily="50" charset="-127"/>
+                <a:cs typeface="Pretendard Light" panose="02000403000000020004" pitchFamily="50" charset="-127"/>
+              </a:rPr>
+              <a:t>전체 처리</a:t>
+            </a:r>
+          </a:p>
+          <a:p>
+            <a:r>
+              <a:rPr lang="en-US" altLang="ko-KR" sz="1200" dirty="0">
+                <a:latin typeface="Pretendard Light" panose="02000403000000020004" pitchFamily="50" charset="-127"/>
+                <a:ea typeface="Pretendard Light" panose="02000403000000020004" pitchFamily="50" charset="-127"/>
+                <a:cs typeface="Pretendard Light" panose="02000403000000020004" pitchFamily="50" charset="-127"/>
+              </a:rPr>
+              <a:t>python make_uasmax_anom.py cmip6</a:t>
+            </a:r>
+          </a:p>
+          <a:p>
+            <a:endParaRPr lang="en-US" altLang="ko-KR" sz="1200" dirty="0">
+              <a:latin typeface="Pretendard Light" panose="02000403000000020004" pitchFamily="50" charset="-127"/>
+              <a:ea typeface="Pretendard Light" panose="02000403000000020004" pitchFamily="50" charset="-127"/>
+              <a:cs typeface="Pretendard Light" panose="02000403000000020004" pitchFamily="50" charset="-127"/>
+            </a:endParaRPr>
+          </a:p>
+          <a:p>
+            <a:r>
+              <a:rPr lang="en-US" altLang="ko-KR" sz="1200" dirty="0">
+                <a:latin typeface="Pretendard Light" panose="02000403000000020004" pitchFamily="50" charset="-127"/>
+                <a:ea typeface="Pretendard Light" panose="02000403000000020004" pitchFamily="50" charset="-127"/>
+                <a:cs typeface="Pretendard Light" panose="02000403000000020004" pitchFamily="50" charset="-127"/>
+              </a:rPr>
+              <a:t># CMIP6 </a:t>
+            </a:r>
+            <a:r>
+              <a:rPr lang="ko-KR" altLang="en-US" sz="1200" dirty="0">
+                <a:latin typeface="Pretendard Light" panose="02000403000000020004" pitchFamily="50" charset="-127"/>
+                <a:ea typeface="Pretendard Light" panose="02000403000000020004" pitchFamily="50" charset="-127"/>
+                <a:cs typeface="Pretendard Light" panose="02000403000000020004" pitchFamily="50" charset="-127"/>
+              </a:rPr>
+              <a:t>특정 모델</a:t>
+            </a:r>
+            <a:r>
+              <a:rPr lang="en-US" altLang="ko-KR" sz="1200" dirty="0">
+                <a:latin typeface="Pretendard Light" panose="02000403000000020004" pitchFamily="50" charset="-127"/>
+                <a:ea typeface="Pretendard Light" panose="02000403000000020004" pitchFamily="50" charset="-127"/>
+                <a:cs typeface="Pretendard Light" panose="02000403000000020004" pitchFamily="50" charset="-127"/>
+              </a:rPr>
+              <a:t>/</a:t>
+            </a:r>
+            <a:r>
+              <a:rPr lang="ko-KR" altLang="en-US" sz="1200" dirty="0">
+                <a:latin typeface="Pretendard Light" panose="02000403000000020004" pitchFamily="50" charset="-127"/>
+                <a:ea typeface="Pretendard Light" panose="02000403000000020004" pitchFamily="50" charset="-127"/>
+                <a:cs typeface="Pretendard Light" panose="02000403000000020004" pitchFamily="50" charset="-127"/>
+              </a:rPr>
+              <a:t>멤버만 처리</a:t>
+            </a:r>
+          </a:p>
+          <a:p>
+            <a:r>
+              <a:rPr lang="en-US" altLang="ko-KR" sz="1200" dirty="0">
+                <a:latin typeface="Pretendard Light" panose="02000403000000020004" pitchFamily="50" charset="-127"/>
+                <a:ea typeface="Pretendard Light" panose="02000403000000020004" pitchFamily="50" charset="-127"/>
+                <a:cs typeface="Pretendard Light" panose="02000403000000020004" pitchFamily="50" charset="-127"/>
+              </a:rPr>
+              <a:t>python make_uasmax_anom.py cmip6 \</a:t>
+            </a:r>
+          </a:p>
+          <a:p>
+            <a:r>
+              <a:rPr lang="en-US" altLang="ko-KR" sz="1200" dirty="0">
+                <a:latin typeface="Pretendard Light" panose="02000403000000020004" pitchFamily="50" charset="-127"/>
+                <a:ea typeface="Pretendard Light" panose="02000403000000020004" pitchFamily="50" charset="-127"/>
+                <a:cs typeface="Pretendard Light" panose="02000403000000020004" pitchFamily="50" charset="-127"/>
+              </a:rPr>
+              <a:t>  --model ACCESS-CM2 CanESM5 \</a:t>
+            </a:r>
+          </a:p>
+          <a:p>
+            <a:r>
+              <a:rPr lang="en-US" altLang="ko-KR" sz="1200" dirty="0">
+                <a:latin typeface="Pretendard Light" panose="02000403000000020004" pitchFamily="50" charset="-127"/>
+                <a:ea typeface="Pretendard Light" panose="02000403000000020004" pitchFamily="50" charset="-127"/>
+                <a:cs typeface="Pretendard Light" panose="02000403000000020004" pitchFamily="50" charset="-127"/>
+              </a:rPr>
+              <a:t>  --member r1i1p1f1 \</a:t>
+            </a:r>
+          </a:p>
+          <a:p>
+            <a:r>
+              <a:rPr lang="en-US" altLang="ko-KR" sz="1200" dirty="0">
+                <a:latin typeface="Pretendard Light" panose="02000403000000020004" pitchFamily="50" charset="-127"/>
+                <a:ea typeface="Pretendard Light" panose="02000403000000020004" pitchFamily="50" charset="-127"/>
+                <a:cs typeface="Pretendard Light" panose="02000403000000020004" pitchFamily="50" charset="-127"/>
+              </a:rPr>
+              <a:t>  --overwrite</a:t>
+            </a:r>
+            <a:endParaRPr lang="ko-KR" altLang="en-US" sz="1200" dirty="0">
               <a:latin typeface="Pretendard Light" panose="02000403000000020004" pitchFamily="50" charset="-127"/>
               <a:ea typeface="Pretendard Light" panose="02000403000000020004" pitchFamily="50" charset="-127"/>
               <a:cs typeface="Pretendard Light" panose="02000403000000020004" pitchFamily="50" charset="-127"/>
@@ -20862,7 +20013,7 @@
 </p:sld>
 </file>
 
-<file path=ppt/slides/slide9.xml><?xml version="1.0" encoding="utf-8"?>
+<file path=ppt/slides/slide8.xml><?xml version="1.0" encoding="utf-8"?>
 <p:sld xmlns:a="http://schemas.openxmlformats.org/drawingml/2006/main" xmlns:r="http://schemas.openxmlformats.org/officeDocument/2006/relationships" xmlns:p="http://schemas.openxmlformats.org/presentationml/2006/main">
   <p:cSld>
     <p:spTree>
@@ -20870,7 +20021,7 @@
         <p:cNvPr id="1" name="Shape 157">
           <a:extLst>
             <a:ext uri="{FF2B5EF4-FFF2-40B4-BE49-F238E27FC236}">
-              <a16:creationId xmlns:a16="http://schemas.microsoft.com/office/drawing/2014/main" id="{8BDB9A46-DC7C-75D8-E6B1-9FBE7D4AD9A6}"/>
+              <a16:creationId xmlns:a16="http://schemas.microsoft.com/office/drawing/2014/main" id="{8A331AF0-9370-1D85-C1D7-FB9790D24E3A}"/>
             </a:ext>
           </a:extLst>
         </p:cNvPr>
@@ -20890,7 +20041,7 @@
           <p:cNvPr id="158" name="Google Shape;158;p18" descr="image.png">
             <a:extLst>
               <a:ext uri="{FF2B5EF4-FFF2-40B4-BE49-F238E27FC236}">
-                <a16:creationId xmlns:a16="http://schemas.microsoft.com/office/drawing/2014/main" id="{EA75159A-00DD-448E-1442-C8A0284A7893}"/>
+                <a16:creationId xmlns:a16="http://schemas.microsoft.com/office/drawing/2014/main" id="{741C7702-7A60-3E7A-B047-2C624B2BD893}"/>
               </a:ext>
             </a:extLst>
           </p:cNvPr>
@@ -20925,7 +20076,7 @@
           <p:cNvPr id="160" name="Google Shape;160;p18">
             <a:extLst>
               <a:ext uri="{FF2B5EF4-FFF2-40B4-BE49-F238E27FC236}">
-                <a16:creationId xmlns:a16="http://schemas.microsoft.com/office/drawing/2014/main" id="{CA0E371E-63EE-B58C-9BFC-9772B628E51F}"/>
+                <a16:creationId xmlns:a16="http://schemas.microsoft.com/office/drawing/2014/main" id="{2072E083-9083-1369-7585-F50FBD858BA0}"/>
               </a:ext>
             </a:extLst>
           </p:cNvPr>
@@ -20961,17 +20112,6 @@
               <a:buNone/>
             </a:pPr>
             <a:r>
-              <a:rPr lang="en-US" sz="3150" b="1" dirty="0">
-                <a:solidFill>
-                  <a:srgbClr val="001F3F"/>
-                </a:solidFill>
-                <a:latin typeface="Pretendard ExtraBold" panose="02000903000000020004" pitchFamily="50" charset="-127"/>
-                <a:ea typeface="Pretendard ExtraBold" panose="02000903000000020004" pitchFamily="50" charset="-127"/>
-                <a:cs typeface="Pretendard ExtraBold" panose="02000903000000020004" pitchFamily="50" charset="-127"/>
-              </a:rPr>
-              <a:t>QC</a:t>
-            </a:r>
-            <a:r>
               <a:rPr lang="en-US" sz="3150" b="1" i="0" u="none" strike="noStrike" cap="none" dirty="0">
                 <a:solidFill>
                   <a:srgbClr val="001F3F"/>
@@ -20981,6 +20121,29 @@
                 <a:cs typeface="Pretendard ExtraBold" panose="02000903000000020004" pitchFamily="50" charset="-127"/>
                 <a:sym typeface="Arial"/>
               </a:rPr>
+              <a:t>make_input.py &amp; make_target</a:t>
+            </a:r>
+            <a:r>
+              <a:rPr lang="en-US" sz="3150" b="1" dirty="0">
+                <a:solidFill>
+                  <a:srgbClr val="001F3F"/>
+                </a:solidFill>
+                <a:latin typeface="Pretendard ExtraBold" panose="02000903000000020004" pitchFamily="50" charset="-127"/>
+                <a:ea typeface="Pretendard ExtraBold" panose="02000903000000020004" pitchFamily="50" charset="-127"/>
+                <a:cs typeface="Pretendard ExtraBold" panose="02000903000000020004" pitchFamily="50" charset="-127"/>
+              </a:rPr>
+              <a:t>.py</a:t>
+            </a:r>
+            <a:r>
+              <a:rPr lang="en-US" sz="3150" b="1" i="0" u="none" strike="noStrike" cap="none" dirty="0">
+                <a:solidFill>
+                  <a:srgbClr val="001F3F"/>
+                </a:solidFill>
+                <a:latin typeface="Pretendard ExtraBold" panose="02000903000000020004" pitchFamily="50" charset="-127"/>
+                <a:ea typeface="Pretendard ExtraBold" panose="02000903000000020004" pitchFamily="50" charset="-127"/>
+                <a:cs typeface="Pretendard ExtraBold" panose="02000903000000020004" pitchFamily="50" charset="-127"/>
+                <a:sym typeface="Arial"/>
+              </a:rPr>
               <a:t> </a:t>
             </a:r>
             <a:endParaRPr dirty="0">
@@ -20996,7 +20159,7 @@
           <p:cNvPr id="161" name="Google Shape;161;p18">
             <a:extLst>
               <a:ext uri="{FF2B5EF4-FFF2-40B4-BE49-F238E27FC236}">
-                <a16:creationId xmlns:a16="http://schemas.microsoft.com/office/drawing/2014/main" id="{26FD35FE-C75E-7168-C095-F81448DC485A}"/>
+                <a16:creationId xmlns:a16="http://schemas.microsoft.com/office/drawing/2014/main" id="{C9757FD2-DBC7-0D50-7A45-7F8815D33C82}"/>
               </a:ext>
             </a:extLst>
           </p:cNvPr>
@@ -21050,7 +20213,7 @@
           <p:cNvPr id="4" name="슬라이드 번호 개체 틀 3">
             <a:extLst>
               <a:ext uri="{FF2B5EF4-FFF2-40B4-BE49-F238E27FC236}">
-                <a16:creationId xmlns:a16="http://schemas.microsoft.com/office/drawing/2014/main" id="{5FB31954-0B36-A73F-A68B-ECA9A0D09A30}"/>
+                <a16:creationId xmlns:a16="http://schemas.microsoft.com/office/drawing/2014/main" id="{A4AFBA6A-E229-1EC7-E7CF-665278364BDE}"/>
               </a:ext>
             </a:extLst>
           </p:cNvPr>
@@ -21077,7 +20240,7 @@
             </a:pPr>
             <a:fld id="{00000000-1234-1234-1234-123412341234}" type="slidenum">
               <a:rPr lang="en-US" smtClean="0"/>
-              <a:t>9</a:t>
+              <a:t>8</a:t>
             </a:fld>
             <a:endParaRPr lang="en-US"/>
           </a:p>
@@ -21085,10 +20248,10 @@
       </p:sp>
       <p:sp>
         <p:nvSpPr>
-          <p:cNvPr id="2" name="TextBox 1">
+          <p:cNvPr id="3" name="TextBox 2">
             <a:extLst>
               <a:ext uri="{FF2B5EF4-FFF2-40B4-BE49-F238E27FC236}">
-                <a16:creationId xmlns:a16="http://schemas.microsoft.com/office/drawing/2014/main" id="{8AD2ADA3-8C9A-7979-2ACE-9E854896A2FA}"/>
+                <a16:creationId xmlns:a16="http://schemas.microsoft.com/office/drawing/2014/main" id="{D17E4728-3518-DA77-FE16-93D7B7552CB0}"/>
               </a:ext>
             </a:extLst>
           </p:cNvPr>
@@ -21098,7 +20261,7 @@
         <p:spPr>
           <a:xfrm>
             <a:off x="571500" y="1210702"/>
-            <a:ext cx="11049000" cy="1200329"/>
+            <a:ext cx="11049000" cy="1938992"/>
           </a:xfrm>
           <a:prstGeom prst="rect">
             <a:avLst/>
@@ -21112,91 +20275,273 @@
           <a:lstStyle/>
           <a:p>
             <a:r>
-              <a:rPr lang="en-US" altLang="ko-KR" sz="1200" dirty="0"/>
-              <a:t>python qc_cmip6.py /</a:t>
-            </a:r>
-            <a:r>
-              <a:rPr lang="en-US" altLang="ko-KR" sz="1200" dirty="0" err="1"/>
+              <a:rPr lang="en-US" altLang="ko-KR" sz="1000" dirty="0">
+                <a:latin typeface="Pretendard" panose="02000503000000020004" pitchFamily="50" charset="-127"/>
+                <a:ea typeface="Pretendard" panose="02000503000000020004" pitchFamily="50" charset="-127"/>
+                <a:cs typeface="Pretendard" panose="02000503000000020004" pitchFamily="50" charset="-127"/>
+              </a:rPr>
+              <a:t>python make_input.py  --</a:t>
+            </a:r>
+            <a:r>
+              <a:rPr lang="en-US" altLang="ko-KR" sz="1000" dirty="0" err="1">
+                <a:latin typeface="Pretendard" panose="02000503000000020004" pitchFamily="50" charset="-127"/>
+                <a:ea typeface="Pretendard" panose="02000503000000020004" pitchFamily="50" charset="-127"/>
+                <a:cs typeface="Pretendard" panose="02000503000000020004" pitchFamily="50" charset="-127"/>
+              </a:rPr>
+              <a:t>inroot</a:t>
+            </a:r>
+            <a:r>
+              <a:rPr lang="en-US" altLang="ko-KR" sz="1000" dirty="0">
+                <a:latin typeface="Pretendard" panose="02000503000000020004" pitchFamily="50" charset="-127"/>
+                <a:ea typeface="Pretendard" panose="02000503000000020004" pitchFamily="50" charset="-127"/>
+                <a:cs typeface="Pretendard" panose="02000503000000020004" pitchFamily="50" charset="-127"/>
+              </a:rPr>
+              <a:t>  /</a:t>
+            </a:r>
+            <a:r>
+              <a:rPr lang="en-US" altLang="ko-KR" sz="1000" dirty="0" err="1">
+                <a:latin typeface="Pretendard" panose="02000503000000020004" pitchFamily="50" charset="-127"/>
+                <a:ea typeface="Pretendard" panose="02000503000000020004" pitchFamily="50" charset="-127"/>
+                <a:cs typeface="Pretendard" panose="02000503000000020004" pitchFamily="50" charset="-127"/>
+              </a:rPr>
               <a:t>mnt</a:t>
             </a:r>
             <a:r>
-              <a:rPr lang="en-US" altLang="ko-KR" sz="1200" dirty="0"/>
-              <a:t>/d/project/01_ENSO/01_data/01_raw/cmip6/ssp370</a:t>
-            </a:r>
-          </a:p>
-          <a:p>
-            <a:r>
-              <a:rPr lang="ko-KR" altLang="en-US" sz="1200" dirty="0">
-                <a:latin typeface="Pretendard Light" panose="02000403000000020004" pitchFamily="50" charset="-127"/>
-                <a:ea typeface="Pretendard Light" panose="02000403000000020004" pitchFamily="50" charset="-127"/>
-                <a:cs typeface="Pretendard Light" panose="02000403000000020004" pitchFamily="50" charset="-127"/>
-              </a:rPr>
-              <a:t>：</a:t>
-            </a:r>
-            <a:endParaRPr lang="en-US" altLang="ko-KR" sz="1200" dirty="0">
-              <a:latin typeface="Pretendard Light" panose="02000403000000020004" pitchFamily="50" charset="-127"/>
-              <a:ea typeface="Pretendard Light" panose="02000403000000020004" pitchFamily="50" charset="-127"/>
-              <a:cs typeface="Pretendard Light" panose="02000403000000020004" pitchFamily="50" charset="-127"/>
+              <a:rPr lang="en-US" altLang="ko-KR" sz="1000" dirty="0">
+                <a:latin typeface="Pretendard" panose="02000503000000020004" pitchFamily="50" charset="-127"/>
+                <a:ea typeface="Pretendard" panose="02000503000000020004" pitchFamily="50" charset="-127"/>
+                <a:cs typeface="Pretendard" panose="02000503000000020004" pitchFamily="50" charset="-127"/>
+              </a:rPr>
+              <a:t>/d/project/01_ENSO/01_data/02_interim  --outroot /</a:t>
+            </a:r>
+            <a:r>
+              <a:rPr lang="en-US" altLang="ko-KR" sz="1000" dirty="0" err="1">
+                <a:latin typeface="Pretendard" panose="02000503000000020004" pitchFamily="50" charset="-127"/>
+                <a:ea typeface="Pretendard" panose="02000503000000020004" pitchFamily="50" charset="-127"/>
+                <a:cs typeface="Pretendard" panose="02000503000000020004" pitchFamily="50" charset="-127"/>
+              </a:rPr>
+              <a:t>mnt</a:t>
+            </a:r>
+            <a:r>
+              <a:rPr lang="en-US" altLang="ko-KR" sz="1000" dirty="0">
+                <a:latin typeface="Pretendard" panose="02000503000000020004" pitchFamily="50" charset="-127"/>
+                <a:ea typeface="Pretendard" panose="02000503000000020004" pitchFamily="50" charset="-127"/>
+                <a:cs typeface="Pretendard" panose="02000503000000020004" pitchFamily="50" charset="-127"/>
+              </a:rPr>
+              <a:t>/d/project/01_ENSO/01_data/03_input  --mode all  --</a:t>
+            </a:r>
+            <a:r>
+              <a:rPr lang="en-US" altLang="ko-KR" sz="1000" dirty="0" err="1">
+                <a:latin typeface="Pretendard" panose="02000503000000020004" pitchFamily="50" charset="-127"/>
+                <a:ea typeface="Pretendard" panose="02000503000000020004" pitchFamily="50" charset="-127"/>
+                <a:cs typeface="Pretendard" panose="02000503000000020004" pitchFamily="50" charset="-127"/>
+              </a:rPr>
+              <a:t>fillna</a:t>
+            </a:r>
+            <a:r>
+              <a:rPr lang="en-US" altLang="ko-KR" sz="1000" dirty="0">
+                <a:latin typeface="Pretendard" panose="02000503000000020004" pitchFamily="50" charset="-127"/>
+                <a:ea typeface="Pretendard" panose="02000503000000020004" pitchFamily="50" charset="-127"/>
+                <a:cs typeface="Pretendard" panose="02000503000000020004" pitchFamily="50" charset="-127"/>
+              </a:rPr>
+              <a:t> none</a:t>
+            </a:r>
+          </a:p>
+          <a:p>
+            <a:endParaRPr lang="en-US" altLang="ko-KR" sz="1000" dirty="0">
+              <a:latin typeface="Pretendard" panose="02000503000000020004" pitchFamily="50" charset="-127"/>
+              <a:ea typeface="Pretendard" panose="02000503000000020004" pitchFamily="50" charset="-127"/>
+              <a:cs typeface="Pretendard" panose="02000503000000020004" pitchFamily="50" charset="-127"/>
             </a:endParaRPr>
           </a:p>
           <a:p>
-            <a:endParaRPr lang="en-US" altLang="ko-KR" sz="1200" dirty="0">
-              <a:latin typeface="Pretendard Light" panose="02000403000000020004" pitchFamily="50" charset="-127"/>
-              <a:ea typeface="Pretendard Light" panose="02000403000000020004" pitchFamily="50" charset="-127"/>
-              <a:cs typeface="Pretendard Light" panose="02000403000000020004" pitchFamily="50" charset="-127"/>
+            <a:pPr marL="171450" indent="-171450">
+              <a:buFontTx/>
+              <a:buChar char="-"/>
+            </a:pPr>
+            <a:r>
+              <a:rPr lang="en-US" altLang="ko-KR" sz="1000" dirty="0">
+                <a:latin typeface="Pretendard" panose="02000503000000020004" pitchFamily="50" charset="-127"/>
+                <a:ea typeface="Pretendard" panose="02000503000000020004" pitchFamily="50" charset="-127"/>
+                <a:cs typeface="Pretendard" panose="02000503000000020004" pitchFamily="50" charset="-127"/>
+              </a:rPr>
+              <a:t>CMIP6 </a:t>
+            </a:r>
+            <a:r>
+              <a:rPr lang="ko-KR" altLang="en-US" sz="1000" dirty="0">
+                <a:latin typeface="Pretendard" panose="02000503000000020004" pitchFamily="50" charset="-127"/>
+                <a:ea typeface="Pretendard" panose="02000503000000020004" pitchFamily="50" charset="-127"/>
+                <a:cs typeface="Pretendard" panose="02000503000000020004" pitchFamily="50" charset="-127"/>
+              </a:rPr>
+              <a:t>출력 파일명</a:t>
+            </a:r>
+            <a:r>
+              <a:rPr lang="en-US" altLang="ko-KR" sz="1000" dirty="0">
+                <a:latin typeface="Pretendard" panose="02000503000000020004" pitchFamily="50" charset="-127"/>
+                <a:ea typeface="Pretendard" panose="02000503000000020004" pitchFamily="50" charset="-127"/>
+                <a:cs typeface="Pretendard" panose="02000503000000020004" pitchFamily="50" charset="-127"/>
+              </a:rPr>
+              <a:t>: input_&lt;model&gt;_&lt;experiment&gt;_&lt;member&gt;.</a:t>
+            </a:r>
+            <a:r>
+              <a:rPr lang="en-US" altLang="ko-KR" sz="1000" dirty="0" err="1">
+                <a:latin typeface="Pretendard" panose="02000503000000020004" pitchFamily="50" charset="-127"/>
+                <a:ea typeface="Pretendard" panose="02000503000000020004" pitchFamily="50" charset="-127"/>
+                <a:cs typeface="Pretendard" panose="02000503000000020004" pitchFamily="50" charset="-127"/>
+              </a:rPr>
+              <a:t>nc</a:t>
+            </a:r>
+            <a:endParaRPr lang="en-US" altLang="ko-KR" sz="1000" dirty="0">
+              <a:latin typeface="Pretendard" panose="02000503000000020004" pitchFamily="50" charset="-127"/>
+              <a:ea typeface="Pretendard" panose="02000503000000020004" pitchFamily="50" charset="-127"/>
+              <a:cs typeface="Pretendard" panose="02000503000000020004" pitchFamily="50" charset="-127"/>
             </a:endParaRPr>
           </a:p>
           <a:p>
-            <a:r>
-              <a:rPr lang="en-US" altLang="ko-KR" sz="1200" dirty="0">
-                <a:latin typeface="Pretendard Light" panose="02000403000000020004" pitchFamily="50" charset="-127"/>
-                <a:ea typeface="Pretendard Light" panose="02000403000000020004" pitchFamily="50" charset="-127"/>
-                <a:cs typeface="Pretendard Light" panose="02000403000000020004" pitchFamily="50" charset="-127"/>
-              </a:rPr>
-              <a:t>python qc_godas.py /</a:t>
-            </a:r>
-            <a:r>
-              <a:rPr lang="en-US" altLang="ko-KR" sz="1200" dirty="0" err="1">
-                <a:latin typeface="Pretendard Light" panose="02000403000000020004" pitchFamily="50" charset="-127"/>
-                <a:ea typeface="Pretendard Light" panose="02000403000000020004" pitchFamily="50" charset="-127"/>
-                <a:cs typeface="Pretendard Light" panose="02000403000000020004" pitchFamily="50" charset="-127"/>
-              </a:rPr>
-              <a:t>mnt</a:t>
-            </a:r>
-            <a:r>
-              <a:rPr lang="en-US" altLang="ko-KR" sz="1200" dirty="0">
-                <a:latin typeface="Pretendard Light" panose="02000403000000020004" pitchFamily="50" charset="-127"/>
-                <a:ea typeface="Pretendard Light" panose="02000403000000020004" pitchFamily="50" charset="-127"/>
-                <a:cs typeface="Pretendard Light" panose="02000403000000020004" pitchFamily="50" charset="-127"/>
-              </a:rPr>
-              <a:t>/d/project/01_ENSO/01_data/01_raw/</a:t>
-            </a:r>
-            <a:r>
-              <a:rPr lang="en-US" altLang="ko-KR" sz="1200" dirty="0" err="1">
-                <a:latin typeface="Pretendard Light" panose="02000403000000020004" pitchFamily="50" charset="-127"/>
-                <a:ea typeface="Pretendard Light" panose="02000403000000020004" pitchFamily="50" charset="-127"/>
-                <a:cs typeface="Pretendard Light" panose="02000403000000020004" pitchFamily="50" charset="-127"/>
-              </a:rPr>
-              <a:t>godas</a:t>
-            </a:r>
-            <a:endParaRPr lang="en-US" altLang="ko-KR" sz="1200" dirty="0">
-              <a:latin typeface="Pretendard Light" panose="02000403000000020004" pitchFamily="50" charset="-127"/>
-              <a:ea typeface="Pretendard Light" panose="02000403000000020004" pitchFamily="50" charset="-127"/>
-              <a:cs typeface="Pretendard Light" panose="02000403000000020004" pitchFamily="50" charset="-127"/>
+            <a:pPr marL="171450" indent="-171450">
+              <a:buFontTx/>
+              <a:buChar char="-"/>
+            </a:pPr>
+            <a:r>
+              <a:rPr lang="en-US" altLang="ko-KR" sz="1000" dirty="0">
+                <a:latin typeface="Pretendard" panose="02000503000000020004" pitchFamily="50" charset="-127"/>
+                <a:ea typeface="Pretendard" panose="02000503000000020004" pitchFamily="50" charset="-127"/>
+                <a:cs typeface="Pretendard" panose="02000503000000020004" pitchFamily="50" charset="-127"/>
+              </a:rPr>
+              <a:t>Reanalysis </a:t>
+            </a:r>
+            <a:r>
+              <a:rPr lang="ko-KR" altLang="en-US" sz="1000" dirty="0">
+                <a:latin typeface="Pretendard" panose="02000503000000020004" pitchFamily="50" charset="-127"/>
+                <a:ea typeface="Pretendard" panose="02000503000000020004" pitchFamily="50" charset="-127"/>
+                <a:cs typeface="Pretendard" panose="02000503000000020004" pitchFamily="50" charset="-127"/>
+              </a:rPr>
+              <a:t>출력 파일명</a:t>
+            </a:r>
+            <a:r>
+              <a:rPr lang="en-US" altLang="ko-KR" sz="1000" dirty="0">
+                <a:latin typeface="Pretendard" panose="02000503000000020004" pitchFamily="50" charset="-127"/>
+                <a:ea typeface="Pretendard" panose="02000503000000020004" pitchFamily="50" charset="-127"/>
+                <a:cs typeface="Pretendard" panose="02000503000000020004" pitchFamily="50" charset="-127"/>
+              </a:rPr>
+              <a:t>: validation_dataset.nc / test_dataset.nc</a:t>
+            </a:r>
+          </a:p>
+          <a:p>
+            <a:pPr marL="171450" indent="-171450">
+              <a:buFontTx/>
+              <a:buChar char="-"/>
+            </a:pPr>
+            <a:r>
+              <a:rPr lang="ko-KR" altLang="en-US" sz="1000" dirty="0">
+                <a:latin typeface="Pretendard" panose="02000503000000020004" pitchFamily="50" charset="-127"/>
+                <a:ea typeface="Pretendard" panose="02000503000000020004" pitchFamily="50" charset="-127"/>
+                <a:cs typeface="Pretendard" panose="02000503000000020004" pitchFamily="50" charset="-127"/>
+              </a:rPr>
+              <a:t>기간</a:t>
+            </a:r>
+            <a:r>
+              <a:rPr lang="en-US" altLang="ko-KR" sz="1000" dirty="0">
+                <a:latin typeface="Pretendard" panose="02000503000000020004" pitchFamily="50" charset="-127"/>
+                <a:ea typeface="Pretendard" panose="02000503000000020004" pitchFamily="50" charset="-127"/>
+                <a:cs typeface="Pretendard" panose="02000503000000020004" pitchFamily="50" charset="-127"/>
+              </a:rPr>
+              <a:t>: validation_dataset.nc (1958.01 ~ 1976.12) / test_dataset.nc (1980.01 ~ 2025.12)</a:t>
+            </a:r>
+          </a:p>
+          <a:p>
+            <a:endParaRPr lang="en-US" altLang="ko-KR" sz="1000" dirty="0">
+              <a:latin typeface="Pretendard" panose="02000503000000020004" pitchFamily="50" charset="-127"/>
+              <a:ea typeface="Pretendard" panose="02000503000000020004" pitchFamily="50" charset="-127"/>
+              <a:cs typeface="Pretendard" panose="02000503000000020004" pitchFamily="50" charset="-127"/>
             </a:endParaRPr>
           </a:p>
           <a:p>
-            <a:endParaRPr lang="en-US" altLang="ko-KR" sz="1200" dirty="0">
-              <a:latin typeface="Pretendard Light" panose="02000403000000020004" pitchFamily="50" charset="-127"/>
-              <a:ea typeface="Pretendard Light" panose="02000403000000020004" pitchFamily="50" charset="-127"/>
-              <a:cs typeface="Pretendard Light" panose="02000403000000020004" pitchFamily="50" charset="-127"/>
+            <a:endParaRPr lang="en-US" altLang="ko-KR" sz="1000" dirty="0">
+              <a:latin typeface="Pretendard" panose="02000503000000020004" pitchFamily="50" charset="-127"/>
+              <a:ea typeface="Pretendard" panose="02000503000000020004" pitchFamily="50" charset="-127"/>
+              <a:cs typeface="Pretendard" panose="02000503000000020004" pitchFamily="50" charset="-127"/>
             </a:endParaRPr>
           </a:p>
           <a:p>
-            <a:endParaRPr lang="en-US" altLang="ko-KR" sz="1200" dirty="0">
-              <a:latin typeface="Pretendard Light" panose="02000403000000020004" pitchFamily="50" charset="-127"/>
-              <a:ea typeface="Pretendard Light" panose="02000403000000020004" pitchFamily="50" charset="-127"/>
-              <a:cs typeface="Pretendard Light" panose="02000403000000020004" pitchFamily="50" charset="-127"/>
+            <a:endParaRPr lang="en-US" altLang="ko-KR" sz="1000" b="1" dirty="0">
+              <a:latin typeface="Pretendard" panose="02000503000000020004" pitchFamily="50" charset="-127"/>
+              <a:ea typeface="Pretendard" panose="02000503000000020004" pitchFamily="50" charset="-127"/>
+              <a:cs typeface="Pretendard" panose="02000503000000020004" pitchFamily="50" charset="-127"/>
+            </a:endParaRPr>
+          </a:p>
+          <a:p>
+            <a:r>
+              <a:rPr lang="en-US" altLang="ko-KR" sz="1000" dirty="0">
+                <a:latin typeface="Pretendard" panose="02000503000000020004" pitchFamily="50" charset="-127"/>
+                <a:ea typeface="Pretendard" panose="02000503000000020004" pitchFamily="50" charset="-127"/>
+                <a:cs typeface="Pretendard" panose="02000503000000020004" pitchFamily="50" charset="-127"/>
+              </a:rPr>
+              <a:t>python make_target.py</a:t>
+            </a:r>
+          </a:p>
+          <a:p>
+            <a:endParaRPr lang="en-US" altLang="ko-KR" sz="1000" dirty="0">
+              <a:latin typeface="Pretendard" panose="02000503000000020004" pitchFamily="50" charset="-127"/>
+              <a:ea typeface="Pretendard" panose="02000503000000020004" pitchFamily="50" charset="-127"/>
+              <a:cs typeface="Pretendard" panose="02000503000000020004" pitchFamily="50" charset="-127"/>
+            </a:endParaRPr>
+          </a:p>
+          <a:p>
+            <a:pPr marL="171450" indent="-171450">
+              <a:buFontTx/>
+              <a:buChar char="-"/>
+            </a:pPr>
+            <a:r>
+              <a:rPr lang="en-US" altLang="ko-KR" sz="1000" dirty="0">
+                <a:latin typeface="Pretendard" panose="02000503000000020004" pitchFamily="50" charset="-127"/>
+                <a:ea typeface="Pretendard" panose="02000503000000020004" pitchFamily="50" charset="-127"/>
+                <a:cs typeface="Pretendard" panose="02000503000000020004" pitchFamily="50" charset="-127"/>
+              </a:rPr>
+              <a:t>Niño3.4 </a:t>
+            </a:r>
+            <a:r>
+              <a:rPr lang="ko-KR" altLang="en-US" sz="1000" dirty="0">
+                <a:latin typeface="Pretendard" panose="02000503000000020004" pitchFamily="50" charset="-127"/>
+                <a:ea typeface="Pretendard" panose="02000503000000020004" pitchFamily="50" charset="-127"/>
+                <a:cs typeface="Pretendard" panose="02000503000000020004" pitchFamily="50" charset="-127"/>
+              </a:rPr>
+              <a:t>영역</a:t>
+            </a:r>
+            <a:r>
+              <a:rPr lang="en-US" altLang="ko-KR" sz="1000" dirty="0">
+                <a:latin typeface="Pretendard" panose="02000503000000020004" pitchFamily="50" charset="-127"/>
+                <a:ea typeface="Pretendard" panose="02000503000000020004" pitchFamily="50" charset="-127"/>
+                <a:cs typeface="Pretendard" panose="02000503000000020004" pitchFamily="50" charset="-127"/>
+              </a:rPr>
+              <a:t>: 5S-5N, 170W-120W</a:t>
+            </a:r>
+          </a:p>
+          <a:p>
+            <a:pPr marL="171450" indent="-171450">
+              <a:buFontTx/>
+              <a:buChar char="-"/>
+            </a:pPr>
+            <a:r>
+              <a:rPr lang="ko-KR" altLang="en-US" sz="1000" dirty="0">
+                <a:latin typeface="Pretendard" panose="02000503000000020004" pitchFamily="50" charset="-127"/>
+                <a:ea typeface="Pretendard" panose="02000503000000020004" pitchFamily="50" charset="-127"/>
+                <a:cs typeface="Pretendard" panose="02000503000000020004" pitchFamily="50" charset="-127"/>
+              </a:rPr>
+              <a:t>기간</a:t>
+            </a:r>
+            <a:r>
+              <a:rPr lang="en-US" altLang="ko-KR" sz="1000" dirty="0">
+                <a:latin typeface="Pretendard" panose="02000503000000020004" pitchFamily="50" charset="-127"/>
+                <a:ea typeface="Pretendard" panose="02000503000000020004" pitchFamily="50" charset="-127"/>
+                <a:cs typeface="Pretendard" panose="02000503000000020004" pitchFamily="50" charset="-127"/>
+              </a:rPr>
+              <a:t>: validation target (1958.01 ~ 1978.12)</a:t>
+            </a:r>
+            <a:endParaRPr lang="ko-KR" altLang="en-US" sz="1000" dirty="0">
+              <a:latin typeface="Pretendard" panose="02000503000000020004" pitchFamily="50" charset="-127"/>
+              <a:ea typeface="Pretendard" panose="02000503000000020004" pitchFamily="50" charset="-127"/>
+              <a:cs typeface="Pretendard" panose="02000503000000020004" pitchFamily="50" charset="-127"/>
             </a:endParaRPr>
           </a:p>
         </p:txBody>
@@ -21204,7 +20549,436 @@
     </p:spTree>
     <p:extLst>
       <p:ext uri="{BB962C8B-B14F-4D97-AF65-F5344CB8AC3E}">
-        <p14:creationId xmlns:p14="http://schemas.microsoft.com/office/powerpoint/2010/main" val="2207531713"/>
+        <p14:creationId xmlns:p14="http://schemas.microsoft.com/office/powerpoint/2010/main" val="3157303717"/>
+      </p:ext>
+    </p:extLst>
+  </p:cSld>
+  <p:clrMapOvr>
+    <a:masterClrMapping/>
+  </p:clrMapOvr>
+</p:sld>
+</file>
+
+<file path=ppt/slides/slide9.xml><?xml version="1.0" encoding="utf-8"?>
+<p:sld xmlns:a="http://schemas.openxmlformats.org/drawingml/2006/main" xmlns:r="http://schemas.openxmlformats.org/officeDocument/2006/relationships" xmlns:p="http://schemas.openxmlformats.org/presentationml/2006/main">
+  <p:cSld>
+    <p:spTree>
+      <p:nvGrpSpPr>
+        <p:cNvPr id="1" name="Shape 157">
+          <a:extLst>
+            <a:ext uri="{FF2B5EF4-FFF2-40B4-BE49-F238E27FC236}">
+              <a16:creationId xmlns:a16="http://schemas.microsoft.com/office/drawing/2014/main" id="{6E268E12-449C-B1CB-7FF4-52C7D8610BA9}"/>
+            </a:ext>
+          </a:extLst>
+        </p:cNvPr>
+        <p:cNvGrpSpPr/>
+        <p:nvPr/>
+      </p:nvGrpSpPr>
+      <p:grpSpPr>
+        <a:xfrm>
+          <a:off x="0" y="0"/>
+          <a:ext cx="0" cy="0"/>
+          <a:chOff x="0" y="0"/>
+          <a:chExt cx="0" cy="0"/>
+        </a:xfrm>
+      </p:grpSpPr>
+      <p:pic>
+        <p:nvPicPr>
+          <p:cNvPr id="158" name="Google Shape;158;p18" descr="image.png">
+            <a:extLst>
+              <a:ext uri="{FF2B5EF4-FFF2-40B4-BE49-F238E27FC236}">
+                <a16:creationId xmlns:a16="http://schemas.microsoft.com/office/drawing/2014/main" id="{68DEC6B1-5957-8C03-0813-B08F403281B5}"/>
+              </a:ext>
+            </a:extLst>
+          </p:cNvPr>
+          <p:cNvPicPr preferRelativeResize="0">
+            <a:picLocks noGrp="1" noRot="1" noMove="1" noResize="1" noEditPoints="1" noAdjustHandles="1" noChangeArrowheads="1" noChangeShapeType="1" noCrop="1"/>
+          </p:cNvPicPr>
+          <p:nvPr/>
+        </p:nvPicPr>
+        <p:blipFill rotWithShape="1">
+          <a:blip r:embed="rId3">
+            <a:alphaModFix/>
+          </a:blip>
+          <a:srcRect/>
+          <a:stretch/>
+        </p:blipFill>
+        <p:spPr>
+          <a:xfrm>
+            <a:off x="0" y="0"/>
+            <a:ext cx="12192000" cy="6858000"/>
+          </a:xfrm>
+          <a:prstGeom prst="rect">
+            <a:avLst/>
+          </a:prstGeom>
+          <a:noFill/>
+          <a:ln>
+            <a:noFill/>
+          </a:ln>
+        </p:spPr>
+      </p:pic>
+      <p:sp>
+        <p:nvSpPr>
+          <p:cNvPr id="160" name="Google Shape;160;p18">
+            <a:extLst>
+              <a:ext uri="{FF2B5EF4-FFF2-40B4-BE49-F238E27FC236}">
+                <a16:creationId xmlns:a16="http://schemas.microsoft.com/office/drawing/2014/main" id="{551A809B-16C4-A5F2-6EF1-A6594CC38C34}"/>
+              </a:ext>
+            </a:extLst>
+          </p:cNvPr>
+          <p:cNvSpPr txBox="1"/>
+          <p:nvPr/>
+        </p:nvSpPr>
+        <p:spPr>
+          <a:xfrm>
+            <a:off x="571500" y="476250"/>
+            <a:ext cx="11049000" cy="484748"/>
+          </a:xfrm>
+          <a:prstGeom prst="rect">
+            <a:avLst/>
+          </a:prstGeom>
+          <a:noFill/>
+          <a:ln>
+            <a:noFill/>
+          </a:ln>
+        </p:spPr>
+        <p:txBody>
+          <a:bodyPr spcFirstLastPara="1" wrap="square" lIns="0" tIns="0" rIns="0" bIns="0" anchor="t" anchorCtr="0">
+            <a:spAutoFit/>
+          </a:bodyPr>
+          <a:lstStyle/>
+          <a:p>
+            <a:pPr marL="0" marR="0" lvl="0" indent="0" algn="l" rtl="0">
+              <a:spcBef>
+                <a:spcPts val="0"/>
+              </a:spcBef>
+              <a:spcAft>
+                <a:spcPts val="0"/>
+              </a:spcAft>
+              <a:buNone/>
+            </a:pPr>
+            <a:r>
+              <a:rPr lang="en-US" sz="3150" b="1" i="0" u="none" strike="noStrike" cap="none" dirty="0">
+                <a:solidFill>
+                  <a:srgbClr val="001F3F"/>
+                </a:solidFill>
+                <a:latin typeface="Pretendard ExtraBold" panose="02000903000000020004" pitchFamily="50" charset="-127"/>
+                <a:ea typeface="Pretendard ExtraBold" panose="02000903000000020004" pitchFamily="50" charset="-127"/>
+                <a:cs typeface="Pretendard ExtraBold" panose="02000903000000020004" pitchFamily="50" charset="-127"/>
+                <a:sym typeface="Arial"/>
+              </a:rPr>
+              <a:t>BASELINE</a:t>
+            </a:r>
+            <a:endParaRPr dirty="0">
+              <a:latin typeface="Pretendard ExtraBold" panose="02000903000000020004" pitchFamily="50" charset="-127"/>
+              <a:ea typeface="Pretendard ExtraBold" panose="02000903000000020004" pitchFamily="50" charset="-127"/>
+              <a:cs typeface="Pretendard ExtraBold" panose="02000903000000020004" pitchFamily="50" charset="-127"/>
+            </a:endParaRPr>
+          </a:p>
+        </p:txBody>
+      </p:sp>
+      <p:sp>
+        <p:nvSpPr>
+          <p:cNvPr id="161" name="Google Shape;161;p18">
+            <a:extLst>
+              <a:ext uri="{FF2B5EF4-FFF2-40B4-BE49-F238E27FC236}">
+                <a16:creationId xmlns:a16="http://schemas.microsoft.com/office/drawing/2014/main" id="{6A27D597-195D-0E67-8C84-D87A547C3D18}"/>
+              </a:ext>
+            </a:extLst>
+          </p:cNvPr>
+          <p:cNvSpPr/>
+          <p:nvPr/>
+        </p:nvSpPr>
+        <p:spPr>
+          <a:xfrm>
+            <a:off x="571500" y="1076325"/>
+            <a:ext cx="11049000" cy="19050"/>
+          </a:xfrm>
+          <a:prstGeom prst="rect">
+            <a:avLst/>
+          </a:prstGeom>
+          <a:solidFill>
+            <a:srgbClr val="EEEEEE"/>
+          </a:solidFill>
+          <a:ln>
+            <a:noFill/>
+          </a:ln>
+        </p:spPr>
+        <p:txBody>
+          <a:bodyPr spcFirstLastPara="1" wrap="square" lIns="91425" tIns="45700" rIns="91425" bIns="45700" anchor="ctr" anchorCtr="0">
+            <a:noAutofit/>
+          </a:bodyPr>
+          <a:lstStyle/>
+          <a:p>
+            <a:pPr marL="0" marR="0" lvl="0" indent="0" algn="ctr" rtl="0">
+              <a:spcBef>
+                <a:spcPts val="0"/>
+              </a:spcBef>
+              <a:spcAft>
+                <a:spcPts val="0"/>
+              </a:spcAft>
+              <a:buNone/>
+            </a:pPr>
+            <a:endParaRPr sz="1800" b="0" i="0" u="none" strike="noStrike" cap="none">
+              <a:solidFill>
+                <a:schemeClr val="dk1"/>
+              </a:solidFill>
+              <a:latin typeface="Calibri"/>
+              <a:ea typeface="Calibri"/>
+              <a:cs typeface="Calibri"/>
+              <a:sym typeface="Calibri"/>
+            </a:endParaRPr>
+          </a:p>
+        </p:txBody>
+      </p:sp>
+      <p:sp>
+        <p:nvSpPr>
+          <p:cNvPr id="4" name="슬라이드 번호 개체 틀 3">
+            <a:extLst>
+              <a:ext uri="{FF2B5EF4-FFF2-40B4-BE49-F238E27FC236}">
+                <a16:creationId xmlns:a16="http://schemas.microsoft.com/office/drawing/2014/main" id="{766B8334-3082-3E78-F037-7D67A722F8F7}"/>
+              </a:ext>
+            </a:extLst>
+          </p:cNvPr>
+          <p:cNvSpPr>
+            <a:spLocks noGrp="1"/>
+          </p:cNvSpPr>
+          <p:nvPr>
+            <p:ph type="sldNum" idx="12"/>
+          </p:nvPr>
+        </p:nvSpPr>
+        <p:spPr/>
+        <p:txBody>
+          <a:bodyPr/>
+          <a:lstStyle/>
+          <a:p>
+            <a:pPr marL="0" lvl="0" indent="0" algn="r" rtl="0">
+              <a:spcBef>
+                <a:spcPts val="0"/>
+              </a:spcBef>
+              <a:spcAft>
+                <a:spcPts val="0"/>
+              </a:spcAft>
+              <a:buNone/>
+            </a:pPr>
+            <a:fld id="{00000000-1234-1234-1234-123412341234}" type="slidenum">
+              <a:rPr lang="en-US" smtClean="0"/>
+              <a:t>9</a:t>
+            </a:fld>
+            <a:endParaRPr lang="en-US"/>
+          </a:p>
+        </p:txBody>
+      </p:sp>
+      <p:sp>
+        <p:nvSpPr>
+          <p:cNvPr id="3" name="TextBox 2">
+            <a:extLst>
+              <a:ext uri="{FF2B5EF4-FFF2-40B4-BE49-F238E27FC236}">
+                <a16:creationId xmlns:a16="http://schemas.microsoft.com/office/drawing/2014/main" id="{7547A81D-2B60-0589-5ADB-464D12C953D5}"/>
+              </a:ext>
+            </a:extLst>
+          </p:cNvPr>
+          <p:cNvSpPr txBox="1"/>
+          <p:nvPr/>
+        </p:nvSpPr>
+        <p:spPr>
+          <a:xfrm>
+            <a:off x="571500" y="1210702"/>
+            <a:ext cx="11049000" cy="3139321"/>
+          </a:xfrm>
+          <a:prstGeom prst="rect">
+            <a:avLst/>
+          </a:prstGeom>
+          <a:noFill/>
+        </p:spPr>
+        <p:txBody>
+          <a:bodyPr wrap="square" rtlCol="0">
+            <a:spAutoFit/>
+          </a:bodyPr>
+          <a:lstStyle/>
+          <a:p>
+            <a:r>
+              <a:rPr lang="en-US" altLang="ko-KR" sz="1100" dirty="0">
+                <a:latin typeface="Pretendard Light" panose="02000403000000020004" pitchFamily="50" charset="-127"/>
+                <a:ea typeface="Pretendard Light" panose="02000403000000020004" pitchFamily="50" charset="-127"/>
+                <a:cs typeface="Pretendard Light" panose="02000403000000020004" pitchFamily="50" charset="-127"/>
+              </a:rPr>
+              <a:t>python train_model.py --config configs/cnn_baseline_v1.yaml</a:t>
+            </a:r>
+          </a:p>
+          <a:p>
+            <a:r>
+              <a:rPr lang="en-US" altLang="ko-KR" sz="1100" dirty="0">
+                <a:latin typeface="Pretendard Light" panose="02000403000000020004" pitchFamily="50" charset="-127"/>
+                <a:ea typeface="Pretendard Light" panose="02000403000000020004" pitchFamily="50" charset="-127"/>
+                <a:cs typeface="Pretendard Light" panose="02000403000000020004" pitchFamily="50" charset="-127"/>
+              </a:rPr>
+              <a:t>python evaluate_model.py --config configs/cnn_baseline_v1.yaml --split validation --checkpoint best</a:t>
+            </a:r>
+          </a:p>
+          <a:p>
+            <a:r>
+              <a:rPr lang="en-US" altLang="ko-KR" sz="1100" dirty="0">
+                <a:latin typeface="Pretendard Light" panose="02000403000000020004" pitchFamily="50" charset="-127"/>
+                <a:ea typeface="Pretendard Light" panose="02000403000000020004" pitchFamily="50" charset="-127"/>
+                <a:cs typeface="Pretendard Light" panose="02000403000000020004" pitchFamily="50" charset="-127"/>
+              </a:rPr>
+              <a:t>python evaluate_model.py --config configs/cnn_baseline_v1.yaml --split test --checkpoint best</a:t>
+            </a:r>
+          </a:p>
+          <a:p>
+            <a:endParaRPr lang="en-US" altLang="ko-KR" sz="1100" dirty="0">
+              <a:latin typeface="Pretendard Light" panose="02000403000000020004" pitchFamily="50" charset="-127"/>
+              <a:ea typeface="Pretendard Light" panose="02000403000000020004" pitchFamily="50" charset="-127"/>
+              <a:cs typeface="Pretendard Light" panose="02000403000000020004" pitchFamily="50" charset="-127"/>
+            </a:endParaRPr>
+          </a:p>
+          <a:p>
+            <a:r>
+              <a:rPr lang="en-US" altLang="ko-KR" sz="1100" dirty="0">
+                <a:latin typeface="Pretendard Light" panose="02000403000000020004" pitchFamily="50" charset="-127"/>
+                <a:ea typeface="Pretendard Light" panose="02000403000000020004" pitchFamily="50" charset="-127"/>
+                <a:cs typeface="Pretendard Light" panose="02000403000000020004" pitchFamily="50" charset="-127"/>
+              </a:rPr>
+              <a:t>python train_model.py --config configs/transformer_baseline_v1.yaml</a:t>
+            </a:r>
+          </a:p>
+          <a:p>
+            <a:r>
+              <a:rPr lang="en-US" altLang="ko-KR" sz="1100" dirty="0">
+                <a:latin typeface="Pretendard Light" panose="02000403000000020004" pitchFamily="50" charset="-127"/>
+                <a:ea typeface="Pretendard Light" panose="02000403000000020004" pitchFamily="50" charset="-127"/>
+                <a:cs typeface="Pretendard Light" panose="02000403000000020004" pitchFamily="50" charset="-127"/>
+              </a:rPr>
+              <a:t>python evaluate_model.py --config configs/transformer_baseline_v1.yaml --split validation --checkpoint best</a:t>
+            </a:r>
+          </a:p>
+          <a:p>
+            <a:r>
+              <a:rPr lang="en-US" altLang="ko-KR" sz="1100" dirty="0">
+                <a:latin typeface="Pretendard Light" panose="02000403000000020004" pitchFamily="50" charset="-127"/>
+                <a:ea typeface="Pretendard Light" panose="02000403000000020004" pitchFamily="50" charset="-127"/>
+                <a:cs typeface="Pretendard Light" panose="02000403000000020004" pitchFamily="50" charset="-127"/>
+              </a:rPr>
+              <a:t>python evaluate_model.py --config configs/transformer_baseline_v1.yaml --split test --checkpoint best</a:t>
+            </a:r>
+          </a:p>
+          <a:p>
+            <a:endParaRPr lang="en-US" altLang="ko-KR" sz="1100" dirty="0">
+              <a:latin typeface="Pretendard Light" panose="02000403000000020004" pitchFamily="50" charset="-127"/>
+              <a:ea typeface="Pretendard Light" panose="02000403000000020004" pitchFamily="50" charset="-127"/>
+              <a:cs typeface="Pretendard Light" panose="02000403000000020004" pitchFamily="50" charset="-127"/>
+            </a:endParaRPr>
+          </a:p>
+          <a:p>
+            <a:r>
+              <a:rPr lang="en-US" altLang="ko-KR" sz="1100" dirty="0">
+                <a:latin typeface="Pretendard Light" panose="02000403000000020004" pitchFamily="50" charset="-127"/>
+                <a:ea typeface="Pretendard Light" panose="02000403000000020004" pitchFamily="50" charset="-127"/>
+                <a:cs typeface="Pretendard Light" panose="02000403000000020004" pitchFamily="50" charset="-127"/>
+              </a:rPr>
+              <a:t>python make_figures.py --config configs/cnn_baseline_v1.yaml --split validation</a:t>
+            </a:r>
+            <a:endParaRPr lang="ko-KR" altLang="en-US" sz="1100" dirty="0">
+              <a:latin typeface="Pretendard Light" panose="02000403000000020004" pitchFamily="50" charset="-127"/>
+              <a:ea typeface="Pretendard Light" panose="02000403000000020004" pitchFamily="50" charset="-127"/>
+              <a:cs typeface="Pretendard Light" panose="02000403000000020004" pitchFamily="50" charset="-127"/>
+            </a:endParaRPr>
+          </a:p>
+          <a:p>
+            <a:r>
+              <a:rPr lang="en-US" altLang="ko-KR" sz="1100" dirty="0">
+                <a:latin typeface="Pretendard Light" panose="02000403000000020004" pitchFamily="50" charset="-127"/>
+                <a:ea typeface="Pretendard Light" panose="02000403000000020004" pitchFamily="50" charset="-127"/>
+                <a:cs typeface="Pretendard Light" panose="02000403000000020004" pitchFamily="50" charset="-127"/>
+              </a:rPr>
+              <a:t>python make_figures.py --config configs/cnn_baseline_v1.yaml --split test</a:t>
+            </a:r>
+          </a:p>
+          <a:p>
+            <a:endParaRPr lang="en-US" altLang="ko-KR" sz="1100" dirty="0">
+              <a:latin typeface="Pretendard Light" panose="02000403000000020004" pitchFamily="50" charset="-127"/>
+              <a:ea typeface="Pretendard Light" panose="02000403000000020004" pitchFamily="50" charset="-127"/>
+              <a:cs typeface="Pretendard Light" panose="02000403000000020004" pitchFamily="50" charset="-127"/>
+            </a:endParaRPr>
+          </a:p>
+          <a:p>
+            <a:r>
+              <a:rPr lang="en-US" altLang="ko-KR" sz="1100" dirty="0">
+                <a:latin typeface="Pretendard Light" panose="02000403000000020004" pitchFamily="50" charset="-127"/>
+                <a:ea typeface="Pretendard Light" panose="02000403000000020004" pitchFamily="50" charset="-127"/>
+                <a:cs typeface="Pretendard Light" panose="02000403000000020004" pitchFamily="50" charset="-127"/>
+              </a:rPr>
+              <a:t>python make_figures.py --config configs/transformer_baseline_v1.yaml --split validation</a:t>
+            </a:r>
+            <a:endParaRPr lang="ko-KR" altLang="en-US" sz="1100" dirty="0">
+              <a:latin typeface="Pretendard Light" panose="02000403000000020004" pitchFamily="50" charset="-127"/>
+              <a:ea typeface="Pretendard Light" panose="02000403000000020004" pitchFamily="50" charset="-127"/>
+              <a:cs typeface="Pretendard Light" panose="02000403000000020004" pitchFamily="50" charset="-127"/>
+            </a:endParaRPr>
+          </a:p>
+          <a:p>
+            <a:r>
+              <a:rPr lang="en-US" altLang="ko-KR" sz="1100" dirty="0">
+                <a:latin typeface="Pretendard Light" panose="02000403000000020004" pitchFamily="50" charset="-127"/>
+                <a:ea typeface="Pretendard Light" panose="02000403000000020004" pitchFamily="50" charset="-127"/>
+                <a:cs typeface="Pretendard Light" panose="02000403000000020004" pitchFamily="50" charset="-127"/>
+              </a:rPr>
+              <a:t>python make_figures.py --config configs/transformer_baseline_v1.yaml --split test</a:t>
+            </a:r>
+          </a:p>
+          <a:p>
+            <a:endParaRPr lang="en-US" altLang="ko-KR" sz="1100" dirty="0">
+              <a:latin typeface="Pretendard Light" panose="02000403000000020004" pitchFamily="50" charset="-127"/>
+              <a:ea typeface="Pretendard Light" panose="02000403000000020004" pitchFamily="50" charset="-127"/>
+              <a:cs typeface="Pretendard Light" panose="02000403000000020004" pitchFamily="50" charset="-127"/>
+            </a:endParaRPr>
+          </a:p>
+          <a:p>
+            <a:endParaRPr lang="en-US" altLang="ko-KR" sz="1100" dirty="0">
+              <a:latin typeface="Pretendard Light" panose="02000403000000020004" pitchFamily="50" charset="-127"/>
+              <a:ea typeface="Pretendard Light" panose="02000403000000020004" pitchFamily="50" charset="-127"/>
+              <a:cs typeface="Pretendard Light" panose="02000403000000020004" pitchFamily="50" charset="-127"/>
+            </a:endParaRPr>
+          </a:p>
+          <a:p>
+            <a:r>
+              <a:rPr lang="en-US" altLang="ko-KR" sz="1100" dirty="0">
+                <a:latin typeface="Pretendard Light" panose="02000403000000020004" pitchFamily="50" charset="-127"/>
+                <a:ea typeface="Pretendard Light" panose="02000403000000020004" pitchFamily="50" charset="-127"/>
+                <a:cs typeface="Pretendard Light" panose="02000403000000020004" pitchFamily="50" charset="-127"/>
+              </a:rPr>
+              <a:t>python evaluate_model.py --config configs/hybrid_v4b.yaml --split validation --checkpoint best</a:t>
+            </a:r>
+          </a:p>
+          <a:p>
+            <a:r>
+              <a:rPr lang="en-US" altLang="ko-KR" sz="1100" dirty="0">
+                <a:latin typeface="Pretendard Light" panose="02000403000000020004" pitchFamily="50" charset="-127"/>
+                <a:ea typeface="Pretendard Light" panose="02000403000000020004" pitchFamily="50" charset="-127"/>
+                <a:cs typeface="Pretendard Light" panose="02000403000000020004" pitchFamily="50" charset="-127"/>
+              </a:rPr>
+              <a:t>python make_figures.py --config configs/hybrid_v4b.yaml --split validation</a:t>
+            </a:r>
+            <a:endParaRPr lang="ko-KR" altLang="en-US" sz="1100" dirty="0">
+              <a:latin typeface="Pretendard Light" panose="02000403000000020004" pitchFamily="50" charset="-127"/>
+              <a:ea typeface="Pretendard Light" panose="02000403000000020004" pitchFamily="50" charset="-127"/>
+              <a:cs typeface="Pretendard Light" panose="02000403000000020004" pitchFamily="50" charset="-127"/>
+            </a:endParaRPr>
+          </a:p>
+          <a:p>
+            <a:endParaRPr lang="en-US" altLang="ko-KR" sz="1100" dirty="0">
+              <a:latin typeface="Pretendard Light" panose="02000403000000020004" pitchFamily="50" charset="-127"/>
+              <a:ea typeface="Pretendard Light" panose="02000403000000020004" pitchFamily="50" charset="-127"/>
+              <a:cs typeface="Pretendard Light" panose="02000403000000020004" pitchFamily="50" charset="-127"/>
+            </a:endParaRPr>
+          </a:p>
+        </p:txBody>
+      </p:sp>
+    </p:spTree>
+    <p:extLst>
+      <p:ext uri="{BB962C8B-B14F-4D97-AF65-F5344CB8AC3E}">
+        <p14:creationId xmlns:p14="http://schemas.microsoft.com/office/powerpoint/2010/main" val="281154705"/>
       </p:ext>
     </p:extLst>
   </p:cSld>
